--- a/LIA-concretement-CC-anime.pptx
+++ b/LIA-concretement-CC-anime.pptx
@@ -5759,7 +5759,7 @@
                 <a:ea typeface="Arial" pitchFamily="34" charset="-122"/>
                 <a:cs typeface="Arial" pitchFamily="34" charset="-120"/>
               </a:rPr>
-              <a:t>« On n’a pas tous le réflexe Salesforce... ni toujours le temps. »</a:t>
+              <a:t>« On n'a pas tous le réflexe Salesforce... ni toujours le temps. »</a:t>
             </a:r>
             <a:endParaRPr lang="en-US" sz="1250" dirty="0"/>
           </a:p>
@@ -6017,7 +6017,7 @@
                 <a:ea typeface="Arial" pitchFamily="34" charset="-122"/>
                 <a:cs typeface="Arial" pitchFamily="34" charset="-120"/>
               </a:rPr>
-              <a:t>« Aucun moyen d’interroger nos participations d’un coup. »</a:t>
+              <a:t>« Aucun moyen d'interroger nos participations d'un coup. »</a:t>
             </a:r>
             <a:endParaRPr lang="en-US" sz="1250" dirty="0"/>
           </a:p>
@@ -6397,7 +6397,7 @@
                 <a:ea typeface="Arial" pitchFamily="34" charset="-122"/>
                 <a:cs typeface="Arial" pitchFamily="34" charset="-120"/>
               </a:rPr>
-              <a:t>« On n’a pas tous le réflexe Salesforce... ni toujours le temps. »</a:t>
+              <a:t>« On n'a pas tous le réflexe Salesforce... ni toujours le temps. »</a:t>
             </a:r>
             <a:endParaRPr lang="en-US" sz="1250" dirty="0"/>
           </a:p>
@@ -6655,7 +6655,7 @@
                 <a:ea typeface="Arial" pitchFamily="34" charset="-122"/>
                 <a:cs typeface="Arial" pitchFamily="34" charset="-120"/>
               </a:rPr>
-              <a:t>« Aucun moyen d’interroger nos participations d’un coup. »</a:t>
+              <a:t>« Aucun moyen d'interroger nos participations d'un coup. »</a:t>
             </a:r>
             <a:endParaRPr lang="en-US" sz="1250" dirty="0"/>
           </a:p>
@@ -7150,7 +7150,7 @@
                 <a:ea typeface="Arial" pitchFamily="34" charset="-122"/>
                 <a:cs typeface="Arial" pitchFamily="34" charset="-120"/>
               </a:rPr>
-              <a:t>« On n’a pas tous le réflexe Salesforce... ni toujours le temps. »</a:t>
+              <a:t>« On n'a pas tous le réflexe Salesforce... ni toujours le temps. »</a:t>
             </a:r>
             <a:endParaRPr lang="en-US" sz="1250" dirty="0"/>
           </a:p>
@@ -7408,7 +7408,7 @@
                 <a:ea typeface="Arial" pitchFamily="34" charset="-122"/>
                 <a:cs typeface="Arial" pitchFamily="34" charset="-120"/>
               </a:rPr>
-              <a:t>« Aucun moyen d’interroger nos participations d’un coup. »</a:t>
+              <a:t>« Aucun moyen d'interroger nos participations d'un coup. »</a:t>
             </a:r>
             <a:endParaRPr lang="en-US" sz="1250" dirty="0"/>
           </a:p>
@@ -8053,7 +8053,7 @@
                 <a:ea typeface="Arial" pitchFamily="34" charset="-122"/>
                 <a:cs typeface="Arial" pitchFamily="34" charset="-120"/>
               </a:rPr>
-              <a:t>Il est 11h02, vous sortez d’un rendez-vous. Une minute de dictée dans Teams, le compte-rendu s’écrit : vous donnez votre feu vert. Demander un résumé à une IA, tout le monde sait déjà le faire. La différence est ailleurs : ici, il est rédigé directement dans </a:t>
+              <a:t>Il est 11h02, vous sortez d'un rendez-vous. Une minute de dictée dans Teams, le compte-rendu s'écrit : vous donnez votre feu vert. Demander un résumé à une IA, tout le monde sait déjà le faire. La différence est ailleurs : ici, il est rédigé directement dans </a:t>
             </a:r>
             <a:pPr indent="0" marL="0">
               <a:lnSpc>
@@ -8285,7 +8285,7 @@
                 <a:ea typeface="Arial" pitchFamily="34" charset="-122"/>
                 <a:cs typeface="Arial" pitchFamily="34" charset="-120"/>
               </a:rPr>
-              <a:t>Il est 11h02, vous sortez d’un rendez-vous. Une minute de dictée dans Teams, le compte-rendu s’écrit : vous donnez votre feu vert. Demander un résumé à une IA, tout le monde sait déjà le faire. La différence est ailleurs : ici, il est rédigé directement dans </a:t>
+              <a:t>Il est 11h02, vous sortez d'un rendez-vous. Une minute de dictée dans Teams, le compte-rendu s'écrit : vous donnez votre feu vert. Demander un résumé à une IA, tout le monde sait déjà le faire. La différence est ailleurs : ici, il est rédigé directement dans </a:t>
             </a:r>
             <a:pPr indent="0" marL="0">
               <a:lnSpc>
@@ -8811,7 +8811,7 @@
                 <a:ea typeface="Arial" pitchFamily="34" charset="-122"/>
                 <a:cs typeface="Arial" pitchFamily="34" charset="-120"/>
               </a:rPr>
-              <a:t>Il est 11h02, vous sortez d’un rendez-vous. Une minute de dictée dans Teams, le compte-rendu s’écrit : vous donnez votre feu vert. Demander un résumé à une IA, tout le monde sait déjà le faire. La différence est ailleurs : ici, il est rédigé directement dans </a:t>
+              <a:t>Il est 11h02, vous sortez d'un rendez-vous. Une minute de dictée dans Teams, le compte-rendu s'écrit : vous donnez votre feu vert. Demander un résumé à une IA, tout le monde sait déjà le faire. La différence est ailleurs : ici, il est rédigé directement dans </a:t>
             </a:r>
             <a:pPr indent="0" marL="0">
               <a:lnSpc>
@@ -9312,7 +9312,29 @@
       </p:sp>
       <p:sp>
         <p:nvSpPr>
-          <p:cNvPr id="4" name="Text 1"/>
+          <p:cNvPr id="4" name="Shape 1"/>
+          <p:cNvSpPr/>
+          <p:nvPr/>
+        </p:nvSpPr>
+        <p:spPr>
+          <a:xfrm>
+            <a:off x="548640" y="2066544"/>
+            <a:ext cx="612648" cy="41148"/>
+          </a:xfrm>
+          <a:prstGeom prst="roundRect">
+            <a:avLst>
+              <a:gd name="adj" fmla="val 44444"/>
+            </a:avLst>
+          </a:prstGeom>
+          <a:solidFill>
+            <a:srgbClr val="0488C1"/>
+          </a:solidFill>
+          <a:ln/>
+        </p:spPr>
+      </p:sp>
+      <p:sp>
+        <p:nvSpPr>
+          <p:cNvPr id="5" name="Text 2"/>
           <p:cNvSpPr/>
           <p:nvPr/>
         </p:nvSpPr>
@@ -9374,13 +9396,13 @@
       </p:sp>
       <p:sp>
         <p:nvSpPr>
-          <p:cNvPr id="5" name="Text 2"/>
-          <p:cNvSpPr/>
-          <p:nvPr/>
-        </p:nvSpPr>
-        <p:spPr>
-          <a:xfrm>
-            <a:off x="566928" y="4800600"/>
+          <p:cNvPr id="6" name="Text 3"/>
+          <p:cNvSpPr/>
+          <p:nvPr/>
+        </p:nvSpPr>
+        <p:spPr>
+          <a:xfrm>
+            <a:off x="548640" y="4800600"/>
             <a:ext cx="6035040" cy="822960"/>
           </a:xfrm>
           <a:prstGeom prst="rect">
@@ -9408,7 +9430,7 @@
                 <a:ea typeface="Arial" pitchFamily="34" charset="-122"/>
                 <a:cs typeface="Arial" pitchFamily="34" charset="-120"/>
               </a:rPr>
-              <a:t>Ce que nous avons construit en deux mois, et ce que vous pouvez installer en sortant d’ici.</a:t>
+              <a:t>Ce que nous avons construit en deux mois, et ce que vous pouvez installer en sortant d'ici.</a:t>
             </a:r>
             <a:endParaRPr lang="en-US" sz="1600" dirty="0"/>
           </a:p>
@@ -9572,7 +9594,7 @@
                 <a:ea typeface="Arial" pitchFamily="34" charset="-122"/>
                 <a:cs typeface="Arial" pitchFamily="34" charset="-120"/>
               </a:rPr>
-              <a:t>Il est 11h02, vous sortez d’un rendez-vous. Une minute de dictée dans Teams, le compte-rendu s’écrit : vous donnez votre feu vert. Demander un résumé à une IA, tout le monde sait déjà le faire. La différence est ailleurs : ici, il est rédigé directement dans </a:t>
+              <a:t>Il est 11h02, vous sortez d'un rendez-vous. Une minute de dictée dans Teams, le compte-rendu s'écrit : vous donnez votre feu vert. Demander un résumé à une IA, tout le monde sait déjà le faire. La différence est ailleurs : ici, il est rédigé directement dans </a:t>
             </a:r>
             <a:pPr indent="0" marL="0">
               <a:lnSpc>
@@ -10122,7 +10144,7 @@
                 <a:ea typeface="Arial" pitchFamily="34" charset="-122"/>
                 <a:cs typeface="Arial" pitchFamily="34" charset="-120"/>
               </a:rPr>
-              <a:t>Il est 11h02, vous sortez d’un rendez-vous. Une minute de dictée dans Teams, le compte-rendu s’écrit : vous donnez votre feu vert. Demander un résumé à une IA, tout le monde sait déjà le faire. La différence est ailleurs : ici, il est rédigé directement dans </a:t>
+              <a:t>Il est 11h02, vous sortez d'un rendez-vous. Une minute de dictée dans Teams, le compte-rendu s'écrit : vous donnez votre feu vert. Demander un résumé à une IA, tout le monde sait déjà le faire. La différence est ailleurs : ici, il est rédigé directement dans </a:t>
             </a:r>
             <a:pPr indent="0" marL="0">
               <a:lnSpc>
@@ -10672,7 +10694,7 @@
                 <a:ea typeface="Arial" pitchFamily="34" charset="-122"/>
                 <a:cs typeface="Arial" pitchFamily="34" charset="-120"/>
               </a:rPr>
-              <a:t>Il est 11h02, vous sortez d’un rendez-vous. Une minute de dictée dans Teams, le compte-rendu s’écrit : vous donnez votre feu vert. Demander un résumé à une IA, tout le monde sait déjà le faire. La différence est ailleurs : ici, il est rédigé directement dans </a:t>
+              <a:t>Il est 11h02, vous sortez d'un rendez-vous. Une minute de dictée dans Teams, le compte-rendu s'écrit : vous donnez votre feu vert. Demander un résumé à une IA, tout le monde sait déjà le faire. La différence est ailleurs : ici, il est rédigé directement dans </a:t>
             </a:r>
             <a:pPr indent="0" marL="0">
               <a:lnSpc>
@@ -11222,7 +11244,7 @@
                 <a:ea typeface="Arial" pitchFamily="34" charset="-122"/>
                 <a:cs typeface="Arial" pitchFamily="34" charset="-120"/>
               </a:rPr>
-              <a:t>Il est 11h02, vous sortez d’un rendez-vous. Une minute de dictée dans Teams, le compte-rendu s’écrit : vous donnez votre feu vert. Demander un résumé à une IA, tout le monde sait déjà le faire. La différence est ailleurs : ici, il est rédigé directement dans </a:t>
+              <a:t>Il est 11h02, vous sortez d'un rendez-vous. Une minute de dictée dans Teams, le compte-rendu s'écrit : vous donnez votre feu vert. Demander un résumé à une IA, tout le monde sait déjà le faire. La différence est ailleurs : ici, il est rédigé directement dans </a:t>
             </a:r>
             <a:pPr indent="0" marL="0">
               <a:lnSpc>
@@ -11772,7 +11794,7 @@
                 <a:ea typeface="Arial" pitchFamily="34" charset="-122"/>
                 <a:cs typeface="Arial" pitchFamily="34" charset="-120"/>
               </a:rPr>
-              <a:t>Il est 11h02, vous sortez d’un rendez-vous. Une minute de dictée dans Teams, le compte-rendu s’écrit : vous donnez votre feu vert. Demander un résumé à une IA, tout le monde sait déjà le faire. La différence est ailleurs : ici, il est rédigé directement dans </a:t>
+              <a:t>Il est 11h02, vous sortez d'un rendez-vous. Une minute de dictée dans Teams, le compte-rendu s'écrit : vous donnez votre feu vert. Demander un résumé à une IA, tout le monde sait déjà le faire. La différence est ailleurs : ici, il est rédigé directement dans </a:t>
             </a:r>
             <a:pPr indent="0" marL="0">
               <a:lnSpc>
@@ -12322,7 +12344,7 @@
                 <a:ea typeface="Arial" pitchFamily="34" charset="-122"/>
                 <a:cs typeface="Arial" pitchFamily="34" charset="-120"/>
               </a:rPr>
-              <a:t>Il est 11h02, vous sortez d’un rendez-vous. Une minute de dictée dans Teams, le compte-rendu s’écrit : vous donnez votre feu vert. Demander un résumé à une IA, tout le monde sait déjà le faire. La différence est ailleurs : ici, il est rédigé directement dans </a:t>
+              <a:t>Il est 11h02, vous sortez d'un rendez-vous. Une minute de dictée dans Teams, le compte-rendu s'écrit : vous donnez votre feu vert. Demander un résumé à une IA, tout le monde sait déjà le faire. La différence est ailleurs : ici, il est rédigé directement dans </a:t>
             </a:r>
             <a:pPr indent="0" marL="0">
               <a:lnSpc>
@@ -12872,7 +12894,7 @@
                 <a:ea typeface="Arial" pitchFamily="34" charset="-122"/>
                 <a:cs typeface="Arial" pitchFamily="34" charset="-120"/>
               </a:rPr>
-              <a:t>Il est 11h02, vous sortez d’un rendez-vous. Une minute de dictée dans Teams, le compte-rendu s’écrit : vous donnez votre feu vert. Demander un résumé à une IA, tout le monde sait déjà le faire. La différence est ailleurs : ici, il est rédigé directement dans </a:t>
+              <a:t>Il est 11h02, vous sortez d'un rendez-vous. Une minute de dictée dans Teams, le compte-rendu s'écrit : vous donnez votre feu vert. Demander un résumé à une IA, tout le monde sait déjà le faire. La différence est ailleurs : ici, il est rédigé directement dans </a:t>
             </a:r>
             <a:pPr indent="0" marL="0">
               <a:lnSpc>
@@ -13422,7 +13444,7 @@
                 <a:ea typeface="Arial" pitchFamily="34" charset="-122"/>
                 <a:cs typeface="Arial" pitchFamily="34" charset="-120"/>
               </a:rPr>
-              <a:t>Il est 11h02, vous sortez d’un rendez-vous. Une minute de dictée dans Teams, le compte-rendu s’écrit : vous donnez votre feu vert. Demander un résumé à une IA, tout le monde sait déjà le faire. La différence est ailleurs : ici, il est rédigé directement dans </a:t>
+              <a:t>Il est 11h02, vous sortez d'un rendez-vous. Une minute de dictée dans Teams, le compte-rendu s'écrit : vous donnez votre feu vert. Demander un résumé à une IA, tout le monde sait déjà le faire. La différence est ailleurs : ici, il est rédigé directement dans </a:t>
             </a:r>
             <a:pPr indent="0" marL="0">
               <a:lnSpc>
@@ -13972,7 +13994,7 @@
                 <a:ea typeface="Arial" pitchFamily="34" charset="-122"/>
                 <a:cs typeface="Arial" pitchFamily="34" charset="-120"/>
               </a:rPr>
-              <a:t>Il est 11h02, vous sortez d’un rendez-vous. Une minute de dictée dans Teams, le compte-rendu s’écrit : vous donnez votre feu vert. Demander un résumé à une IA, tout le monde sait déjà le faire. La différence est ailleurs : ici, il est rédigé directement dans </a:t>
+              <a:t>Il est 11h02, vous sortez d'un rendez-vous. Une minute de dictée dans Teams, le compte-rendu s'écrit : vous donnez votre feu vert. Demander un résumé à une IA, tout le monde sait déjà le faire. La différence est ailleurs : ici, il est rédigé directement dans </a:t>
             </a:r>
             <a:pPr indent="0" marL="0">
               <a:lnSpc>
@@ -14522,7 +14544,7 @@
                 <a:ea typeface="Arial" pitchFamily="34" charset="-122"/>
                 <a:cs typeface="Arial" pitchFamily="34" charset="-120"/>
               </a:rPr>
-              <a:t>Il est 11h02, vous sortez d’un rendez-vous. Une minute de dictée dans Teams, le compte-rendu s’écrit : vous donnez votre feu vert. Demander un résumé à une IA, tout le monde sait déjà le faire. La différence est ailleurs : ici, il est rédigé directement dans </a:t>
+              <a:t>Il est 11h02, vous sortez d'un rendez-vous. Une minute de dictée dans Teams, le compte-rendu s'écrit : vous donnez votre feu vert. Demander un résumé à une IA, tout le monde sait déjà le faire. La différence est ailleurs : ici, il est rédigé directement dans </a:t>
             </a:r>
             <a:pPr indent="0" marL="0">
               <a:lnSpc>
@@ -15194,7 +15216,7 @@
                 <a:ea typeface="Arial" pitchFamily="34" charset="-122"/>
                 <a:cs typeface="Arial" pitchFamily="34" charset="-120"/>
               </a:rPr>
-              <a:t>Il est 11h02, vous sortez d’un rendez-vous. Une minute de dictée dans Teams, le compte-rendu s’écrit : vous donnez votre feu vert. Demander un résumé à une IA, tout le monde sait déjà le faire. La différence est ailleurs : ici, il est rédigé directement dans </a:t>
+              <a:t>Il est 11h02, vous sortez d'un rendez-vous. Une minute de dictée dans Teams, le compte-rendu s'écrit : vous donnez votre feu vert. Demander un résumé à une IA, tout le monde sait déjà le faire. La différence est ailleurs : ici, il est rédigé directement dans </a:t>
             </a:r>
             <a:pPr indent="0" marL="0">
               <a:lnSpc>
@@ -15744,7 +15766,7 @@
                 <a:ea typeface="Arial" pitchFamily="34" charset="-122"/>
                 <a:cs typeface="Arial" pitchFamily="34" charset="-120"/>
               </a:rPr>
-              <a:t>Il est 11h02, vous sortez d’un rendez-vous. Une minute de dictée dans Teams, le compte-rendu s’écrit : vous donnez votre feu vert. Demander un résumé à une IA, tout le monde sait déjà le faire. La différence est ailleurs : ici, il est rédigé directement dans </a:t>
+              <a:t>Il est 11h02, vous sortez d'un rendez-vous. Une minute de dictée dans Teams, le compte-rendu s'écrit : vous donnez votre feu vert. Demander un résumé à une IA, tout le monde sait déjà le faire. La différence est ailleurs : ici, il est rédigé directement dans </a:t>
             </a:r>
             <a:pPr indent="0" marL="0">
               <a:lnSpc>
@@ -16294,7 +16316,7 @@
                 <a:ea typeface="Arial" pitchFamily="34" charset="-122"/>
                 <a:cs typeface="Arial" pitchFamily="34" charset="-120"/>
               </a:rPr>
-              <a:t>Il est 11h02, vous sortez d’un rendez-vous. Une minute de dictée dans Teams, le compte-rendu s’écrit : vous donnez votre feu vert. Demander un résumé à une IA, tout le monde sait déjà le faire. La différence est ailleurs : ici, il est rédigé directement dans </a:t>
+              <a:t>Il est 11h02, vous sortez d'un rendez-vous. Une minute de dictée dans Teams, le compte-rendu s'écrit : vous donnez votre feu vert. Demander un résumé à une IA, tout le monde sait déjà le faire. La différence est ailleurs : ici, il est rédigé directement dans </a:t>
             </a:r>
             <a:pPr indent="0" marL="0">
               <a:lnSpc>
@@ -16715,7 +16737,7 @@
                 <a:ea typeface="Arial" pitchFamily="34" charset="-122"/>
                 <a:cs typeface="Arial" pitchFamily="34" charset="-120"/>
               </a:rPr>
-              <a:t>Vous parlez, vous validez, c’est rangé.</a:t>
+              <a:t>Vous parlez, vous validez, c'est rangé.</a:t>
             </a:r>
             <a:endParaRPr lang="en-US" sz="1600" dirty="0"/>
           </a:p>
@@ -17045,7 +17067,7 @@
                 <a:ea typeface="Arial" pitchFamily="34" charset="-122"/>
                 <a:cs typeface="Arial" pitchFamily="34" charset="-120"/>
               </a:rPr>
-              <a:t>Il est 9h21, vous voyez un LP dans 20 minutes. Une phrase dans Teams : il relit d’abord tout ce que notre Salesforce sait déjà de lui, puis enrichit avec ce qui se dit dehors : </a:t>
+              <a:t>Il est 9h21, vous voyez un LP dans 20 minutes. Une phrase dans Teams : il relit d'abord tout ce que notre Salesforce sait déjà de lui, puis enrichit avec ce qui se dit dehors : </a:t>
             </a:r>
             <a:pPr indent="0" marL="0">
               <a:lnSpc>
@@ -17311,7 +17333,7 @@
                 <a:ea typeface="Arial" pitchFamily="34" charset="-122"/>
                 <a:cs typeface="Arial" pitchFamily="34" charset="-120"/>
               </a:rPr>
-              <a:t>Il est 9h21, vous voyez un LP dans 20 minutes. Une phrase dans Teams : il relit d’abord tout ce que notre Salesforce sait déjà de lui, puis enrichit avec ce qui se dit dehors : </a:t>
+              <a:t>Il est 9h21, vous voyez un LP dans 20 minutes. Une phrase dans Teams : il relit d'abord tout ce que notre Salesforce sait déjà de lui, puis enrichit avec ce qui se dit dehors : </a:t>
             </a:r>
             <a:pPr indent="0" marL="0">
               <a:lnSpc>
@@ -17930,7 +17952,7 @@
                 <a:ea typeface="Arial" pitchFamily="34" charset="-122"/>
                 <a:cs typeface="Arial" pitchFamily="34" charset="-120"/>
               </a:rPr>
-              <a:t>Il est 9h21, vous voyez un LP dans 20 minutes. Une phrase dans Teams : il relit d’abord tout ce que notre Salesforce sait déjà de lui, puis enrichit avec ce qui se dit dehors : </a:t>
+              <a:t>Il est 9h21, vous voyez un LP dans 20 minutes. Une phrase dans Teams : il relit d'abord tout ce que notre Salesforce sait déjà de lui, puis enrichit avec ce qui se dit dehors : </a:t>
             </a:r>
             <a:pPr indent="0" marL="0">
               <a:lnSpc>
@@ -18573,7 +18595,7 @@
                 <a:ea typeface="Arial" pitchFamily="34" charset="-122"/>
                 <a:cs typeface="Arial" pitchFamily="34" charset="-120"/>
               </a:rPr>
-              <a:t>Il est 9h21, vous voyez un LP dans 20 minutes. Une phrase dans Teams : il relit d’abord tout ce que notre Salesforce sait déjà de lui, puis enrichit avec ce qui se dit dehors : </a:t>
+              <a:t>Il est 9h21, vous voyez un LP dans 20 minutes. Une phrase dans Teams : il relit d'abord tout ce que notre Salesforce sait déjà de lui, puis enrichit avec ce qui se dit dehors : </a:t>
             </a:r>
             <a:pPr indent="0" marL="0">
               <a:lnSpc>
@@ -19216,7 +19238,7 @@
                 <a:ea typeface="Arial" pitchFamily="34" charset="-122"/>
                 <a:cs typeface="Arial" pitchFamily="34" charset="-120"/>
               </a:rPr>
-              <a:t>Il est 9h21, vous voyez un LP dans 20 minutes. Une phrase dans Teams : il relit d’abord tout ce que notre Salesforce sait déjà de lui, puis enrichit avec ce qui se dit dehors : </a:t>
+              <a:t>Il est 9h21, vous voyez un LP dans 20 minutes. Une phrase dans Teams : il relit d'abord tout ce que notre Salesforce sait déjà de lui, puis enrichit avec ce qui se dit dehors : </a:t>
             </a:r>
             <a:pPr indent="0" marL="0">
               <a:lnSpc>
@@ -19859,7 +19881,7 @@
                 <a:ea typeface="Arial" pitchFamily="34" charset="-122"/>
                 <a:cs typeface="Arial" pitchFamily="34" charset="-120"/>
               </a:rPr>
-              <a:t>Il est 9h21, vous voyez un LP dans 20 minutes. Une phrase dans Teams : il relit d’abord tout ce que notre Salesforce sait déjà de lui, puis enrichit avec ce qui se dit dehors : </a:t>
+              <a:t>Il est 9h21, vous voyez un LP dans 20 minutes. Une phrase dans Teams : il relit d'abord tout ce que notre Salesforce sait déjà de lui, puis enrichit avec ce qui se dit dehors : </a:t>
             </a:r>
             <a:pPr indent="0" marL="0">
               <a:lnSpc>
@@ -20860,7 +20882,7 @@
                 <a:ea typeface="Arial" pitchFamily="34" charset="-122"/>
                 <a:cs typeface="Arial" pitchFamily="34" charset="-120"/>
               </a:rPr>
-              <a:t>C'est elle qui fait dialoguer le cerveau et la bibliothèque.</a:t>
+              <a:t>C'est elle qui les fait dialoguer.</a:t>
             </a:r>
             <a:endParaRPr lang="en-US" sz="1200" dirty="0"/>
           </a:p>
@@ -21274,7 +21296,7 @@
                 <a:ea typeface="Arial" pitchFamily="34" charset="-122"/>
                 <a:cs typeface="Arial" pitchFamily="34" charset="-120"/>
               </a:rPr>
-              <a:t>Il est 9h21, vous voyez un LP dans 20 minutes. Une phrase dans Teams : il relit d’abord tout ce que notre Salesforce sait déjà de lui, puis enrichit avec ce qui se dit dehors : </a:t>
+              <a:t>Il est 9h21, vous voyez un LP dans 20 minutes. Une phrase dans Teams : il relit d'abord tout ce que notre Salesforce sait déjà de lui, puis enrichit avec ce qui se dit dehors : </a:t>
             </a:r>
             <a:pPr indent="0" marL="0">
               <a:lnSpc>
@@ -21767,12 +21789,12 @@
         </p:nvSpPr>
         <p:spPr>
           <a:xfrm>
-            <a:off x="7563518" y="1094728"/>
-            <a:ext cx="2674469" cy="5242064"/>
+            <a:off x="7346290" y="1238098"/>
+            <a:ext cx="2648102" cy="4736592"/>
           </a:xfrm>
           <a:prstGeom prst="roundRect">
             <a:avLst>
-              <a:gd name="adj" fmla="val 3077"/>
+              <a:gd name="adj" fmla="val 3108"/>
             </a:avLst>
           </a:prstGeom>
           <a:solidFill>
@@ -21801,8 +21823,8 @@
         </p:nvSpPr>
         <p:spPr>
           <a:xfrm>
-            <a:off x="7673246" y="1149592"/>
-            <a:ext cx="2455013" cy="219456"/>
+            <a:off x="7456018" y="1292962"/>
+            <a:ext cx="2428646" cy="219456"/>
           </a:xfrm>
           <a:prstGeom prst="rect">
             <a:avLst/>
@@ -21854,17 +21876,17 @@
         </p:nvSpPr>
         <p:spPr>
           <a:xfrm>
-            <a:off x="7673246" y="1405624"/>
-            <a:ext cx="2455013" cy="731520"/>
-          </a:xfrm>
-          <a:prstGeom prst="rect">
-            <a:avLst/>
-          </a:prstGeom>
-          <a:noFill/>
-          <a:ln/>
-        </p:spPr>
-        <p:txBody>
-          <a:bodyPr wrap="square" lIns="0" tIns="0" rIns="0" bIns="0" rtlCol="0" anchor="ctr"/>
+            <a:off x="7456018" y="1548994"/>
+            <a:ext cx="2428646" cy="731520"/>
+          </a:xfrm>
+          <a:prstGeom prst="rect">
+            <a:avLst/>
+          </a:prstGeom>
+          <a:noFill/>
+          <a:ln/>
+        </p:spPr>
+        <p:txBody>
+          <a:bodyPr wrap="square" lIns="0" tIns="0" rIns="0" bIns="0" rtlCol="0" anchor="t"/>
           <a:lstStyle/>
           <a:p>
             <a:pPr indent="0" marL="0">
@@ -21896,17 +21918,17 @@
         </p:nvSpPr>
         <p:spPr>
           <a:xfrm>
-            <a:off x="7673246" y="2192008"/>
-            <a:ext cx="2455013" cy="4007624"/>
-          </a:xfrm>
-          <a:prstGeom prst="rect">
-            <a:avLst/>
-          </a:prstGeom>
-          <a:noFill/>
-          <a:ln/>
-        </p:spPr>
-        <p:txBody>
-          <a:bodyPr wrap="square" lIns="0" tIns="0" rIns="0" bIns="0" rtlCol="0" anchor="ctr"/>
+            <a:off x="7456018" y="2335378"/>
+            <a:ext cx="2428646" cy="3502152"/>
+          </a:xfrm>
+          <a:prstGeom prst="rect">
+            <a:avLst/>
+          </a:prstGeom>
+          <a:noFill/>
+          <a:ln/>
+        </p:spPr>
+        <p:txBody>
+          <a:bodyPr wrap="square" lIns="0" tIns="0" rIns="0" bIns="0" rtlCol="0" anchor="t"/>
           <a:lstStyle/>
           <a:p>
             <a:pPr indent="0" marL="0">
@@ -22036,7 +22058,7 @@
             <a:r>
               <a:rPr lang="en-US" sz="550" dirty="0">
                 <a:solidFill>
-                  <a:srgbClr val="6B6D72"/>
+                  <a:srgbClr val="25262A"/>
                 </a:solidFill>
                 <a:latin typeface="Arial" pitchFamily="34" charset="0"/>
                 <a:ea typeface="Arial" pitchFamily="34" charset="-122"/>
@@ -22510,7 +22532,7 @@
               <a:buNone/>
             </a:pPr>
             <a:r>
-              <a:rPr lang="en-US" sz="950" dirty="0">
+              <a:rPr lang="en-US" sz="950" b="1" dirty="0">
                 <a:solidFill>
                   <a:srgbClr val="25262A"/>
                 </a:solidFill>
@@ -23293,7 +23315,7 @@
               <a:buNone/>
             </a:pPr>
             <a:r>
-              <a:rPr lang="en-US" sz="950" b="1" dirty="0">
+              <a:rPr lang="en-US" sz="1000" b="1" spc="100" kern="0" dirty="0">
                 <a:solidFill>
                   <a:srgbClr val="414142"/>
                 </a:solidFill>
@@ -23403,7 +23425,47 @@
                 <a:ea typeface="Arial" pitchFamily="34" charset="-122"/>
                 <a:cs typeface="Arial" pitchFamily="34" charset="-120"/>
               </a:rPr>
-              <a:t>Associé fondateur de Breizh Rebond (Rennes), premier fonds breton de retournement, créé en 2021, spécialisé dans le financement de PME en difficulté.</a:t>
+              <a:t>Associé fondateur de </a:t>
+            </a:r>
+            <a:pPr indent="0" marL="0">
+              <a:lnSpc>
+                <a:spcPts val="1250"/>
+              </a:lnSpc>
+              <a:spcAft>
+                <a:spcPts val="400"/>
+              </a:spcAft>
+              <a:buNone/>
+            </a:pPr>
+            <a:r>
+              <a:rPr lang="en-US" sz="950" b="1" dirty="0">
+                <a:solidFill>
+                  <a:srgbClr val="25262A"/>
+                </a:solidFill>
+                <a:latin typeface="Arial" pitchFamily="34" charset="0"/>
+                <a:ea typeface="Arial" pitchFamily="34" charset="-122"/>
+                <a:cs typeface="Arial" pitchFamily="34" charset="-120"/>
+              </a:rPr>
+              <a:t>Breizh Rebond</a:t>
+            </a:r>
+            <a:pPr indent="0" marL="0">
+              <a:lnSpc>
+                <a:spcPts val="1250"/>
+              </a:lnSpc>
+              <a:spcAft>
+                <a:spcPts val="400"/>
+              </a:spcAft>
+              <a:buNone/>
+            </a:pPr>
+            <a:r>
+              <a:rPr lang="en-US" sz="950" dirty="0">
+                <a:solidFill>
+                  <a:srgbClr val="25262A"/>
+                </a:solidFill>
+                <a:latin typeface="Arial" pitchFamily="34" charset="0"/>
+                <a:ea typeface="Arial" pitchFamily="34" charset="-122"/>
+                <a:cs typeface="Arial" pitchFamily="34" charset="-120"/>
+              </a:rPr>
+              <a:t> (Rennes), premier fonds breton de retournement, créé en 2021, spécialisé dans le financement de PME en difficulté.</a:t>
             </a:r>
             <a:endParaRPr lang="en-US" sz="950" dirty="0"/>
           </a:p>
@@ -23419,6 +23481,26 @@
               <a:buChar char="•"/>
             </a:pPr>
             <a:r>
+              <a:rPr lang="en-US" sz="950" b="1" dirty="0">
+                <a:solidFill>
+                  <a:srgbClr val="25262A"/>
+                </a:solidFill>
+                <a:latin typeface="Arial" pitchFamily="34" charset="0"/>
+                <a:ea typeface="Arial" pitchFamily="34" charset="-122"/>
+                <a:cs typeface="Arial" pitchFamily="34" charset="-120"/>
+              </a:rPr>
+              <a:t>46 M€ investis dans 10 PME</a:t>
+            </a:r>
+            <a:pPr indent="0" marL="0">
+              <a:lnSpc>
+                <a:spcPts val="1250"/>
+              </a:lnSpc>
+              <a:spcAft>
+                <a:spcPts val="400"/>
+              </a:spcAft>
+              <a:buNone/>
+            </a:pPr>
+            <a:r>
               <a:rPr lang="en-US" sz="950" dirty="0">
                 <a:solidFill>
                   <a:srgbClr val="25262A"/>
@@ -23427,7 +23509,7 @@
                 <a:ea typeface="Arial" pitchFamily="34" charset="-122"/>
                 <a:cs typeface="Arial" pitchFamily="34" charset="-120"/>
               </a:rPr>
-              <a:t>46 M€ investis dans 10 PME, tickets de 1 à 6 M€.</a:t>
+              <a:t>, tickets de 1 à 6 M€.</a:t>
             </a:r>
             <a:endParaRPr lang="en-US" sz="950" dirty="0"/>
           </a:p>
@@ -23451,7 +23533,47 @@
                 <a:ea typeface="Arial" pitchFamily="34" charset="-122"/>
                 <a:cs typeface="Arial" pitchFamily="34" charset="-120"/>
               </a:rPr>
-              <a:t>Prix « Best French Turnaround Investor », Private Equity Exchange 2025.</a:t>
+              <a:t>Prix </a:t>
+            </a:r>
+            <a:pPr indent="0" marL="0">
+              <a:lnSpc>
+                <a:spcPts val="1250"/>
+              </a:lnSpc>
+              <a:spcAft>
+                <a:spcPts val="400"/>
+              </a:spcAft>
+              <a:buNone/>
+            </a:pPr>
+            <a:r>
+              <a:rPr lang="en-US" sz="950" b="1" dirty="0">
+                <a:solidFill>
+                  <a:srgbClr val="25262A"/>
+                </a:solidFill>
+                <a:latin typeface="Arial" pitchFamily="34" charset="0"/>
+                <a:ea typeface="Arial" pitchFamily="34" charset="-122"/>
+                <a:cs typeface="Arial" pitchFamily="34" charset="-120"/>
+              </a:rPr>
+              <a:t>« Best French Turnaround Investor »</a:t>
+            </a:r>
+            <a:pPr indent="0" marL="0">
+              <a:lnSpc>
+                <a:spcPts val="1250"/>
+              </a:lnSpc>
+              <a:spcAft>
+                <a:spcPts val="400"/>
+              </a:spcAft>
+              <a:buNone/>
+            </a:pPr>
+            <a:r>
+              <a:rPr lang="en-US" sz="950" dirty="0">
+                <a:solidFill>
+                  <a:srgbClr val="25262A"/>
+                </a:solidFill>
+                <a:latin typeface="Arial" pitchFamily="34" charset="0"/>
+                <a:ea typeface="Arial" pitchFamily="34" charset="-122"/>
+                <a:cs typeface="Arial" pitchFamily="34" charset="-120"/>
+              </a:rPr>
+              <a:t>, Private Equity Exchange 2025.</a:t>
             </a:r>
             <a:endParaRPr lang="en-US" sz="950" dirty="0"/>
           </a:p>
@@ -23537,7 +23659,7 @@
                 <a:ea typeface="Arial" pitchFamily="34" charset="-122"/>
                 <a:cs typeface="Arial" pitchFamily="34" charset="-120"/>
               </a:rPr>
-              <a:t>Il voit les PME de l’Ouest par le bas du cycle, nous par le haut : un prescripteur autant qu’un LP.</a:t>
+              <a:t>Il voit les PME de l'Ouest par le bas du cycle, nous par le haut : un prescripteur autant qu'un LP.</a:t>
             </a:r>
             <a:endParaRPr lang="en-US" sz="950" dirty="0"/>
           </a:p>
@@ -23623,7 +23745,7 @@
                 <a:ea typeface="Arial" pitchFamily="34" charset="-122"/>
                 <a:cs typeface="Arial" pitchFamily="34" charset="-120"/>
               </a:rPr>
-              <a:t>une reprise récente s’est accompagnée de suppressions de postes. À ne pas aborder en ouverture.</a:t>
+              <a:t>une reprise récente s'est accompagnée de suppressions de postes. À ne pas aborder en ouverture.</a:t>
             </a:r>
             <a:endParaRPr lang="en-US" sz="950" dirty="0"/>
           </a:p>
@@ -23637,7 +23759,7 @@
         </p:nvSpPr>
         <p:spPr>
           <a:xfrm>
-            <a:off x="6355080" y="5596128"/>
+            <a:off x="6355080" y="5559552"/>
             <a:ext cx="859536" cy="274320"/>
           </a:xfrm>
           <a:prstGeom prst="roundRect">
@@ -23664,7 +23786,7 @@
         </p:nvSpPr>
         <p:spPr>
           <a:xfrm>
-            <a:off x="6355080" y="5596128"/>
+            <a:off x="6355080" y="5559552"/>
             <a:ext cx="859536" cy="274320"/>
           </a:xfrm>
           <a:prstGeom prst="rect">
@@ -23703,7 +23825,7 @@
         </p:nvSpPr>
         <p:spPr>
           <a:xfrm>
-            <a:off x="7306056" y="5596128"/>
+            <a:off x="7306056" y="5559552"/>
             <a:ext cx="610819" cy="274320"/>
           </a:xfrm>
           <a:prstGeom prst="roundRect">
@@ -23730,7 +23852,7 @@
         </p:nvSpPr>
         <p:spPr>
           <a:xfrm>
-            <a:off x="7306056" y="5596128"/>
+            <a:off x="7306056" y="5559552"/>
             <a:ext cx="610819" cy="274320"/>
           </a:xfrm>
           <a:prstGeom prst="rect">
@@ -23769,7 +23891,7 @@
         </p:nvSpPr>
         <p:spPr>
           <a:xfrm>
-            <a:off x="8008315" y="5596128"/>
+            <a:off x="8008315" y="5559552"/>
             <a:ext cx="1481328" cy="274320"/>
           </a:xfrm>
           <a:prstGeom prst="roundRect">
@@ -23796,7 +23918,7 @@
         </p:nvSpPr>
         <p:spPr>
           <a:xfrm>
-            <a:off x="8008315" y="5596128"/>
+            <a:off x="8008315" y="5559552"/>
             <a:ext cx="1481328" cy="274320"/>
           </a:xfrm>
           <a:prstGeom prst="rect">
@@ -23835,7 +23957,7 @@
         </p:nvSpPr>
         <p:spPr>
           <a:xfrm>
-            <a:off x="9581083" y="5596128"/>
+            <a:off x="6355080" y="5907024"/>
             <a:ext cx="735178" cy="274320"/>
           </a:xfrm>
           <a:prstGeom prst="roundRect">
@@ -23862,7 +23984,7 @@
         </p:nvSpPr>
         <p:spPr>
           <a:xfrm>
-            <a:off x="9581083" y="5596128"/>
+            <a:off x="6355080" y="5907024"/>
             <a:ext cx="735178" cy="274320"/>
           </a:xfrm>
           <a:prstGeom prst="rect">
@@ -23901,7 +24023,7 @@
         </p:nvSpPr>
         <p:spPr>
           <a:xfrm>
-            <a:off x="10407701" y="5596128"/>
+            <a:off x="7181698" y="5907024"/>
             <a:ext cx="983894" cy="274320"/>
           </a:xfrm>
           <a:prstGeom prst="roundRect">
@@ -23928,7 +24050,7 @@
         </p:nvSpPr>
         <p:spPr>
           <a:xfrm>
-            <a:off x="10407701" y="5596128"/>
+            <a:off x="7181698" y="5907024"/>
             <a:ext cx="983894" cy="274320"/>
           </a:xfrm>
           <a:prstGeom prst="rect">
@@ -23967,7 +24089,7 @@
         </p:nvSpPr>
         <p:spPr>
           <a:xfrm>
-            <a:off x="11483035" y="5596128"/>
+            <a:off x="8257032" y="5907024"/>
             <a:ext cx="1356970" cy="274320"/>
           </a:xfrm>
           <a:prstGeom prst="roundRect">
@@ -23994,7 +24116,7 @@
         </p:nvSpPr>
         <p:spPr>
           <a:xfrm>
-            <a:off x="11483035" y="5596128"/>
+            <a:off x="8257032" y="5907024"/>
             <a:ext cx="1356970" cy="274320"/>
           </a:xfrm>
           <a:prstGeom prst="rect">
@@ -24259,7 +24381,7 @@
         <p:spPr>
           <a:xfrm>
             <a:off x="548640" y="987552"/>
-            <a:ext cx="5577840" cy="1005840"/>
+            <a:ext cx="5577840" cy="1051560"/>
           </a:xfrm>
           <a:prstGeom prst="rect">
             <a:avLst/>
@@ -24275,7 +24397,7 @@
               <a:buNone/>
             </a:pPr>
             <a:r>
-              <a:rPr lang="en-US" sz="2600" b="1" dirty="0">
+              <a:rPr lang="en-US" sz="3400" b="1" dirty="0">
                 <a:solidFill>
                   <a:srgbClr val="414142"/>
                 </a:solidFill>
@@ -24285,7 +24407,7 @@
               </a:rPr>
               <a:t>Une question sur nos participations ?</a:t>
             </a:r>
-            <a:endParaRPr lang="en-US" sz="2600" dirty="0"/>
+            <a:endParaRPr lang="en-US" sz="3400" dirty="0"/>
           </a:p>
         </p:txBody>
       </p:sp>
@@ -24297,7 +24419,7 @@
         </p:nvSpPr>
         <p:spPr>
           <a:xfrm>
-            <a:off x="548640" y="2057400"/>
+            <a:off x="548640" y="2121408"/>
             <a:ext cx="5394960" cy="1234440"/>
           </a:xfrm>
           <a:prstGeom prst="rect">
@@ -24325,7 +24447,7 @@
                 <a:ea typeface="Arial" pitchFamily="34" charset="-122"/>
                 <a:cs typeface="Arial" pitchFamily="34" charset="-120"/>
               </a:rPr>
-              <a:t>Un cas venu de l’équipe IR : des agents qui vont chercher, systématiquement, la même information dans chacune de nos participations, données sensibles comprises. Ici, la cartographie bancaire : deux régions, une banque, l’analyse tombe.</a:t>
+              <a:t>Un cas venu de l'équipe IR : des agents qui vont chercher, systématiquement, la même information dans chacune de nos participations, données sensibles comprises. Ici, la cartographie bancaire : deux régions, une banque, l'analyse tombe.</a:t>
             </a:r>
             <a:endParaRPr lang="en-US" sz="1250" dirty="0"/>
           </a:p>
@@ -24423,7 +24545,7 @@
         <p:spPr>
           <a:xfrm>
             <a:off x="548640" y="987552"/>
-            <a:ext cx="5577840" cy="1005840"/>
+            <a:ext cx="5577840" cy="1051560"/>
           </a:xfrm>
           <a:prstGeom prst="rect">
             <a:avLst/>
@@ -24439,7 +24561,7 @@
               <a:buNone/>
             </a:pPr>
             <a:r>
-              <a:rPr lang="en-US" sz="2600" b="1" dirty="0">
+              <a:rPr lang="en-US" sz="3400" b="1" dirty="0">
                 <a:solidFill>
                   <a:srgbClr val="414142"/>
                 </a:solidFill>
@@ -24449,7 +24571,7 @@
               </a:rPr>
               <a:t>Une question sur nos participations ?</a:t>
             </a:r>
-            <a:endParaRPr lang="en-US" sz="2600" dirty="0"/>
+            <a:endParaRPr lang="en-US" sz="3400" dirty="0"/>
           </a:p>
         </p:txBody>
       </p:sp>
@@ -24461,7 +24583,7 @@
         </p:nvSpPr>
         <p:spPr>
           <a:xfrm>
-            <a:off x="548640" y="2057400"/>
+            <a:off x="548640" y="2121408"/>
             <a:ext cx="5394960" cy="1234440"/>
           </a:xfrm>
           <a:prstGeom prst="rect">
@@ -24489,7 +24611,7 @@
                 <a:ea typeface="Arial" pitchFamily="34" charset="-122"/>
                 <a:cs typeface="Arial" pitchFamily="34" charset="-120"/>
               </a:rPr>
-              <a:t>Un cas venu de l’équipe IR : des agents qui vont chercher, systématiquement, la même information dans chacune de nos participations, données sensibles comprises. Ici, la cartographie bancaire : deux régions, une banque, l’analyse tombe.</a:t>
+              <a:t>Un cas venu de l'équipe IR : des agents qui vont chercher, systématiquement, la même information dans chacune de nos participations, données sensibles comprises. Ici, la cartographie bancaire : deux régions, une banque, l'analyse tombe.</a:t>
             </a:r>
             <a:endParaRPr lang="en-US" sz="1250" dirty="0"/>
           </a:p>
@@ -24576,7 +24698,7 @@
                 <a:ea typeface="Arial" pitchFamily="34" charset="-122"/>
                 <a:cs typeface="Arial" pitchFamily="34" charset="-120"/>
               </a:rPr>
-              <a:t>Virtual Brain · L’app régions</a:t>
+              <a:t>Virtual Brain · L'app régions</a:t>
             </a:r>
             <a:endParaRPr lang="en-US" sz="1150" dirty="0"/>
           </a:p>
@@ -25112,7 +25234,7 @@
         <p:spPr>
           <a:xfrm>
             <a:off x="548640" y="987552"/>
-            <a:ext cx="5577840" cy="1005840"/>
+            <a:ext cx="5577840" cy="1051560"/>
           </a:xfrm>
           <a:prstGeom prst="rect">
             <a:avLst/>
@@ -25128,7 +25250,7 @@
               <a:buNone/>
             </a:pPr>
             <a:r>
-              <a:rPr lang="en-US" sz="2600" b="1" dirty="0">
+              <a:rPr lang="en-US" sz="3400" b="1" dirty="0">
                 <a:solidFill>
                   <a:srgbClr val="414142"/>
                 </a:solidFill>
@@ -25138,7 +25260,7 @@
               </a:rPr>
               <a:t>Une question sur nos participations ?</a:t>
             </a:r>
-            <a:endParaRPr lang="en-US" sz="2600" dirty="0"/>
+            <a:endParaRPr lang="en-US" sz="3400" dirty="0"/>
           </a:p>
         </p:txBody>
       </p:sp>
@@ -25150,7 +25272,7 @@
         </p:nvSpPr>
         <p:spPr>
           <a:xfrm>
-            <a:off x="548640" y="2057400"/>
+            <a:off x="548640" y="2121408"/>
             <a:ext cx="5394960" cy="1234440"/>
           </a:xfrm>
           <a:prstGeom prst="rect">
@@ -25178,7 +25300,7 @@
                 <a:ea typeface="Arial" pitchFamily="34" charset="-122"/>
                 <a:cs typeface="Arial" pitchFamily="34" charset="-120"/>
               </a:rPr>
-              <a:t>Un cas venu de l’équipe IR : des agents qui vont chercher, systématiquement, la même information dans chacune de nos participations, données sensibles comprises. Ici, la cartographie bancaire : deux régions, une banque, l’analyse tombe.</a:t>
+              <a:t>Un cas venu de l'équipe IR : des agents qui vont chercher, systématiquement, la même information dans chacune de nos participations, données sensibles comprises. Ici, la cartographie bancaire : deux régions, une banque, l'analyse tombe.</a:t>
             </a:r>
             <a:endParaRPr lang="en-US" sz="1250" dirty="0"/>
           </a:p>
@@ -25265,7 +25387,7 @@
                 <a:ea typeface="Arial" pitchFamily="34" charset="-122"/>
                 <a:cs typeface="Arial" pitchFamily="34" charset="-120"/>
               </a:rPr>
-              <a:t>Virtual Brain · L’app régions</a:t>
+              <a:t>Virtual Brain · L'app régions</a:t>
             </a:r>
             <a:endParaRPr lang="en-US" sz="1150" dirty="0"/>
           </a:p>
@@ -25603,7 +25725,7 @@
                 <a:ea typeface="Arial" pitchFamily="34" charset="-122"/>
                 <a:cs typeface="Arial" pitchFamily="34" charset="-120"/>
               </a:rPr>
-              <a:t>Caisse d’Épargne</a:t>
+              <a:t>Caisse d'Épargne</a:t>
             </a:r>
             <a:endParaRPr lang="en-US" sz="1100" dirty="0"/>
           </a:p>
@@ -25801,7 +25923,7 @@
         <p:spPr>
           <a:xfrm>
             <a:off x="548640" y="987552"/>
-            <a:ext cx="5577840" cy="1005840"/>
+            <a:ext cx="5577840" cy="1051560"/>
           </a:xfrm>
           <a:prstGeom prst="rect">
             <a:avLst/>
@@ -25817,7 +25939,7 @@
               <a:buNone/>
             </a:pPr>
             <a:r>
-              <a:rPr lang="en-US" sz="2600" b="1" dirty="0">
+              <a:rPr lang="en-US" sz="3400" b="1" dirty="0">
                 <a:solidFill>
                   <a:srgbClr val="414142"/>
                 </a:solidFill>
@@ -25827,7 +25949,7 @@
               </a:rPr>
               <a:t>Une question sur nos participations ?</a:t>
             </a:r>
-            <a:endParaRPr lang="en-US" sz="2600" dirty="0"/>
+            <a:endParaRPr lang="en-US" sz="3400" dirty="0"/>
           </a:p>
         </p:txBody>
       </p:sp>
@@ -25839,7 +25961,7 @@
         </p:nvSpPr>
         <p:spPr>
           <a:xfrm>
-            <a:off x="548640" y="2057400"/>
+            <a:off x="548640" y="2121408"/>
             <a:ext cx="5394960" cy="1234440"/>
           </a:xfrm>
           <a:prstGeom prst="rect">
@@ -25867,7 +25989,7 @@
                 <a:ea typeface="Arial" pitchFamily="34" charset="-122"/>
                 <a:cs typeface="Arial" pitchFamily="34" charset="-120"/>
               </a:rPr>
-              <a:t>Un cas venu de l’équipe IR : des agents qui vont chercher, systématiquement, la même information dans chacune de nos participations, données sensibles comprises. Ici, la cartographie bancaire : deux régions, une banque, l’analyse tombe.</a:t>
+              <a:t>Un cas venu de l'équipe IR : des agents qui vont chercher, systématiquement, la même information dans chacune de nos participations, données sensibles comprises. Ici, la cartographie bancaire : deux régions, une banque, l'analyse tombe.</a:t>
             </a:r>
             <a:endParaRPr lang="en-US" sz="1250" dirty="0"/>
           </a:p>
@@ -25954,7 +26076,7 @@
                 <a:ea typeface="Arial" pitchFamily="34" charset="-122"/>
                 <a:cs typeface="Arial" pitchFamily="34" charset="-120"/>
               </a:rPr>
-              <a:t>Virtual Brain · L’app régions</a:t>
+              <a:t>Virtual Brain · L'app régions</a:t>
             </a:r>
             <a:endParaRPr lang="en-US" sz="1150" dirty="0"/>
           </a:p>
@@ -26292,7 +26414,7 @@
                 <a:ea typeface="Arial" pitchFamily="34" charset="-122"/>
                 <a:cs typeface="Arial" pitchFamily="34" charset="-120"/>
               </a:rPr>
-              <a:t>Caisse d’Épargne</a:t>
+              <a:t>Caisse d'Épargne</a:t>
             </a:r>
             <a:endParaRPr lang="en-US" sz="1100" dirty="0"/>
           </a:p>
@@ -26622,7 +26744,7 @@
                 <a:ea typeface="Arial" pitchFamily="34" charset="-122"/>
                 <a:cs typeface="Arial" pitchFamily="34" charset="-120"/>
               </a:rPr>
-              <a:t>de prêt effectif, Tier 1 Caisse d’Épargne</a:t>
+              <a:t>de prêt effectif, Tier 1 Caisse d'Épargne</a:t>
             </a:r>
             <a:endParaRPr lang="en-US" sz="850" dirty="0"/>
           </a:p>
@@ -26872,7 +26994,7 @@
                 <a:ea typeface="Arial" pitchFamily="34" charset="-122"/>
                 <a:cs typeface="Arial" pitchFamily="34" charset="-120"/>
               </a:rPr>
-              <a:t>Caisse d’Épargne BPL</a:t>
+              <a:t>Caisse d'Épargne BPL</a:t>
             </a:r>
             <a:endParaRPr lang="en-US" sz="1050" dirty="0"/>
           </a:p>
@@ -27360,7 +27482,7 @@
                 <a:ea typeface="Arial" pitchFamily="34" charset="-122"/>
                 <a:cs typeface="Arial" pitchFamily="34" charset="-120"/>
               </a:rPr>
-              <a:t>Deux régions, une banque : l’analyse tombe, données sensibles comprises.</a:t>
+              <a:t>Deux régions, une banque : l'analyse tombe, données sensibles comprises.</a:t>
             </a:r>
             <a:endParaRPr lang="en-US" sz="900" dirty="0"/>
           </a:p>
@@ -27458,7 +27580,7 @@
         <p:spPr>
           <a:xfrm>
             <a:off x="548640" y="987552"/>
-            <a:ext cx="5577840" cy="1005840"/>
+            <a:ext cx="5577840" cy="1051560"/>
           </a:xfrm>
           <a:prstGeom prst="rect">
             <a:avLst/>
@@ -27474,7 +27596,7 @@
               <a:buNone/>
             </a:pPr>
             <a:r>
-              <a:rPr lang="en-US" sz="2600" b="1" dirty="0">
+              <a:rPr lang="en-US" sz="3400" b="1" dirty="0">
                 <a:solidFill>
                   <a:srgbClr val="414142"/>
                 </a:solidFill>
@@ -27484,7 +27606,7 @@
               </a:rPr>
               <a:t>Une question sur nos participations ?</a:t>
             </a:r>
-            <a:endParaRPr lang="en-US" sz="2600" dirty="0"/>
+            <a:endParaRPr lang="en-US" sz="3400" dirty="0"/>
           </a:p>
         </p:txBody>
       </p:sp>
@@ -27496,7 +27618,7 @@
         </p:nvSpPr>
         <p:spPr>
           <a:xfrm>
-            <a:off x="548640" y="2057400"/>
+            <a:off x="548640" y="2121408"/>
             <a:ext cx="5394960" cy="1234440"/>
           </a:xfrm>
           <a:prstGeom prst="rect">
@@ -27524,7 +27646,7 @@
                 <a:ea typeface="Arial" pitchFamily="34" charset="-122"/>
                 <a:cs typeface="Arial" pitchFamily="34" charset="-120"/>
               </a:rPr>
-              <a:t>Un cas venu de l’équipe IR : des agents qui vont chercher, systématiquement, la même information dans chacune de nos participations, données sensibles comprises. Ici, la cartographie bancaire : deux régions, une banque, l’analyse tombe.</a:t>
+              <a:t>Un cas venu de l'équipe IR : des agents qui vont chercher, systématiquement, la même information dans chacune de nos participations, données sensibles comprises. Ici, la cartographie bancaire : deux régions, une banque, l'analyse tombe.</a:t>
             </a:r>
             <a:endParaRPr lang="en-US" sz="1250" dirty="0"/>
           </a:p>
@@ -27611,7 +27733,7 @@
                 <a:ea typeface="Arial" pitchFamily="34" charset="-122"/>
                 <a:cs typeface="Arial" pitchFamily="34" charset="-120"/>
               </a:rPr>
-              <a:t>Virtual Brain · L’app régions</a:t>
+              <a:t>Virtual Brain · L'app régions</a:t>
             </a:r>
             <a:endParaRPr lang="en-US" sz="1150" dirty="0"/>
           </a:p>
@@ -27949,7 +28071,7 @@
                 <a:ea typeface="Arial" pitchFamily="34" charset="-122"/>
                 <a:cs typeface="Arial" pitchFamily="34" charset="-120"/>
               </a:rPr>
-              <a:t>Caisse d’Épargne</a:t>
+              <a:t>Caisse d'Épargne</a:t>
             </a:r>
             <a:endParaRPr lang="en-US" sz="1100" dirty="0"/>
           </a:p>
@@ -28279,7 +28401,7 @@
                 <a:ea typeface="Arial" pitchFamily="34" charset="-122"/>
                 <a:cs typeface="Arial" pitchFamily="34" charset="-120"/>
               </a:rPr>
-              <a:t>de prêt effectif, Tier 1 Caisse d’Épargne</a:t>
+              <a:t>de prêt effectif, Tier 1 Caisse d'Épargne</a:t>
             </a:r>
             <a:endParaRPr lang="en-US" sz="850" dirty="0"/>
           </a:p>
@@ -28529,7 +28651,7 @@
                 <a:ea typeface="Arial" pitchFamily="34" charset="-122"/>
                 <a:cs typeface="Arial" pitchFamily="34" charset="-120"/>
               </a:rPr>
-              <a:t>Caisse d’Épargne BPL</a:t>
+              <a:t>Caisse d'Épargne BPL</a:t>
             </a:r>
             <a:endParaRPr lang="en-US" sz="1050" dirty="0"/>
           </a:p>
@@ -29017,7 +29139,7 @@
                 <a:ea typeface="Arial" pitchFamily="34" charset="-122"/>
                 <a:cs typeface="Arial" pitchFamily="34" charset="-120"/>
               </a:rPr>
-              <a:t>Deux régions, une banque : l’analyse tombe, données sensibles comprises.</a:t>
+              <a:t>Deux régions, une banque : l'analyse tombe, données sensibles comprises.</a:t>
             </a:r>
             <a:endParaRPr lang="en-US" sz="900" dirty="0"/>
           </a:p>
@@ -29088,7 +29210,7 @@
           <a:bodyPr wrap="square" lIns="0" tIns="0" rIns="0" bIns="0" rtlCol="0" anchor="ctr"/>
           <a:lstStyle/>
           <a:p>
-            <a:pPr algn="ctr" indent="0" marL="0">
+            <a:pPr algn="l" indent="0" marL="0">
               <a:buNone/>
             </a:pPr>
             <a:r>
@@ -29127,7 +29249,7 @@
           <a:bodyPr wrap="square" lIns="0" tIns="0" rIns="0" bIns="0" rtlCol="0" anchor="ctr"/>
           <a:lstStyle/>
           <a:p>
-            <a:pPr algn="ctr" indent="0" marL="0">
+            <a:pPr algn="l" indent="0" marL="0">
               <a:buNone/>
             </a:pPr>
             <a:r>
@@ -29210,7 +29332,7 @@
           <a:bodyPr wrap="square" lIns="0" tIns="0" rIns="0" bIns="0" rtlCol="0" anchor="ctr"/>
           <a:lstStyle/>
           <a:p>
-            <a:pPr algn="ctr" indent="0" marL="0">
+            <a:pPr algn="l" indent="0" marL="0">
               <a:buNone/>
             </a:pPr>
             <a:r>
@@ -29249,7 +29371,7 @@
           <a:bodyPr wrap="square" lIns="0" tIns="0" rIns="0" bIns="0" rtlCol="0" anchor="ctr"/>
           <a:lstStyle/>
           <a:p>
-            <a:pPr algn="ctr" indent="0" marL="0">
+            <a:pPr algn="l" indent="0" marL="0">
               <a:buNone/>
             </a:pPr>
             <a:r>
@@ -29275,12 +29397,12 @@
         </p:nvSpPr>
         <p:spPr>
           <a:xfrm>
-            <a:off x="563728" y="2377440"/>
-            <a:ext cx="3383280" cy="2286000"/>
+            <a:off x="548640" y="2514600"/>
+            <a:ext cx="3383280" cy="1600200"/>
           </a:xfrm>
           <a:prstGeom prst="roundRect">
             <a:avLst>
-              <a:gd name="adj" fmla="val 3600"/>
+              <a:gd name="adj" fmla="val 5143"/>
             </a:avLst>
           </a:prstGeom>
           <a:solidFill>
@@ -29309,26 +29431,26 @@
         </p:nvSpPr>
         <p:spPr>
           <a:xfrm>
-            <a:off x="856336" y="2606040"/>
-            <a:ext cx="2798064" cy="548640"/>
-          </a:xfrm>
-          <a:prstGeom prst="rect">
-            <a:avLst/>
-          </a:prstGeom>
-          <a:noFill/>
-          <a:ln/>
-        </p:spPr>
-        <p:txBody>
-          <a:bodyPr wrap="square" lIns="0" tIns="0" rIns="0" bIns="0" rtlCol="0" anchor="ctr"/>
-          <a:lstStyle/>
-          <a:p>
-            <a:pPr indent="0" marL="0">
-              <a:buNone/>
-            </a:pPr>
-            <a:r>
-              <a:rPr lang="en-US" sz="3000" b="1" dirty="0">
-                <a:solidFill>
-                  <a:srgbClr val="0488C1"/>
+            <a:off x="841248" y="2788920"/>
+            <a:ext cx="2798064" cy="256032"/>
+          </a:xfrm>
+          <a:prstGeom prst="rect">
+            <a:avLst/>
+          </a:prstGeom>
+          <a:noFill/>
+          <a:ln/>
+        </p:spPr>
+        <p:txBody>
+          <a:bodyPr wrap="square" lIns="0" tIns="0" rIns="0" bIns="0" rtlCol="0" anchor="ctr"/>
+          <a:lstStyle/>
+          <a:p>
+            <a:pPr indent="0" marL="0">
+              <a:buNone/>
+            </a:pPr>
+            <a:r>
+              <a:rPr lang="en-US" sz="1100" b="1" spc="200" kern="0" dirty="0">
+                <a:solidFill>
+                  <a:srgbClr val="9B9DA3"/>
                 </a:solidFill>
                 <a:latin typeface="Arial" pitchFamily="34" charset="0"/>
                 <a:ea typeface="Arial" pitchFamily="34" charset="-122"/>
@@ -29336,7 +29458,7 @@
               </a:rPr>
               <a:t>01</a:t>
             </a:r>
-            <a:endParaRPr lang="en-US" sz="3000" dirty="0"/>
+            <a:endParaRPr lang="en-US" sz="1100" dirty="0"/>
           </a:p>
         </p:txBody>
       </p:sp>
@@ -29348,8 +29470,8 @@
         </p:nvSpPr>
         <p:spPr>
           <a:xfrm>
-            <a:off x="856336" y="3246120"/>
-            <a:ext cx="2798064" cy="594360"/>
+            <a:off x="841248" y="3136392"/>
+            <a:ext cx="2798064" cy="685800"/>
           </a:xfrm>
           <a:prstGeom prst="rect">
             <a:avLst/>
@@ -29363,12 +29485,12 @@
           <a:p>
             <a:pPr indent="0" marL="0">
               <a:lnSpc>
-                <a:spcPts val="2000"/>
+                <a:spcPts val="2200"/>
               </a:lnSpc>
               <a:buNone/>
             </a:pPr>
             <a:r>
-              <a:rPr lang="en-US" sz="1650" b="1" dirty="0">
+              <a:rPr lang="en-US" sz="1800" b="1" dirty="0">
                 <a:solidFill>
                   <a:srgbClr val="414142"/>
                 </a:solidFill>
@@ -29378,66 +29500,24 @@
               </a:rPr>
               <a:t>Installez CR Express</a:t>
             </a:r>
-            <a:endParaRPr lang="en-US" sz="1650" dirty="0"/>
-          </a:p>
-        </p:txBody>
-      </p:sp>
-      <p:sp>
-        <p:nvSpPr>
-          <p:cNvPr id="7" name="Text 5"/>
-          <p:cNvSpPr/>
-          <p:nvPr/>
-        </p:nvSpPr>
-        <p:spPr>
-          <a:xfrm>
-            <a:off x="856336" y="3858768"/>
-            <a:ext cx="2798064" cy="731520"/>
-          </a:xfrm>
-          <a:prstGeom prst="rect">
-            <a:avLst/>
-          </a:prstGeom>
-          <a:noFill/>
-          <a:ln/>
-        </p:spPr>
-        <p:txBody>
-          <a:bodyPr wrap="square" lIns="0" tIns="0" rIns="0" bIns="0" rtlCol="0" anchor="ctr"/>
-          <a:lstStyle/>
-          <a:p>
-            <a:pPr indent="0" marL="0">
-              <a:lnSpc>
-                <a:spcPts val="1450"/>
-              </a:lnSpc>
-              <a:buNone/>
-            </a:pPr>
-            <a:r>
-              <a:rPr lang="en-US" sz="1100" dirty="0">
-                <a:solidFill>
-                  <a:srgbClr val="6B6D72"/>
-                </a:solidFill>
-                <a:latin typeface="Arial" pitchFamily="34" charset="0"/>
-                <a:ea typeface="Arial" pitchFamily="34" charset="-122"/>
-                <a:cs typeface="Arial" pitchFamily="34" charset="-120"/>
-              </a:rPr>
-              <a:t>Dictez votre compte-rendu, validez quatre cartes : tout est rangé dans Salesforce.</a:t>
-            </a:r>
-            <a:endParaRPr lang="en-US" sz="1100" dirty="0"/>
-          </a:p>
-        </p:txBody>
-      </p:sp>
-      <p:sp>
-        <p:nvSpPr>
-          <p:cNvPr id="8" name="Shape 6"/>
-          <p:cNvSpPr/>
-          <p:nvPr/>
-        </p:nvSpPr>
-        <p:spPr>
-          <a:xfrm>
-            <a:off x="4404208" y="2377440"/>
-            <a:ext cx="3383280" cy="2286000"/>
+            <a:endParaRPr lang="en-US" sz="1800" dirty="0"/>
+          </a:p>
+        </p:txBody>
+      </p:sp>
+      <p:sp>
+        <p:nvSpPr>
+          <p:cNvPr id="7" name="Shape 5"/>
+          <p:cNvSpPr/>
+          <p:nvPr/>
+        </p:nvSpPr>
+        <p:spPr>
+          <a:xfrm>
+            <a:off x="4389120" y="2514600"/>
+            <a:ext cx="3383280" cy="1600200"/>
           </a:xfrm>
           <a:prstGeom prst="roundRect">
             <a:avLst>
-              <a:gd name="adj" fmla="val 3600"/>
+              <a:gd name="adj" fmla="val 5143"/>
             </a:avLst>
           </a:prstGeom>
           <a:solidFill>
@@ -29460,53 +29540,53 @@
       </p:sp>
       <p:sp>
         <p:nvSpPr>
+          <p:cNvPr id="8" name="Text 6"/>
+          <p:cNvSpPr/>
+          <p:nvPr/>
+        </p:nvSpPr>
+        <p:spPr>
+          <a:xfrm>
+            <a:off x="4681728" y="2788920"/>
+            <a:ext cx="2798064" cy="256032"/>
+          </a:xfrm>
+          <a:prstGeom prst="rect">
+            <a:avLst/>
+          </a:prstGeom>
+          <a:noFill/>
+          <a:ln/>
+        </p:spPr>
+        <p:txBody>
+          <a:bodyPr wrap="square" lIns="0" tIns="0" rIns="0" bIns="0" rtlCol="0" anchor="ctr"/>
+          <a:lstStyle/>
+          <a:p>
+            <a:pPr indent="0" marL="0">
+              <a:buNone/>
+            </a:pPr>
+            <a:r>
+              <a:rPr lang="en-US" sz="1100" b="1" spc="200" kern="0" dirty="0">
+                <a:solidFill>
+                  <a:srgbClr val="9B9DA3"/>
+                </a:solidFill>
+                <a:latin typeface="Arial" pitchFamily="34" charset="0"/>
+                <a:ea typeface="Arial" pitchFamily="34" charset="-122"/>
+                <a:cs typeface="Arial" pitchFamily="34" charset="-120"/>
+              </a:rPr>
+              <a:t>02</a:t>
+            </a:r>
+            <a:endParaRPr lang="en-US" sz="1100" dirty="0"/>
+          </a:p>
+        </p:txBody>
+      </p:sp>
+      <p:sp>
+        <p:nvSpPr>
           <p:cNvPr id="9" name="Text 7"/>
           <p:cNvSpPr/>
           <p:nvPr/>
         </p:nvSpPr>
         <p:spPr>
           <a:xfrm>
-            <a:off x="4696816" y="2606040"/>
-            <a:ext cx="2798064" cy="548640"/>
-          </a:xfrm>
-          <a:prstGeom prst="rect">
-            <a:avLst/>
-          </a:prstGeom>
-          <a:noFill/>
-          <a:ln/>
-        </p:spPr>
-        <p:txBody>
-          <a:bodyPr wrap="square" lIns="0" tIns="0" rIns="0" bIns="0" rtlCol="0" anchor="ctr"/>
-          <a:lstStyle/>
-          <a:p>
-            <a:pPr indent="0" marL="0">
-              <a:buNone/>
-            </a:pPr>
-            <a:r>
-              <a:rPr lang="en-US" sz="3000" b="1" dirty="0">
-                <a:solidFill>
-                  <a:srgbClr val="0488C1"/>
-                </a:solidFill>
-                <a:latin typeface="Arial" pitchFamily="34" charset="0"/>
-                <a:ea typeface="Arial" pitchFamily="34" charset="-122"/>
-                <a:cs typeface="Arial" pitchFamily="34" charset="-120"/>
-              </a:rPr>
-              <a:t>02</a:t>
-            </a:r>
-            <a:endParaRPr lang="en-US" sz="3000" dirty="0"/>
-          </a:p>
-        </p:txBody>
-      </p:sp>
-      <p:sp>
-        <p:nvSpPr>
-          <p:cNvPr id="10" name="Text 8"/>
-          <p:cNvSpPr/>
-          <p:nvPr/>
-        </p:nvSpPr>
-        <p:spPr>
-          <a:xfrm>
-            <a:off x="4696816" y="3246120"/>
-            <a:ext cx="2798064" cy="594360"/>
+            <a:off x="4681728" y="3136392"/>
+            <a:ext cx="2798064" cy="685800"/>
           </a:xfrm>
           <a:prstGeom prst="rect">
             <a:avLst/>
@@ -29520,12 +29600,12 @@
           <a:p>
             <a:pPr indent="0" marL="0">
               <a:lnSpc>
-                <a:spcPts val="2000"/>
+                <a:spcPts val="2200"/>
               </a:lnSpc>
               <a:buNone/>
             </a:pPr>
             <a:r>
-              <a:rPr lang="en-US" sz="1650" b="1" dirty="0">
+              <a:rPr lang="en-US" sz="1800" b="1" dirty="0">
                 <a:solidFill>
                   <a:srgbClr val="414142"/>
                 </a:solidFill>
@@ -29535,66 +29615,24 @@
               </a:rPr>
               <a:t>Demandez un Brief Express</a:t>
             </a:r>
-            <a:endParaRPr lang="en-US" sz="1650" dirty="0"/>
-          </a:p>
-        </p:txBody>
-      </p:sp>
-      <p:sp>
-        <p:nvSpPr>
-          <p:cNvPr id="11" name="Text 9"/>
-          <p:cNvSpPr/>
-          <p:nvPr/>
-        </p:nvSpPr>
-        <p:spPr>
-          <a:xfrm>
-            <a:off x="4696816" y="3858768"/>
-            <a:ext cx="2798064" cy="731520"/>
-          </a:xfrm>
-          <a:prstGeom prst="rect">
-            <a:avLst/>
-          </a:prstGeom>
-          <a:noFill/>
-          <a:ln/>
-        </p:spPr>
-        <p:txBody>
-          <a:bodyPr wrap="square" lIns="0" tIns="0" rIns="0" bIns="0" rtlCol="0" anchor="ctr"/>
-          <a:lstStyle/>
-          <a:p>
-            <a:pPr indent="0" marL="0">
-              <a:lnSpc>
-                <a:spcPts val="1450"/>
-              </a:lnSpc>
-              <a:buNone/>
-            </a:pPr>
-            <a:r>
-              <a:rPr lang="en-US" sz="1100" dirty="0">
-                <a:solidFill>
-                  <a:srgbClr val="6B6D72"/>
-                </a:solidFill>
-                <a:latin typeface="Arial" pitchFamily="34" charset="0"/>
-                <a:ea typeface="Arial" pitchFamily="34" charset="-122"/>
-                <a:cs typeface="Arial" pitchFamily="34" charset="-120"/>
-              </a:rPr>
-              <a:t>Une phrase dans Teams, trente secondes : la fiche complète avant votre rendez-vous.</a:t>
-            </a:r>
-            <a:endParaRPr lang="en-US" sz="1100" dirty="0"/>
-          </a:p>
-        </p:txBody>
-      </p:sp>
-      <p:sp>
-        <p:nvSpPr>
-          <p:cNvPr id="12" name="Shape 10"/>
-          <p:cNvSpPr/>
-          <p:nvPr/>
-        </p:nvSpPr>
-        <p:spPr>
-          <a:xfrm>
-            <a:off x="8244688" y="2377440"/>
-            <a:ext cx="3383280" cy="2286000"/>
+            <a:endParaRPr lang="en-US" sz="1800" dirty="0"/>
+          </a:p>
+        </p:txBody>
+      </p:sp>
+      <p:sp>
+        <p:nvSpPr>
+          <p:cNvPr id="10" name="Shape 8"/>
+          <p:cNvSpPr/>
+          <p:nvPr/>
+        </p:nvSpPr>
+        <p:spPr>
+          <a:xfrm>
+            <a:off x="8229600" y="2514600"/>
+            <a:ext cx="3383280" cy="1600200"/>
           </a:xfrm>
           <a:prstGeom prst="roundRect">
             <a:avLst>
-              <a:gd name="adj" fmla="val 3600"/>
+              <a:gd name="adj" fmla="val 5143"/>
             </a:avLst>
           </a:prstGeom>
           <a:solidFill>
@@ -29617,72 +29655,111 @@
       </p:sp>
       <p:sp>
         <p:nvSpPr>
+          <p:cNvPr id="11" name="Text 9"/>
+          <p:cNvSpPr/>
+          <p:nvPr/>
+        </p:nvSpPr>
+        <p:spPr>
+          <a:xfrm>
+            <a:off x="8522208" y="2788920"/>
+            <a:ext cx="2798064" cy="256032"/>
+          </a:xfrm>
+          <a:prstGeom prst="rect">
+            <a:avLst/>
+          </a:prstGeom>
+          <a:noFill/>
+          <a:ln/>
+        </p:spPr>
+        <p:txBody>
+          <a:bodyPr wrap="square" lIns="0" tIns="0" rIns="0" bIns="0" rtlCol="0" anchor="ctr"/>
+          <a:lstStyle/>
+          <a:p>
+            <a:pPr indent="0" marL="0">
+              <a:buNone/>
+            </a:pPr>
+            <a:r>
+              <a:rPr lang="en-US" sz="1100" b="1" spc="200" kern="0" dirty="0">
+                <a:solidFill>
+                  <a:srgbClr val="9B9DA3"/>
+                </a:solidFill>
+                <a:latin typeface="Arial" pitchFamily="34" charset="0"/>
+                <a:ea typeface="Arial" pitchFamily="34" charset="-122"/>
+                <a:cs typeface="Arial" pitchFamily="34" charset="-120"/>
+              </a:rPr>
+              <a:t>03</a:t>
+            </a:r>
+            <a:endParaRPr lang="en-US" sz="1100" dirty="0"/>
+          </a:p>
+        </p:txBody>
+      </p:sp>
+      <p:sp>
+        <p:nvSpPr>
+          <p:cNvPr id="12" name="Text 10"/>
+          <p:cNvSpPr/>
+          <p:nvPr/>
+        </p:nvSpPr>
+        <p:spPr>
+          <a:xfrm>
+            <a:off x="8522208" y="3136392"/>
+            <a:ext cx="2798064" cy="685800"/>
+          </a:xfrm>
+          <a:prstGeom prst="rect">
+            <a:avLst/>
+          </a:prstGeom>
+          <a:noFill/>
+          <a:ln/>
+        </p:spPr>
+        <p:txBody>
+          <a:bodyPr wrap="square" lIns="0" tIns="0" rIns="0" bIns="0" rtlCol="0" anchor="ctr"/>
+          <a:lstStyle/>
+          <a:p>
+            <a:pPr indent="0" marL="0">
+              <a:lnSpc>
+                <a:spcPts val="2200"/>
+              </a:lnSpc>
+              <a:buNone/>
+            </a:pPr>
+            <a:r>
+              <a:rPr lang="en-US" sz="1800" b="1" dirty="0">
+                <a:solidFill>
+                  <a:srgbClr val="414142"/>
+                </a:solidFill>
+                <a:latin typeface="Arial" pitchFamily="34" charset="0"/>
+                <a:ea typeface="Arial" pitchFamily="34" charset="-122"/>
+                <a:cs typeface="Arial" pitchFamily="34" charset="-120"/>
+              </a:rPr>
+              <a:t>Parlez à Virtual Brain</a:t>
+            </a:r>
+            <a:endParaRPr lang="en-US" sz="1800" dirty="0"/>
+          </a:p>
+        </p:txBody>
+      </p:sp>
+      <p:sp>
+        <p:nvSpPr>
           <p:cNvPr id="13" name="Text 11"/>
           <p:cNvSpPr/>
           <p:nvPr/>
         </p:nvSpPr>
         <p:spPr>
           <a:xfrm>
-            <a:off x="8537296" y="2606040"/>
-            <a:ext cx="2798064" cy="548640"/>
-          </a:xfrm>
-          <a:prstGeom prst="rect">
-            <a:avLst/>
-          </a:prstGeom>
-          <a:noFill/>
-          <a:ln/>
-        </p:spPr>
-        <p:txBody>
-          <a:bodyPr wrap="square" lIns="0" tIns="0" rIns="0" bIns="0" rtlCol="0" anchor="ctr"/>
-          <a:lstStyle/>
-          <a:p>
-            <a:pPr indent="0" marL="0">
-              <a:buNone/>
-            </a:pPr>
-            <a:r>
-              <a:rPr lang="en-US" sz="3000" b="1" dirty="0">
-                <a:solidFill>
-                  <a:srgbClr val="0488C1"/>
-                </a:solidFill>
-                <a:latin typeface="Arial" pitchFamily="34" charset="0"/>
-                <a:ea typeface="Arial" pitchFamily="34" charset="-122"/>
-                <a:cs typeface="Arial" pitchFamily="34" charset="-120"/>
-              </a:rPr>
-              <a:t>03</a:t>
-            </a:r>
-            <a:endParaRPr lang="en-US" sz="3000" dirty="0"/>
-          </a:p>
-        </p:txBody>
-      </p:sp>
-      <p:sp>
-        <p:nvSpPr>
-          <p:cNvPr id="14" name="Text 12"/>
-          <p:cNvSpPr/>
-          <p:nvPr/>
-        </p:nvSpPr>
-        <p:spPr>
-          <a:xfrm>
-            <a:off x="8537296" y="3246120"/>
-            <a:ext cx="2798064" cy="594360"/>
-          </a:xfrm>
-          <a:prstGeom prst="rect">
-            <a:avLst/>
-          </a:prstGeom>
-          <a:noFill/>
-          <a:ln/>
-        </p:spPr>
-        <p:txBody>
-          <a:bodyPr wrap="square" lIns="0" tIns="0" rIns="0" bIns="0" rtlCol="0" anchor="ctr"/>
-          <a:lstStyle/>
-          <a:p>
-            <a:pPr indent="0" marL="0">
-              <a:lnSpc>
-                <a:spcPts val="2000"/>
-              </a:lnSpc>
-              <a:buNone/>
-            </a:pPr>
-            <a:r>
-              <a:rPr lang="en-US" sz="1650" b="1" dirty="0">
+            <a:off x="548640" y="4892040"/>
+            <a:ext cx="11064240" cy="548640"/>
+          </a:xfrm>
+          <a:prstGeom prst="rect">
+            <a:avLst/>
+          </a:prstGeom>
+          <a:noFill/>
+          <a:ln/>
+        </p:spPr>
+        <p:txBody>
+          <a:bodyPr wrap="square" lIns="0" tIns="0" rIns="0" bIns="0" rtlCol="0" anchor="ctr"/>
+          <a:lstStyle/>
+          <a:p>
+            <a:pPr indent="0" marL="0">
+              <a:buNone/>
+            </a:pPr>
+            <a:r>
+              <a:rPr lang="en-US" sz="2100" b="1" dirty="0">
                 <a:solidFill>
                   <a:srgbClr val="414142"/>
                 </a:solidFill>
@@ -29690,90 +29767,9 @@
                 <a:ea typeface="Arial" pitchFamily="34" charset="-122"/>
                 <a:cs typeface="Arial" pitchFamily="34" charset="-120"/>
               </a:rPr>
-              <a:t>Parlez à Virtual Brain</a:t>
-            </a:r>
-            <a:endParaRPr lang="en-US" sz="1650" dirty="0"/>
-          </a:p>
-        </p:txBody>
-      </p:sp>
-      <p:sp>
-        <p:nvSpPr>
-          <p:cNvPr id="15" name="Text 13"/>
-          <p:cNvSpPr/>
-          <p:nvPr/>
-        </p:nvSpPr>
-        <p:spPr>
-          <a:xfrm>
-            <a:off x="8537296" y="3858768"/>
-            <a:ext cx="2798064" cy="731520"/>
-          </a:xfrm>
-          <a:prstGeom prst="rect">
-            <a:avLst/>
-          </a:prstGeom>
-          <a:noFill/>
-          <a:ln/>
-        </p:spPr>
-        <p:txBody>
-          <a:bodyPr wrap="square" lIns="0" tIns="0" rIns="0" bIns="0" rtlCol="0" anchor="ctr"/>
-          <a:lstStyle/>
-          <a:p>
-            <a:pPr indent="0" marL="0">
-              <a:lnSpc>
-                <a:spcPts val="1450"/>
-              </a:lnSpc>
-              <a:buNone/>
-            </a:pPr>
-            <a:r>
-              <a:rPr lang="en-US" sz="1100" dirty="0">
-                <a:solidFill>
-                  <a:srgbClr val="6B6D72"/>
-                </a:solidFill>
-                <a:latin typeface="Arial" pitchFamily="34" charset="0"/>
-                <a:ea typeface="Arial" pitchFamily="34" charset="-122"/>
-                <a:cs typeface="Arial" pitchFamily="34" charset="-120"/>
-              </a:rPr>
-              <a:t>Une question, toutes nos participations interrogées d’un coup.</a:t>
-            </a:r>
-            <a:endParaRPr lang="en-US" sz="1100" dirty="0"/>
-          </a:p>
-        </p:txBody>
-      </p:sp>
-      <p:sp>
-        <p:nvSpPr>
-          <p:cNvPr id="16" name="Text 14"/>
-          <p:cNvSpPr/>
-          <p:nvPr/>
-        </p:nvSpPr>
-        <p:spPr>
-          <a:xfrm>
-            <a:off x="548640" y="5166360"/>
-            <a:ext cx="11064240" cy="548640"/>
-          </a:xfrm>
-          <a:prstGeom prst="rect">
-            <a:avLst/>
-          </a:prstGeom>
-          <a:noFill/>
-          <a:ln/>
-        </p:spPr>
-        <p:txBody>
-          <a:bodyPr wrap="square" lIns="0" tIns="0" rIns="0" bIns="0" rtlCol="0" anchor="ctr"/>
-          <a:lstStyle/>
-          <a:p>
-            <a:pPr algn="ctr" indent="0" marL="0">
-              <a:buNone/>
-            </a:pPr>
-            <a:r>
-              <a:rPr lang="en-US" sz="2100" b="1" dirty="0">
-                <a:solidFill>
-                  <a:srgbClr val="414142"/>
-                </a:solidFill>
-                <a:latin typeface="Arial" pitchFamily="34" charset="0"/>
-                <a:ea typeface="Arial" pitchFamily="34" charset="-122"/>
-                <a:cs typeface="Arial" pitchFamily="34" charset="-120"/>
-              </a:rPr>
               <a:t>Plus on les utilise, </a:t>
             </a:r>
-            <a:pPr algn="ctr" indent="0" marL="0">
+            <a:pPr indent="0" marL="0">
               <a:buNone/>
             </a:pPr>
             <a:r>
@@ -29949,7 +29945,7 @@
           <a:bodyPr wrap="square" lIns="0" tIns="0" rIns="0" bIns="0" rtlCol="0" anchor="ctr"/>
           <a:lstStyle/>
           <a:p>
-            <a:pPr algn="ctr" indent="0" marL="0">
+            <a:pPr algn="l" indent="0" marL="0">
               <a:buNone/>
             </a:pPr>
             <a:r>
@@ -29988,7 +29984,7 @@
           <a:bodyPr wrap="square" lIns="0" tIns="0" rIns="0" bIns="0" rtlCol="0" anchor="ctr"/>
           <a:lstStyle/>
           <a:p>
-            <a:pPr algn="ctr" indent="0" marL="0">
+            <a:pPr indent="0" marL="0">
               <a:buNone/>
             </a:pPr>
             <a:r>
@@ -30027,7 +30023,7 @@
           <a:bodyPr wrap="square" lIns="0" tIns="0" rIns="0" bIns="0" rtlCol="0" anchor="ctr"/>
           <a:lstStyle/>
           <a:p>
-            <a:pPr algn="ctr" indent="0" marL="0">
+            <a:pPr indent="0" marL="0">
               <a:buNone/>
             </a:pPr>
             <a:r>
@@ -30039,7 +30035,7 @@
                 <a:ea typeface="Arial" pitchFamily="34" charset="-122"/>
                 <a:cs typeface="Arial" pitchFamily="34" charset="-120"/>
               </a:rPr>
-              <a:t>Une idée, un cas d’usage ? Venez nous voir.</a:t>
+              <a:t>Une idée, un cas d'usage ? Venez nous voir.</a:t>
             </a:r>
             <a:endParaRPr lang="en-US" sz="1400" dirty="0"/>
           </a:p>
@@ -30061,8 +30057,8 @@
         </p:blipFill>
         <p:spPr>
           <a:xfrm>
-            <a:off x="5227168" y="5577840"/>
-            <a:ext cx="1737360" cy="684355"/>
+            <a:off x="548640" y="5897880"/>
+            <a:ext cx="1463040" cy="576299"/>
           </a:xfrm>
           <a:prstGeom prst="rect">
             <a:avLst/>
@@ -30504,7 +30500,7 @@
     </a:clrScheme>
     <a:fontScheme name="Office">
       <a:majorFont>
-        <a:latin typeface="Calibri Light" panose="020F0302020204030204"/>
+        <a:latin typeface="Arial" panose="020F0302020204030204"/>
         <a:ea typeface=""/>
         <a:cs typeface=""/>
         <a:font script="Jpan" typeface="游ゴシック Light"/>
@@ -30556,7 +30552,7 @@
         <a:font script="Tfng" typeface="Ebrima"/>
       </a:majorFont>
       <a:minorFont>
-        <a:latin typeface="Calibri" panose="020F0502020204030204"/>
+        <a:latin typeface="Arial" panose="020F0502020204030204"/>
         <a:ea typeface=""/>
         <a:cs typeface=""/>
         <a:font script="Jpan" typeface="游ゴシック"/>

--- a/LIA-concretement-CC-anime.pptx
+++ b/LIA-concretement-CC-anime.pptx
@@ -5620,7 +5620,7 @@
         <p:spPr>
           <a:xfrm>
             <a:off x="548640" y="685800"/>
-            <a:ext cx="11064240" cy="274320"/>
+            <a:ext cx="11064240" cy="256032"/>
           </a:xfrm>
           <a:prstGeom prst="rect">
             <a:avLst/>
@@ -5636,7 +5636,7 @@
               <a:buNone/>
             </a:pPr>
             <a:r>
-              <a:rPr lang="en-US" sz="1100" b="1" spc="300" kern="0" dirty="0">
+              <a:rPr lang="en-US" sz="900" b="1" spc="250" kern="0" dirty="0">
                 <a:solidFill>
                   <a:srgbClr val="0488C1"/>
                 </a:solidFill>
@@ -5646,7 +5646,7 @@
               </a:rPr>
               <a:t>LE DIAGNOSTIC</a:t>
             </a:r>
-            <a:endParaRPr lang="en-US" sz="1100" dirty="0"/>
+            <a:endParaRPr lang="en-US" sz="900" dirty="0"/>
           </a:p>
         </p:txBody>
       </p:sp>
@@ -5697,12 +5697,12 @@
         </p:nvSpPr>
         <p:spPr>
           <a:xfrm>
-            <a:off x="548640" y="2103120"/>
-            <a:ext cx="5212080" cy="969264"/>
+            <a:off x="1600200" y="2084832"/>
+            <a:ext cx="6309360" cy="932688"/>
           </a:xfrm>
           <a:prstGeom prst="roundRect">
             <a:avLst>
-              <a:gd name="adj" fmla="val 13208"/>
+              <a:gd name="adj" fmla="val 16667"/>
             </a:avLst>
           </a:prstGeom>
           <a:solidFill>
@@ -5731,8 +5731,8 @@
         </p:nvSpPr>
         <p:spPr>
           <a:xfrm>
-            <a:off x="804672" y="2212848"/>
-            <a:ext cx="4700016" cy="530352"/>
+            <a:off x="1892808" y="2176272"/>
+            <a:ext cx="5724144" cy="512064"/>
           </a:xfrm>
           <a:prstGeom prst="rect">
             <a:avLst/>
@@ -5746,12 +5746,12 @@
           <a:p>
             <a:pPr indent="0" marL="0">
               <a:lnSpc>
-                <a:spcPts val="1550"/>
+                <a:spcPts val="1800"/>
               </a:lnSpc>
               <a:buNone/>
             </a:pPr>
             <a:r>
-              <a:rPr lang="en-US" sz="1250" i="1" dirty="0">
+              <a:rPr lang="en-US" sz="1400" i="1" dirty="0">
                 <a:solidFill>
                   <a:srgbClr val="414142"/>
                 </a:solidFill>
@@ -5761,7 +5761,7 @@
               </a:rPr>
               <a:t>« On n'a pas tous le réflexe Salesforce... ni toujours le temps. »</a:t>
             </a:r>
-            <a:endParaRPr lang="en-US" sz="1250" dirty="0"/>
+            <a:endParaRPr lang="en-US" sz="1400" dirty="0"/>
           </a:p>
         </p:txBody>
       </p:sp>
@@ -5773,8 +5773,8 @@
         </p:nvSpPr>
         <p:spPr>
           <a:xfrm>
-            <a:off x="804672" y="2724912"/>
-            <a:ext cx="4700016" cy="274320"/>
+            <a:off x="1892808" y="2688336"/>
+            <a:ext cx="5724144" cy="256032"/>
           </a:xfrm>
           <a:prstGeom prst="rect">
             <a:avLst/>
@@ -5790,7 +5790,7 @@
               <a:buNone/>
             </a:pPr>
             <a:r>
-              <a:rPr lang="en-US" sz="700" b="1" dirty="0">
+              <a:rPr lang="en-US" sz="650" b="1" dirty="0">
                 <a:solidFill>
                   <a:srgbClr val="0488C1"/>
                 </a:solidFill>
@@ -5804,7 +5804,7 @@
               <a:buNone/>
             </a:pPr>
             <a:r>
-              <a:rPr lang="en-US" sz="950" b="1" dirty="0">
+              <a:rPr lang="en-US" sz="850" b="1" dirty="0">
                 <a:solidFill>
                   <a:srgbClr val="9B9DA3"/>
                 </a:solidFill>
@@ -5814,7 +5814,7 @@
               </a:rPr>
               <a:t>Tout le monde</a:t>
             </a:r>
-            <a:endParaRPr lang="en-US" sz="950" dirty="0"/>
+            <a:endParaRPr lang="en-US" sz="850" dirty="0"/>
           </a:p>
         </p:txBody>
       </p:sp>
@@ -5826,12 +5826,12 @@
         </p:nvSpPr>
         <p:spPr>
           <a:xfrm>
-            <a:off x="1371600" y="3273552"/>
-            <a:ext cx="5212080" cy="969264"/>
+            <a:off x="4739335" y="3163824"/>
+            <a:ext cx="5852160" cy="932688"/>
           </a:xfrm>
           <a:prstGeom prst="roundRect">
             <a:avLst>
-              <a:gd name="adj" fmla="val 13208"/>
+              <a:gd name="adj" fmla="val 16667"/>
             </a:avLst>
           </a:prstGeom>
           <a:solidFill>
@@ -5860,8 +5860,8 @@
         </p:nvSpPr>
         <p:spPr>
           <a:xfrm>
-            <a:off x="1627632" y="3383280"/>
-            <a:ext cx="4700016" cy="530352"/>
+            <a:off x="5031943" y="3255264"/>
+            <a:ext cx="5266944" cy="512064"/>
           </a:xfrm>
           <a:prstGeom prst="rect">
             <a:avLst/>
@@ -5875,12 +5875,12 @@
           <a:p>
             <a:pPr indent="0" marL="0">
               <a:lnSpc>
-                <a:spcPts val="1550"/>
+                <a:spcPts val="1800"/>
               </a:lnSpc>
               <a:buNone/>
             </a:pPr>
             <a:r>
-              <a:rPr lang="en-US" sz="1250" i="1" dirty="0">
+              <a:rPr lang="en-US" sz="1400" i="1" dirty="0">
                 <a:solidFill>
                   <a:srgbClr val="414142"/>
                 </a:solidFill>
@@ -5890,7 +5890,7 @@
               </a:rPr>
               <a:t>« Ce qui se dit en RDV reste chez ceux qui y étaient. »</a:t>
             </a:r>
-            <a:endParaRPr lang="en-US" sz="1250" dirty="0"/>
+            <a:endParaRPr lang="en-US" sz="1400" dirty="0"/>
           </a:p>
         </p:txBody>
       </p:sp>
@@ -5902,8 +5902,8 @@
         </p:nvSpPr>
         <p:spPr>
           <a:xfrm>
-            <a:off x="1627632" y="3895344"/>
-            <a:ext cx="4700016" cy="274320"/>
+            <a:off x="5031943" y="3767328"/>
+            <a:ext cx="5266944" cy="256032"/>
           </a:xfrm>
           <a:prstGeom prst="rect">
             <a:avLst/>
@@ -5919,7 +5919,7 @@
               <a:buNone/>
             </a:pPr>
             <a:r>
-              <a:rPr lang="en-US" sz="700" b="1" dirty="0">
+              <a:rPr lang="en-US" sz="650" b="1" dirty="0">
                 <a:solidFill>
                   <a:srgbClr val="0488C1"/>
                 </a:solidFill>
@@ -5933,7 +5933,7 @@
               <a:buNone/>
             </a:pPr>
             <a:r>
-              <a:rPr lang="en-US" sz="950" b="1" dirty="0">
+              <a:rPr lang="en-US" sz="850" b="1" dirty="0">
                 <a:solidFill>
                   <a:srgbClr val="9B9DA3"/>
                 </a:solidFill>
@@ -5943,7 +5943,7 @@
               </a:rPr>
               <a:t>IR et buy-out</a:t>
             </a:r>
-            <a:endParaRPr lang="en-US" sz="950" dirty="0"/>
+            <a:endParaRPr lang="en-US" sz="850" dirty="0"/>
           </a:p>
         </p:txBody>
       </p:sp>
@@ -5955,12 +5955,12 @@
         </p:nvSpPr>
         <p:spPr>
           <a:xfrm>
-            <a:off x="548640" y="4443984"/>
-            <a:ext cx="5212080" cy="969264"/>
+            <a:off x="1600200" y="4242816"/>
+            <a:ext cx="6035040" cy="932688"/>
           </a:xfrm>
           <a:prstGeom prst="roundRect">
             <a:avLst>
-              <a:gd name="adj" fmla="val 13208"/>
+              <a:gd name="adj" fmla="val 16667"/>
             </a:avLst>
           </a:prstGeom>
           <a:solidFill>
@@ -5989,8 +5989,8 @@
         </p:nvSpPr>
         <p:spPr>
           <a:xfrm>
-            <a:off x="804672" y="4553712"/>
-            <a:ext cx="4700016" cy="530352"/>
+            <a:off x="1892808" y="4334256"/>
+            <a:ext cx="5449824" cy="512064"/>
           </a:xfrm>
           <a:prstGeom prst="rect">
             <a:avLst/>
@@ -6004,12 +6004,12 @@
           <a:p>
             <a:pPr indent="0" marL="0">
               <a:lnSpc>
-                <a:spcPts val="1550"/>
+                <a:spcPts val="1800"/>
               </a:lnSpc>
               <a:buNone/>
             </a:pPr>
             <a:r>
-              <a:rPr lang="en-US" sz="1250" i="1" dirty="0">
+              <a:rPr lang="en-US" sz="1400" i="1" dirty="0">
                 <a:solidFill>
                   <a:srgbClr val="414142"/>
                 </a:solidFill>
@@ -6019,7 +6019,7 @@
               </a:rPr>
               <a:t>« Aucun moyen d'interroger nos participations d'un coup. »</a:t>
             </a:r>
-            <a:endParaRPr lang="en-US" sz="1250" dirty="0"/>
+            <a:endParaRPr lang="en-US" sz="1400" dirty="0"/>
           </a:p>
         </p:txBody>
       </p:sp>
@@ -6031,8 +6031,8 @@
         </p:nvSpPr>
         <p:spPr>
           <a:xfrm>
-            <a:off x="804672" y="5065776"/>
-            <a:ext cx="4700016" cy="274320"/>
+            <a:off x="1892808" y="4846320"/>
+            <a:ext cx="5449824" cy="256032"/>
           </a:xfrm>
           <a:prstGeom prst="rect">
             <a:avLst/>
@@ -6048,7 +6048,7 @@
               <a:buNone/>
             </a:pPr>
             <a:r>
-              <a:rPr lang="en-US" sz="700" b="1" dirty="0">
+              <a:rPr lang="en-US" sz="650" b="1" dirty="0">
                 <a:solidFill>
                   <a:srgbClr val="0488C1"/>
                 </a:solidFill>
@@ -6062,7 +6062,7 @@
               <a:buNone/>
             </a:pPr>
             <a:r>
-              <a:rPr lang="en-US" sz="950" b="1" dirty="0">
+              <a:rPr lang="en-US" sz="850" b="1" dirty="0">
                 <a:solidFill>
                   <a:srgbClr val="9B9DA3"/>
                 </a:solidFill>
@@ -6072,7 +6072,7 @@
               </a:rPr>
               <a:t>Les équipes</a:t>
             </a:r>
-            <a:endParaRPr lang="en-US" sz="950" dirty="0"/>
+            <a:endParaRPr lang="en-US" sz="850" dirty="0"/>
           </a:p>
         </p:txBody>
       </p:sp>
@@ -6084,12 +6084,12 @@
         </p:nvSpPr>
         <p:spPr>
           <a:xfrm>
-            <a:off x="1371600" y="5614416"/>
-            <a:ext cx="5212080" cy="969264"/>
+            <a:off x="5562295" y="5321808"/>
+            <a:ext cx="5029200" cy="932688"/>
           </a:xfrm>
           <a:prstGeom prst="roundRect">
             <a:avLst>
-              <a:gd name="adj" fmla="val 13208"/>
+              <a:gd name="adj" fmla="val 16667"/>
             </a:avLst>
           </a:prstGeom>
           <a:solidFill>
@@ -6118,8 +6118,8 @@
         </p:nvSpPr>
         <p:spPr>
           <a:xfrm>
-            <a:off x="1627632" y="5724144"/>
-            <a:ext cx="4700016" cy="530352"/>
+            <a:off x="5854903" y="5413248"/>
+            <a:ext cx="4443984" cy="512064"/>
           </a:xfrm>
           <a:prstGeom prst="rect">
             <a:avLst/>
@@ -6133,12 +6133,12 @@
           <a:p>
             <a:pPr indent="0" marL="0">
               <a:lnSpc>
-                <a:spcPts val="1550"/>
+                <a:spcPts val="1800"/>
               </a:lnSpc>
               <a:buNone/>
             </a:pPr>
             <a:r>
-              <a:rPr lang="en-US" sz="1250" i="1" dirty="0">
+              <a:rPr lang="en-US" sz="1400" i="1" dirty="0">
                 <a:solidFill>
                   <a:srgbClr val="414142"/>
                 </a:solidFill>
@@ -6148,7 +6148,7 @@
               </a:rPr>
               <a:t>« On ne sait pas ce qui bouge chez nos LP. »</a:t>
             </a:r>
-            <a:endParaRPr lang="en-US" sz="1250" dirty="0"/>
+            <a:endParaRPr lang="en-US" sz="1400" dirty="0"/>
           </a:p>
         </p:txBody>
       </p:sp>
@@ -6160,8 +6160,8 @@
         </p:nvSpPr>
         <p:spPr>
           <a:xfrm>
-            <a:off x="1627632" y="6236208"/>
-            <a:ext cx="4700016" cy="274320"/>
+            <a:off x="5854903" y="5925312"/>
+            <a:ext cx="4443984" cy="256032"/>
           </a:xfrm>
           <a:prstGeom prst="rect">
             <a:avLst/>
@@ -6177,7 +6177,7 @@
               <a:buNone/>
             </a:pPr>
             <a:r>
-              <a:rPr lang="en-US" sz="700" b="1" dirty="0">
+              <a:rPr lang="en-US" sz="650" b="1" dirty="0">
                 <a:solidFill>
                   <a:srgbClr val="0488C1"/>
                 </a:solidFill>
@@ -6191,7 +6191,7 @@
               <a:buNone/>
             </a:pPr>
             <a:r>
-              <a:rPr lang="en-US" sz="950" b="1" dirty="0">
+              <a:rPr lang="en-US" sz="850" b="1" dirty="0">
                 <a:solidFill>
                   <a:srgbClr val="9B9DA3"/>
                 </a:solidFill>
@@ -6201,7 +6201,7 @@
               </a:rPr>
               <a:t>Chris</a:t>
             </a:r>
-            <a:endParaRPr lang="en-US" sz="950" dirty="0"/>
+            <a:endParaRPr lang="en-US" sz="850" dirty="0"/>
           </a:p>
         </p:txBody>
       </p:sp>
@@ -6257,602 +6257,8 @@
         </p:nvSpPr>
         <p:spPr>
           <a:xfrm>
-            <a:off x="548640" y="685800"/>
-            <a:ext cx="11064240" cy="274320"/>
-          </a:xfrm>
-          <a:prstGeom prst="rect">
-            <a:avLst/>
-          </a:prstGeom>
-          <a:noFill/>
-          <a:ln/>
-        </p:spPr>
-        <p:txBody>
-          <a:bodyPr wrap="square" lIns="0" tIns="0" rIns="0" bIns="0" rtlCol="0" anchor="ctr"/>
-          <a:lstStyle/>
-          <a:p>
-            <a:pPr algn="l" indent="0" marL="0">
-              <a:buNone/>
-            </a:pPr>
-            <a:r>
-              <a:rPr lang="en-US" sz="1100" b="1" spc="300" kern="0" dirty="0">
-                <a:solidFill>
-                  <a:srgbClr val="0488C1"/>
-                </a:solidFill>
-                <a:latin typeface="Arial" pitchFamily="34" charset="0"/>
-                <a:ea typeface="Arial" pitchFamily="34" charset="-122"/>
-                <a:cs typeface="Arial" pitchFamily="34" charset="-120"/>
-              </a:rPr>
-              <a:t>LE DIAGNOSTIC</a:t>
-            </a:r>
-            <a:endParaRPr lang="en-US" sz="1100" dirty="0"/>
-          </a:p>
-        </p:txBody>
-      </p:sp>
-      <p:sp>
-        <p:nvSpPr>
-          <p:cNvPr id="3" name="Text 1"/>
-          <p:cNvSpPr/>
-          <p:nvPr/>
-        </p:nvSpPr>
-        <p:spPr>
-          <a:xfrm>
-            <a:off x="548640" y="1051560"/>
-            <a:ext cx="11064240" cy="685800"/>
-          </a:xfrm>
-          <a:prstGeom prst="rect">
-            <a:avLst/>
-          </a:prstGeom>
-          <a:noFill/>
-          <a:ln/>
-        </p:spPr>
-        <p:txBody>
-          <a:bodyPr wrap="square" lIns="0" tIns="0" rIns="0" bIns="0" rtlCol="0" anchor="ctr"/>
-          <a:lstStyle/>
-          <a:p>
-            <a:pPr algn="l" indent="0" marL="0">
-              <a:buNone/>
-            </a:pPr>
-            <a:r>
-              <a:rPr lang="en-US" sz="3000" b="1" dirty="0">
-                <a:solidFill>
-                  <a:srgbClr val="414142"/>
-                </a:solidFill>
-                <a:latin typeface="Arial" pitchFamily="34" charset="0"/>
-                <a:ea typeface="Arial" pitchFamily="34" charset="-122"/>
-                <a:cs typeface="Arial" pitchFamily="34" charset="-120"/>
-              </a:rPr>
-              <a:t>Ce qu'on entend tous les jours.</a:t>
-            </a:r>
-            <a:endParaRPr lang="en-US" sz="3000" dirty="0"/>
-          </a:p>
-        </p:txBody>
-      </p:sp>
-      <p:sp>
-        <p:nvSpPr>
-          <p:cNvPr id="4" name="Shape 2"/>
-          <p:cNvSpPr/>
-          <p:nvPr/>
-        </p:nvSpPr>
-        <p:spPr>
-          <a:xfrm>
             <a:off x="548640" y="2103120"/>
-            <a:ext cx="5212080" cy="969264"/>
-          </a:xfrm>
-          <a:prstGeom prst="roundRect">
-            <a:avLst>
-              <a:gd name="adj" fmla="val 13208"/>
-            </a:avLst>
-          </a:prstGeom>
-          <a:solidFill>
-            <a:srgbClr val="FFFFFF"/>
-          </a:solidFill>
-          <a:ln w="9525">
-            <a:solidFill>
-              <a:srgbClr val="D2D6DC"/>
-            </a:solidFill>
-            <a:prstDash val="solid"/>
-          </a:ln>
-          <a:effectLst>
-            <a:outerShdw sx="100000" sy="100000" kx="0" ky="0" algn="bl" rotWithShape="0" blurRad="88900" dist="25400" dir="5400000">
-              <a:srgbClr val="292A2E">
-                <a:alpha val="16000"/>
-              </a:srgbClr>
-            </a:outerShdw>
-          </a:effectLst>
-        </p:spPr>
-      </p:sp>
-      <p:sp>
-        <p:nvSpPr>
-          <p:cNvPr id="5" name="Text 3"/>
-          <p:cNvSpPr/>
-          <p:nvPr/>
-        </p:nvSpPr>
-        <p:spPr>
-          <a:xfrm>
-            <a:off x="804672" y="2212848"/>
-            <a:ext cx="4700016" cy="530352"/>
-          </a:xfrm>
-          <a:prstGeom prst="rect">
-            <a:avLst/>
-          </a:prstGeom>
-          <a:noFill/>
-          <a:ln/>
-        </p:spPr>
-        <p:txBody>
-          <a:bodyPr wrap="square" lIns="0" tIns="0" rIns="0" bIns="0" rtlCol="0" anchor="ctr"/>
-          <a:lstStyle/>
-          <a:p>
-            <a:pPr indent="0" marL="0">
-              <a:lnSpc>
-                <a:spcPts val="1550"/>
-              </a:lnSpc>
-              <a:buNone/>
-            </a:pPr>
-            <a:r>
-              <a:rPr lang="en-US" sz="1250" i="1" dirty="0">
-                <a:solidFill>
-                  <a:srgbClr val="414142"/>
-                </a:solidFill>
-                <a:latin typeface="Arial" pitchFamily="34" charset="0"/>
-                <a:ea typeface="Arial" pitchFamily="34" charset="-122"/>
-                <a:cs typeface="Arial" pitchFamily="34" charset="-120"/>
-              </a:rPr>
-              <a:t>« On n'a pas tous le réflexe Salesforce... ni toujours le temps. »</a:t>
-            </a:r>
-            <a:endParaRPr lang="en-US" sz="1250" dirty="0"/>
-          </a:p>
-        </p:txBody>
-      </p:sp>
-      <p:sp>
-        <p:nvSpPr>
-          <p:cNvPr id="6" name="Text 4"/>
-          <p:cNvSpPr/>
-          <p:nvPr/>
-        </p:nvSpPr>
-        <p:spPr>
-          <a:xfrm>
-            <a:off x="804672" y="2724912"/>
-            <a:ext cx="4700016" cy="274320"/>
-          </a:xfrm>
-          <a:prstGeom prst="rect">
-            <a:avLst/>
-          </a:prstGeom>
-          <a:noFill/>
-          <a:ln/>
-        </p:spPr>
-        <p:txBody>
-          <a:bodyPr wrap="square" lIns="0" tIns="0" rIns="0" bIns="0" rtlCol="0" anchor="ctr"/>
-          <a:lstStyle/>
-          <a:p>
-            <a:pPr algn="l" indent="0" marL="0">
-              <a:buNone/>
-            </a:pPr>
-            <a:r>
-              <a:rPr lang="en-US" sz="700" b="1" dirty="0">
-                <a:solidFill>
-                  <a:srgbClr val="0488C1"/>
-                </a:solidFill>
-                <a:latin typeface="Arial" pitchFamily="34" charset="0"/>
-                <a:ea typeface="Arial" pitchFamily="34" charset="-122"/>
-                <a:cs typeface="Arial" pitchFamily="34" charset="-120"/>
-              </a:rPr>
-              <a:t>● </a:t>
-            </a:r>
-            <a:pPr algn="l" indent="0" marL="0">
-              <a:buNone/>
-            </a:pPr>
-            <a:r>
-              <a:rPr lang="en-US" sz="950" b="1" dirty="0">
-                <a:solidFill>
-                  <a:srgbClr val="9B9DA3"/>
-                </a:solidFill>
-                <a:latin typeface="Arial" pitchFamily="34" charset="0"/>
-                <a:ea typeface="Arial" pitchFamily="34" charset="-122"/>
-                <a:cs typeface="Arial" pitchFamily="34" charset="-120"/>
-              </a:rPr>
-              <a:t>Tout le monde</a:t>
-            </a:r>
-            <a:endParaRPr lang="en-US" sz="950" dirty="0"/>
-          </a:p>
-        </p:txBody>
-      </p:sp>
-      <p:sp>
-        <p:nvSpPr>
-          <p:cNvPr id="7" name="Shape 5"/>
-          <p:cNvSpPr/>
-          <p:nvPr/>
-        </p:nvSpPr>
-        <p:spPr>
-          <a:xfrm>
-            <a:off x="1371600" y="3273552"/>
-            <a:ext cx="5212080" cy="969264"/>
-          </a:xfrm>
-          <a:prstGeom prst="roundRect">
-            <a:avLst>
-              <a:gd name="adj" fmla="val 13208"/>
-            </a:avLst>
-          </a:prstGeom>
-          <a:solidFill>
-            <a:srgbClr val="E9F5FB"/>
-          </a:solidFill>
-          <a:ln w="9525">
-            <a:solidFill>
-              <a:srgbClr val="9CCFE7"/>
-            </a:solidFill>
-            <a:prstDash val="solid"/>
-          </a:ln>
-          <a:effectLst>
-            <a:outerShdw sx="100000" sy="100000" kx="0" ky="0" algn="bl" rotWithShape="0" blurRad="88900" dist="25400" dir="5400000">
-              <a:srgbClr val="292A2E">
-                <a:alpha val="16000"/>
-              </a:srgbClr>
-            </a:outerShdw>
-          </a:effectLst>
-        </p:spPr>
-      </p:sp>
-      <p:sp>
-        <p:nvSpPr>
-          <p:cNvPr id="8" name="Text 6"/>
-          <p:cNvSpPr/>
-          <p:nvPr/>
-        </p:nvSpPr>
-        <p:spPr>
-          <a:xfrm>
-            <a:off x="1627632" y="3383280"/>
-            <a:ext cx="4700016" cy="530352"/>
-          </a:xfrm>
-          <a:prstGeom prst="rect">
-            <a:avLst/>
-          </a:prstGeom>
-          <a:noFill/>
-          <a:ln/>
-        </p:spPr>
-        <p:txBody>
-          <a:bodyPr wrap="square" lIns="0" tIns="0" rIns="0" bIns="0" rtlCol="0" anchor="ctr"/>
-          <a:lstStyle/>
-          <a:p>
-            <a:pPr indent="0" marL="0">
-              <a:lnSpc>
-                <a:spcPts val="1550"/>
-              </a:lnSpc>
-              <a:buNone/>
-            </a:pPr>
-            <a:r>
-              <a:rPr lang="en-US" sz="1250" i="1" dirty="0">
-                <a:solidFill>
-                  <a:srgbClr val="414142"/>
-                </a:solidFill>
-                <a:latin typeface="Arial" pitchFamily="34" charset="0"/>
-                <a:ea typeface="Arial" pitchFamily="34" charset="-122"/>
-                <a:cs typeface="Arial" pitchFamily="34" charset="-120"/>
-              </a:rPr>
-              <a:t>« Ce qui se dit en RDV reste chez ceux qui y étaient. »</a:t>
-            </a:r>
-            <a:endParaRPr lang="en-US" sz="1250" dirty="0"/>
-          </a:p>
-        </p:txBody>
-      </p:sp>
-      <p:sp>
-        <p:nvSpPr>
-          <p:cNvPr id="9" name="Text 7"/>
-          <p:cNvSpPr/>
-          <p:nvPr/>
-        </p:nvSpPr>
-        <p:spPr>
-          <a:xfrm>
-            <a:off x="1627632" y="3895344"/>
-            <a:ext cx="4700016" cy="274320"/>
-          </a:xfrm>
-          <a:prstGeom prst="rect">
-            <a:avLst/>
-          </a:prstGeom>
-          <a:noFill/>
-          <a:ln/>
-        </p:spPr>
-        <p:txBody>
-          <a:bodyPr wrap="square" lIns="0" tIns="0" rIns="0" bIns="0" rtlCol="0" anchor="ctr"/>
-          <a:lstStyle/>
-          <a:p>
-            <a:pPr algn="r" indent="0" marL="0">
-              <a:buNone/>
-            </a:pPr>
-            <a:r>
-              <a:rPr lang="en-US" sz="700" b="1" dirty="0">
-                <a:solidFill>
-                  <a:srgbClr val="0488C1"/>
-                </a:solidFill>
-                <a:latin typeface="Arial" pitchFamily="34" charset="0"/>
-                <a:ea typeface="Arial" pitchFamily="34" charset="-122"/>
-                <a:cs typeface="Arial" pitchFamily="34" charset="-120"/>
-              </a:rPr>
-              <a:t>● </a:t>
-            </a:r>
-            <a:pPr algn="r" indent="0" marL="0">
-              <a:buNone/>
-            </a:pPr>
-            <a:r>
-              <a:rPr lang="en-US" sz="950" b="1" dirty="0">
-                <a:solidFill>
-                  <a:srgbClr val="9B9DA3"/>
-                </a:solidFill>
-                <a:latin typeface="Arial" pitchFamily="34" charset="0"/>
-                <a:ea typeface="Arial" pitchFamily="34" charset="-122"/>
-                <a:cs typeface="Arial" pitchFamily="34" charset="-120"/>
-              </a:rPr>
-              <a:t>IR et buy-out</a:t>
-            </a:r>
-            <a:endParaRPr lang="en-US" sz="950" dirty="0"/>
-          </a:p>
-        </p:txBody>
-      </p:sp>
-      <p:sp>
-        <p:nvSpPr>
-          <p:cNvPr id="10" name="Shape 8"/>
-          <p:cNvSpPr/>
-          <p:nvPr/>
-        </p:nvSpPr>
-        <p:spPr>
-          <a:xfrm>
-            <a:off x="548640" y="4443984"/>
-            <a:ext cx="5212080" cy="969264"/>
-          </a:xfrm>
-          <a:prstGeom prst="roundRect">
-            <a:avLst>
-              <a:gd name="adj" fmla="val 13208"/>
-            </a:avLst>
-          </a:prstGeom>
-          <a:solidFill>
-            <a:srgbClr val="FFFFFF"/>
-          </a:solidFill>
-          <a:ln w="9525">
-            <a:solidFill>
-              <a:srgbClr val="D2D6DC"/>
-            </a:solidFill>
-            <a:prstDash val="solid"/>
-          </a:ln>
-          <a:effectLst>
-            <a:outerShdw sx="100000" sy="100000" kx="0" ky="0" algn="bl" rotWithShape="0" blurRad="88900" dist="25400" dir="5400000">
-              <a:srgbClr val="292A2E">
-                <a:alpha val="16000"/>
-              </a:srgbClr>
-            </a:outerShdw>
-          </a:effectLst>
-        </p:spPr>
-      </p:sp>
-      <p:sp>
-        <p:nvSpPr>
-          <p:cNvPr id="11" name="Text 9"/>
-          <p:cNvSpPr/>
-          <p:nvPr/>
-        </p:nvSpPr>
-        <p:spPr>
-          <a:xfrm>
-            <a:off x="804672" y="4553712"/>
-            <a:ext cx="4700016" cy="530352"/>
-          </a:xfrm>
-          <a:prstGeom prst="rect">
-            <a:avLst/>
-          </a:prstGeom>
-          <a:noFill/>
-          <a:ln/>
-        </p:spPr>
-        <p:txBody>
-          <a:bodyPr wrap="square" lIns="0" tIns="0" rIns="0" bIns="0" rtlCol="0" anchor="ctr"/>
-          <a:lstStyle/>
-          <a:p>
-            <a:pPr indent="0" marL="0">
-              <a:lnSpc>
-                <a:spcPts val="1550"/>
-              </a:lnSpc>
-              <a:buNone/>
-            </a:pPr>
-            <a:r>
-              <a:rPr lang="en-US" sz="1250" i="1" dirty="0">
-                <a:solidFill>
-                  <a:srgbClr val="414142"/>
-                </a:solidFill>
-                <a:latin typeface="Arial" pitchFamily="34" charset="0"/>
-                <a:ea typeface="Arial" pitchFamily="34" charset="-122"/>
-                <a:cs typeface="Arial" pitchFamily="34" charset="-120"/>
-              </a:rPr>
-              <a:t>« Aucun moyen d'interroger nos participations d'un coup. »</a:t>
-            </a:r>
-            <a:endParaRPr lang="en-US" sz="1250" dirty="0"/>
-          </a:p>
-        </p:txBody>
-      </p:sp>
-      <p:sp>
-        <p:nvSpPr>
-          <p:cNvPr id="12" name="Text 10"/>
-          <p:cNvSpPr/>
-          <p:nvPr/>
-        </p:nvSpPr>
-        <p:spPr>
-          <a:xfrm>
-            <a:off x="804672" y="5065776"/>
-            <a:ext cx="4700016" cy="274320"/>
-          </a:xfrm>
-          <a:prstGeom prst="rect">
-            <a:avLst/>
-          </a:prstGeom>
-          <a:noFill/>
-          <a:ln/>
-        </p:spPr>
-        <p:txBody>
-          <a:bodyPr wrap="square" lIns="0" tIns="0" rIns="0" bIns="0" rtlCol="0" anchor="ctr"/>
-          <a:lstStyle/>
-          <a:p>
-            <a:pPr algn="l" indent="0" marL="0">
-              <a:buNone/>
-            </a:pPr>
-            <a:r>
-              <a:rPr lang="en-US" sz="700" b="1" dirty="0">
-                <a:solidFill>
-                  <a:srgbClr val="0488C1"/>
-                </a:solidFill>
-                <a:latin typeface="Arial" pitchFamily="34" charset="0"/>
-                <a:ea typeface="Arial" pitchFamily="34" charset="-122"/>
-                <a:cs typeface="Arial" pitchFamily="34" charset="-120"/>
-              </a:rPr>
-              <a:t>● </a:t>
-            </a:r>
-            <a:pPr algn="l" indent="0" marL="0">
-              <a:buNone/>
-            </a:pPr>
-            <a:r>
-              <a:rPr lang="en-US" sz="950" b="1" dirty="0">
-                <a:solidFill>
-                  <a:srgbClr val="9B9DA3"/>
-                </a:solidFill>
-                <a:latin typeface="Arial" pitchFamily="34" charset="0"/>
-                <a:ea typeface="Arial" pitchFamily="34" charset="-122"/>
-                <a:cs typeface="Arial" pitchFamily="34" charset="-120"/>
-              </a:rPr>
-              <a:t>Les équipes</a:t>
-            </a:r>
-            <a:endParaRPr lang="en-US" sz="950" dirty="0"/>
-          </a:p>
-        </p:txBody>
-      </p:sp>
-      <p:sp>
-        <p:nvSpPr>
-          <p:cNvPr id="13" name="Shape 11"/>
-          <p:cNvSpPr/>
-          <p:nvPr/>
-        </p:nvSpPr>
-        <p:spPr>
-          <a:xfrm>
-            <a:off x="1371600" y="5614416"/>
-            <a:ext cx="5212080" cy="969264"/>
-          </a:xfrm>
-          <a:prstGeom prst="roundRect">
-            <a:avLst>
-              <a:gd name="adj" fmla="val 13208"/>
-            </a:avLst>
-          </a:prstGeom>
-          <a:solidFill>
-            <a:srgbClr val="E9F5FB"/>
-          </a:solidFill>
-          <a:ln w="9525">
-            <a:solidFill>
-              <a:srgbClr val="9CCFE7"/>
-            </a:solidFill>
-            <a:prstDash val="solid"/>
-          </a:ln>
-          <a:effectLst>
-            <a:outerShdw sx="100000" sy="100000" kx="0" ky="0" algn="bl" rotWithShape="0" blurRad="88900" dist="25400" dir="5400000">
-              <a:srgbClr val="292A2E">
-                <a:alpha val="16000"/>
-              </a:srgbClr>
-            </a:outerShdw>
-          </a:effectLst>
-        </p:spPr>
-      </p:sp>
-      <p:sp>
-        <p:nvSpPr>
-          <p:cNvPr id="14" name="Text 12"/>
-          <p:cNvSpPr/>
-          <p:nvPr/>
-        </p:nvSpPr>
-        <p:spPr>
-          <a:xfrm>
-            <a:off x="1627632" y="5724144"/>
-            <a:ext cx="4700016" cy="530352"/>
-          </a:xfrm>
-          <a:prstGeom prst="rect">
-            <a:avLst/>
-          </a:prstGeom>
-          <a:noFill/>
-          <a:ln/>
-        </p:spPr>
-        <p:txBody>
-          <a:bodyPr wrap="square" lIns="0" tIns="0" rIns="0" bIns="0" rtlCol="0" anchor="ctr"/>
-          <a:lstStyle/>
-          <a:p>
-            <a:pPr indent="0" marL="0">
-              <a:lnSpc>
-                <a:spcPts val="1550"/>
-              </a:lnSpc>
-              <a:buNone/>
-            </a:pPr>
-            <a:r>
-              <a:rPr lang="en-US" sz="1250" i="1" dirty="0">
-                <a:solidFill>
-                  <a:srgbClr val="414142"/>
-                </a:solidFill>
-                <a:latin typeface="Arial" pitchFamily="34" charset="0"/>
-                <a:ea typeface="Arial" pitchFamily="34" charset="-122"/>
-                <a:cs typeface="Arial" pitchFamily="34" charset="-120"/>
-              </a:rPr>
-              <a:t>« On ne sait pas ce qui bouge chez nos LP. »</a:t>
-            </a:r>
-            <a:endParaRPr lang="en-US" sz="1250" dirty="0"/>
-          </a:p>
-        </p:txBody>
-      </p:sp>
-      <p:sp>
-        <p:nvSpPr>
-          <p:cNvPr id="15" name="Text 13"/>
-          <p:cNvSpPr/>
-          <p:nvPr/>
-        </p:nvSpPr>
-        <p:spPr>
-          <a:xfrm>
-            <a:off x="1627632" y="6236208"/>
-            <a:ext cx="4700016" cy="274320"/>
-          </a:xfrm>
-          <a:prstGeom prst="rect">
-            <a:avLst/>
-          </a:prstGeom>
-          <a:noFill/>
-          <a:ln/>
-        </p:spPr>
-        <p:txBody>
-          <a:bodyPr wrap="square" lIns="0" tIns="0" rIns="0" bIns="0" rtlCol="0" anchor="ctr"/>
-          <a:lstStyle/>
-          <a:p>
-            <a:pPr algn="r" indent="0" marL="0">
-              <a:buNone/>
-            </a:pPr>
-            <a:r>
-              <a:rPr lang="en-US" sz="700" b="1" dirty="0">
-                <a:solidFill>
-                  <a:srgbClr val="0488C1"/>
-                </a:solidFill>
-                <a:latin typeface="Arial" pitchFamily="34" charset="0"/>
-                <a:ea typeface="Arial" pitchFamily="34" charset="-122"/>
-                <a:cs typeface="Arial" pitchFamily="34" charset="-120"/>
-              </a:rPr>
-              <a:t>● </a:t>
-            </a:r>
-            <a:pPr algn="r" indent="0" marL="0">
-              <a:buNone/>
-            </a:pPr>
-            <a:r>
-              <a:rPr lang="en-US" sz="950" b="1" dirty="0">
-                <a:solidFill>
-                  <a:srgbClr val="9B9DA3"/>
-                </a:solidFill>
-                <a:latin typeface="Arial" pitchFamily="34" charset="0"/>
-                <a:ea typeface="Arial" pitchFamily="34" charset="-122"/>
-                <a:cs typeface="Arial" pitchFamily="34" charset="-120"/>
-              </a:rPr>
-              <a:t>Chris</a:t>
-            </a:r>
-            <a:endParaRPr lang="en-US" sz="950" dirty="0"/>
-          </a:p>
-        </p:txBody>
-      </p:sp>
-      <p:sp>
-        <p:nvSpPr>
-          <p:cNvPr id="16" name="Text 14"/>
-          <p:cNvSpPr/>
-          <p:nvPr/>
-        </p:nvSpPr>
-        <p:spPr>
-          <a:xfrm>
-            <a:off x="7086600" y="2514600"/>
-            <a:ext cx="4572000" cy="274320"/>
+            <a:ext cx="11064240" cy="292608"/>
           </a:xfrm>
           <a:prstGeom prst="rect">
             <a:avLst/>
@@ -6868,7 +6274,7 @@
               <a:buNone/>
             </a:pPr>
             <a:r>
-              <a:rPr lang="en-US" sz="1100" b="1" spc="350" kern="0" dirty="0">
+              <a:rPr lang="en-US" sz="1000" b="1" spc="350" kern="0" dirty="0">
                 <a:solidFill>
                   <a:srgbClr val="6B6D72"/>
                 </a:solidFill>
@@ -6878,20 +6284,20 @@
               </a:rPr>
               <a:t>UN SEUL SUJET</a:t>
             </a:r>
-            <a:endParaRPr lang="en-US" sz="1100" dirty="0"/>
-          </a:p>
-        </p:txBody>
-      </p:sp>
-      <p:sp>
-        <p:nvSpPr>
-          <p:cNvPr id="17" name="!!verdict"/>
-          <p:cNvSpPr/>
-          <p:nvPr/>
-        </p:nvSpPr>
-        <p:spPr>
-          <a:xfrm>
-            <a:off x="7086600" y="2880360"/>
-            <a:ext cx="4572000" cy="1371600"/>
+            <a:endParaRPr lang="en-US" sz="1000" dirty="0"/>
+          </a:p>
+        </p:txBody>
+      </p:sp>
+      <p:sp>
+        <p:nvSpPr>
+          <p:cNvPr id="3" name="!!verdict"/>
+          <p:cNvSpPr/>
+          <p:nvPr/>
+        </p:nvSpPr>
+        <p:spPr>
+          <a:xfrm>
+            <a:off x="1097280" y="2606040"/>
+            <a:ext cx="9994392" cy="1051560"/>
           </a:xfrm>
           <a:prstGeom prst="rect">
             <a:avLst/>
@@ -6905,12 +6311,12 @@
           <a:p>
             <a:pPr algn="ctr" indent="0" marL="0">
               <a:lnSpc>
-                <a:spcPts val="2800"/>
+                <a:spcPts val="4000"/>
               </a:lnSpc>
               <a:buNone/>
             </a:pPr>
             <a:r>
-              <a:rPr lang="en-US" sz="2300" i="1" dirty="0">
+              <a:rPr lang="en-US" sz="3400" i="1" dirty="0">
                 <a:solidFill>
                   <a:srgbClr val="0488C1"/>
                 </a:solidFill>
@@ -6922,12 +6328,12 @@
             </a:r>
             <a:pPr algn="ctr" indent="0" marL="0">
               <a:lnSpc>
-                <a:spcPts val="2800"/>
+                <a:spcPts val="4000"/>
               </a:lnSpc>
               <a:buNone/>
             </a:pPr>
             <a:r>
-              <a:rPr lang="en-US" sz="2300" b="1" dirty="0">
+              <a:rPr lang="en-US" sz="3400" b="1" dirty="0">
                 <a:solidFill>
                   <a:srgbClr val="25262A"/>
                 </a:solidFill>
@@ -6939,12 +6345,12 @@
             </a:r>
             <a:pPr algn="ctr" indent="0" marL="0">
               <a:lnSpc>
-                <a:spcPts val="2800"/>
+                <a:spcPts val="4000"/>
               </a:lnSpc>
               <a:buNone/>
             </a:pPr>
             <a:r>
-              <a:rPr lang="en-US" sz="2300" i="1" dirty="0">
+              <a:rPr lang="en-US" sz="3400" i="1" dirty="0">
                 <a:solidFill>
                   <a:srgbClr val="0488C1"/>
                 </a:solidFill>
@@ -6954,7 +6360,7 @@
               </a:rPr>
               <a:t>pas à portée de main.</a:t>
             </a:r>
-            <a:endParaRPr lang="en-US" sz="2300" dirty="0"/>
+            <a:endParaRPr lang="en-US" sz="3400" dirty="0"/>
           </a:p>
         </p:txBody>
       </p:sp>
@@ -6965,7 +6371,7 @@
   </p:clrMapOvr>
   <mc:AlternateContent xmlns:mc="http://schemas.openxmlformats.org/markup-compatibility/2006">
     <mc:Choice xmlns:p159="http://schemas.microsoft.com/office/powerpoint/2015/09/main" Requires="p159">
-      <p:transition xmlns:p14="http://schemas.microsoft.com/office/powerpoint/2010/main" spd="slow" p14:dur="700">
+      <p:transition xmlns:p14="http://schemas.microsoft.com/office/powerpoint/2010/main" spd="slow" p14:dur="800">
         <p159:morph option="byObject"/>
       </p:transition>
     </mc:Choice>
@@ -7010,602 +6416,8 @@
         </p:nvSpPr>
         <p:spPr>
           <a:xfrm>
-            <a:off x="548640" y="685800"/>
-            <a:ext cx="11064240" cy="274320"/>
-          </a:xfrm>
-          <a:prstGeom prst="rect">
-            <a:avLst/>
-          </a:prstGeom>
-          <a:noFill/>
-          <a:ln/>
-        </p:spPr>
-        <p:txBody>
-          <a:bodyPr wrap="square" lIns="0" tIns="0" rIns="0" bIns="0" rtlCol="0" anchor="ctr"/>
-          <a:lstStyle/>
-          <a:p>
-            <a:pPr algn="l" indent="0" marL="0">
-              <a:buNone/>
-            </a:pPr>
-            <a:r>
-              <a:rPr lang="en-US" sz="1100" b="1" spc="300" kern="0" dirty="0">
-                <a:solidFill>
-                  <a:srgbClr val="0488C1"/>
-                </a:solidFill>
-                <a:latin typeface="Arial" pitchFamily="34" charset="0"/>
-                <a:ea typeface="Arial" pitchFamily="34" charset="-122"/>
-                <a:cs typeface="Arial" pitchFamily="34" charset="-120"/>
-              </a:rPr>
-              <a:t>LE DIAGNOSTIC</a:t>
-            </a:r>
-            <a:endParaRPr lang="en-US" sz="1100" dirty="0"/>
-          </a:p>
-        </p:txBody>
-      </p:sp>
-      <p:sp>
-        <p:nvSpPr>
-          <p:cNvPr id="3" name="Text 1"/>
-          <p:cNvSpPr/>
-          <p:nvPr/>
-        </p:nvSpPr>
-        <p:spPr>
-          <a:xfrm>
-            <a:off x="548640" y="1051560"/>
-            <a:ext cx="11064240" cy="685800"/>
-          </a:xfrm>
-          <a:prstGeom prst="rect">
-            <a:avLst/>
-          </a:prstGeom>
-          <a:noFill/>
-          <a:ln/>
-        </p:spPr>
-        <p:txBody>
-          <a:bodyPr wrap="square" lIns="0" tIns="0" rIns="0" bIns="0" rtlCol="0" anchor="ctr"/>
-          <a:lstStyle/>
-          <a:p>
-            <a:pPr algn="l" indent="0" marL="0">
-              <a:buNone/>
-            </a:pPr>
-            <a:r>
-              <a:rPr lang="en-US" sz="3000" b="1" dirty="0">
-                <a:solidFill>
-                  <a:srgbClr val="414142"/>
-                </a:solidFill>
-                <a:latin typeface="Arial" pitchFamily="34" charset="0"/>
-                <a:ea typeface="Arial" pitchFamily="34" charset="-122"/>
-                <a:cs typeface="Arial" pitchFamily="34" charset="-120"/>
-              </a:rPr>
-              <a:t>Ce qu'on entend tous les jours.</a:t>
-            </a:r>
-            <a:endParaRPr lang="en-US" sz="3000" dirty="0"/>
-          </a:p>
-        </p:txBody>
-      </p:sp>
-      <p:sp>
-        <p:nvSpPr>
-          <p:cNvPr id="4" name="Shape 2"/>
-          <p:cNvSpPr/>
-          <p:nvPr/>
-        </p:nvSpPr>
-        <p:spPr>
-          <a:xfrm>
             <a:off x="548640" y="2103120"/>
-            <a:ext cx="5212080" cy="969264"/>
-          </a:xfrm>
-          <a:prstGeom prst="roundRect">
-            <a:avLst>
-              <a:gd name="adj" fmla="val 13208"/>
-            </a:avLst>
-          </a:prstGeom>
-          <a:solidFill>
-            <a:srgbClr val="FFFFFF"/>
-          </a:solidFill>
-          <a:ln w="9525">
-            <a:solidFill>
-              <a:srgbClr val="D2D6DC"/>
-            </a:solidFill>
-            <a:prstDash val="solid"/>
-          </a:ln>
-          <a:effectLst>
-            <a:outerShdw sx="100000" sy="100000" kx="0" ky="0" algn="bl" rotWithShape="0" blurRad="88900" dist="25400" dir="5400000">
-              <a:srgbClr val="292A2E">
-                <a:alpha val="16000"/>
-              </a:srgbClr>
-            </a:outerShdw>
-          </a:effectLst>
-        </p:spPr>
-      </p:sp>
-      <p:sp>
-        <p:nvSpPr>
-          <p:cNvPr id="5" name="Text 3"/>
-          <p:cNvSpPr/>
-          <p:nvPr/>
-        </p:nvSpPr>
-        <p:spPr>
-          <a:xfrm>
-            <a:off x="804672" y="2212848"/>
-            <a:ext cx="4700016" cy="530352"/>
-          </a:xfrm>
-          <a:prstGeom prst="rect">
-            <a:avLst/>
-          </a:prstGeom>
-          <a:noFill/>
-          <a:ln/>
-        </p:spPr>
-        <p:txBody>
-          <a:bodyPr wrap="square" lIns="0" tIns="0" rIns="0" bIns="0" rtlCol="0" anchor="ctr"/>
-          <a:lstStyle/>
-          <a:p>
-            <a:pPr indent="0" marL="0">
-              <a:lnSpc>
-                <a:spcPts val="1550"/>
-              </a:lnSpc>
-              <a:buNone/>
-            </a:pPr>
-            <a:r>
-              <a:rPr lang="en-US" sz="1250" i="1" dirty="0">
-                <a:solidFill>
-                  <a:srgbClr val="414142"/>
-                </a:solidFill>
-                <a:latin typeface="Arial" pitchFamily="34" charset="0"/>
-                <a:ea typeface="Arial" pitchFamily="34" charset="-122"/>
-                <a:cs typeface="Arial" pitchFamily="34" charset="-120"/>
-              </a:rPr>
-              <a:t>« On n'a pas tous le réflexe Salesforce... ni toujours le temps. »</a:t>
-            </a:r>
-            <a:endParaRPr lang="en-US" sz="1250" dirty="0"/>
-          </a:p>
-        </p:txBody>
-      </p:sp>
-      <p:sp>
-        <p:nvSpPr>
-          <p:cNvPr id="6" name="Text 4"/>
-          <p:cNvSpPr/>
-          <p:nvPr/>
-        </p:nvSpPr>
-        <p:spPr>
-          <a:xfrm>
-            <a:off x="804672" y="2724912"/>
-            <a:ext cx="4700016" cy="274320"/>
-          </a:xfrm>
-          <a:prstGeom prst="rect">
-            <a:avLst/>
-          </a:prstGeom>
-          <a:noFill/>
-          <a:ln/>
-        </p:spPr>
-        <p:txBody>
-          <a:bodyPr wrap="square" lIns="0" tIns="0" rIns="0" bIns="0" rtlCol="0" anchor="ctr"/>
-          <a:lstStyle/>
-          <a:p>
-            <a:pPr algn="l" indent="0" marL="0">
-              <a:buNone/>
-            </a:pPr>
-            <a:r>
-              <a:rPr lang="en-US" sz="700" b="1" dirty="0">
-                <a:solidFill>
-                  <a:srgbClr val="0488C1"/>
-                </a:solidFill>
-                <a:latin typeface="Arial" pitchFamily="34" charset="0"/>
-                <a:ea typeface="Arial" pitchFamily="34" charset="-122"/>
-                <a:cs typeface="Arial" pitchFamily="34" charset="-120"/>
-              </a:rPr>
-              <a:t>● </a:t>
-            </a:r>
-            <a:pPr algn="l" indent="0" marL="0">
-              <a:buNone/>
-            </a:pPr>
-            <a:r>
-              <a:rPr lang="en-US" sz="950" b="1" dirty="0">
-                <a:solidFill>
-                  <a:srgbClr val="9B9DA3"/>
-                </a:solidFill>
-                <a:latin typeface="Arial" pitchFamily="34" charset="0"/>
-                <a:ea typeface="Arial" pitchFamily="34" charset="-122"/>
-                <a:cs typeface="Arial" pitchFamily="34" charset="-120"/>
-              </a:rPr>
-              <a:t>Tout le monde</a:t>
-            </a:r>
-            <a:endParaRPr lang="en-US" sz="950" dirty="0"/>
-          </a:p>
-        </p:txBody>
-      </p:sp>
-      <p:sp>
-        <p:nvSpPr>
-          <p:cNvPr id="7" name="Shape 5"/>
-          <p:cNvSpPr/>
-          <p:nvPr/>
-        </p:nvSpPr>
-        <p:spPr>
-          <a:xfrm>
-            <a:off x="1371600" y="3273552"/>
-            <a:ext cx="5212080" cy="969264"/>
-          </a:xfrm>
-          <a:prstGeom prst="roundRect">
-            <a:avLst>
-              <a:gd name="adj" fmla="val 13208"/>
-            </a:avLst>
-          </a:prstGeom>
-          <a:solidFill>
-            <a:srgbClr val="E9F5FB"/>
-          </a:solidFill>
-          <a:ln w="9525">
-            <a:solidFill>
-              <a:srgbClr val="9CCFE7"/>
-            </a:solidFill>
-            <a:prstDash val="solid"/>
-          </a:ln>
-          <a:effectLst>
-            <a:outerShdw sx="100000" sy="100000" kx="0" ky="0" algn="bl" rotWithShape="0" blurRad="88900" dist="25400" dir="5400000">
-              <a:srgbClr val="292A2E">
-                <a:alpha val="16000"/>
-              </a:srgbClr>
-            </a:outerShdw>
-          </a:effectLst>
-        </p:spPr>
-      </p:sp>
-      <p:sp>
-        <p:nvSpPr>
-          <p:cNvPr id="8" name="Text 6"/>
-          <p:cNvSpPr/>
-          <p:nvPr/>
-        </p:nvSpPr>
-        <p:spPr>
-          <a:xfrm>
-            <a:off x="1627632" y="3383280"/>
-            <a:ext cx="4700016" cy="530352"/>
-          </a:xfrm>
-          <a:prstGeom prst="rect">
-            <a:avLst/>
-          </a:prstGeom>
-          <a:noFill/>
-          <a:ln/>
-        </p:spPr>
-        <p:txBody>
-          <a:bodyPr wrap="square" lIns="0" tIns="0" rIns="0" bIns="0" rtlCol="0" anchor="ctr"/>
-          <a:lstStyle/>
-          <a:p>
-            <a:pPr indent="0" marL="0">
-              <a:lnSpc>
-                <a:spcPts val="1550"/>
-              </a:lnSpc>
-              <a:buNone/>
-            </a:pPr>
-            <a:r>
-              <a:rPr lang="en-US" sz="1250" i="1" dirty="0">
-                <a:solidFill>
-                  <a:srgbClr val="414142"/>
-                </a:solidFill>
-                <a:latin typeface="Arial" pitchFamily="34" charset="0"/>
-                <a:ea typeface="Arial" pitchFamily="34" charset="-122"/>
-                <a:cs typeface="Arial" pitchFamily="34" charset="-120"/>
-              </a:rPr>
-              <a:t>« Ce qui se dit en RDV reste chez ceux qui y étaient. »</a:t>
-            </a:r>
-            <a:endParaRPr lang="en-US" sz="1250" dirty="0"/>
-          </a:p>
-        </p:txBody>
-      </p:sp>
-      <p:sp>
-        <p:nvSpPr>
-          <p:cNvPr id="9" name="Text 7"/>
-          <p:cNvSpPr/>
-          <p:nvPr/>
-        </p:nvSpPr>
-        <p:spPr>
-          <a:xfrm>
-            <a:off x="1627632" y="3895344"/>
-            <a:ext cx="4700016" cy="274320"/>
-          </a:xfrm>
-          <a:prstGeom prst="rect">
-            <a:avLst/>
-          </a:prstGeom>
-          <a:noFill/>
-          <a:ln/>
-        </p:spPr>
-        <p:txBody>
-          <a:bodyPr wrap="square" lIns="0" tIns="0" rIns="0" bIns="0" rtlCol="0" anchor="ctr"/>
-          <a:lstStyle/>
-          <a:p>
-            <a:pPr algn="r" indent="0" marL="0">
-              <a:buNone/>
-            </a:pPr>
-            <a:r>
-              <a:rPr lang="en-US" sz="700" b="1" dirty="0">
-                <a:solidFill>
-                  <a:srgbClr val="0488C1"/>
-                </a:solidFill>
-                <a:latin typeface="Arial" pitchFamily="34" charset="0"/>
-                <a:ea typeface="Arial" pitchFamily="34" charset="-122"/>
-                <a:cs typeface="Arial" pitchFamily="34" charset="-120"/>
-              </a:rPr>
-              <a:t>● </a:t>
-            </a:r>
-            <a:pPr algn="r" indent="0" marL="0">
-              <a:buNone/>
-            </a:pPr>
-            <a:r>
-              <a:rPr lang="en-US" sz="950" b="1" dirty="0">
-                <a:solidFill>
-                  <a:srgbClr val="9B9DA3"/>
-                </a:solidFill>
-                <a:latin typeface="Arial" pitchFamily="34" charset="0"/>
-                <a:ea typeface="Arial" pitchFamily="34" charset="-122"/>
-                <a:cs typeface="Arial" pitchFamily="34" charset="-120"/>
-              </a:rPr>
-              <a:t>IR et buy-out</a:t>
-            </a:r>
-            <a:endParaRPr lang="en-US" sz="950" dirty="0"/>
-          </a:p>
-        </p:txBody>
-      </p:sp>
-      <p:sp>
-        <p:nvSpPr>
-          <p:cNvPr id="10" name="Shape 8"/>
-          <p:cNvSpPr/>
-          <p:nvPr/>
-        </p:nvSpPr>
-        <p:spPr>
-          <a:xfrm>
-            <a:off x="548640" y="4443984"/>
-            <a:ext cx="5212080" cy="969264"/>
-          </a:xfrm>
-          <a:prstGeom prst="roundRect">
-            <a:avLst>
-              <a:gd name="adj" fmla="val 13208"/>
-            </a:avLst>
-          </a:prstGeom>
-          <a:solidFill>
-            <a:srgbClr val="FFFFFF"/>
-          </a:solidFill>
-          <a:ln w="9525">
-            <a:solidFill>
-              <a:srgbClr val="D2D6DC"/>
-            </a:solidFill>
-            <a:prstDash val="solid"/>
-          </a:ln>
-          <a:effectLst>
-            <a:outerShdw sx="100000" sy="100000" kx="0" ky="0" algn="bl" rotWithShape="0" blurRad="88900" dist="25400" dir="5400000">
-              <a:srgbClr val="292A2E">
-                <a:alpha val="16000"/>
-              </a:srgbClr>
-            </a:outerShdw>
-          </a:effectLst>
-        </p:spPr>
-      </p:sp>
-      <p:sp>
-        <p:nvSpPr>
-          <p:cNvPr id="11" name="Text 9"/>
-          <p:cNvSpPr/>
-          <p:nvPr/>
-        </p:nvSpPr>
-        <p:spPr>
-          <a:xfrm>
-            <a:off x="804672" y="4553712"/>
-            <a:ext cx="4700016" cy="530352"/>
-          </a:xfrm>
-          <a:prstGeom prst="rect">
-            <a:avLst/>
-          </a:prstGeom>
-          <a:noFill/>
-          <a:ln/>
-        </p:spPr>
-        <p:txBody>
-          <a:bodyPr wrap="square" lIns="0" tIns="0" rIns="0" bIns="0" rtlCol="0" anchor="ctr"/>
-          <a:lstStyle/>
-          <a:p>
-            <a:pPr indent="0" marL="0">
-              <a:lnSpc>
-                <a:spcPts val="1550"/>
-              </a:lnSpc>
-              <a:buNone/>
-            </a:pPr>
-            <a:r>
-              <a:rPr lang="en-US" sz="1250" i="1" dirty="0">
-                <a:solidFill>
-                  <a:srgbClr val="414142"/>
-                </a:solidFill>
-                <a:latin typeface="Arial" pitchFamily="34" charset="0"/>
-                <a:ea typeface="Arial" pitchFamily="34" charset="-122"/>
-                <a:cs typeface="Arial" pitchFamily="34" charset="-120"/>
-              </a:rPr>
-              <a:t>« Aucun moyen d'interroger nos participations d'un coup. »</a:t>
-            </a:r>
-            <a:endParaRPr lang="en-US" sz="1250" dirty="0"/>
-          </a:p>
-        </p:txBody>
-      </p:sp>
-      <p:sp>
-        <p:nvSpPr>
-          <p:cNvPr id="12" name="Text 10"/>
-          <p:cNvSpPr/>
-          <p:nvPr/>
-        </p:nvSpPr>
-        <p:spPr>
-          <a:xfrm>
-            <a:off x="804672" y="5065776"/>
-            <a:ext cx="4700016" cy="274320"/>
-          </a:xfrm>
-          <a:prstGeom prst="rect">
-            <a:avLst/>
-          </a:prstGeom>
-          <a:noFill/>
-          <a:ln/>
-        </p:spPr>
-        <p:txBody>
-          <a:bodyPr wrap="square" lIns="0" tIns="0" rIns="0" bIns="0" rtlCol="0" anchor="ctr"/>
-          <a:lstStyle/>
-          <a:p>
-            <a:pPr algn="l" indent="0" marL="0">
-              <a:buNone/>
-            </a:pPr>
-            <a:r>
-              <a:rPr lang="en-US" sz="700" b="1" dirty="0">
-                <a:solidFill>
-                  <a:srgbClr val="0488C1"/>
-                </a:solidFill>
-                <a:latin typeface="Arial" pitchFamily="34" charset="0"/>
-                <a:ea typeface="Arial" pitchFamily="34" charset="-122"/>
-                <a:cs typeface="Arial" pitchFamily="34" charset="-120"/>
-              </a:rPr>
-              <a:t>● </a:t>
-            </a:r>
-            <a:pPr algn="l" indent="0" marL="0">
-              <a:buNone/>
-            </a:pPr>
-            <a:r>
-              <a:rPr lang="en-US" sz="950" b="1" dirty="0">
-                <a:solidFill>
-                  <a:srgbClr val="9B9DA3"/>
-                </a:solidFill>
-                <a:latin typeface="Arial" pitchFamily="34" charset="0"/>
-                <a:ea typeface="Arial" pitchFamily="34" charset="-122"/>
-                <a:cs typeface="Arial" pitchFamily="34" charset="-120"/>
-              </a:rPr>
-              <a:t>Les équipes</a:t>
-            </a:r>
-            <a:endParaRPr lang="en-US" sz="950" dirty="0"/>
-          </a:p>
-        </p:txBody>
-      </p:sp>
-      <p:sp>
-        <p:nvSpPr>
-          <p:cNvPr id="13" name="Shape 11"/>
-          <p:cNvSpPr/>
-          <p:nvPr/>
-        </p:nvSpPr>
-        <p:spPr>
-          <a:xfrm>
-            <a:off x="1371600" y="5614416"/>
-            <a:ext cx="5212080" cy="969264"/>
-          </a:xfrm>
-          <a:prstGeom prst="roundRect">
-            <a:avLst>
-              <a:gd name="adj" fmla="val 13208"/>
-            </a:avLst>
-          </a:prstGeom>
-          <a:solidFill>
-            <a:srgbClr val="E9F5FB"/>
-          </a:solidFill>
-          <a:ln w="9525">
-            <a:solidFill>
-              <a:srgbClr val="9CCFE7"/>
-            </a:solidFill>
-            <a:prstDash val="solid"/>
-          </a:ln>
-          <a:effectLst>
-            <a:outerShdw sx="100000" sy="100000" kx="0" ky="0" algn="bl" rotWithShape="0" blurRad="88900" dist="25400" dir="5400000">
-              <a:srgbClr val="292A2E">
-                <a:alpha val="16000"/>
-              </a:srgbClr>
-            </a:outerShdw>
-          </a:effectLst>
-        </p:spPr>
-      </p:sp>
-      <p:sp>
-        <p:nvSpPr>
-          <p:cNvPr id="14" name="Text 12"/>
-          <p:cNvSpPr/>
-          <p:nvPr/>
-        </p:nvSpPr>
-        <p:spPr>
-          <a:xfrm>
-            <a:off x="1627632" y="5724144"/>
-            <a:ext cx="4700016" cy="530352"/>
-          </a:xfrm>
-          <a:prstGeom prst="rect">
-            <a:avLst/>
-          </a:prstGeom>
-          <a:noFill/>
-          <a:ln/>
-        </p:spPr>
-        <p:txBody>
-          <a:bodyPr wrap="square" lIns="0" tIns="0" rIns="0" bIns="0" rtlCol="0" anchor="ctr"/>
-          <a:lstStyle/>
-          <a:p>
-            <a:pPr indent="0" marL="0">
-              <a:lnSpc>
-                <a:spcPts val="1550"/>
-              </a:lnSpc>
-              <a:buNone/>
-            </a:pPr>
-            <a:r>
-              <a:rPr lang="en-US" sz="1250" i="1" dirty="0">
-                <a:solidFill>
-                  <a:srgbClr val="414142"/>
-                </a:solidFill>
-                <a:latin typeface="Arial" pitchFamily="34" charset="0"/>
-                <a:ea typeface="Arial" pitchFamily="34" charset="-122"/>
-                <a:cs typeface="Arial" pitchFamily="34" charset="-120"/>
-              </a:rPr>
-              <a:t>« On ne sait pas ce qui bouge chez nos LP. »</a:t>
-            </a:r>
-            <a:endParaRPr lang="en-US" sz="1250" dirty="0"/>
-          </a:p>
-        </p:txBody>
-      </p:sp>
-      <p:sp>
-        <p:nvSpPr>
-          <p:cNvPr id="15" name="Text 13"/>
-          <p:cNvSpPr/>
-          <p:nvPr/>
-        </p:nvSpPr>
-        <p:spPr>
-          <a:xfrm>
-            <a:off x="1627632" y="6236208"/>
-            <a:ext cx="4700016" cy="274320"/>
-          </a:xfrm>
-          <a:prstGeom prst="rect">
-            <a:avLst/>
-          </a:prstGeom>
-          <a:noFill/>
-          <a:ln/>
-        </p:spPr>
-        <p:txBody>
-          <a:bodyPr wrap="square" lIns="0" tIns="0" rIns="0" bIns="0" rtlCol="0" anchor="ctr"/>
-          <a:lstStyle/>
-          <a:p>
-            <a:pPr algn="r" indent="0" marL="0">
-              <a:buNone/>
-            </a:pPr>
-            <a:r>
-              <a:rPr lang="en-US" sz="700" b="1" dirty="0">
-                <a:solidFill>
-                  <a:srgbClr val="0488C1"/>
-                </a:solidFill>
-                <a:latin typeface="Arial" pitchFamily="34" charset="0"/>
-                <a:ea typeface="Arial" pitchFamily="34" charset="-122"/>
-                <a:cs typeface="Arial" pitchFamily="34" charset="-120"/>
-              </a:rPr>
-              <a:t>● </a:t>
-            </a:r>
-            <a:pPr algn="r" indent="0" marL="0">
-              <a:buNone/>
-            </a:pPr>
-            <a:r>
-              <a:rPr lang="en-US" sz="950" b="1" dirty="0">
-                <a:solidFill>
-                  <a:srgbClr val="9B9DA3"/>
-                </a:solidFill>
-                <a:latin typeface="Arial" pitchFamily="34" charset="0"/>
-                <a:ea typeface="Arial" pitchFamily="34" charset="-122"/>
-                <a:cs typeface="Arial" pitchFamily="34" charset="-120"/>
-              </a:rPr>
-              <a:t>Chris</a:t>
-            </a:r>
-            <a:endParaRPr lang="en-US" sz="950" dirty="0"/>
-          </a:p>
-        </p:txBody>
-      </p:sp>
-      <p:sp>
-        <p:nvSpPr>
-          <p:cNvPr id="16" name="Text 14"/>
-          <p:cNvSpPr/>
-          <p:nvPr/>
-        </p:nvSpPr>
-        <p:spPr>
-          <a:xfrm>
-            <a:off x="7086600" y="2514600"/>
-            <a:ext cx="4572000" cy="274320"/>
+            <a:ext cx="11064240" cy="292608"/>
           </a:xfrm>
           <a:prstGeom prst="rect">
             <a:avLst/>
@@ -7621,7 +6433,7 @@
               <a:buNone/>
             </a:pPr>
             <a:r>
-              <a:rPr lang="en-US" sz="1100" b="1" spc="350" kern="0" dirty="0">
+              <a:rPr lang="en-US" sz="1000" b="1" spc="350" kern="0" dirty="0">
                 <a:solidFill>
                   <a:srgbClr val="6B6D72"/>
                 </a:solidFill>
@@ -7631,20 +6443,20 @@
               </a:rPr>
               <a:t>UN SEUL SUJET</a:t>
             </a:r>
-            <a:endParaRPr lang="en-US" sz="1100" dirty="0"/>
-          </a:p>
-        </p:txBody>
-      </p:sp>
-      <p:sp>
-        <p:nvSpPr>
-          <p:cNvPr id="17" name="!!verdict"/>
-          <p:cNvSpPr/>
-          <p:nvPr/>
-        </p:nvSpPr>
-        <p:spPr>
-          <a:xfrm>
-            <a:off x="7086600" y="2880360"/>
-            <a:ext cx="4572000" cy="1371600"/>
+            <a:endParaRPr lang="en-US" sz="1000" dirty="0"/>
+          </a:p>
+        </p:txBody>
+      </p:sp>
+      <p:sp>
+        <p:nvSpPr>
+          <p:cNvPr id="3" name="!!verdict"/>
+          <p:cNvSpPr/>
+          <p:nvPr/>
+        </p:nvSpPr>
+        <p:spPr>
+          <a:xfrm>
+            <a:off x="1097280" y="2606040"/>
+            <a:ext cx="9994392" cy="1051560"/>
           </a:xfrm>
           <a:prstGeom prst="rect">
             <a:avLst/>
@@ -7658,12 +6470,12 @@
           <a:p>
             <a:pPr algn="ctr" indent="0" marL="0">
               <a:lnSpc>
-                <a:spcPts val="2800"/>
+                <a:spcPts val="4000"/>
               </a:lnSpc>
               <a:buNone/>
             </a:pPr>
             <a:r>
-              <a:rPr lang="en-US" sz="2300" i="1" dirty="0">
+              <a:rPr lang="en-US" sz="3400" i="1" dirty="0">
                 <a:solidFill>
                   <a:srgbClr val="0488C1"/>
                 </a:solidFill>
@@ -7675,12 +6487,12 @@
             </a:r>
             <a:pPr algn="ctr" indent="0" marL="0">
               <a:lnSpc>
-                <a:spcPts val="2800"/>
+                <a:spcPts val="4000"/>
               </a:lnSpc>
               <a:buNone/>
             </a:pPr>
             <a:r>
-              <a:rPr lang="en-US" sz="2300" b="1" dirty="0">
+              <a:rPr lang="en-US" sz="3400" b="1" dirty="0">
                 <a:solidFill>
                   <a:srgbClr val="25262A"/>
                 </a:solidFill>
@@ -7692,12 +6504,12 @@
             </a:r>
             <a:pPr algn="ctr" indent="0" marL="0">
               <a:lnSpc>
-                <a:spcPts val="2800"/>
+                <a:spcPts val="4000"/>
               </a:lnSpc>
               <a:buNone/>
             </a:pPr>
             <a:r>
-              <a:rPr lang="en-US" sz="2300" i="1" strike="sngStrike" dirty="0">
+              <a:rPr lang="en-US" sz="3400" i="1" strike="sngStrike" dirty="0">
                 <a:solidFill>
                   <a:srgbClr val="0488C1"/>
                 </a:solidFill>
@@ -7707,20 +6519,20 @@
               </a:rPr>
               <a:t>pas à portée de main.</a:t>
             </a:r>
-            <a:endParaRPr lang="en-US" sz="2300" dirty="0"/>
-          </a:p>
-        </p:txBody>
-      </p:sp>
-      <p:sp>
-        <p:nvSpPr>
-          <p:cNvPr id="18" name="Text 16"/>
-          <p:cNvSpPr/>
-          <p:nvPr/>
-        </p:nvSpPr>
-        <p:spPr>
-          <a:xfrm>
-            <a:off x="7086600" y="4343400"/>
-            <a:ext cx="4572000" cy="868680"/>
+            <a:endParaRPr lang="en-US" sz="3400" dirty="0"/>
+          </a:p>
+        </p:txBody>
+      </p:sp>
+      <p:sp>
+        <p:nvSpPr>
+          <p:cNvPr id="4" name="Text 2"/>
+          <p:cNvSpPr/>
+          <p:nvPr/>
+        </p:nvSpPr>
+        <p:spPr>
+          <a:xfrm>
+            <a:off x="1097280" y="3977640"/>
+            <a:ext cx="9994392" cy="685800"/>
           </a:xfrm>
           <a:prstGeom prst="rect">
             <a:avLst/>
@@ -7733,13 +6545,10 @@
           <a:lstStyle/>
           <a:p>
             <a:pPr algn="ctr" indent="0" marL="0">
-              <a:lnSpc>
-                <a:spcPts val="2200"/>
-              </a:lnSpc>
-              <a:buNone/>
-            </a:pPr>
-            <a:r>
-              <a:rPr lang="en-US" sz="1800" b="1" dirty="0">
+              <a:buNone/>
+            </a:pPr>
+            <a:r>
+              <a:rPr lang="en-US" sz="2400" b="1" dirty="0">
                 <a:solidFill>
                   <a:srgbClr val="0488C1"/>
                 </a:solidFill>
@@ -7749,7 +6558,7 @@
               </a:rPr>
               <a:t>Trois outils pour la mettre à portée de main.</a:t>
             </a:r>
-            <a:endParaRPr lang="en-US" sz="1800" dirty="0"/>
+            <a:endParaRPr lang="en-US" sz="2400" dirty="0"/>
           </a:p>
         </p:txBody>
       </p:sp>
@@ -7805,8 +6614,8 @@
         </p:nvSpPr>
         <p:spPr>
           <a:xfrm>
-            <a:off x="3809848" y="822960"/>
-            <a:ext cx="4572000" cy="4572000"/>
+            <a:off x="3718408" y="685800"/>
+            <a:ext cx="4754880" cy="4754880"/>
           </a:xfrm>
           <a:prstGeom prst="ellipse">
             <a:avLst/>
@@ -7825,8 +6634,8 @@
         </p:nvSpPr>
         <p:spPr>
           <a:xfrm>
-            <a:off x="0" y="1325880"/>
-            <a:ext cx="12191695" cy="2560320"/>
+            <a:off x="0" y="1051560"/>
+            <a:ext cx="12191695" cy="3017520"/>
           </a:xfrm>
           <a:prstGeom prst="rect">
             <a:avLst/>
@@ -7842,9 +6651,9 @@
               <a:buNone/>
             </a:pPr>
             <a:r>
-              <a:rPr lang="en-US" sz="15000" b="1" dirty="0">
-                <a:solidFill>
-                  <a:srgbClr val="0488C1"/>
+              <a:rPr lang="en-US" sz="18000" b="1" dirty="0">
+                <a:solidFill>
+                  <a:srgbClr val="049ED5"/>
                 </a:solidFill>
                 <a:latin typeface="Arial" pitchFamily="34" charset="0"/>
                 <a:ea typeface="Arial" pitchFamily="34" charset="-122"/>
@@ -7852,7 +6661,7 @@
               </a:rPr>
               <a:t>01</a:t>
             </a:r>
-            <a:endParaRPr lang="en-US" sz="15000" dirty="0"/>
+            <a:endParaRPr lang="en-US" sz="18000" dirty="0"/>
           </a:p>
         </p:txBody>
       </p:sp>
@@ -7864,7 +6673,7 @@
         </p:nvSpPr>
         <p:spPr>
           <a:xfrm>
-            <a:off x="914400" y="4206240"/>
+            <a:off x="914400" y="4434840"/>
             <a:ext cx="10362895" cy="640080"/>
           </a:xfrm>
           <a:prstGeom prst="rect">
@@ -7947,8 +6756,8 @@
         </p:nvSpPr>
         <p:spPr>
           <a:xfrm>
-            <a:off x="548640" y="640080"/>
-            <a:ext cx="5486400" cy="274320"/>
+            <a:off x="2103120" y="1325880"/>
+            <a:ext cx="7955280" cy="256032"/>
           </a:xfrm>
           <a:prstGeom prst="rect">
             <a:avLst/>
@@ -7964,7 +6773,7 @@
               <a:buNone/>
             </a:pPr>
             <a:r>
-              <a:rPr lang="en-US" sz="1100" b="1" spc="300" kern="0" dirty="0">
+              <a:rPr lang="en-US" sz="900" b="1" spc="250" kern="0" dirty="0">
                 <a:solidFill>
                   <a:srgbClr val="0488C1"/>
                 </a:solidFill>
@@ -7974,7 +6783,7 @@
               </a:rPr>
               <a:t>CAS 1 · APRÈS LE RENDEZ-VOUS</a:t>
             </a:r>
-            <a:endParaRPr lang="en-US" sz="1100" dirty="0"/>
+            <a:endParaRPr lang="en-US" sz="900" dirty="0"/>
           </a:p>
         </p:txBody>
       </p:sp>
@@ -7986,8 +6795,8 @@
         </p:nvSpPr>
         <p:spPr>
           <a:xfrm>
-            <a:off x="548640" y="987552"/>
-            <a:ext cx="5486400" cy="685800"/>
+            <a:off x="2103120" y="1673352"/>
+            <a:ext cx="7955280" cy="685800"/>
           </a:xfrm>
           <a:prstGeom prst="rect">
             <a:avLst/>
@@ -8025,8 +6834,8 @@
         </p:nvSpPr>
         <p:spPr>
           <a:xfrm>
-            <a:off x="548640" y="1691640"/>
-            <a:ext cx="5074920" cy="1783080"/>
+            <a:off x="2103120" y="2514600"/>
+            <a:ext cx="7772400" cy="1600200"/>
           </a:xfrm>
           <a:prstGeom prst="rect">
             <a:avLst/>
@@ -8040,12 +6849,12 @@
           <a:p>
             <a:pPr indent="0" marL="0">
               <a:lnSpc>
-                <a:spcPts val="1650"/>
+                <a:spcPts val="1700"/>
               </a:lnSpc>
               <a:buNone/>
             </a:pPr>
             <a:r>
-              <a:rPr lang="en-US" sz="1200" i="1" dirty="0">
+              <a:rPr lang="en-US" sz="1250" i="1" dirty="0">
                 <a:solidFill>
                   <a:srgbClr val="6B6D72"/>
                 </a:solidFill>
@@ -8057,12 +6866,12 @@
             </a:r>
             <a:pPr indent="0" marL="0">
               <a:lnSpc>
-                <a:spcPts val="1650"/>
+                <a:spcPts val="1700"/>
               </a:lnSpc>
               <a:buNone/>
             </a:pPr>
             <a:r>
-              <a:rPr lang="en-US" sz="1200" b="1" i="1" dirty="0">
+              <a:rPr lang="en-US" sz="1250" b="1" i="1" dirty="0">
                 <a:solidFill>
                   <a:srgbClr val="00A1E0"/>
                 </a:solidFill>
@@ -8074,12 +6883,12 @@
             </a:r>
             <a:pPr indent="0" marL="0">
               <a:lnSpc>
-                <a:spcPts val="1650"/>
+                <a:spcPts val="1700"/>
               </a:lnSpc>
               <a:buNone/>
             </a:pPr>
             <a:r>
-              <a:rPr lang="en-US" sz="1200" i="1" dirty="0">
+              <a:rPr lang="en-US" sz="1250" i="1" dirty="0">
                 <a:solidFill>
                   <a:srgbClr val="6B6D72"/>
                 </a:solidFill>
@@ -8091,12 +6900,12 @@
             </a:r>
             <a:pPr indent="0" marL="0">
               <a:lnSpc>
-                <a:spcPts val="1650"/>
+                <a:spcPts val="1700"/>
               </a:lnSpc>
               <a:buNone/>
             </a:pPr>
             <a:r>
-              <a:rPr lang="en-US" sz="1200" b="1" i="1" dirty="0">
+              <a:rPr lang="en-US" sz="1250" b="1" i="1" dirty="0">
                 <a:solidFill>
                   <a:srgbClr val="25262A"/>
                 </a:solidFill>
@@ -8108,12 +6917,12 @@
             </a:r>
             <a:pPr indent="0" marL="0">
               <a:lnSpc>
-                <a:spcPts val="1650"/>
+                <a:spcPts val="1700"/>
               </a:lnSpc>
               <a:buNone/>
             </a:pPr>
             <a:r>
-              <a:rPr lang="en-US" sz="1200" i="1" dirty="0">
+              <a:rPr lang="en-US" sz="1250" i="1" dirty="0">
                 <a:solidFill>
                   <a:srgbClr val="6B6D72"/>
                 </a:solidFill>
@@ -8123,7 +6932,7 @@
               </a:rPr>
               <a:t>, au bon endroit.</a:t>
             </a:r>
-            <a:endParaRPr lang="en-US" sz="1200" dirty="0"/>
+            <a:endParaRPr lang="en-US" sz="1250" dirty="0"/>
           </a:p>
         </p:txBody>
       </p:sp>
@@ -8179,8 +6988,8 @@
         </p:nvSpPr>
         <p:spPr>
           <a:xfrm>
-            <a:off x="548640" y="640080"/>
-            <a:ext cx="5486400" cy="274320"/>
+            <a:off x="2103120" y="1325880"/>
+            <a:ext cx="7955280" cy="256032"/>
           </a:xfrm>
           <a:prstGeom prst="rect">
             <a:avLst/>
@@ -8196,7 +7005,7 @@
               <a:buNone/>
             </a:pPr>
             <a:r>
-              <a:rPr lang="en-US" sz="1100" b="1" spc="300" kern="0" dirty="0">
+              <a:rPr lang="en-US" sz="900" b="1" spc="250" kern="0" dirty="0">
                 <a:solidFill>
                   <a:srgbClr val="0488C1"/>
                 </a:solidFill>
@@ -8206,7 +7015,7 @@
               </a:rPr>
               <a:t>CAS 1 · APRÈS LE RENDEZ-VOUS</a:t>
             </a:r>
-            <a:endParaRPr lang="en-US" sz="1100" dirty="0"/>
+            <a:endParaRPr lang="en-US" sz="900" dirty="0"/>
           </a:p>
         </p:txBody>
       </p:sp>
@@ -8218,8 +7027,8 @@
         </p:nvSpPr>
         <p:spPr>
           <a:xfrm>
-            <a:off x="548640" y="987552"/>
-            <a:ext cx="5486400" cy="685800"/>
+            <a:off x="2103120" y="1673352"/>
+            <a:ext cx="7955280" cy="685800"/>
           </a:xfrm>
           <a:prstGeom prst="rect">
             <a:avLst/>
@@ -8257,8 +7066,8 @@
         </p:nvSpPr>
         <p:spPr>
           <a:xfrm>
-            <a:off x="548640" y="1691640"/>
-            <a:ext cx="5074920" cy="1783080"/>
+            <a:off x="2103120" y="2514600"/>
+            <a:ext cx="7772400" cy="1600200"/>
           </a:xfrm>
           <a:prstGeom prst="rect">
             <a:avLst/>
@@ -8272,12 +7081,12 @@
           <a:p>
             <a:pPr indent="0" marL="0">
               <a:lnSpc>
-                <a:spcPts val="1650"/>
+                <a:spcPts val="1700"/>
               </a:lnSpc>
               <a:buNone/>
             </a:pPr>
             <a:r>
-              <a:rPr lang="en-US" sz="1200" i="1" dirty="0">
+              <a:rPr lang="en-US" sz="1250" i="1" dirty="0">
                 <a:solidFill>
                   <a:srgbClr val="6B6D72"/>
                 </a:solidFill>
@@ -8289,12 +7098,12 @@
             </a:r>
             <a:pPr indent="0" marL="0">
               <a:lnSpc>
-                <a:spcPts val="1650"/>
+                <a:spcPts val="1700"/>
               </a:lnSpc>
               <a:buNone/>
             </a:pPr>
             <a:r>
-              <a:rPr lang="en-US" sz="1200" b="1" i="1" dirty="0">
+              <a:rPr lang="en-US" sz="1250" b="1" i="1" dirty="0">
                 <a:solidFill>
                   <a:srgbClr val="00A1E0"/>
                 </a:solidFill>
@@ -8306,12 +7115,12 @@
             </a:r>
             <a:pPr indent="0" marL="0">
               <a:lnSpc>
-                <a:spcPts val="1650"/>
+                <a:spcPts val="1700"/>
               </a:lnSpc>
               <a:buNone/>
             </a:pPr>
             <a:r>
-              <a:rPr lang="en-US" sz="1200" i="1" dirty="0">
+              <a:rPr lang="en-US" sz="1250" i="1" dirty="0">
                 <a:solidFill>
                   <a:srgbClr val="6B6D72"/>
                 </a:solidFill>
@@ -8323,12 +7132,12 @@
             </a:r>
             <a:pPr indent="0" marL="0">
               <a:lnSpc>
-                <a:spcPts val="1650"/>
+                <a:spcPts val="1700"/>
               </a:lnSpc>
               <a:buNone/>
             </a:pPr>
             <a:r>
-              <a:rPr lang="en-US" sz="1200" b="1" i="1" dirty="0">
+              <a:rPr lang="en-US" sz="1250" b="1" i="1" dirty="0">
                 <a:solidFill>
                   <a:srgbClr val="25262A"/>
                 </a:solidFill>
@@ -8340,12 +7149,12 @@
             </a:r>
             <a:pPr indent="0" marL="0">
               <a:lnSpc>
-                <a:spcPts val="1650"/>
+                <a:spcPts val="1700"/>
               </a:lnSpc>
               <a:buNone/>
             </a:pPr>
             <a:r>
-              <a:rPr lang="en-US" sz="1200" i="1" dirty="0">
+              <a:rPr lang="en-US" sz="1250" i="1" dirty="0">
                 <a:solidFill>
                   <a:srgbClr val="6B6D72"/>
                 </a:solidFill>
@@ -8355,7 +7164,7 @@
               </a:rPr>
               <a:t>, au bon endroit.</a:t>
             </a:r>
-            <a:endParaRPr lang="en-US" sz="1200" dirty="0"/>
+            <a:endParaRPr lang="en-US" sz="1250" dirty="0"/>
           </a:p>
         </p:txBody>
       </p:sp>
@@ -8367,7 +7176,7 @@
         </p:nvSpPr>
         <p:spPr>
           <a:xfrm>
-            <a:off x="548640" y="3657600"/>
+            <a:off x="2103120" y="4434840"/>
             <a:ext cx="292608" cy="292608"/>
           </a:xfrm>
           <a:prstGeom prst="ellipse">
@@ -8387,7 +7196,7 @@
         </p:nvSpPr>
         <p:spPr>
           <a:xfrm>
-            <a:off x="548640" y="3657600"/>
+            <a:off x="2103120" y="4434840"/>
             <a:ext cx="292608" cy="292608"/>
           </a:xfrm>
           <a:prstGeom prst="rect">
@@ -8426,7 +7235,7 @@
         </p:nvSpPr>
         <p:spPr>
           <a:xfrm>
-            <a:off x="960120" y="3643884"/>
+            <a:off x="2514600" y="4421124"/>
             <a:ext cx="4754880" cy="329184"/>
           </a:xfrm>
           <a:prstGeom prst="rect">
@@ -8465,7 +7274,7 @@
         </p:nvSpPr>
         <p:spPr>
           <a:xfrm>
-            <a:off x="548640" y="4133088"/>
+            <a:off x="2103120" y="4910328"/>
             <a:ext cx="292608" cy="292608"/>
           </a:xfrm>
           <a:prstGeom prst="ellipse">
@@ -8485,7 +7294,7 @@
         </p:nvSpPr>
         <p:spPr>
           <a:xfrm>
-            <a:off x="548640" y="4133088"/>
+            <a:off x="2103120" y="4910328"/>
             <a:ext cx="292608" cy="292608"/>
           </a:xfrm>
           <a:prstGeom prst="rect">
@@ -8524,7 +7333,7 @@
         </p:nvSpPr>
         <p:spPr>
           <a:xfrm>
-            <a:off x="960120" y="4119372"/>
+            <a:off x="2514600" y="4896612"/>
             <a:ext cx="4754880" cy="329184"/>
           </a:xfrm>
           <a:prstGeom prst="rect">
@@ -8563,7 +7372,7 @@
         </p:nvSpPr>
         <p:spPr>
           <a:xfrm>
-            <a:off x="548640" y="4608576"/>
+            <a:off x="2103120" y="5385816"/>
             <a:ext cx="292608" cy="292608"/>
           </a:xfrm>
           <a:prstGeom prst="ellipse">
@@ -8583,7 +7392,7 @@
         </p:nvSpPr>
         <p:spPr>
           <a:xfrm>
-            <a:off x="548640" y="4608576"/>
+            <a:off x="2103120" y="5385816"/>
             <a:ext cx="292608" cy="292608"/>
           </a:xfrm>
           <a:prstGeom prst="rect">
@@ -8622,7 +7431,7 @@
         </p:nvSpPr>
         <p:spPr>
           <a:xfrm>
-            <a:off x="960120" y="4594860"/>
+            <a:off x="2514600" y="5372100"/>
             <a:ext cx="4754880" cy="329184"/>
           </a:xfrm>
           <a:prstGeom prst="rect">
@@ -8706,7 +7515,7 @@
         <p:spPr>
           <a:xfrm>
             <a:off x="548640" y="640080"/>
-            <a:ext cx="5486400" cy="274320"/>
+            <a:ext cx="5486400" cy="256032"/>
           </a:xfrm>
           <a:prstGeom prst="rect">
             <a:avLst/>
@@ -8722,7 +7531,7 @@
               <a:buNone/>
             </a:pPr>
             <a:r>
-              <a:rPr lang="en-US" sz="1100" b="1" spc="300" kern="0" dirty="0">
+              <a:rPr lang="en-US" sz="900" b="1" spc="250" kern="0" dirty="0">
                 <a:solidFill>
                   <a:srgbClr val="0488C1"/>
                 </a:solidFill>
@@ -8732,7 +7541,7 @@
               </a:rPr>
               <a:t>CAS 1 · APRÈS LE RENDEZ-VOUS</a:t>
             </a:r>
-            <a:endParaRPr lang="en-US" sz="1100" dirty="0"/>
+            <a:endParaRPr lang="en-US" sz="900" dirty="0"/>
           </a:p>
         </p:txBody>
       </p:sp>
@@ -8798,12 +7607,12 @@
           <a:p>
             <a:pPr indent="0" marL="0">
               <a:lnSpc>
-                <a:spcPts val="1650"/>
+                <a:spcPts val="1700"/>
               </a:lnSpc>
               <a:buNone/>
             </a:pPr>
             <a:r>
-              <a:rPr lang="en-US" sz="1200" i="1" dirty="0">
+              <a:rPr lang="en-US" sz="1250" i="1" dirty="0">
                 <a:solidFill>
                   <a:srgbClr val="6B6D72"/>
                 </a:solidFill>
@@ -8815,12 +7624,12 @@
             </a:r>
             <a:pPr indent="0" marL="0">
               <a:lnSpc>
-                <a:spcPts val="1650"/>
+                <a:spcPts val="1700"/>
               </a:lnSpc>
               <a:buNone/>
             </a:pPr>
             <a:r>
-              <a:rPr lang="en-US" sz="1200" b="1" i="1" dirty="0">
+              <a:rPr lang="en-US" sz="1250" b="1" i="1" dirty="0">
                 <a:solidFill>
                   <a:srgbClr val="00A1E0"/>
                 </a:solidFill>
@@ -8832,12 +7641,12 @@
             </a:r>
             <a:pPr indent="0" marL="0">
               <a:lnSpc>
-                <a:spcPts val="1650"/>
+                <a:spcPts val="1700"/>
               </a:lnSpc>
               <a:buNone/>
             </a:pPr>
             <a:r>
-              <a:rPr lang="en-US" sz="1200" i="1" dirty="0">
+              <a:rPr lang="en-US" sz="1250" i="1" dirty="0">
                 <a:solidFill>
                   <a:srgbClr val="6B6D72"/>
                 </a:solidFill>
@@ -8849,12 +7658,12 @@
             </a:r>
             <a:pPr indent="0" marL="0">
               <a:lnSpc>
-                <a:spcPts val="1650"/>
+                <a:spcPts val="1700"/>
               </a:lnSpc>
               <a:buNone/>
             </a:pPr>
             <a:r>
-              <a:rPr lang="en-US" sz="1200" b="1" i="1" dirty="0">
+              <a:rPr lang="en-US" sz="1250" b="1" i="1" dirty="0">
                 <a:solidFill>
                   <a:srgbClr val="25262A"/>
                 </a:solidFill>
@@ -8866,12 +7675,12 @@
             </a:r>
             <a:pPr indent="0" marL="0">
               <a:lnSpc>
-                <a:spcPts val="1650"/>
+                <a:spcPts val="1700"/>
               </a:lnSpc>
               <a:buNone/>
             </a:pPr>
             <a:r>
-              <a:rPr lang="en-US" sz="1200" i="1" dirty="0">
+              <a:rPr lang="en-US" sz="1250" i="1" dirty="0">
                 <a:solidFill>
                   <a:srgbClr val="6B6D72"/>
                 </a:solidFill>
@@ -8881,7 +7690,7 @@
               </a:rPr>
               <a:t>, au bon endroit.</a:t>
             </a:r>
-            <a:endParaRPr lang="en-US" sz="1200" dirty="0"/>
+            <a:endParaRPr lang="en-US" sz="1250" dirty="0"/>
           </a:p>
         </p:txBody>
       </p:sp>
@@ -9489,7 +8298,7 @@
         <p:spPr>
           <a:xfrm>
             <a:off x="548640" y="640080"/>
-            <a:ext cx="5486400" cy="274320"/>
+            <a:ext cx="5486400" cy="256032"/>
           </a:xfrm>
           <a:prstGeom prst="rect">
             <a:avLst/>
@@ -9505,7 +8314,7 @@
               <a:buNone/>
             </a:pPr>
             <a:r>
-              <a:rPr lang="en-US" sz="1100" b="1" spc="300" kern="0" dirty="0">
+              <a:rPr lang="en-US" sz="900" b="1" spc="250" kern="0" dirty="0">
                 <a:solidFill>
                   <a:srgbClr val="0488C1"/>
                 </a:solidFill>
@@ -9515,7 +8324,7 @@
               </a:rPr>
               <a:t>CAS 1 · APRÈS LE RENDEZ-VOUS</a:t>
             </a:r>
-            <a:endParaRPr lang="en-US" sz="1100" dirty="0"/>
+            <a:endParaRPr lang="en-US" sz="900" dirty="0"/>
           </a:p>
         </p:txBody>
       </p:sp>
@@ -9581,12 +8390,12 @@
           <a:p>
             <a:pPr indent="0" marL="0">
               <a:lnSpc>
-                <a:spcPts val="1650"/>
+                <a:spcPts val="1700"/>
               </a:lnSpc>
               <a:buNone/>
             </a:pPr>
             <a:r>
-              <a:rPr lang="en-US" sz="1200" i="1" dirty="0">
+              <a:rPr lang="en-US" sz="1250" i="1" dirty="0">
                 <a:solidFill>
                   <a:srgbClr val="6B6D72"/>
                 </a:solidFill>
@@ -9598,12 +8407,12 @@
             </a:r>
             <a:pPr indent="0" marL="0">
               <a:lnSpc>
-                <a:spcPts val="1650"/>
+                <a:spcPts val="1700"/>
               </a:lnSpc>
               <a:buNone/>
             </a:pPr>
             <a:r>
-              <a:rPr lang="en-US" sz="1200" b="1" i="1" dirty="0">
+              <a:rPr lang="en-US" sz="1250" b="1" i="1" dirty="0">
                 <a:solidFill>
                   <a:srgbClr val="00A1E0"/>
                 </a:solidFill>
@@ -9615,12 +8424,12 @@
             </a:r>
             <a:pPr indent="0" marL="0">
               <a:lnSpc>
-                <a:spcPts val="1650"/>
+                <a:spcPts val="1700"/>
               </a:lnSpc>
               <a:buNone/>
             </a:pPr>
             <a:r>
-              <a:rPr lang="en-US" sz="1200" i="1" dirty="0">
+              <a:rPr lang="en-US" sz="1250" i="1" dirty="0">
                 <a:solidFill>
                   <a:srgbClr val="6B6D72"/>
                 </a:solidFill>
@@ -9632,12 +8441,12 @@
             </a:r>
             <a:pPr indent="0" marL="0">
               <a:lnSpc>
-                <a:spcPts val="1650"/>
+                <a:spcPts val="1700"/>
               </a:lnSpc>
               <a:buNone/>
             </a:pPr>
             <a:r>
-              <a:rPr lang="en-US" sz="1200" b="1" i="1" dirty="0">
+              <a:rPr lang="en-US" sz="1250" b="1" i="1" dirty="0">
                 <a:solidFill>
                   <a:srgbClr val="25262A"/>
                 </a:solidFill>
@@ -9649,12 +8458,12 @@
             </a:r>
             <a:pPr indent="0" marL="0">
               <a:lnSpc>
-                <a:spcPts val="1650"/>
+                <a:spcPts val="1700"/>
               </a:lnSpc>
               <a:buNone/>
             </a:pPr>
             <a:r>
-              <a:rPr lang="en-US" sz="1200" i="1" dirty="0">
+              <a:rPr lang="en-US" sz="1250" i="1" dirty="0">
                 <a:solidFill>
                   <a:srgbClr val="6B6D72"/>
                 </a:solidFill>
@@ -9664,7 +8473,7 @@
               </a:rPr>
               <a:t>, au bon endroit.</a:t>
             </a:r>
-            <a:endParaRPr lang="en-US" sz="1200" dirty="0"/>
+            <a:endParaRPr lang="en-US" sz="1250" dirty="0"/>
           </a:p>
         </p:txBody>
       </p:sp>
@@ -10039,7 +8848,7 @@
         <p:spPr>
           <a:xfrm>
             <a:off x="548640" y="640080"/>
-            <a:ext cx="5486400" cy="274320"/>
+            <a:ext cx="5486400" cy="256032"/>
           </a:xfrm>
           <a:prstGeom prst="rect">
             <a:avLst/>
@@ -10055,7 +8864,7 @@
               <a:buNone/>
             </a:pPr>
             <a:r>
-              <a:rPr lang="en-US" sz="1100" b="1" spc="300" kern="0" dirty="0">
+              <a:rPr lang="en-US" sz="900" b="1" spc="250" kern="0" dirty="0">
                 <a:solidFill>
                   <a:srgbClr val="0488C1"/>
                 </a:solidFill>
@@ -10065,7 +8874,7 @@
               </a:rPr>
               <a:t>CAS 1 · APRÈS LE RENDEZ-VOUS</a:t>
             </a:r>
-            <a:endParaRPr lang="en-US" sz="1100" dirty="0"/>
+            <a:endParaRPr lang="en-US" sz="900" dirty="0"/>
           </a:p>
         </p:txBody>
       </p:sp>
@@ -10131,12 +8940,12 @@
           <a:p>
             <a:pPr indent="0" marL="0">
               <a:lnSpc>
-                <a:spcPts val="1650"/>
+                <a:spcPts val="1700"/>
               </a:lnSpc>
               <a:buNone/>
             </a:pPr>
             <a:r>
-              <a:rPr lang="en-US" sz="1200" i="1" dirty="0">
+              <a:rPr lang="en-US" sz="1250" i="1" dirty="0">
                 <a:solidFill>
                   <a:srgbClr val="6B6D72"/>
                 </a:solidFill>
@@ -10148,12 +8957,12 @@
             </a:r>
             <a:pPr indent="0" marL="0">
               <a:lnSpc>
-                <a:spcPts val="1650"/>
+                <a:spcPts val="1700"/>
               </a:lnSpc>
               <a:buNone/>
             </a:pPr>
             <a:r>
-              <a:rPr lang="en-US" sz="1200" b="1" i="1" dirty="0">
+              <a:rPr lang="en-US" sz="1250" b="1" i="1" dirty="0">
                 <a:solidFill>
                   <a:srgbClr val="00A1E0"/>
                 </a:solidFill>
@@ -10165,12 +8974,12 @@
             </a:r>
             <a:pPr indent="0" marL="0">
               <a:lnSpc>
-                <a:spcPts val="1650"/>
+                <a:spcPts val="1700"/>
               </a:lnSpc>
               <a:buNone/>
             </a:pPr>
             <a:r>
-              <a:rPr lang="en-US" sz="1200" i="1" dirty="0">
+              <a:rPr lang="en-US" sz="1250" i="1" dirty="0">
                 <a:solidFill>
                   <a:srgbClr val="6B6D72"/>
                 </a:solidFill>
@@ -10182,12 +8991,12 @@
             </a:r>
             <a:pPr indent="0" marL="0">
               <a:lnSpc>
-                <a:spcPts val="1650"/>
+                <a:spcPts val="1700"/>
               </a:lnSpc>
               <a:buNone/>
             </a:pPr>
             <a:r>
-              <a:rPr lang="en-US" sz="1200" b="1" i="1" dirty="0">
+              <a:rPr lang="en-US" sz="1250" b="1" i="1" dirty="0">
                 <a:solidFill>
                   <a:srgbClr val="25262A"/>
                 </a:solidFill>
@@ -10199,12 +9008,12 @@
             </a:r>
             <a:pPr indent="0" marL="0">
               <a:lnSpc>
-                <a:spcPts val="1650"/>
+                <a:spcPts val="1700"/>
               </a:lnSpc>
               <a:buNone/>
             </a:pPr>
             <a:r>
-              <a:rPr lang="en-US" sz="1200" i="1" dirty="0">
+              <a:rPr lang="en-US" sz="1250" i="1" dirty="0">
                 <a:solidFill>
                   <a:srgbClr val="6B6D72"/>
                 </a:solidFill>
@@ -10214,7 +9023,7 @@
               </a:rPr>
               <a:t>, au bon endroit.</a:t>
             </a:r>
-            <a:endParaRPr lang="en-US" sz="1200" dirty="0"/>
+            <a:endParaRPr lang="en-US" sz="1250" dirty="0"/>
           </a:p>
         </p:txBody>
       </p:sp>
@@ -10589,7 +9398,7 @@
         <p:spPr>
           <a:xfrm>
             <a:off x="548640" y="640080"/>
-            <a:ext cx="5486400" cy="274320"/>
+            <a:ext cx="5486400" cy="256032"/>
           </a:xfrm>
           <a:prstGeom prst="rect">
             <a:avLst/>
@@ -10605,7 +9414,7 @@
               <a:buNone/>
             </a:pPr>
             <a:r>
-              <a:rPr lang="en-US" sz="1100" b="1" spc="300" kern="0" dirty="0">
+              <a:rPr lang="en-US" sz="900" b="1" spc="250" kern="0" dirty="0">
                 <a:solidFill>
                   <a:srgbClr val="0488C1"/>
                 </a:solidFill>
@@ -10615,7 +9424,7 @@
               </a:rPr>
               <a:t>CAS 1 · APRÈS LE RENDEZ-VOUS</a:t>
             </a:r>
-            <a:endParaRPr lang="en-US" sz="1100" dirty="0"/>
+            <a:endParaRPr lang="en-US" sz="900" dirty="0"/>
           </a:p>
         </p:txBody>
       </p:sp>
@@ -10681,12 +9490,12 @@
           <a:p>
             <a:pPr indent="0" marL="0">
               <a:lnSpc>
-                <a:spcPts val="1650"/>
+                <a:spcPts val="1700"/>
               </a:lnSpc>
               <a:buNone/>
             </a:pPr>
             <a:r>
-              <a:rPr lang="en-US" sz="1200" i="1" dirty="0">
+              <a:rPr lang="en-US" sz="1250" i="1" dirty="0">
                 <a:solidFill>
                   <a:srgbClr val="6B6D72"/>
                 </a:solidFill>
@@ -10698,12 +9507,12 @@
             </a:r>
             <a:pPr indent="0" marL="0">
               <a:lnSpc>
-                <a:spcPts val="1650"/>
+                <a:spcPts val="1700"/>
               </a:lnSpc>
               <a:buNone/>
             </a:pPr>
             <a:r>
-              <a:rPr lang="en-US" sz="1200" b="1" i="1" dirty="0">
+              <a:rPr lang="en-US" sz="1250" b="1" i="1" dirty="0">
                 <a:solidFill>
                   <a:srgbClr val="00A1E0"/>
                 </a:solidFill>
@@ -10715,12 +9524,12 @@
             </a:r>
             <a:pPr indent="0" marL="0">
               <a:lnSpc>
-                <a:spcPts val="1650"/>
+                <a:spcPts val="1700"/>
               </a:lnSpc>
               <a:buNone/>
             </a:pPr>
             <a:r>
-              <a:rPr lang="en-US" sz="1200" i="1" dirty="0">
+              <a:rPr lang="en-US" sz="1250" i="1" dirty="0">
                 <a:solidFill>
                   <a:srgbClr val="6B6D72"/>
                 </a:solidFill>
@@ -10732,12 +9541,12 @@
             </a:r>
             <a:pPr indent="0" marL="0">
               <a:lnSpc>
-                <a:spcPts val="1650"/>
+                <a:spcPts val="1700"/>
               </a:lnSpc>
               <a:buNone/>
             </a:pPr>
             <a:r>
-              <a:rPr lang="en-US" sz="1200" b="1" i="1" dirty="0">
+              <a:rPr lang="en-US" sz="1250" b="1" i="1" dirty="0">
                 <a:solidFill>
                   <a:srgbClr val="25262A"/>
                 </a:solidFill>
@@ -10749,12 +9558,12 @@
             </a:r>
             <a:pPr indent="0" marL="0">
               <a:lnSpc>
-                <a:spcPts val="1650"/>
+                <a:spcPts val="1700"/>
               </a:lnSpc>
               <a:buNone/>
             </a:pPr>
             <a:r>
-              <a:rPr lang="en-US" sz="1200" i="1" dirty="0">
+              <a:rPr lang="en-US" sz="1250" i="1" dirty="0">
                 <a:solidFill>
                   <a:srgbClr val="6B6D72"/>
                 </a:solidFill>
@@ -10764,7 +9573,7 @@
               </a:rPr>
               <a:t>, au bon endroit.</a:t>
             </a:r>
-            <a:endParaRPr lang="en-US" sz="1200" dirty="0"/>
+            <a:endParaRPr lang="en-US" sz="1250" dirty="0"/>
           </a:p>
         </p:txBody>
       </p:sp>
@@ -11139,7 +9948,7 @@
         <p:spPr>
           <a:xfrm>
             <a:off x="548640" y="640080"/>
-            <a:ext cx="5486400" cy="274320"/>
+            <a:ext cx="5486400" cy="256032"/>
           </a:xfrm>
           <a:prstGeom prst="rect">
             <a:avLst/>
@@ -11155,7 +9964,7 @@
               <a:buNone/>
             </a:pPr>
             <a:r>
-              <a:rPr lang="en-US" sz="1100" b="1" spc="300" kern="0" dirty="0">
+              <a:rPr lang="en-US" sz="900" b="1" spc="250" kern="0" dirty="0">
                 <a:solidFill>
                   <a:srgbClr val="0488C1"/>
                 </a:solidFill>
@@ -11165,7 +9974,7 @@
               </a:rPr>
               <a:t>CAS 1 · APRÈS LE RENDEZ-VOUS</a:t>
             </a:r>
-            <a:endParaRPr lang="en-US" sz="1100" dirty="0"/>
+            <a:endParaRPr lang="en-US" sz="900" dirty="0"/>
           </a:p>
         </p:txBody>
       </p:sp>
@@ -11231,12 +10040,12 @@
           <a:p>
             <a:pPr indent="0" marL="0">
               <a:lnSpc>
-                <a:spcPts val="1650"/>
+                <a:spcPts val="1700"/>
               </a:lnSpc>
               <a:buNone/>
             </a:pPr>
             <a:r>
-              <a:rPr lang="en-US" sz="1200" i="1" dirty="0">
+              <a:rPr lang="en-US" sz="1250" i="1" dirty="0">
                 <a:solidFill>
                   <a:srgbClr val="6B6D72"/>
                 </a:solidFill>
@@ -11248,12 +10057,12 @@
             </a:r>
             <a:pPr indent="0" marL="0">
               <a:lnSpc>
-                <a:spcPts val="1650"/>
+                <a:spcPts val="1700"/>
               </a:lnSpc>
               <a:buNone/>
             </a:pPr>
             <a:r>
-              <a:rPr lang="en-US" sz="1200" b="1" i="1" dirty="0">
+              <a:rPr lang="en-US" sz="1250" b="1" i="1" dirty="0">
                 <a:solidFill>
                   <a:srgbClr val="00A1E0"/>
                 </a:solidFill>
@@ -11265,12 +10074,12 @@
             </a:r>
             <a:pPr indent="0" marL="0">
               <a:lnSpc>
-                <a:spcPts val="1650"/>
+                <a:spcPts val="1700"/>
               </a:lnSpc>
               <a:buNone/>
             </a:pPr>
             <a:r>
-              <a:rPr lang="en-US" sz="1200" i="1" dirty="0">
+              <a:rPr lang="en-US" sz="1250" i="1" dirty="0">
                 <a:solidFill>
                   <a:srgbClr val="6B6D72"/>
                 </a:solidFill>
@@ -11282,12 +10091,12 @@
             </a:r>
             <a:pPr indent="0" marL="0">
               <a:lnSpc>
-                <a:spcPts val="1650"/>
+                <a:spcPts val="1700"/>
               </a:lnSpc>
               <a:buNone/>
             </a:pPr>
             <a:r>
-              <a:rPr lang="en-US" sz="1200" b="1" i="1" dirty="0">
+              <a:rPr lang="en-US" sz="1250" b="1" i="1" dirty="0">
                 <a:solidFill>
                   <a:srgbClr val="25262A"/>
                 </a:solidFill>
@@ -11299,12 +10108,12 @@
             </a:r>
             <a:pPr indent="0" marL="0">
               <a:lnSpc>
-                <a:spcPts val="1650"/>
+                <a:spcPts val="1700"/>
               </a:lnSpc>
               <a:buNone/>
             </a:pPr>
             <a:r>
-              <a:rPr lang="en-US" sz="1200" i="1" dirty="0">
+              <a:rPr lang="en-US" sz="1250" i="1" dirty="0">
                 <a:solidFill>
                   <a:srgbClr val="6B6D72"/>
                 </a:solidFill>
@@ -11314,7 +10123,7 @@
               </a:rPr>
               <a:t>, au bon endroit.</a:t>
             </a:r>
-            <a:endParaRPr lang="en-US" sz="1200" dirty="0"/>
+            <a:endParaRPr lang="en-US" sz="1250" dirty="0"/>
           </a:p>
         </p:txBody>
       </p:sp>
@@ -11689,7 +10498,7 @@
         <p:spPr>
           <a:xfrm>
             <a:off x="548640" y="640080"/>
-            <a:ext cx="5486400" cy="274320"/>
+            <a:ext cx="5486400" cy="256032"/>
           </a:xfrm>
           <a:prstGeom prst="rect">
             <a:avLst/>
@@ -11705,7 +10514,7 @@
               <a:buNone/>
             </a:pPr>
             <a:r>
-              <a:rPr lang="en-US" sz="1100" b="1" spc="300" kern="0" dirty="0">
+              <a:rPr lang="en-US" sz="900" b="1" spc="250" kern="0" dirty="0">
                 <a:solidFill>
                   <a:srgbClr val="0488C1"/>
                 </a:solidFill>
@@ -11715,7 +10524,7 @@
               </a:rPr>
               <a:t>CAS 1 · APRÈS LE RENDEZ-VOUS</a:t>
             </a:r>
-            <a:endParaRPr lang="en-US" sz="1100" dirty="0"/>
+            <a:endParaRPr lang="en-US" sz="900" dirty="0"/>
           </a:p>
         </p:txBody>
       </p:sp>
@@ -11781,12 +10590,12 @@
           <a:p>
             <a:pPr indent="0" marL="0">
               <a:lnSpc>
-                <a:spcPts val="1650"/>
+                <a:spcPts val="1700"/>
               </a:lnSpc>
               <a:buNone/>
             </a:pPr>
             <a:r>
-              <a:rPr lang="en-US" sz="1200" i="1" dirty="0">
+              <a:rPr lang="en-US" sz="1250" i="1" dirty="0">
                 <a:solidFill>
                   <a:srgbClr val="6B6D72"/>
                 </a:solidFill>
@@ -11798,12 +10607,12 @@
             </a:r>
             <a:pPr indent="0" marL="0">
               <a:lnSpc>
-                <a:spcPts val="1650"/>
+                <a:spcPts val="1700"/>
               </a:lnSpc>
               <a:buNone/>
             </a:pPr>
             <a:r>
-              <a:rPr lang="en-US" sz="1200" b="1" i="1" dirty="0">
+              <a:rPr lang="en-US" sz="1250" b="1" i="1" dirty="0">
                 <a:solidFill>
                   <a:srgbClr val="00A1E0"/>
                 </a:solidFill>
@@ -11815,12 +10624,12 @@
             </a:r>
             <a:pPr indent="0" marL="0">
               <a:lnSpc>
-                <a:spcPts val="1650"/>
+                <a:spcPts val="1700"/>
               </a:lnSpc>
               <a:buNone/>
             </a:pPr>
             <a:r>
-              <a:rPr lang="en-US" sz="1200" i="1" dirty="0">
+              <a:rPr lang="en-US" sz="1250" i="1" dirty="0">
                 <a:solidFill>
                   <a:srgbClr val="6B6D72"/>
                 </a:solidFill>
@@ -11832,12 +10641,12 @@
             </a:r>
             <a:pPr indent="0" marL="0">
               <a:lnSpc>
-                <a:spcPts val="1650"/>
+                <a:spcPts val="1700"/>
               </a:lnSpc>
               <a:buNone/>
             </a:pPr>
             <a:r>
-              <a:rPr lang="en-US" sz="1200" b="1" i="1" dirty="0">
+              <a:rPr lang="en-US" sz="1250" b="1" i="1" dirty="0">
                 <a:solidFill>
                   <a:srgbClr val="25262A"/>
                 </a:solidFill>
@@ -11849,12 +10658,12 @@
             </a:r>
             <a:pPr indent="0" marL="0">
               <a:lnSpc>
-                <a:spcPts val="1650"/>
+                <a:spcPts val="1700"/>
               </a:lnSpc>
               <a:buNone/>
             </a:pPr>
             <a:r>
-              <a:rPr lang="en-US" sz="1200" i="1" dirty="0">
+              <a:rPr lang="en-US" sz="1250" i="1" dirty="0">
                 <a:solidFill>
                   <a:srgbClr val="6B6D72"/>
                 </a:solidFill>
@@ -11864,7 +10673,7 @@
               </a:rPr>
               <a:t>, au bon endroit.</a:t>
             </a:r>
-            <a:endParaRPr lang="en-US" sz="1200" dirty="0"/>
+            <a:endParaRPr lang="en-US" sz="1250" dirty="0"/>
           </a:p>
         </p:txBody>
       </p:sp>
@@ -12239,7 +11048,7 @@
         <p:spPr>
           <a:xfrm>
             <a:off x="548640" y="640080"/>
-            <a:ext cx="5486400" cy="274320"/>
+            <a:ext cx="5486400" cy="256032"/>
           </a:xfrm>
           <a:prstGeom prst="rect">
             <a:avLst/>
@@ -12255,7 +11064,7 @@
               <a:buNone/>
             </a:pPr>
             <a:r>
-              <a:rPr lang="en-US" sz="1100" b="1" spc="300" kern="0" dirty="0">
+              <a:rPr lang="en-US" sz="900" b="1" spc="250" kern="0" dirty="0">
                 <a:solidFill>
                   <a:srgbClr val="0488C1"/>
                 </a:solidFill>
@@ -12265,7 +11074,7 @@
               </a:rPr>
               <a:t>CAS 1 · APRÈS LE RENDEZ-VOUS</a:t>
             </a:r>
-            <a:endParaRPr lang="en-US" sz="1100" dirty="0"/>
+            <a:endParaRPr lang="en-US" sz="900" dirty="0"/>
           </a:p>
         </p:txBody>
       </p:sp>
@@ -12331,12 +11140,12 @@
           <a:p>
             <a:pPr indent="0" marL="0">
               <a:lnSpc>
-                <a:spcPts val="1650"/>
+                <a:spcPts val="1700"/>
               </a:lnSpc>
               <a:buNone/>
             </a:pPr>
             <a:r>
-              <a:rPr lang="en-US" sz="1200" i="1" dirty="0">
+              <a:rPr lang="en-US" sz="1250" i="1" dirty="0">
                 <a:solidFill>
                   <a:srgbClr val="6B6D72"/>
                 </a:solidFill>
@@ -12348,12 +11157,12 @@
             </a:r>
             <a:pPr indent="0" marL="0">
               <a:lnSpc>
-                <a:spcPts val="1650"/>
+                <a:spcPts val="1700"/>
               </a:lnSpc>
               <a:buNone/>
             </a:pPr>
             <a:r>
-              <a:rPr lang="en-US" sz="1200" b="1" i="1" dirty="0">
+              <a:rPr lang="en-US" sz="1250" b="1" i="1" dirty="0">
                 <a:solidFill>
                   <a:srgbClr val="00A1E0"/>
                 </a:solidFill>
@@ -12365,12 +11174,12 @@
             </a:r>
             <a:pPr indent="0" marL="0">
               <a:lnSpc>
-                <a:spcPts val="1650"/>
+                <a:spcPts val="1700"/>
               </a:lnSpc>
               <a:buNone/>
             </a:pPr>
             <a:r>
-              <a:rPr lang="en-US" sz="1200" i="1" dirty="0">
+              <a:rPr lang="en-US" sz="1250" i="1" dirty="0">
                 <a:solidFill>
                   <a:srgbClr val="6B6D72"/>
                 </a:solidFill>
@@ -12382,12 +11191,12 @@
             </a:r>
             <a:pPr indent="0" marL="0">
               <a:lnSpc>
-                <a:spcPts val="1650"/>
+                <a:spcPts val="1700"/>
               </a:lnSpc>
               <a:buNone/>
             </a:pPr>
             <a:r>
-              <a:rPr lang="en-US" sz="1200" b="1" i="1" dirty="0">
+              <a:rPr lang="en-US" sz="1250" b="1" i="1" dirty="0">
                 <a:solidFill>
                   <a:srgbClr val="25262A"/>
                 </a:solidFill>
@@ -12399,12 +11208,12 @@
             </a:r>
             <a:pPr indent="0" marL="0">
               <a:lnSpc>
-                <a:spcPts val="1650"/>
+                <a:spcPts val="1700"/>
               </a:lnSpc>
               <a:buNone/>
             </a:pPr>
             <a:r>
-              <a:rPr lang="en-US" sz="1200" i="1" dirty="0">
+              <a:rPr lang="en-US" sz="1250" i="1" dirty="0">
                 <a:solidFill>
                   <a:srgbClr val="6B6D72"/>
                 </a:solidFill>
@@ -12414,7 +11223,7 @@
               </a:rPr>
               <a:t>, au bon endroit.</a:t>
             </a:r>
-            <a:endParaRPr lang="en-US" sz="1200" dirty="0"/>
+            <a:endParaRPr lang="en-US" sz="1250" dirty="0"/>
           </a:p>
         </p:txBody>
       </p:sp>
@@ -12789,7 +11598,7 @@
         <p:spPr>
           <a:xfrm>
             <a:off x="548640" y="640080"/>
-            <a:ext cx="5486400" cy="274320"/>
+            <a:ext cx="5486400" cy="256032"/>
           </a:xfrm>
           <a:prstGeom prst="rect">
             <a:avLst/>
@@ -12805,7 +11614,7 @@
               <a:buNone/>
             </a:pPr>
             <a:r>
-              <a:rPr lang="en-US" sz="1100" b="1" spc="300" kern="0" dirty="0">
+              <a:rPr lang="en-US" sz="900" b="1" spc="250" kern="0" dirty="0">
                 <a:solidFill>
                   <a:srgbClr val="0488C1"/>
                 </a:solidFill>
@@ -12815,7 +11624,7 @@
               </a:rPr>
               <a:t>CAS 1 · APRÈS LE RENDEZ-VOUS</a:t>
             </a:r>
-            <a:endParaRPr lang="en-US" sz="1100" dirty="0"/>
+            <a:endParaRPr lang="en-US" sz="900" dirty="0"/>
           </a:p>
         </p:txBody>
       </p:sp>
@@ -12881,12 +11690,12 @@
           <a:p>
             <a:pPr indent="0" marL="0">
               <a:lnSpc>
-                <a:spcPts val="1650"/>
+                <a:spcPts val="1700"/>
               </a:lnSpc>
               <a:buNone/>
             </a:pPr>
             <a:r>
-              <a:rPr lang="en-US" sz="1200" i="1" dirty="0">
+              <a:rPr lang="en-US" sz="1250" i="1" dirty="0">
                 <a:solidFill>
                   <a:srgbClr val="6B6D72"/>
                 </a:solidFill>
@@ -12898,12 +11707,12 @@
             </a:r>
             <a:pPr indent="0" marL="0">
               <a:lnSpc>
-                <a:spcPts val="1650"/>
+                <a:spcPts val="1700"/>
               </a:lnSpc>
               <a:buNone/>
             </a:pPr>
             <a:r>
-              <a:rPr lang="en-US" sz="1200" b="1" i="1" dirty="0">
+              <a:rPr lang="en-US" sz="1250" b="1" i="1" dirty="0">
                 <a:solidFill>
                   <a:srgbClr val="00A1E0"/>
                 </a:solidFill>
@@ -12915,12 +11724,12 @@
             </a:r>
             <a:pPr indent="0" marL="0">
               <a:lnSpc>
-                <a:spcPts val="1650"/>
+                <a:spcPts val="1700"/>
               </a:lnSpc>
               <a:buNone/>
             </a:pPr>
             <a:r>
-              <a:rPr lang="en-US" sz="1200" i="1" dirty="0">
+              <a:rPr lang="en-US" sz="1250" i="1" dirty="0">
                 <a:solidFill>
                   <a:srgbClr val="6B6D72"/>
                 </a:solidFill>
@@ -12932,12 +11741,12 @@
             </a:r>
             <a:pPr indent="0" marL="0">
               <a:lnSpc>
-                <a:spcPts val="1650"/>
+                <a:spcPts val="1700"/>
               </a:lnSpc>
               <a:buNone/>
             </a:pPr>
             <a:r>
-              <a:rPr lang="en-US" sz="1200" b="1" i="1" dirty="0">
+              <a:rPr lang="en-US" sz="1250" b="1" i="1" dirty="0">
                 <a:solidFill>
                   <a:srgbClr val="25262A"/>
                 </a:solidFill>
@@ -12949,12 +11758,12 @@
             </a:r>
             <a:pPr indent="0" marL="0">
               <a:lnSpc>
-                <a:spcPts val="1650"/>
+                <a:spcPts val="1700"/>
               </a:lnSpc>
               <a:buNone/>
             </a:pPr>
             <a:r>
-              <a:rPr lang="en-US" sz="1200" i="1" dirty="0">
+              <a:rPr lang="en-US" sz="1250" i="1" dirty="0">
                 <a:solidFill>
                   <a:srgbClr val="6B6D72"/>
                 </a:solidFill>
@@ -12964,7 +11773,7 @@
               </a:rPr>
               <a:t>, au bon endroit.</a:t>
             </a:r>
-            <a:endParaRPr lang="en-US" sz="1200" dirty="0"/>
+            <a:endParaRPr lang="en-US" sz="1250" dirty="0"/>
           </a:p>
         </p:txBody>
       </p:sp>
@@ -13339,7 +12148,7 @@
         <p:spPr>
           <a:xfrm>
             <a:off x="548640" y="640080"/>
-            <a:ext cx="5486400" cy="274320"/>
+            <a:ext cx="5486400" cy="256032"/>
           </a:xfrm>
           <a:prstGeom prst="rect">
             <a:avLst/>
@@ -13355,7 +12164,7 @@
               <a:buNone/>
             </a:pPr>
             <a:r>
-              <a:rPr lang="en-US" sz="1100" b="1" spc="300" kern="0" dirty="0">
+              <a:rPr lang="en-US" sz="900" b="1" spc="250" kern="0" dirty="0">
                 <a:solidFill>
                   <a:srgbClr val="0488C1"/>
                 </a:solidFill>
@@ -13365,7 +12174,7 @@
               </a:rPr>
               <a:t>CAS 1 · APRÈS LE RENDEZ-VOUS</a:t>
             </a:r>
-            <a:endParaRPr lang="en-US" sz="1100" dirty="0"/>
+            <a:endParaRPr lang="en-US" sz="900" dirty="0"/>
           </a:p>
         </p:txBody>
       </p:sp>
@@ -13431,12 +12240,12 @@
           <a:p>
             <a:pPr indent="0" marL="0">
               <a:lnSpc>
-                <a:spcPts val="1650"/>
+                <a:spcPts val="1700"/>
               </a:lnSpc>
               <a:buNone/>
             </a:pPr>
             <a:r>
-              <a:rPr lang="en-US" sz="1200" i="1" dirty="0">
+              <a:rPr lang="en-US" sz="1250" i="1" dirty="0">
                 <a:solidFill>
                   <a:srgbClr val="6B6D72"/>
                 </a:solidFill>
@@ -13448,12 +12257,12 @@
             </a:r>
             <a:pPr indent="0" marL="0">
               <a:lnSpc>
-                <a:spcPts val="1650"/>
+                <a:spcPts val="1700"/>
               </a:lnSpc>
               <a:buNone/>
             </a:pPr>
             <a:r>
-              <a:rPr lang="en-US" sz="1200" b="1" i="1" dirty="0">
+              <a:rPr lang="en-US" sz="1250" b="1" i="1" dirty="0">
                 <a:solidFill>
                   <a:srgbClr val="00A1E0"/>
                 </a:solidFill>
@@ -13465,12 +12274,12 @@
             </a:r>
             <a:pPr indent="0" marL="0">
               <a:lnSpc>
-                <a:spcPts val="1650"/>
+                <a:spcPts val="1700"/>
               </a:lnSpc>
               <a:buNone/>
             </a:pPr>
             <a:r>
-              <a:rPr lang="en-US" sz="1200" i="1" dirty="0">
+              <a:rPr lang="en-US" sz="1250" i="1" dirty="0">
                 <a:solidFill>
                   <a:srgbClr val="6B6D72"/>
                 </a:solidFill>
@@ -13482,12 +12291,12 @@
             </a:r>
             <a:pPr indent="0" marL="0">
               <a:lnSpc>
-                <a:spcPts val="1650"/>
+                <a:spcPts val="1700"/>
               </a:lnSpc>
               <a:buNone/>
             </a:pPr>
             <a:r>
-              <a:rPr lang="en-US" sz="1200" b="1" i="1" dirty="0">
+              <a:rPr lang="en-US" sz="1250" b="1" i="1" dirty="0">
                 <a:solidFill>
                   <a:srgbClr val="25262A"/>
                 </a:solidFill>
@@ -13499,12 +12308,12 @@
             </a:r>
             <a:pPr indent="0" marL="0">
               <a:lnSpc>
-                <a:spcPts val="1650"/>
+                <a:spcPts val="1700"/>
               </a:lnSpc>
               <a:buNone/>
             </a:pPr>
             <a:r>
-              <a:rPr lang="en-US" sz="1200" i="1" dirty="0">
+              <a:rPr lang="en-US" sz="1250" i="1" dirty="0">
                 <a:solidFill>
                   <a:srgbClr val="6B6D72"/>
                 </a:solidFill>
@@ -13514,7 +12323,7 @@
               </a:rPr>
               <a:t>, au bon endroit.</a:t>
             </a:r>
-            <a:endParaRPr lang="en-US" sz="1200" dirty="0"/>
+            <a:endParaRPr lang="en-US" sz="1250" dirty="0"/>
           </a:p>
         </p:txBody>
       </p:sp>
@@ -13889,7 +12698,7 @@
         <p:spPr>
           <a:xfrm>
             <a:off x="548640" y="640080"/>
-            <a:ext cx="5486400" cy="274320"/>
+            <a:ext cx="5486400" cy="256032"/>
           </a:xfrm>
           <a:prstGeom prst="rect">
             <a:avLst/>
@@ -13905,7 +12714,7 @@
               <a:buNone/>
             </a:pPr>
             <a:r>
-              <a:rPr lang="en-US" sz="1100" b="1" spc="300" kern="0" dirty="0">
+              <a:rPr lang="en-US" sz="900" b="1" spc="250" kern="0" dirty="0">
                 <a:solidFill>
                   <a:srgbClr val="0488C1"/>
                 </a:solidFill>
@@ -13915,7 +12724,7 @@
               </a:rPr>
               <a:t>CAS 1 · APRÈS LE RENDEZ-VOUS</a:t>
             </a:r>
-            <a:endParaRPr lang="en-US" sz="1100" dirty="0"/>
+            <a:endParaRPr lang="en-US" sz="900" dirty="0"/>
           </a:p>
         </p:txBody>
       </p:sp>
@@ -13981,12 +12790,12 @@
           <a:p>
             <a:pPr indent="0" marL="0">
               <a:lnSpc>
-                <a:spcPts val="1650"/>
+                <a:spcPts val="1700"/>
               </a:lnSpc>
               <a:buNone/>
             </a:pPr>
             <a:r>
-              <a:rPr lang="en-US" sz="1200" i="1" dirty="0">
+              <a:rPr lang="en-US" sz="1250" i="1" dirty="0">
                 <a:solidFill>
                   <a:srgbClr val="6B6D72"/>
                 </a:solidFill>
@@ -13998,12 +12807,12 @@
             </a:r>
             <a:pPr indent="0" marL="0">
               <a:lnSpc>
-                <a:spcPts val="1650"/>
+                <a:spcPts val="1700"/>
               </a:lnSpc>
               <a:buNone/>
             </a:pPr>
             <a:r>
-              <a:rPr lang="en-US" sz="1200" b="1" i="1" dirty="0">
+              <a:rPr lang="en-US" sz="1250" b="1" i="1" dirty="0">
                 <a:solidFill>
                   <a:srgbClr val="00A1E0"/>
                 </a:solidFill>
@@ -14015,12 +12824,12 @@
             </a:r>
             <a:pPr indent="0" marL="0">
               <a:lnSpc>
-                <a:spcPts val="1650"/>
+                <a:spcPts val="1700"/>
               </a:lnSpc>
               <a:buNone/>
             </a:pPr>
             <a:r>
-              <a:rPr lang="en-US" sz="1200" i="1" dirty="0">
+              <a:rPr lang="en-US" sz="1250" i="1" dirty="0">
                 <a:solidFill>
                   <a:srgbClr val="6B6D72"/>
                 </a:solidFill>
@@ -14032,12 +12841,12 @@
             </a:r>
             <a:pPr indent="0" marL="0">
               <a:lnSpc>
-                <a:spcPts val="1650"/>
+                <a:spcPts val="1700"/>
               </a:lnSpc>
               <a:buNone/>
             </a:pPr>
             <a:r>
-              <a:rPr lang="en-US" sz="1200" b="1" i="1" dirty="0">
+              <a:rPr lang="en-US" sz="1250" b="1" i="1" dirty="0">
                 <a:solidFill>
                   <a:srgbClr val="25262A"/>
                 </a:solidFill>
@@ -14049,12 +12858,12 @@
             </a:r>
             <a:pPr indent="0" marL="0">
               <a:lnSpc>
-                <a:spcPts val="1650"/>
+                <a:spcPts val="1700"/>
               </a:lnSpc>
               <a:buNone/>
             </a:pPr>
             <a:r>
-              <a:rPr lang="en-US" sz="1200" i="1" dirty="0">
+              <a:rPr lang="en-US" sz="1250" i="1" dirty="0">
                 <a:solidFill>
                   <a:srgbClr val="6B6D72"/>
                 </a:solidFill>
@@ -14064,7 +12873,7 @@
               </a:rPr>
               <a:t>, au bon endroit.</a:t>
             </a:r>
-            <a:endParaRPr lang="en-US" sz="1200" dirty="0"/>
+            <a:endParaRPr lang="en-US" sz="1250" dirty="0"/>
           </a:p>
         </p:txBody>
       </p:sp>
@@ -14439,7 +13248,7 @@
         <p:spPr>
           <a:xfrm>
             <a:off x="548640" y="640080"/>
-            <a:ext cx="5486400" cy="274320"/>
+            <a:ext cx="5486400" cy="256032"/>
           </a:xfrm>
           <a:prstGeom prst="rect">
             <a:avLst/>
@@ -14455,7 +13264,7 @@
               <a:buNone/>
             </a:pPr>
             <a:r>
-              <a:rPr lang="en-US" sz="1100" b="1" spc="300" kern="0" dirty="0">
+              <a:rPr lang="en-US" sz="900" b="1" spc="250" kern="0" dirty="0">
                 <a:solidFill>
                   <a:srgbClr val="0488C1"/>
                 </a:solidFill>
@@ -14465,7 +13274,7 @@
               </a:rPr>
               <a:t>CAS 1 · APRÈS LE RENDEZ-VOUS</a:t>
             </a:r>
-            <a:endParaRPr lang="en-US" sz="1100" dirty="0"/>
+            <a:endParaRPr lang="en-US" sz="900" dirty="0"/>
           </a:p>
         </p:txBody>
       </p:sp>
@@ -14531,12 +13340,12 @@
           <a:p>
             <a:pPr indent="0" marL="0">
               <a:lnSpc>
-                <a:spcPts val="1650"/>
+                <a:spcPts val="1700"/>
               </a:lnSpc>
               <a:buNone/>
             </a:pPr>
             <a:r>
-              <a:rPr lang="en-US" sz="1200" i="1" dirty="0">
+              <a:rPr lang="en-US" sz="1250" i="1" dirty="0">
                 <a:solidFill>
                   <a:srgbClr val="6B6D72"/>
                 </a:solidFill>
@@ -14548,12 +13357,12 @@
             </a:r>
             <a:pPr indent="0" marL="0">
               <a:lnSpc>
-                <a:spcPts val="1650"/>
+                <a:spcPts val="1700"/>
               </a:lnSpc>
               <a:buNone/>
             </a:pPr>
             <a:r>
-              <a:rPr lang="en-US" sz="1200" b="1" i="1" dirty="0">
+              <a:rPr lang="en-US" sz="1250" b="1" i="1" dirty="0">
                 <a:solidFill>
                   <a:srgbClr val="00A1E0"/>
                 </a:solidFill>
@@ -14565,12 +13374,12 @@
             </a:r>
             <a:pPr indent="0" marL="0">
               <a:lnSpc>
-                <a:spcPts val="1650"/>
+                <a:spcPts val="1700"/>
               </a:lnSpc>
               <a:buNone/>
             </a:pPr>
             <a:r>
-              <a:rPr lang="en-US" sz="1200" i="1" dirty="0">
+              <a:rPr lang="en-US" sz="1250" i="1" dirty="0">
                 <a:solidFill>
                   <a:srgbClr val="6B6D72"/>
                 </a:solidFill>
@@ -14582,12 +13391,12 @@
             </a:r>
             <a:pPr indent="0" marL="0">
               <a:lnSpc>
-                <a:spcPts val="1650"/>
+                <a:spcPts val="1700"/>
               </a:lnSpc>
               <a:buNone/>
             </a:pPr>
             <a:r>
-              <a:rPr lang="en-US" sz="1200" b="1" i="1" dirty="0">
+              <a:rPr lang="en-US" sz="1250" b="1" i="1" dirty="0">
                 <a:solidFill>
                   <a:srgbClr val="25262A"/>
                 </a:solidFill>
@@ -14599,12 +13408,12 @@
             </a:r>
             <a:pPr indent="0" marL="0">
               <a:lnSpc>
-                <a:spcPts val="1650"/>
+                <a:spcPts val="1700"/>
               </a:lnSpc>
               <a:buNone/>
             </a:pPr>
             <a:r>
-              <a:rPr lang="en-US" sz="1200" i="1" dirty="0">
+              <a:rPr lang="en-US" sz="1250" i="1" dirty="0">
                 <a:solidFill>
                   <a:srgbClr val="6B6D72"/>
                 </a:solidFill>
@@ -14614,7 +13423,7 @@
               </a:rPr>
               <a:t>, au bon endroit.</a:t>
             </a:r>
-            <a:endParaRPr lang="en-US" sz="1200" dirty="0"/>
+            <a:endParaRPr lang="en-US" sz="1250" dirty="0"/>
           </a:p>
         </p:txBody>
       </p:sp>
@@ -14989,7 +13798,7 @@
         <p:spPr>
           <a:xfrm>
             <a:off x="548640" y="685800"/>
-            <a:ext cx="11064240" cy="274320"/>
+            <a:ext cx="11064240" cy="256032"/>
           </a:xfrm>
           <a:prstGeom prst="rect">
             <a:avLst/>
@@ -15005,7 +13814,7 @@
               <a:buNone/>
             </a:pPr>
             <a:r>
-              <a:rPr lang="en-US" sz="1100" b="1" spc="300" kern="0" dirty="0">
+              <a:rPr lang="en-US" sz="900" b="1" spc="250" kern="0" dirty="0">
                 <a:solidFill>
                   <a:srgbClr val="0488C1"/>
                 </a:solidFill>
@@ -15015,7 +13824,7 @@
               </a:rPr>
               <a:t>LA BOÎTE À OUTILS</a:t>
             </a:r>
-            <a:endParaRPr lang="en-US" sz="1100" dirty="0"/>
+            <a:endParaRPr lang="en-US" sz="900" dirty="0"/>
           </a:p>
         </p:txBody>
       </p:sp>
@@ -15111,7 +13920,7 @@
         <p:spPr>
           <a:xfrm>
             <a:off x="548640" y="640080"/>
-            <a:ext cx="5486400" cy="274320"/>
+            <a:ext cx="5486400" cy="256032"/>
           </a:xfrm>
           <a:prstGeom prst="rect">
             <a:avLst/>
@@ -15127,7 +13936,7 @@
               <a:buNone/>
             </a:pPr>
             <a:r>
-              <a:rPr lang="en-US" sz="1100" b="1" spc="300" kern="0" dirty="0">
+              <a:rPr lang="en-US" sz="900" b="1" spc="250" kern="0" dirty="0">
                 <a:solidFill>
                   <a:srgbClr val="0488C1"/>
                 </a:solidFill>
@@ -15137,7 +13946,7 @@
               </a:rPr>
               <a:t>CAS 1 · APRÈS LE RENDEZ-VOUS</a:t>
             </a:r>
-            <a:endParaRPr lang="en-US" sz="1100" dirty="0"/>
+            <a:endParaRPr lang="en-US" sz="900" dirty="0"/>
           </a:p>
         </p:txBody>
       </p:sp>
@@ -15203,12 +14012,12 @@
           <a:p>
             <a:pPr indent="0" marL="0">
               <a:lnSpc>
-                <a:spcPts val="1650"/>
+                <a:spcPts val="1700"/>
               </a:lnSpc>
               <a:buNone/>
             </a:pPr>
             <a:r>
-              <a:rPr lang="en-US" sz="1200" i="1" dirty="0">
+              <a:rPr lang="en-US" sz="1250" i="1" dirty="0">
                 <a:solidFill>
                   <a:srgbClr val="6B6D72"/>
                 </a:solidFill>
@@ -15220,12 +14029,12 @@
             </a:r>
             <a:pPr indent="0" marL="0">
               <a:lnSpc>
-                <a:spcPts val="1650"/>
+                <a:spcPts val="1700"/>
               </a:lnSpc>
               <a:buNone/>
             </a:pPr>
             <a:r>
-              <a:rPr lang="en-US" sz="1200" b="1" i="1" dirty="0">
+              <a:rPr lang="en-US" sz="1250" b="1" i="1" dirty="0">
                 <a:solidFill>
                   <a:srgbClr val="00A1E0"/>
                 </a:solidFill>
@@ -15237,12 +14046,12 @@
             </a:r>
             <a:pPr indent="0" marL="0">
               <a:lnSpc>
-                <a:spcPts val="1650"/>
+                <a:spcPts val="1700"/>
               </a:lnSpc>
               <a:buNone/>
             </a:pPr>
             <a:r>
-              <a:rPr lang="en-US" sz="1200" i="1" dirty="0">
+              <a:rPr lang="en-US" sz="1250" i="1" dirty="0">
                 <a:solidFill>
                   <a:srgbClr val="6B6D72"/>
                 </a:solidFill>
@@ -15254,12 +14063,12 @@
             </a:r>
             <a:pPr indent="0" marL="0">
               <a:lnSpc>
-                <a:spcPts val="1650"/>
+                <a:spcPts val="1700"/>
               </a:lnSpc>
               <a:buNone/>
             </a:pPr>
             <a:r>
-              <a:rPr lang="en-US" sz="1200" b="1" i="1" dirty="0">
+              <a:rPr lang="en-US" sz="1250" b="1" i="1" dirty="0">
                 <a:solidFill>
                   <a:srgbClr val="25262A"/>
                 </a:solidFill>
@@ -15271,12 +14080,12 @@
             </a:r>
             <a:pPr indent="0" marL="0">
               <a:lnSpc>
-                <a:spcPts val="1650"/>
+                <a:spcPts val="1700"/>
               </a:lnSpc>
               <a:buNone/>
             </a:pPr>
             <a:r>
-              <a:rPr lang="en-US" sz="1200" i="1" dirty="0">
+              <a:rPr lang="en-US" sz="1250" i="1" dirty="0">
                 <a:solidFill>
                   <a:srgbClr val="6B6D72"/>
                 </a:solidFill>
@@ -15286,7 +14095,7 @@
               </a:rPr>
               <a:t>, au bon endroit.</a:t>
             </a:r>
-            <a:endParaRPr lang="en-US" sz="1200" dirty="0"/>
+            <a:endParaRPr lang="en-US" sz="1250" dirty="0"/>
           </a:p>
         </p:txBody>
       </p:sp>
@@ -15661,7 +14470,7 @@
         <p:spPr>
           <a:xfrm>
             <a:off x="548640" y="640080"/>
-            <a:ext cx="5486400" cy="274320"/>
+            <a:ext cx="5486400" cy="256032"/>
           </a:xfrm>
           <a:prstGeom prst="rect">
             <a:avLst/>
@@ -15677,7 +14486,7 @@
               <a:buNone/>
             </a:pPr>
             <a:r>
-              <a:rPr lang="en-US" sz="1100" b="1" spc="300" kern="0" dirty="0">
+              <a:rPr lang="en-US" sz="900" b="1" spc="250" kern="0" dirty="0">
                 <a:solidFill>
                   <a:srgbClr val="0488C1"/>
                 </a:solidFill>
@@ -15687,7 +14496,7 @@
               </a:rPr>
               <a:t>CAS 1 · APRÈS LE RENDEZ-VOUS</a:t>
             </a:r>
-            <a:endParaRPr lang="en-US" sz="1100" dirty="0"/>
+            <a:endParaRPr lang="en-US" sz="900" dirty="0"/>
           </a:p>
         </p:txBody>
       </p:sp>
@@ -15753,12 +14562,12 @@
           <a:p>
             <a:pPr indent="0" marL="0">
               <a:lnSpc>
-                <a:spcPts val="1650"/>
+                <a:spcPts val="1700"/>
               </a:lnSpc>
               <a:buNone/>
             </a:pPr>
             <a:r>
-              <a:rPr lang="en-US" sz="1200" i="1" dirty="0">
+              <a:rPr lang="en-US" sz="1250" i="1" dirty="0">
                 <a:solidFill>
                   <a:srgbClr val="6B6D72"/>
                 </a:solidFill>
@@ -15770,12 +14579,12 @@
             </a:r>
             <a:pPr indent="0" marL="0">
               <a:lnSpc>
-                <a:spcPts val="1650"/>
+                <a:spcPts val="1700"/>
               </a:lnSpc>
               <a:buNone/>
             </a:pPr>
             <a:r>
-              <a:rPr lang="en-US" sz="1200" b="1" i="1" dirty="0">
+              <a:rPr lang="en-US" sz="1250" b="1" i="1" dirty="0">
                 <a:solidFill>
                   <a:srgbClr val="00A1E0"/>
                 </a:solidFill>
@@ -15787,12 +14596,12 @@
             </a:r>
             <a:pPr indent="0" marL="0">
               <a:lnSpc>
-                <a:spcPts val="1650"/>
+                <a:spcPts val="1700"/>
               </a:lnSpc>
               <a:buNone/>
             </a:pPr>
             <a:r>
-              <a:rPr lang="en-US" sz="1200" i="1" dirty="0">
+              <a:rPr lang="en-US" sz="1250" i="1" dirty="0">
                 <a:solidFill>
                   <a:srgbClr val="6B6D72"/>
                 </a:solidFill>
@@ -15804,12 +14613,12 @@
             </a:r>
             <a:pPr indent="0" marL="0">
               <a:lnSpc>
-                <a:spcPts val="1650"/>
+                <a:spcPts val="1700"/>
               </a:lnSpc>
               <a:buNone/>
             </a:pPr>
             <a:r>
-              <a:rPr lang="en-US" sz="1200" b="1" i="1" dirty="0">
+              <a:rPr lang="en-US" sz="1250" b="1" i="1" dirty="0">
                 <a:solidFill>
                   <a:srgbClr val="25262A"/>
                 </a:solidFill>
@@ -15821,12 +14630,12 @@
             </a:r>
             <a:pPr indent="0" marL="0">
               <a:lnSpc>
-                <a:spcPts val="1650"/>
+                <a:spcPts val="1700"/>
               </a:lnSpc>
               <a:buNone/>
             </a:pPr>
             <a:r>
-              <a:rPr lang="en-US" sz="1200" i="1" dirty="0">
+              <a:rPr lang="en-US" sz="1250" i="1" dirty="0">
                 <a:solidFill>
                   <a:srgbClr val="6B6D72"/>
                 </a:solidFill>
@@ -15836,7 +14645,7 @@
               </a:rPr>
               <a:t>, au bon endroit.</a:t>
             </a:r>
-            <a:endParaRPr lang="en-US" sz="1200" dirty="0"/>
+            <a:endParaRPr lang="en-US" sz="1250" dirty="0"/>
           </a:p>
         </p:txBody>
       </p:sp>
@@ -16211,7 +15020,7 @@
         <p:spPr>
           <a:xfrm>
             <a:off x="548640" y="640080"/>
-            <a:ext cx="5486400" cy="274320"/>
+            <a:ext cx="5486400" cy="256032"/>
           </a:xfrm>
           <a:prstGeom prst="rect">
             <a:avLst/>
@@ -16227,7 +15036,7 @@
               <a:buNone/>
             </a:pPr>
             <a:r>
-              <a:rPr lang="en-US" sz="1100" b="1" spc="300" kern="0" dirty="0">
+              <a:rPr lang="en-US" sz="900" b="1" spc="250" kern="0" dirty="0">
                 <a:solidFill>
                   <a:srgbClr val="0488C1"/>
                 </a:solidFill>
@@ -16237,7 +15046,7 @@
               </a:rPr>
               <a:t>CAS 1 · APRÈS LE RENDEZ-VOUS</a:t>
             </a:r>
-            <a:endParaRPr lang="en-US" sz="1100" dirty="0"/>
+            <a:endParaRPr lang="en-US" sz="900" dirty="0"/>
           </a:p>
         </p:txBody>
       </p:sp>
@@ -16303,12 +15112,12 @@
           <a:p>
             <a:pPr indent="0" marL="0">
               <a:lnSpc>
-                <a:spcPts val="1650"/>
+                <a:spcPts val="1700"/>
               </a:lnSpc>
               <a:buNone/>
             </a:pPr>
             <a:r>
-              <a:rPr lang="en-US" sz="1200" i="1" dirty="0">
+              <a:rPr lang="en-US" sz="1250" i="1" dirty="0">
                 <a:solidFill>
                   <a:srgbClr val="6B6D72"/>
                 </a:solidFill>
@@ -16320,12 +15129,12 @@
             </a:r>
             <a:pPr indent="0" marL="0">
               <a:lnSpc>
-                <a:spcPts val="1650"/>
+                <a:spcPts val="1700"/>
               </a:lnSpc>
               <a:buNone/>
             </a:pPr>
             <a:r>
-              <a:rPr lang="en-US" sz="1200" b="1" i="1" dirty="0">
+              <a:rPr lang="en-US" sz="1250" b="1" i="1" dirty="0">
                 <a:solidFill>
                   <a:srgbClr val="00A1E0"/>
                 </a:solidFill>
@@ -16337,12 +15146,12 @@
             </a:r>
             <a:pPr indent="0" marL="0">
               <a:lnSpc>
-                <a:spcPts val="1650"/>
+                <a:spcPts val="1700"/>
               </a:lnSpc>
               <a:buNone/>
             </a:pPr>
             <a:r>
-              <a:rPr lang="en-US" sz="1200" i="1" dirty="0">
+              <a:rPr lang="en-US" sz="1250" i="1" dirty="0">
                 <a:solidFill>
                   <a:srgbClr val="6B6D72"/>
                 </a:solidFill>
@@ -16354,12 +15163,12 @@
             </a:r>
             <a:pPr indent="0" marL="0">
               <a:lnSpc>
-                <a:spcPts val="1650"/>
+                <a:spcPts val="1700"/>
               </a:lnSpc>
               <a:buNone/>
             </a:pPr>
             <a:r>
-              <a:rPr lang="en-US" sz="1200" b="1" i="1" dirty="0">
+              <a:rPr lang="en-US" sz="1250" b="1" i="1" dirty="0">
                 <a:solidFill>
                   <a:srgbClr val="25262A"/>
                 </a:solidFill>
@@ -16371,12 +15180,12 @@
             </a:r>
             <a:pPr indent="0" marL="0">
               <a:lnSpc>
-                <a:spcPts val="1650"/>
+                <a:spcPts val="1700"/>
               </a:lnSpc>
               <a:buNone/>
             </a:pPr>
             <a:r>
-              <a:rPr lang="en-US" sz="1200" i="1" dirty="0">
+              <a:rPr lang="en-US" sz="1250" i="1" dirty="0">
                 <a:solidFill>
                   <a:srgbClr val="6B6D72"/>
                 </a:solidFill>
@@ -16386,7 +15195,7 @@
               </a:rPr>
               <a:t>, au bon endroit.</a:t>
             </a:r>
-            <a:endParaRPr lang="en-US" sz="1200" dirty="0"/>
+            <a:endParaRPr lang="en-US" sz="1250" dirty="0"/>
           </a:p>
         </p:txBody>
       </p:sp>
@@ -16819,8 +15628,8 @@
         </p:nvSpPr>
         <p:spPr>
           <a:xfrm>
-            <a:off x="3809848" y="822960"/>
-            <a:ext cx="4572000" cy="4572000"/>
+            <a:off x="3718408" y="685800"/>
+            <a:ext cx="4754880" cy="4754880"/>
           </a:xfrm>
           <a:prstGeom prst="ellipse">
             <a:avLst/>
@@ -16839,8 +15648,8 @@
         </p:nvSpPr>
         <p:spPr>
           <a:xfrm>
-            <a:off x="0" y="1325880"/>
-            <a:ext cx="12191695" cy="2560320"/>
+            <a:off x="0" y="1051560"/>
+            <a:ext cx="12191695" cy="3017520"/>
           </a:xfrm>
           <a:prstGeom prst="rect">
             <a:avLst/>
@@ -16856,9 +15665,9 @@
               <a:buNone/>
             </a:pPr>
             <a:r>
-              <a:rPr lang="en-US" sz="15000" b="1" dirty="0">
-                <a:solidFill>
-                  <a:srgbClr val="0488C1"/>
+              <a:rPr lang="en-US" sz="18000" b="1" dirty="0">
+                <a:solidFill>
+                  <a:srgbClr val="049ED5"/>
                 </a:solidFill>
                 <a:latin typeface="Arial" pitchFamily="34" charset="0"/>
                 <a:ea typeface="Arial" pitchFamily="34" charset="-122"/>
@@ -16866,7 +15675,7 @@
               </a:rPr>
               <a:t>02</a:t>
             </a:r>
-            <a:endParaRPr lang="en-US" sz="15000" dirty="0"/>
+            <a:endParaRPr lang="en-US" sz="18000" dirty="0"/>
           </a:p>
         </p:txBody>
       </p:sp>
@@ -16878,7 +15687,7 @@
         </p:nvSpPr>
         <p:spPr>
           <a:xfrm>
-            <a:off x="914400" y="4206240"/>
+            <a:off x="914400" y="4434840"/>
             <a:ext cx="10362895" cy="640080"/>
           </a:xfrm>
           <a:prstGeom prst="rect">
@@ -16961,8 +15770,8 @@
         </p:nvSpPr>
         <p:spPr>
           <a:xfrm>
-            <a:off x="548640" y="640080"/>
-            <a:ext cx="5486400" cy="274320"/>
+            <a:off x="2103120" y="1325880"/>
+            <a:ext cx="7955280" cy="256032"/>
           </a:xfrm>
           <a:prstGeom prst="rect">
             <a:avLst/>
@@ -16978,7 +15787,7 @@
               <a:buNone/>
             </a:pPr>
             <a:r>
-              <a:rPr lang="en-US" sz="1100" b="1" spc="300" kern="0" dirty="0">
+              <a:rPr lang="en-US" sz="900" b="1" spc="250" kern="0" dirty="0">
                 <a:solidFill>
                   <a:srgbClr val="0488C1"/>
                 </a:solidFill>
@@ -16988,7 +15797,7 @@
               </a:rPr>
               <a:t>CAS 2 · AVANT LE RENDEZ-VOUS</a:t>
             </a:r>
-            <a:endParaRPr lang="en-US" sz="1100" dirty="0"/>
+            <a:endParaRPr lang="en-US" sz="900" dirty="0"/>
           </a:p>
         </p:txBody>
       </p:sp>
@@ -17000,8 +15809,8 @@
         </p:nvSpPr>
         <p:spPr>
           <a:xfrm>
-            <a:off x="548640" y="987552"/>
-            <a:ext cx="5486400" cy="685800"/>
+            <a:off x="2103120" y="1673352"/>
+            <a:ext cx="7955280" cy="685800"/>
           </a:xfrm>
           <a:prstGeom prst="rect">
             <a:avLst/>
@@ -17039,8 +15848,8 @@
         </p:nvSpPr>
         <p:spPr>
           <a:xfrm>
-            <a:off x="548640" y="1691640"/>
-            <a:ext cx="5074920" cy="1783080"/>
+            <a:off x="2103120" y="2514600"/>
+            <a:ext cx="7772400" cy="1600200"/>
           </a:xfrm>
           <a:prstGeom prst="rect">
             <a:avLst/>
@@ -17054,12 +15863,12 @@
           <a:p>
             <a:pPr indent="0" marL="0">
               <a:lnSpc>
-                <a:spcPts val="1650"/>
+                <a:spcPts val="1700"/>
               </a:lnSpc>
               <a:buNone/>
             </a:pPr>
             <a:r>
-              <a:rPr lang="en-US" sz="1200" i="1" dirty="0">
+              <a:rPr lang="en-US" sz="1250" i="1" dirty="0">
                 <a:solidFill>
                   <a:srgbClr val="6B6D72"/>
                 </a:solidFill>
@@ -17071,12 +15880,12 @@
             </a:r>
             <a:pPr indent="0" marL="0">
               <a:lnSpc>
-                <a:spcPts val="1650"/>
+                <a:spcPts val="1700"/>
               </a:lnSpc>
               <a:buNone/>
             </a:pPr>
             <a:r>
-              <a:rPr lang="en-US" sz="1200" b="1" i="1" dirty="0">
+              <a:rPr lang="en-US" sz="1250" b="1" i="1" dirty="0">
                 <a:solidFill>
                   <a:srgbClr val="036A96"/>
                 </a:solidFill>
@@ -17088,12 +15897,12 @@
             </a:r>
             <a:pPr indent="0" marL="0">
               <a:lnSpc>
-                <a:spcPts val="1650"/>
+                <a:spcPts val="1700"/>
               </a:lnSpc>
               <a:buNone/>
             </a:pPr>
             <a:r>
-              <a:rPr lang="en-US" sz="1200" i="1" dirty="0">
+              <a:rPr lang="en-US" sz="1250" i="1" dirty="0">
                 <a:solidFill>
                   <a:srgbClr val="6B6D72"/>
                 </a:solidFill>
@@ -17105,12 +15914,12 @@
             </a:r>
             <a:pPr indent="0" marL="0">
               <a:lnSpc>
-                <a:spcPts val="1650"/>
+                <a:spcPts val="1700"/>
               </a:lnSpc>
               <a:buNone/>
             </a:pPr>
             <a:r>
-              <a:rPr lang="en-US" sz="1200" b="1" i="1" dirty="0">
+              <a:rPr lang="en-US" sz="1250" b="1" i="1" dirty="0">
                 <a:solidFill>
                   <a:srgbClr val="036A96"/>
                 </a:solidFill>
@@ -17122,12 +15931,12 @@
             </a:r>
             <a:pPr indent="0" marL="0">
               <a:lnSpc>
-                <a:spcPts val="1650"/>
+                <a:spcPts val="1700"/>
               </a:lnSpc>
               <a:buNone/>
             </a:pPr>
             <a:r>
-              <a:rPr lang="en-US" sz="1200" i="1" dirty="0">
+              <a:rPr lang="en-US" sz="1250" i="1" dirty="0">
                 <a:solidFill>
                   <a:srgbClr val="6B6D72"/>
                 </a:solidFill>
@@ -17139,12 +15948,12 @@
             </a:r>
             <a:pPr indent="0" marL="0">
               <a:lnSpc>
-                <a:spcPts val="1650"/>
+                <a:spcPts val="1700"/>
               </a:lnSpc>
               <a:buNone/>
             </a:pPr>
             <a:r>
-              <a:rPr lang="en-US" sz="1200" b="1" i="1" dirty="0">
+              <a:rPr lang="en-US" sz="1250" b="1" i="1" dirty="0">
                 <a:solidFill>
                   <a:srgbClr val="036A96"/>
                 </a:solidFill>
@@ -17156,12 +15965,12 @@
             </a:r>
             <a:pPr indent="0" marL="0">
               <a:lnSpc>
-                <a:spcPts val="1650"/>
+                <a:spcPts val="1700"/>
               </a:lnSpc>
               <a:buNone/>
             </a:pPr>
             <a:r>
-              <a:rPr lang="en-US" sz="1200" i="1" dirty="0">
+              <a:rPr lang="en-US" sz="1250" i="1" dirty="0">
                 <a:solidFill>
                   <a:srgbClr val="6B6D72"/>
                 </a:solidFill>
@@ -17171,7 +15980,7 @@
               </a:rPr>
               <a:t>. LinkedIn aussi, à prendre avec un peu de recul. Vous arrivez préparé, sans rien avoir ouvert.</a:t>
             </a:r>
-            <a:endParaRPr lang="en-US" sz="1200" dirty="0"/>
+            <a:endParaRPr lang="en-US" sz="1250" dirty="0"/>
           </a:p>
         </p:txBody>
       </p:sp>
@@ -17227,8 +16036,8 @@
         </p:nvSpPr>
         <p:spPr>
           <a:xfrm>
-            <a:off x="548640" y="640080"/>
-            <a:ext cx="5486400" cy="274320"/>
+            <a:off x="2103120" y="1325880"/>
+            <a:ext cx="7955280" cy="256032"/>
           </a:xfrm>
           <a:prstGeom prst="rect">
             <a:avLst/>
@@ -17244,7 +16053,7 @@
               <a:buNone/>
             </a:pPr>
             <a:r>
-              <a:rPr lang="en-US" sz="1100" b="1" spc="300" kern="0" dirty="0">
+              <a:rPr lang="en-US" sz="900" b="1" spc="250" kern="0" dirty="0">
                 <a:solidFill>
                   <a:srgbClr val="0488C1"/>
                 </a:solidFill>
@@ -17254,7 +16063,7 @@
               </a:rPr>
               <a:t>CAS 2 · AVANT LE RENDEZ-VOUS</a:t>
             </a:r>
-            <a:endParaRPr lang="en-US" sz="1100" dirty="0"/>
+            <a:endParaRPr lang="en-US" sz="900" dirty="0"/>
           </a:p>
         </p:txBody>
       </p:sp>
@@ -17266,8 +16075,8 @@
         </p:nvSpPr>
         <p:spPr>
           <a:xfrm>
-            <a:off x="548640" y="987552"/>
-            <a:ext cx="5486400" cy="685800"/>
+            <a:off x="2103120" y="1673352"/>
+            <a:ext cx="7955280" cy="685800"/>
           </a:xfrm>
           <a:prstGeom prst="rect">
             <a:avLst/>
@@ -17305,8 +16114,8 @@
         </p:nvSpPr>
         <p:spPr>
           <a:xfrm>
-            <a:off x="548640" y="1691640"/>
-            <a:ext cx="5074920" cy="1783080"/>
+            <a:off x="2103120" y="2514600"/>
+            <a:ext cx="7772400" cy="1600200"/>
           </a:xfrm>
           <a:prstGeom prst="rect">
             <a:avLst/>
@@ -17320,12 +16129,12 @@
           <a:p>
             <a:pPr indent="0" marL="0">
               <a:lnSpc>
-                <a:spcPts val="1650"/>
+                <a:spcPts val="1700"/>
               </a:lnSpc>
               <a:buNone/>
             </a:pPr>
             <a:r>
-              <a:rPr lang="en-US" sz="1200" i="1" dirty="0">
+              <a:rPr lang="en-US" sz="1250" i="1" dirty="0">
                 <a:solidFill>
                   <a:srgbClr val="6B6D72"/>
                 </a:solidFill>
@@ -17337,12 +16146,12 @@
             </a:r>
             <a:pPr indent="0" marL="0">
               <a:lnSpc>
-                <a:spcPts val="1650"/>
+                <a:spcPts val="1700"/>
               </a:lnSpc>
               <a:buNone/>
             </a:pPr>
             <a:r>
-              <a:rPr lang="en-US" sz="1200" b="1" i="1" dirty="0">
+              <a:rPr lang="en-US" sz="1250" b="1" i="1" dirty="0">
                 <a:solidFill>
                   <a:srgbClr val="036A96"/>
                 </a:solidFill>
@@ -17354,12 +16163,12 @@
             </a:r>
             <a:pPr indent="0" marL="0">
               <a:lnSpc>
-                <a:spcPts val="1650"/>
+                <a:spcPts val="1700"/>
               </a:lnSpc>
               <a:buNone/>
             </a:pPr>
             <a:r>
-              <a:rPr lang="en-US" sz="1200" i="1" dirty="0">
+              <a:rPr lang="en-US" sz="1250" i="1" dirty="0">
                 <a:solidFill>
                   <a:srgbClr val="6B6D72"/>
                 </a:solidFill>
@@ -17371,12 +16180,12 @@
             </a:r>
             <a:pPr indent="0" marL="0">
               <a:lnSpc>
-                <a:spcPts val="1650"/>
+                <a:spcPts val="1700"/>
               </a:lnSpc>
               <a:buNone/>
             </a:pPr>
             <a:r>
-              <a:rPr lang="en-US" sz="1200" b="1" i="1" dirty="0">
+              <a:rPr lang="en-US" sz="1250" b="1" i="1" dirty="0">
                 <a:solidFill>
                   <a:srgbClr val="036A96"/>
                 </a:solidFill>
@@ -17388,12 +16197,12 @@
             </a:r>
             <a:pPr indent="0" marL="0">
               <a:lnSpc>
-                <a:spcPts val="1650"/>
+                <a:spcPts val="1700"/>
               </a:lnSpc>
               <a:buNone/>
             </a:pPr>
             <a:r>
-              <a:rPr lang="en-US" sz="1200" i="1" dirty="0">
+              <a:rPr lang="en-US" sz="1250" i="1" dirty="0">
                 <a:solidFill>
                   <a:srgbClr val="6B6D72"/>
                 </a:solidFill>
@@ -17405,12 +16214,12 @@
             </a:r>
             <a:pPr indent="0" marL="0">
               <a:lnSpc>
-                <a:spcPts val="1650"/>
+                <a:spcPts val="1700"/>
               </a:lnSpc>
               <a:buNone/>
             </a:pPr>
             <a:r>
-              <a:rPr lang="en-US" sz="1200" b="1" i="1" dirty="0">
+              <a:rPr lang="en-US" sz="1250" b="1" i="1" dirty="0">
                 <a:solidFill>
                   <a:srgbClr val="036A96"/>
                 </a:solidFill>
@@ -17422,12 +16231,12 @@
             </a:r>
             <a:pPr indent="0" marL="0">
               <a:lnSpc>
-                <a:spcPts val="1650"/>
+                <a:spcPts val="1700"/>
               </a:lnSpc>
               <a:buNone/>
             </a:pPr>
             <a:r>
-              <a:rPr lang="en-US" sz="1200" i="1" dirty="0">
+              <a:rPr lang="en-US" sz="1250" i="1" dirty="0">
                 <a:solidFill>
                   <a:srgbClr val="6B6D72"/>
                 </a:solidFill>
@@ -17437,7 +16246,7 @@
               </a:rPr>
               <a:t>. LinkedIn aussi, à prendre avec un peu de recul. Vous arrivez préparé, sans rien avoir ouvert.</a:t>
             </a:r>
-            <a:endParaRPr lang="en-US" sz="1200" dirty="0"/>
+            <a:endParaRPr lang="en-US" sz="1250" dirty="0"/>
           </a:p>
         </p:txBody>
       </p:sp>
@@ -17449,7 +16258,7 @@
         </p:nvSpPr>
         <p:spPr>
           <a:xfrm>
-            <a:off x="548640" y="3657600"/>
+            <a:off x="2103120" y="4434840"/>
             <a:ext cx="292608" cy="292608"/>
           </a:xfrm>
           <a:prstGeom prst="ellipse">
@@ -17469,7 +16278,7 @@
         </p:nvSpPr>
         <p:spPr>
           <a:xfrm>
-            <a:off x="548640" y="3657600"/>
+            <a:off x="2103120" y="4434840"/>
             <a:ext cx="292608" cy="292608"/>
           </a:xfrm>
           <a:prstGeom prst="rect">
@@ -17508,7 +16317,7 @@
         </p:nvSpPr>
         <p:spPr>
           <a:xfrm>
-            <a:off x="960120" y="3643884"/>
+            <a:off x="2514600" y="4421124"/>
             <a:ext cx="4754880" cy="329184"/>
           </a:xfrm>
           <a:prstGeom prst="rect">
@@ -17547,7 +16356,7 @@
         </p:nvSpPr>
         <p:spPr>
           <a:xfrm>
-            <a:off x="548640" y="4133088"/>
+            <a:off x="2103120" y="4910328"/>
             <a:ext cx="292608" cy="292608"/>
           </a:xfrm>
           <a:prstGeom prst="ellipse">
@@ -17567,7 +16376,7 @@
         </p:nvSpPr>
         <p:spPr>
           <a:xfrm>
-            <a:off x="548640" y="4133088"/>
+            <a:off x="2103120" y="4910328"/>
             <a:ext cx="292608" cy="292608"/>
           </a:xfrm>
           <a:prstGeom prst="rect">
@@ -17606,7 +16415,7 @@
         </p:nvSpPr>
         <p:spPr>
           <a:xfrm>
-            <a:off x="960120" y="4119372"/>
+            <a:off x="2514600" y="4896612"/>
             <a:ext cx="4754880" cy="329184"/>
           </a:xfrm>
           <a:prstGeom prst="rect">
@@ -17645,7 +16454,7 @@
         </p:nvSpPr>
         <p:spPr>
           <a:xfrm>
-            <a:off x="548640" y="4608576"/>
+            <a:off x="2103120" y="5385816"/>
             <a:ext cx="292608" cy="292608"/>
           </a:xfrm>
           <a:prstGeom prst="ellipse">
@@ -17665,7 +16474,7 @@
         </p:nvSpPr>
         <p:spPr>
           <a:xfrm>
-            <a:off x="548640" y="4608576"/>
+            <a:off x="2103120" y="5385816"/>
             <a:ext cx="292608" cy="292608"/>
           </a:xfrm>
           <a:prstGeom prst="rect">
@@ -17704,7 +16513,7 @@
         </p:nvSpPr>
         <p:spPr>
           <a:xfrm>
-            <a:off x="960120" y="4594860"/>
+            <a:off x="2514600" y="5372100"/>
             <a:ext cx="4754880" cy="329184"/>
           </a:xfrm>
           <a:prstGeom prst="rect">
@@ -17732,65 +16541,6 @@
               <a:t>Puis il enrichit : CFnews, presse, registres</a:t>
             </a:r>
             <a:endParaRPr lang="en-US" sz="1300" dirty="0"/>
-          </a:p>
-        </p:txBody>
-      </p:sp>
-      <p:sp>
-        <p:nvSpPr>
-          <p:cNvPr id="14" name="Text 12"/>
-          <p:cNvSpPr/>
-          <p:nvPr/>
-        </p:nvSpPr>
-        <p:spPr>
-          <a:xfrm>
-            <a:off x="548640" y="5349240"/>
-            <a:ext cx="5212080" cy="822960"/>
-          </a:xfrm>
-          <a:prstGeom prst="rect">
-            <a:avLst/>
-          </a:prstGeom>
-          <a:noFill/>
-          <a:ln/>
-        </p:spPr>
-        <p:txBody>
-          <a:bodyPr wrap="square" lIns="0" tIns="0" rIns="0" bIns="0" rtlCol="0" anchor="ctr"/>
-          <a:lstStyle/>
-          <a:p>
-            <a:pPr indent="0" marL="0">
-              <a:lnSpc>
-                <a:spcPts val="2050"/>
-              </a:lnSpc>
-              <a:buNone/>
-            </a:pPr>
-            <a:r>
-              <a:rPr lang="en-US" sz="1600" b="1" dirty="0">
-                <a:solidFill>
-                  <a:srgbClr val="414142"/>
-                </a:solidFill>
-                <a:latin typeface="Arial" pitchFamily="34" charset="0"/>
-                <a:ea typeface="Arial" pitchFamily="34" charset="-122"/>
-                <a:cs typeface="Arial" pitchFamily="34" charset="-120"/>
-              </a:rPr>
-              <a:t>Il ne fait que lire. </a:t>
-            </a:r>
-            <a:pPr indent="0" marL="0">
-              <a:lnSpc>
-                <a:spcPts val="2050"/>
-              </a:lnSpc>
-              <a:buNone/>
-            </a:pPr>
-            <a:r>
-              <a:rPr lang="en-US" sz="1600" b="1" dirty="0">
-                <a:solidFill>
-                  <a:srgbClr val="0488C1"/>
-                </a:solidFill>
-                <a:latin typeface="Arial" pitchFamily="34" charset="0"/>
-                <a:ea typeface="Arial" pitchFamily="34" charset="-122"/>
-                <a:cs typeface="Arial" pitchFamily="34" charset="-120"/>
-              </a:rPr>
-              <a:t>Une phrase, trente secondes, vous arrivez préparé.</a:t>
-            </a:r>
-            <a:endParaRPr lang="en-US" sz="1600" dirty="0"/>
           </a:p>
         </p:txBody>
       </p:sp>
@@ -17847,7 +16597,7 @@
         <p:spPr>
           <a:xfrm>
             <a:off x="548640" y="640080"/>
-            <a:ext cx="5486400" cy="274320"/>
+            <a:ext cx="5486400" cy="256032"/>
           </a:xfrm>
           <a:prstGeom prst="rect">
             <a:avLst/>
@@ -17863,7 +16613,7 @@
               <a:buNone/>
             </a:pPr>
             <a:r>
-              <a:rPr lang="en-US" sz="1100" b="1" spc="300" kern="0" dirty="0">
+              <a:rPr lang="en-US" sz="900" b="1" spc="250" kern="0" dirty="0">
                 <a:solidFill>
                   <a:srgbClr val="0488C1"/>
                 </a:solidFill>
@@ -17873,7 +16623,7 @@
               </a:rPr>
               <a:t>CAS 2 · AVANT LE RENDEZ-VOUS</a:t>
             </a:r>
-            <a:endParaRPr lang="en-US" sz="1100" dirty="0"/>
+            <a:endParaRPr lang="en-US" sz="900" dirty="0"/>
           </a:p>
         </p:txBody>
       </p:sp>
@@ -17939,12 +16689,12 @@
           <a:p>
             <a:pPr indent="0" marL="0">
               <a:lnSpc>
-                <a:spcPts val="1650"/>
+                <a:spcPts val="1700"/>
               </a:lnSpc>
               <a:buNone/>
             </a:pPr>
             <a:r>
-              <a:rPr lang="en-US" sz="1200" i="1" dirty="0">
+              <a:rPr lang="en-US" sz="1250" i="1" dirty="0">
                 <a:solidFill>
                   <a:srgbClr val="6B6D72"/>
                 </a:solidFill>
@@ -17956,12 +16706,12 @@
             </a:r>
             <a:pPr indent="0" marL="0">
               <a:lnSpc>
-                <a:spcPts val="1650"/>
+                <a:spcPts val="1700"/>
               </a:lnSpc>
               <a:buNone/>
             </a:pPr>
             <a:r>
-              <a:rPr lang="en-US" sz="1200" b="1" i="1" dirty="0">
+              <a:rPr lang="en-US" sz="1250" b="1" i="1" dirty="0">
                 <a:solidFill>
                   <a:srgbClr val="036A96"/>
                 </a:solidFill>
@@ -17973,12 +16723,12 @@
             </a:r>
             <a:pPr indent="0" marL="0">
               <a:lnSpc>
-                <a:spcPts val="1650"/>
+                <a:spcPts val="1700"/>
               </a:lnSpc>
               <a:buNone/>
             </a:pPr>
             <a:r>
-              <a:rPr lang="en-US" sz="1200" i="1" dirty="0">
+              <a:rPr lang="en-US" sz="1250" i="1" dirty="0">
                 <a:solidFill>
                   <a:srgbClr val="6B6D72"/>
                 </a:solidFill>
@@ -17990,12 +16740,12 @@
             </a:r>
             <a:pPr indent="0" marL="0">
               <a:lnSpc>
-                <a:spcPts val="1650"/>
+                <a:spcPts val="1700"/>
               </a:lnSpc>
               <a:buNone/>
             </a:pPr>
             <a:r>
-              <a:rPr lang="en-US" sz="1200" b="1" i="1" dirty="0">
+              <a:rPr lang="en-US" sz="1250" b="1" i="1" dirty="0">
                 <a:solidFill>
                   <a:srgbClr val="036A96"/>
                 </a:solidFill>
@@ -18007,12 +16757,12 @@
             </a:r>
             <a:pPr indent="0" marL="0">
               <a:lnSpc>
-                <a:spcPts val="1650"/>
+                <a:spcPts val="1700"/>
               </a:lnSpc>
               <a:buNone/>
             </a:pPr>
             <a:r>
-              <a:rPr lang="en-US" sz="1200" i="1" dirty="0">
+              <a:rPr lang="en-US" sz="1250" i="1" dirty="0">
                 <a:solidFill>
                   <a:srgbClr val="6B6D72"/>
                 </a:solidFill>
@@ -18024,12 +16774,12 @@
             </a:r>
             <a:pPr indent="0" marL="0">
               <a:lnSpc>
-                <a:spcPts val="1650"/>
+                <a:spcPts val="1700"/>
               </a:lnSpc>
               <a:buNone/>
             </a:pPr>
             <a:r>
-              <a:rPr lang="en-US" sz="1200" b="1" i="1" dirty="0">
+              <a:rPr lang="en-US" sz="1250" b="1" i="1" dirty="0">
                 <a:solidFill>
                   <a:srgbClr val="036A96"/>
                 </a:solidFill>
@@ -18041,12 +16791,12 @@
             </a:r>
             <a:pPr indent="0" marL="0">
               <a:lnSpc>
-                <a:spcPts val="1650"/>
+                <a:spcPts val="1700"/>
               </a:lnSpc>
               <a:buNone/>
             </a:pPr>
             <a:r>
-              <a:rPr lang="en-US" sz="1200" i="1" dirty="0">
+              <a:rPr lang="en-US" sz="1250" i="1" dirty="0">
                 <a:solidFill>
                   <a:srgbClr val="6B6D72"/>
                 </a:solidFill>
@@ -18056,7 +16806,7 @@
               </a:rPr>
               <a:t>. LinkedIn aussi, à prendre avec un peu de recul. Vous arrivez préparé, sans rien avoir ouvert.</a:t>
             </a:r>
-            <a:endParaRPr lang="en-US" sz="1200" dirty="0"/>
+            <a:endParaRPr lang="en-US" sz="1250" dirty="0"/>
           </a:p>
         </p:txBody>
       </p:sp>
@@ -18490,7 +17240,7 @@
         <p:spPr>
           <a:xfrm>
             <a:off x="548640" y="640080"/>
-            <a:ext cx="5486400" cy="274320"/>
+            <a:ext cx="5486400" cy="256032"/>
           </a:xfrm>
           <a:prstGeom prst="rect">
             <a:avLst/>
@@ -18506,7 +17256,7 @@
               <a:buNone/>
             </a:pPr>
             <a:r>
-              <a:rPr lang="en-US" sz="1100" b="1" spc="300" kern="0" dirty="0">
+              <a:rPr lang="en-US" sz="900" b="1" spc="250" kern="0" dirty="0">
                 <a:solidFill>
                   <a:srgbClr val="0488C1"/>
                 </a:solidFill>
@@ -18516,7 +17266,7 @@
               </a:rPr>
               <a:t>CAS 2 · AVANT LE RENDEZ-VOUS</a:t>
             </a:r>
-            <a:endParaRPr lang="en-US" sz="1100" dirty="0"/>
+            <a:endParaRPr lang="en-US" sz="900" dirty="0"/>
           </a:p>
         </p:txBody>
       </p:sp>
@@ -18582,12 +17332,12 @@
           <a:p>
             <a:pPr indent="0" marL="0">
               <a:lnSpc>
-                <a:spcPts val="1650"/>
+                <a:spcPts val="1700"/>
               </a:lnSpc>
               <a:buNone/>
             </a:pPr>
             <a:r>
-              <a:rPr lang="en-US" sz="1200" i="1" dirty="0">
+              <a:rPr lang="en-US" sz="1250" i="1" dirty="0">
                 <a:solidFill>
                   <a:srgbClr val="6B6D72"/>
                 </a:solidFill>
@@ -18599,12 +17349,12 @@
             </a:r>
             <a:pPr indent="0" marL="0">
               <a:lnSpc>
-                <a:spcPts val="1650"/>
+                <a:spcPts val="1700"/>
               </a:lnSpc>
               <a:buNone/>
             </a:pPr>
             <a:r>
-              <a:rPr lang="en-US" sz="1200" b="1" i="1" dirty="0">
+              <a:rPr lang="en-US" sz="1250" b="1" i="1" dirty="0">
                 <a:solidFill>
                   <a:srgbClr val="036A96"/>
                 </a:solidFill>
@@ -18616,12 +17366,12 @@
             </a:r>
             <a:pPr indent="0" marL="0">
               <a:lnSpc>
-                <a:spcPts val="1650"/>
+                <a:spcPts val="1700"/>
               </a:lnSpc>
               <a:buNone/>
             </a:pPr>
             <a:r>
-              <a:rPr lang="en-US" sz="1200" i="1" dirty="0">
+              <a:rPr lang="en-US" sz="1250" i="1" dirty="0">
                 <a:solidFill>
                   <a:srgbClr val="6B6D72"/>
                 </a:solidFill>
@@ -18633,12 +17383,12 @@
             </a:r>
             <a:pPr indent="0" marL="0">
               <a:lnSpc>
-                <a:spcPts val="1650"/>
+                <a:spcPts val="1700"/>
               </a:lnSpc>
               <a:buNone/>
             </a:pPr>
             <a:r>
-              <a:rPr lang="en-US" sz="1200" b="1" i="1" dirty="0">
+              <a:rPr lang="en-US" sz="1250" b="1" i="1" dirty="0">
                 <a:solidFill>
                   <a:srgbClr val="036A96"/>
                 </a:solidFill>
@@ -18650,12 +17400,12 @@
             </a:r>
             <a:pPr indent="0" marL="0">
               <a:lnSpc>
-                <a:spcPts val="1650"/>
+                <a:spcPts val="1700"/>
               </a:lnSpc>
               <a:buNone/>
             </a:pPr>
             <a:r>
-              <a:rPr lang="en-US" sz="1200" i="1" dirty="0">
+              <a:rPr lang="en-US" sz="1250" i="1" dirty="0">
                 <a:solidFill>
                   <a:srgbClr val="6B6D72"/>
                 </a:solidFill>
@@ -18667,12 +17417,12 @@
             </a:r>
             <a:pPr indent="0" marL="0">
               <a:lnSpc>
-                <a:spcPts val="1650"/>
+                <a:spcPts val="1700"/>
               </a:lnSpc>
               <a:buNone/>
             </a:pPr>
             <a:r>
-              <a:rPr lang="en-US" sz="1200" b="1" i="1" dirty="0">
+              <a:rPr lang="en-US" sz="1250" b="1" i="1" dirty="0">
                 <a:solidFill>
                   <a:srgbClr val="036A96"/>
                 </a:solidFill>
@@ -18684,12 +17434,12 @@
             </a:r>
             <a:pPr indent="0" marL="0">
               <a:lnSpc>
-                <a:spcPts val="1650"/>
+                <a:spcPts val="1700"/>
               </a:lnSpc>
               <a:buNone/>
             </a:pPr>
             <a:r>
-              <a:rPr lang="en-US" sz="1200" i="1" dirty="0">
+              <a:rPr lang="en-US" sz="1250" i="1" dirty="0">
                 <a:solidFill>
                   <a:srgbClr val="6B6D72"/>
                 </a:solidFill>
@@ -18699,7 +17449,7 @@
               </a:rPr>
               <a:t>. LinkedIn aussi, à prendre avec un peu de recul. Vous arrivez préparé, sans rien avoir ouvert.</a:t>
             </a:r>
-            <a:endParaRPr lang="en-US" sz="1200" dirty="0"/>
+            <a:endParaRPr lang="en-US" sz="1250" dirty="0"/>
           </a:p>
         </p:txBody>
       </p:sp>
@@ -19133,7 +17883,7 @@
         <p:spPr>
           <a:xfrm>
             <a:off x="548640" y="640080"/>
-            <a:ext cx="5486400" cy="274320"/>
+            <a:ext cx="5486400" cy="256032"/>
           </a:xfrm>
           <a:prstGeom prst="rect">
             <a:avLst/>
@@ -19149,7 +17899,7 @@
               <a:buNone/>
             </a:pPr>
             <a:r>
-              <a:rPr lang="en-US" sz="1100" b="1" spc="300" kern="0" dirty="0">
+              <a:rPr lang="en-US" sz="900" b="1" spc="250" kern="0" dirty="0">
                 <a:solidFill>
                   <a:srgbClr val="0488C1"/>
                 </a:solidFill>
@@ -19159,7 +17909,7 @@
               </a:rPr>
               <a:t>CAS 2 · AVANT LE RENDEZ-VOUS</a:t>
             </a:r>
-            <a:endParaRPr lang="en-US" sz="1100" dirty="0"/>
+            <a:endParaRPr lang="en-US" sz="900" dirty="0"/>
           </a:p>
         </p:txBody>
       </p:sp>
@@ -19225,12 +17975,12 @@
           <a:p>
             <a:pPr indent="0" marL="0">
               <a:lnSpc>
-                <a:spcPts val="1650"/>
+                <a:spcPts val="1700"/>
               </a:lnSpc>
               <a:buNone/>
             </a:pPr>
             <a:r>
-              <a:rPr lang="en-US" sz="1200" i="1" dirty="0">
+              <a:rPr lang="en-US" sz="1250" i="1" dirty="0">
                 <a:solidFill>
                   <a:srgbClr val="6B6D72"/>
                 </a:solidFill>
@@ -19242,12 +17992,12 @@
             </a:r>
             <a:pPr indent="0" marL="0">
               <a:lnSpc>
-                <a:spcPts val="1650"/>
+                <a:spcPts val="1700"/>
               </a:lnSpc>
               <a:buNone/>
             </a:pPr>
             <a:r>
-              <a:rPr lang="en-US" sz="1200" b="1" i="1" dirty="0">
+              <a:rPr lang="en-US" sz="1250" b="1" i="1" dirty="0">
                 <a:solidFill>
                   <a:srgbClr val="036A96"/>
                 </a:solidFill>
@@ -19259,12 +18009,12 @@
             </a:r>
             <a:pPr indent="0" marL="0">
               <a:lnSpc>
-                <a:spcPts val="1650"/>
+                <a:spcPts val="1700"/>
               </a:lnSpc>
               <a:buNone/>
             </a:pPr>
             <a:r>
-              <a:rPr lang="en-US" sz="1200" i="1" dirty="0">
+              <a:rPr lang="en-US" sz="1250" i="1" dirty="0">
                 <a:solidFill>
                   <a:srgbClr val="6B6D72"/>
                 </a:solidFill>
@@ -19276,12 +18026,12 @@
             </a:r>
             <a:pPr indent="0" marL="0">
               <a:lnSpc>
-                <a:spcPts val="1650"/>
+                <a:spcPts val="1700"/>
               </a:lnSpc>
               <a:buNone/>
             </a:pPr>
             <a:r>
-              <a:rPr lang="en-US" sz="1200" b="1" i="1" dirty="0">
+              <a:rPr lang="en-US" sz="1250" b="1" i="1" dirty="0">
                 <a:solidFill>
                   <a:srgbClr val="036A96"/>
                 </a:solidFill>
@@ -19293,12 +18043,12 @@
             </a:r>
             <a:pPr indent="0" marL="0">
               <a:lnSpc>
-                <a:spcPts val="1650"/>
+                <a:spcPts val="1700"/>
               </a:lnSpc>
               <a:buNone/>
             </a:pPr>
             <a:r>
-              <a:rPr lang="en-US" sz="1200" i="1" dirty="0">
+              <a:rPr lang="en-US" sz="1250" i="1" dirty="0">
                 <a:solidFill>
                   <a:srgbClr val="6B6D72"/>
                 </a:solidFill>
@@ -19310,12 +18060,12 @@
             </a:r>
             <a:pPr indent="0" marL="0">
               <a:lnSpc>
-                <a:spcPts val="1650"/>
+                <a:spcPts val="1700"/>
               </a:lnSpc>
               <a:buNone/>
             </a:pPr>
             <a:r>
-              <a:rPr lang="en-US" sz="1200" b="1" i="1" dirty="0">
+              <a:rPr lang="en-US" sz="1250" b="1" i="1" dirty="0">
                 <a:solidFill>
                   <a:srgbClr val="036A96"/>
                 </a:solidFill>
@@ -19327,12 +18077,12 @@
             </a:r>
             <a:pPr indent="0" marL="0">
               <a:lnSpc>
-                <a:spcPts val="1650"/>
+                <a:spcPts val="1700"/>
               </a:lnSpc>
               <a:buNone/>
             </a:pPr>
             <a:r>
-              <a:rPr lang="en-US" sz="1200" i="1" dirty="0">
+              <a:rPr lang="en-US" sz="1250" i="1" dirty="0">
                 <a:solidFill>
                   <a:srgbClr val="6B6D72"/>
                 </a:solidFill>
@@ -19342,7 +18092,7 @@
               </a:rPr>
               <a:t>. LinkedIn aussi, à prendre avec un peu de recul. Vous arrivez préparé, sans rien avoir ouvert.</a:t>
             </a:r>
-            <a:endParaRPr lang="en-US" sz="1200" dirty="0"/>
+            <a:endParaRPr lang="en-US" sz="1250" dirty="0"/>
           </a:p>
         </p:txBody>
       </p:sp>
@@ -19776,7 +18526,7 @@
         <p:spPr>
           <a:xfrm>
             <a:off x="548640" y="640080"/>
-            <a:ext cx="5486400" cy="274320"/>
+            <a:ext cx="5486400" cy="256032"/>
           </a:xfrm>
           <a:prstGeom prst="rect">
             <a:avLst/>
@@ -19792,7 +18542,7 @@
               <a:buNone/>
             </a:pPr>
             <a:r>
-              <a:rPr lang="en-US" sz="1100" b="1" spc="300" kern="0" dirty="0">
+              <a:rPr lang="en-US" sz="900" b="1" spc="250" kern="0" dirty="0">
                 <a:solidFill>
                   <a:srgbClr val="0488C1"/>
                 </a:solidFill>
@@ -19802,7 +18552,7 @@
               </a:rPr>
               <a:t>CAS 2 · AVANT LE RENDEZ-VOUS</a:t>
             </a:r>
-            <a:endParaRPr lang="en-US" sz="1100" dirty="0"/>
+            <a:endParaRPr lang="en-US" sz="900" dirty="0"/>
           </a:p>
         </p:txBody>
       </p:sp>
@@ -19868,12 +18618,12 @@
           <a:p>
             <a:pPr indent="0" marL="0">
               <a:lnSpc>
-                <a:spcPts val="1650"/>
+                <a:spcPts val="1700"/>
               </a:lnSpc>
               <a:buNone/>
             </a:pPr>
             <a:r>
-              <a:rPr lang="en-US" sz="1200" i="1" dirty="0">
+              <a:rPr lang="en-US" sz="1250" i="1" dirty="0">
                 <a:solidFill>
                   <a:srgbClr val="6B6D72"/>
                 </a:solidFill>
@@ -19885,12 +18635,12 @@
             </a:r>
             <a:pPr indent="0" marL="0">
               <a:lnSpc>
-                <a:spcPts val="1650"/>
+                <a:spcPts val="1700"/>
               </a:lnSpc>
               <a:buNone/>
             </a:pPr>
             <a:r>
-              <a:rPr lang="en-US" sz="1200" b="1" i="1" dirty="0">
+              <a:rPr lang="en-US" sz="1250" b="1" i="1" dirty="0">
                 <a:solidFill>
                   <a:srgbClr val="036A96"/>
                 </a:solidFill>
@@ -19902,12 +18652,12 @@
             </a:r>
             <a:pPr indent="0" marL="0">
               <a:lnSpc>
-                <a:spcPts val="1650"/>
+                <a:spcPts val="1700"/>
               </a:lnSpc>
               <a:buNone/>
             </a:pPr>
             <a:r>
-              <a:rPr lang="en-US" sz="1200" i="1" dirty="0">
+              <a:rPr lang="en-US" sz="1250" i="1" dirty="0">
                 <a:solidFill>
                   <a:srgbClr val="6B6D72"/>
                 </a:solidFill>
@@ -19919,12 +18669,12 @@
             </a:r>
             <a:pPr indent="0" marL="0">
               <a:lnSpc>
-                <a:spcPts val="1650"/>
+                <a:spcPts val="1700"/>
               </a:lnSpc>
               <a:buNone/>
             </a:pPr>
             <a:r>
-              <a:rPr lang="en-US" sz="1200" b="1" i="1" dirty="0">
+              <a:rPr lang="en-US" sz="1250" b="1" i="1" dirty="0">
                 <a:solidFill>
                   <a:srgbClr val="036A96"/>
                 </a:solidFill>
@@ -19936,12 +18686,12 @@
             </a:r>
             <a:pPr indent="0" marL="0">
               <a:lnSpc>
-                <a:spcPts val="1650"/>
+                <a:spcPts val="1700"/>
               </a:lnSpc>
               <a:buNone/>
             </a:pPr>
             <a:r>
-              <a:rPr lang="en-US" sz="1200" i="1" dirty="0">
+              <a:rPr lang="en-US" sz="1250" i="1" dirty="0">
                 <a:solidFill>
                   <a:srgbClr val="6B6D72"/>
                 </a:solidFill>
@@ -19953,12 +18703,12 @@
             </a:r>
             <a:pPr indent="0" marL="0">
               <a:lnSpc>
-                <a:spcPts val="1650"/>
+                <a:spcPts val="1700"/>
               </a:lnSpc>
               <a:buNone/>
             </a:pPr>
             <a:r>
-              <a:rPr lang="en-US" sz="1200" b="1" i="1" dirty="0">
+              <a:rPr lang="en-US" sz="1250" b="1" i="1" dirty="0">
                 <a:solidFill>
                   <a:srgbClr val="036A96"/>
                 </a:solidFill>
@@ -19970,12 +18720,12 @@
             </a:r>
             <a:pPr indent="0" marL="0">
               <a:lnSpc>
-                <a:spcPts val="1650"/>
+                <a:spcPts val="1700"/>
               </a:lnSpc>
               <a:buNone/>
             </a:pPr>
             <a:r>
-              <a:rPr lang="en-US" sz="1200" i="1" dirty="0">
+              <a:rPr lang="en-US" sz="1250" i="1" dirty="0">
                 <a:solidFill>
                   <a:srgbClr val="6B6D72"/>
                 </a:solidFill>
@@ -19985,7 +18735,7 @@
               </a:rPr>
               <a:t>. LinkedIn aussi, à prendre avec un peu de recul. Vous arrivez préparé, sans rien avoir ouvert.</a:t>
             </a:r>
-            <a:endParaRPr lang="en-US" sz="1200" dirty="0"/>
+            <a:endParaRPr lang="en-US" sz="1250" dirty="0"/>
           </a:p>
         </p:txBody>
       </p:sp>
@@ -20419,7 +19169,7 @@
         <p:spPr>
           <a:xfrm>
             <a:off x="548640" y="685800"/>
-            <a:ext cx="11064240" cy="274320"/>
+            <a:ext cx="11064240" cy="256032"/>
           </a:xfrm>
           <a:prstGeom prst="rect">
             <a:avLst/>
@@ -20435,7 +19185,7 @@
               <a:buNone/>
             </a:pPr>
             <a:r>
-              <a:rPr lang="en-US" sz="1100" b="1" spc="300" kern="0" dirty="0">
+              <a:rPr lang="en-US" sz="900" b="1" spc="250" kern="0" dirty="0">
                 <a:solidFill>
                   <a:srgbClr val="0488C1"/>
                 </a:solidFill>
@@ -20445,7 +19195,7 @@
               </a:rPr>
               <a:t>LA BOÎTE À OUTILS</a:t>
             </a:r>
-            <a:endParaRPr lang="en-US" sz="1100" dirty="0"/>
+            <a:endParaRPr lang="en-US" sz="900" dirty="0"/>
           </a:p>
         </p:txBody>
       </p:sp>
@@ -20496,12 +19246,12 @@
         </p:nvSpPr>
         <p:spPr>
           <a:xfrm>
-            <a:off x="563728" y="2331720"/>
-            <a:ext cx="3383280" cy="2651760"/>
+            <a:off x="1752448" y="2103120"/>
+            <a:ext cx="3977640" cy="2011680"/>
           </a:xfrm>
           <a:prstGeom prst="roundRect">
             <a:avLst>
-              <a:gd name="adj" fmla="val 3103"/>
+              <a:gd name="adj" fmla="val 4091"/>
             </a:avLst>
           </a:prstGeom>
           <a:solidFill>
@@ -20530,12 +19280,12 @@
         </p:nvSpPr>
         <p:spPr>
           <a:xfrm>
-            <a:off x="856336" y="2624328"/>
-            <a:ext cx="566928" cy="566928"/>
+            <a:off x="2026768" y="2359152"/>
+            <a:ext cx="475488" cy="475488"/>
           </a:xfrm>
           <a:prstGeom prst="roundRect">
             <a:avLst>
-              <a:gd name="adj" fmla="val 12903"/>
+              <a:gd name="adj" fmla="val 15385"/>
             </a:avLst>
           </a:prstGeom>
           <a:solidFill>
@@ -20560,8 +19310,8 @@
         </p:blipFill>
         <p:spPr>
           <a:xfrm>
-            <a:off x="981060" y="2749052"/>
-            <a:ext cx="317480" cy="317480"/>
+            <a:off x="2131375" y="2463759"/>
+            <a:ext cx="266273" cy="266273"/>
           </a:xfrm>
           <a:prstGeom prst="rect">
             <a:avLst/>
@@ -20576,24 +19326,24 @@
         </p:nvSpPr>
         <p:spPr>
           <a:xfrm>
-            <a:off x="856336" y="3355848"/>
-            <a:ext cx="2798064" cy="237744"/>
-          </a:xfrm>
-          <a:prstGeom prst="rect">
-            <a:avLst/>
-          </a:prstGeom>
-          <a:noFill/>
-          <a:ln/>
-        </p:spPr>
-        <p:txBody>
-          <a:bodyPr wrap="square" lIns="0" tIns="0" rIns="0" bIns="0" rtlCol="0" anchor="ctr"/>
-          <a:lstStyle/>
-          <a:p>
-            <a:pPr indent="0" marL="0">
-              <a:buNone/>
-            </a:pPr>
-            <a:r>
-              <a:rPr lang="en-US" sz="950" b="1" spc="200" kern="0" dirty="0">
+            <a:off x="2648560" y="2377440"/>
+            <a:ext cx="2825496" cy="219456"/>
+          </a:xfrm>
+          <a:prstGeom prst="rect">
+            <a:avLst/>
+          </a:prstGeom>
+          <a:noFill/>
+          <a:ln/>
+        </p:spPr>
+        <p:txBody>
+          <a:bodyPr wrap="square" lIns="0" tIns="0" rIns="0" bIns="0" rtlCol="0" anchor="ctr"/>
+          <a:lstStyle/>
+          <a:p>
+            <a:pPr indent="0" marL="0">
+              <a:buNone/>
+            </a:pPr>
+            <a:r>
+              <a:rPr lang="en-US" sz="850" b="1" spc="200" kern="0" dirty="0">
                 <a:solidFill>
                   <a:srgbClr val="9B9DA3"/>
                 </a:solidFill>
@@ -20603,7 +19353,7 @@
               </a:rPr>
               <a:t>LE CERVEAU DE L'OPÉRATION</a:t>
             </a:r>
-            <a:endParaRPr lang="en-US" sz="950" dirty="0"/>
+            <a:endParaRPr lang="en-US" sz="850" dirty="0"/>
           </a:p>
         </p:txBody>
       </p:sp>
@@ -20615,8 +19365,8 @@
         </p:nvSpPr>
         <p:spPr>
           <a:xfrm>
-            <a:off x="856336" y="3611880"/>
-            <a:ext cx="2798064" cy="384048"/>
+            <a:off x="2648560" y="2596896"/>
+            <a:ext cx="2825496" cy="384048"/>
           </a:xfrm>
           <a:prstGeom prst="rect">
             <a:avLst/>
@@ -20654,8 +19404,8 @@
         </p:nvSpPr>
         <p:spPr>
           <a:xfrm>
-            <a:off x="856336" y="4050792"/>
-            <a:ext cx="2798064" cy="822960"/>
+            <a:off x="2026768" y="3072384"/>
+            <a:ext cx="3429000" cy="868680"/>
           </a:xfrm>
           <a:prstGeom prst="rect">
             <a:avLst/>
@@ -20696,12 +19446,260 @@
         </p:nvSpPr>
         <p:spPr>
           <a:xfrm>
-            <a:off x="4404208" y="2331720"/>
-            <a:ext cx="3383280" cy="2651760"/>
+            <a:off x="6461608" y="2103120"/>
+            <a:ext cx="3977640" cy="2011680"/>
           </a:xfrm>
           <a:prstGeom prst="roundRect">
             <a:avLst>
-              <a:gd name="adj" fmla="val 3103"/>
+              <a:gd name="adj" fmla="val 4091"/>
+            </a:avLst>
+          </a:prstGeom>
+          <a:solidFill>
+            <a:srgbClr val="FFFFFF"/>
+          </a:solidFill>
+          <a:ln w="9525">
+            <a:solidFill>
+              <a:srgbClr val="D2D6DC"/>
+            </a:solidFill>
+            <a:prstDash val="solid"/>
+          </a:ln>
+          <a:effectLst>
+            <a:outerShdw sx="100000" sy="100000" kx="0" ky="0" algn="bl" rotWithShape="0" blurRad="88900" dist="25400" dir="5400000">
+              <a:srgbClr val="292A2E">
+                <a:alpha val="16000"/>
+              </a:srgbClr>
+            </a:outerShdw>
+          </a:effectLst>
+        </p:spPr>
+      </p:sp>
+      <p:sp>
+        <p:nvSpPr>
+          <p:cNvPr id="11" name="Shape 8"/>
+          <p:cNvSpPr/>
+          <p:nvPr/>
+        </p:nvSpPr>
+        <p:spPr>
+          <a:xfrm>
+            <a:off x="6735928" y="2359152"/>
+            <a:ext cx="475488" cy="475488"/>
+          </a:xfrm>
+          <a:prstGeom prst="roundRect">
+            <a:avLst>
+              <a:gd name="adj" fmla="val 15385"/>
+            </a:avLst>
+          </a:prstGeom>
+          <a:solidFill>
+            <a:srgbClr val="E5F5FC"/>
+          </a:solidFill>
+          <a:ln/>
+        </p:spPr>
+      </p:sp>
+      <p:pic>
+        <p:nvPicPr>
+          <p:cNvPr id="12" name="Image 1" descr="preencoded.png">    </p:cNvPr>
+          <p:cNvPicPr>
+            <a:picLocks noChangeAspect="1"/>
+          </p:cNvPicPr>
+          <p:nvPr/>
+        </p:nvPicPr>
+        <p:blipFill>
+          <a:blip r:embed="rId2"/>
+          <a:stretch>
+            <a:fillRect/>
+          </a:stretch>
+        </p:blipFill>
+        <p:spPr>
+          <a:xfrm>
+            <a:off x="6840535" y="2463759"/>
+            <a:ext cx="266273" cy="266273"/>
+          </a:xfrm>
+          <a:prstGeom prst="rect">
+            <a:avLst/>
+          </a:prstGeom>
+        </p:spPr>
+      </p:pic>
+      <p:sp>
+        <p:nvSpPr>
+          <p:cNvPr id="13" name="Text 9"/>
+          <p:cNvSpPr/>
+          <p:nvPr/>
+        </p:nvSpPr>
+        <p:spPr>
+          <a:xfrm>
+            <a:off x="7357720" y="2377440"/>
+            <a:ext cx="2825496" cy="219456"/>
+          </a:xfrm>
+          <a:prstGeom prst="rect">
+            <a:avLst/>
+          </a:prstGeom>
+          <a:noFill/>
+          <a:ln/>
+        </p:spPr>
+        <p:txBody>
+          <a:bodyPr wrap="square" lIns="0" tIns="0" rIns="0" bIns="0" rtlCol="0" anchor="ctr"/>
+          <a:lstStyle/>
+          <a:p>
+            <a:pPr indent="0" marL="0">
+              <a:buNone/>
+            </a:pPr>
+            <a:r>
+              <a:rPr lang="en-US" sz="850" b="1" spc="200" kern="0" dirty="0">
+                <a:solidFill>
+                  <a:srgbClr val="9B9DA3"/>
+                </a:solidFill>
+                <a:latin typeface="Arial" pitchFamily="34" charset="0"/>
+                <a:ea typeface="Arial" pitchFamily="34" charset="-122"/>
+                <a:cs typeface="Arial" pitchFamily="34" charset="-120"/>
+              </a:rPr>
+              <a:t>LA BIBLIOTHÈQUE</a:t>
+            </a:r>
+            <a:endParaRPr lang="en-US" sz="850" dirty="0"/>
+          </a:p>
+        </p:txBody>
+      </p:sp>
+      <p:sp>
+        <p:nvSpPr>
+          <p:cNvPr id="14" name="Text 10"/>
+          <p:cNvSpPr/>
+          <p:nvPr/>
+        </p:nvSpPr>
+        <p:spPr>
+          <a:xfrm>
+            <a:off x="7357720" y="2596896"/>
+            <a:ext cx="2825496" cy="384048"/>
+          </a:xfrm>
+          <a:prstGeom prst="rect">
+            <a:avLst/>
+          </a:prstGeom>
+          <a:noFill/>
+          <a:ln/>
+        </p:spPr>
+        <p:txBody>
+          <a:bodyPr wrap="square" lIns="0" tIns="0" rIns="0" bIns="0" rtlCol="0" anchor="ctr"/>
+          <a:lstStyle/>
+          <a:p>
+            <a:pPr indent="0" marL="0">
+              <a:buNone/>
+            </a:pPr>
+            <a:r>
+              <a:rPr lang="en-US" sz="2100" b="1" dirty="0">
+                <a:solidFill>
+                  <a:srgbClr val="414142"/>
+                </a:solidFill>
+                <a:latin typeface="Arial" pitchFamily="34" charset="0"/>
+                <a:ea typeface="Arial" pitchFamily="34" charset="-122"/>
+                <a:cs typeface="Arial" pitchFamily="34" charset="-120"/>
+              </a:rPr>
+              <a:t>Salesforce</a:t>
+            </a:r>
+            <a:endParaRPr lang="en-US" sz="2100" dirty="0"/>
+          </a:p>
+        </p:txBody>
+      </p:sp>
+      <p:sp>
+        <p:nvSpPr>
+          <p:cNvPr id="15" name="Text 11"/>
+          <p:cNvSpPr/>
+          <p:nvPr/>
+        </p:nvSpPr>
+        <p:spPr>
+          <a:xfrm>
+            <a:off x="6735928" y="3072384"/>
+            <a:ext cx="3429000" cy="868680"/>
+          </a:xfrm>
+          <a:prstGeom prst="rect">
+            <a:avLst/>
+          </a:prstGeom>
+          <a:noFill/>
+          <a:ln/>
+        </p:spPr>
+        <p:txBody>
+          <a:bodyPr wrap="square" lIns="0" tIns="0" rIns="0" bIns="0" rtlCol="0" anchor="ctr"/>
+          <a:lstStyle/>
+          <a:p>
+            <a:pPr indent="0" marL="0">
+              <a:lnSpc>
+                <a:spcPts val="1600"/>
+              </a:lnSpc>
+              <a:buNone/>
+            </a:pPr>
+            <a:r>
+              <a:rPr lang="en-US" sz="1200" dirty="0">
+                <a:solidFill>
+                  <a:srgbClr val="6B6D72"/>
+                </a:solidFill>
+                <a:latin typeface="Arial" pitchFamily="34" charset="0"/>
+                <a:ea typeface="Arial" pitchFamily="34" charset="-122"/>
+                <a:cs typeface="Arial" pitchFamily="34" charset="-120"/>
+              </a:rPr>
+              <a:t>Comptes, contacts, historique. C'est là que tout doit finir, trié, proprement rangé.</a:t>
+            </a:r>
+            <a:endParaRPr lang="en-US" sz="1200" dirty="0"/>
+          </a:p>
+        </p:txBody>
+      </p:sp>
+      <p:sp>
+        <p:nvSpPr>
+          <p:cNvPr id="16" name="Shape 12"/>
+          <p:cNvSpPr/>
+          <p:nvPr/>
+        </p:nvSpPr>
+        <p:spPr>
+          <a:xfrm>
+            <a:off x="3741268" y="4151376"/>
+            <a:ext cx="1495044" cy="384048"/>
+          </a:xfrm>
+          <a:prstGeom prst="line">
+            <a:avLst/>
+          </a:prstGeom>
+          <a:noFill/>
+          <a:ln w="19050">
+            <a:solidFill>
+              <a:srgbClr val="EA4B71"/>
+            </a:solidFill>
+            <a:prstDash val="solid"/>
+            <a:headEnd type="oval"/>
+          </a:ln>
+        </p:spPr>
+      </p:sp>
+      <p:sp>
+        <p:nvSpPr>
+          <p:cNvPr id="17" name="Shape 13"/>
+          <p:cNvSpPr/>
+          <p:nvPr/>
+        </p:nvSpPr>
+        <p:spPr>
+          <a:xfrm flipV="1">
+            <a:off x="6955384" y="4151376"/>
+            <a:ext cx="1495044" cy="384048"/>
+          </a:xfrm>
+          <a:prstGeom prst="line">
+            <a:avLst/>
+          </a:prstGeom>
+          <a:noFill/>
+          <a:ln w="19050">
+            <a:solidFill>
+              <a:srgbClr val="EA4B71"/>
+            </a:solidFill>
+            <a:prstDash val="solid"/>
+            <a:tailEnd type="oval"/>
+          </a:ln>
+        </p:spPr>
+      </p:sp>
+      <p:sp>
+        <p:nvSpPr>
+          <p:cNvPr id="18" name="Shape 14"/>
+          <p:cNvSpPr/>
+          <p:nvPr/>
+        </p:nvSpPr>
+        <p:spPr>
+          <a:xfrm>
+            <a:off x="3947008" y="4572000"/>
+            <a:ext cx="4297680" cy="1645920"/>
+          </a:xfrm>
+          <a:prstGeom prst="roundRect">
+            <a:avLst>
+              <a:gd name="adj" fmla="val 5000"/>
             </a:avLst>
           </a:prstGeom>
           <a:solidFill>
@@ -20724,18 +19722,18 @@
       </p:sp>
       <p:sp>
         <p:nvSpPr>
-          <p:cNvPr id="11" name="Shape 8"/>
-          <p:cNvSpPr/>
-          <p:nvPr/>
-        </p:nvSpPr>
-        <p:spPr>
-          <a:xfrm>
-            <a:off x="4696816" y="2624328"/>
-            <a:ext cx="566928" cy="566928"/>
+          <p:cNvPr id="19" name="Shape 15"/>
+          <p:cNvSpPr/>
+          <p:nvPr/>
+        </p:nvSpPr>
+        <p:spPr>
+          <a:xfrm>
+            <a:off x="5858104" y="4773168"/>
+            <a:ext cx="475488" cy="475488"/>
           </a:xfrm>
           <a:prstGeom prst="roundRect">
             <a:avLst>
-              <a:gd name="adj" fmla="val 12903"/>
+              <a:gd name="adj" fmla="val 15385"/>
             </a:avLst>
           </a:prstGeom>
           <a:solidFill>
@@ -20746,207 +19744,7 @@
       </p:sp>
       <p:pic>
         <p:nvPicPr>
-          <p:cNvPr id="12" name="Image 1" descr="preencoded.png">    </p:cNvPr>
-          <p:cNvPicPr>
-            <a:picLocks noChangeAspect="1"/>
-          </p:cNvPicPr>
-          <p:nvPr/>
-        </p:nvPicPr>
-        <p:blipFill>
-          <a:blip r:embed="rId2"/>
-          <a:stretch>
-            <a:fillRect/>
-          </a:stretch>
-        </p:blipFill>
-        <p:spPr>
-          <a:xfrm>
-            <a:off x="4821540" y="2749052"/>
-            <a:ext cx="317480" cy="317480"/>
-          </a:xfrm>
-          <a:prstGeom prst="rect">
-            <a:avLst/>
-          </a:prstGeom>
-        </p:spPr>
-      </p:pic>
-      <p:sp>
-        <p:nvSpPr>
-          <p:cNvPr id="13" name="Text 9"/>
-          <p:cNvSpPr/>
-          <p:nvPr/>
-        </p:nvSpPr>
-        <p:spPr>
-          <a:xfrm>
-            <a:off x="4696816" y="3355848"/>
-            <a:ext cx="2798064" cy="237744"/>
-          </a:xfrm>
-          <a:prstGeom prst="rect">
-            <a:avLst/>
-          </a:prstGeom>
-          <a:noFill/>
-          <a:ln/>
-        </p:spPr>
-        <p:txBody>
-          <a:bodyPr wrap="square" lIns="0" tIns="0" rIns="0" bIns="0" rtlCol="0" anchor="ctr"/>
-          <a:lstStyle/>
-          <a:p>
-            <a:pPr indent="0" marL="0">
-              <a:buNone/>
-            </a:pPr>
-            <a:r>
-              <a:rPr lang="en-US" sz="950" b="1" spc="200" kern="0" dirty="0">
-                <a:solidFill>
-                  <a:srgbClr val="9B9DA3"/>
-                </a:solidFill>
-                <a:latin typeface="Arial" pitchFamily="34" charset="0"/>
-                <a:ea typeface="Arial" pitchFamily="34" charset="-122"/>
-                <a:cs typeface="Arial" pitchFamily="34" charset="-120"/>
-              </a:rPr>
-              <a:t>LA TUYAUTERIE</a:t>
-            </a:r>
-            <a:endParaRPr lang="en-US" sz="950" dirty="0"/>
-          </a:p>
-        </p:txBody>
-      </p:sp>
-      <p:sp>
-        <p:nvSpPr>
-          <p:cNvPr id="14" name="Text 10"/>
-          <p:cNvSpPr/>
-          <p:nvPr/>
-        </p:nvSpPr>
-        <p:spPr>
-          <a:xfrm>
-            <a:off x="4696816" y="3611880"/>
-            <a:ext cx="2798064" cy="384048"/>
-          </a:xfrm>
-          <a:prstGeom prst="rect">
-            <a:avLst/>
-          </a:prstGeom>
-          <a:noFill/>
-          <a:ln/>
-        </p:spPr>
-        <p:txBody>
-          <a:bodyPr wrap="square" lIns="0" tIns="0" rIns="0" bIns="0" rtlCol="0" anchor="ctr"/>
-          <a:lstStyle/>
-          <a:p>
-            <a:pPr indent="0" marL="0">
-              <a:buNone/>
-            </a:pPr>
-            <a:r>
-              <a:rPr lang="en-US" sz="2100" b="1" dirty="0">
-                <a:solidFill>
-                  <a:srgbClr val="414142"/>
-                </a:solidFill>
-                <a:latin typeface="Arial" pitchFamily="34" charset="0"/>
-                <a:ea typeface="Arial" pitchFamily="34" charset="-122"/>
-                <a:cs typeface="Arial" pitchFamily="34" charset="-120"/>
-              </a:rPr>
-              <a:t>n8n</a:t>
-            </a:r>
-            <a:endParaRPr lang="en-US" sz="2100" dirty="0"/>
-          </a:p>
-        </p:txBody>
-      </p:sp>
-      <p:sp>
-        <p:nvSpPr>
-          <p:cNvPr id="15" name="Text 11"/>
-          <p:cNvSpPr/>
-          <p:nvPr/>
-        </p:nvSpPr>
-        <p:spPr>
-          <a:xfrm>
-            <a:off x="4696816" y="4050792"/>
-            <a:ext cx="2798064" cy="822960"/>
-          </a:xfrm>
-          <a:prstGeom prst="rect">
-            <a:avLst/>
-          </a:prstGeom>
-          <a:noFill/>
-          <a:ln/>
-        </p:spPr>
-        <p:txBody>
-          <a:bodyPr wrap="square" lIns="0" tIns="0" rIns="0" bIns="0" rtlCol="0" anchor="ctr"/>
-          <a:lstStyle/>
-          <a:p>
-            <a:pPr indent="0" marL="0">
-              <a:lnSpc>
-                <a:spcPts val="1600"/>
-              </a:lnSpc>
-              <a:buNone/>
-            </a:pPr>
-            <a:r>
-              <a:rPr lang="en-US" sz="1200" dirty="0">
-                <a:solidFill>
-                  <a:srgbClr val="6B6D72"/>
-                </a:solidFill>
-                <a:latin typeface="Arial" pitchFamily="34" charset="0"/>
-                <a:ea typeface="Arial" pitchFamily="34" charset="-122"/>
-                <a:cs typeface="Arial" pitchFamily="34" charset="-120"/>
-              </a:rPr>
-              <a:t>C'est elle qui les fait dialoguer.</a:t>
-            </a:r>
-            <a:endParaRPr lang="en-US" sz="1200" dirty="0"/>
-          </a:p>
-        </p:txBody>
-      </p:sp>
-      <p:sp>
-        <p:nvSpPr>
-          <p:cNvPr id="16" name="Shape 12"/>
-          <p:cNvSpPr/>
-          <p:nvPr/>
-        </p:nvSpPr>
-        <p:spPr>
-          <a:xfrm>
-            <a:off x="8244688" y="2331720"/>
-            <a:ext cx="3383280" cy="2651760"/>
-          </a:xfrm>
-          <a:prstGeom prst="roundRect">
-            <a:avLst>
-              <a:gd name="adj" fmla="val 3103"/>
-            </a:avLst>
-          </a:prstGeom>
-          <a:solidFill>
-            <a:srgbClr val="FFFFFF"/>
-          </a:solidFill>
-          <a:ln w="9525">
-            <a:solidFill>
-              <a:srgbClr val="D2D6DC"/>
-            </a:solidFill>
-            <a:prstDash val="solid"/>
-          </a:ln>
-          <a:effectLst>
-            <a:outerShdw sx="100000" sy="100000" kx="0" ky="0" algn="bl" rotWithShape="0" blurRad="88900" dist="25400" dir="5400000">
-              <a:srgbClr val="292A2E">
-                <a:alpha val="16000"/>
-              </a:srgbClr>
-            </a:outerShdw>
-          </a:effectLst>
-        </p:spPr>
-      </p:sp>
-      <p:sp>
-        <p:nvSpPr>
-          <p:cNvPr id="17" name="Shape 13"/>
-          <p:cNvSpPr/>
-          <p:nvPr/>
-        </p:nvSpPr>
-        <p:spPr>
-          <a:xfrm>
-            <a:off x="8537296" y="2624328"/>
-            <a:ext cx="566928" cy="566928"/>
-          </a:xfrm>
-          <a:prstGeom prst="roundRect">
-            <a:avLst>
-              <a:gd name="adj" fmla="val 12903"/>
-            </a:avLst>
-          </a:prstGeom>
-          <a:solidFill>
-            <a:srgbClr val="E5F5FC"/>
-          </a:solidFill>
-          <a:ln/>
-        </p:spPr>
-      </p:sp>
-      <p:pic>
-        <p:nvPicPr>
-          <p:cNvPr id="18" name="Image 2" descr="preencoded.png">    </p:cNvPr>
+          <p:cNvPr id="20" name="Image 2" descr="preencoded.png">    </p:cNvPr>
           <p:cNvPicPr>
             <a:picLocks noChangeAspect="1"/>
           </p:cNvPicPr>
@@ -20960,8 +19758,8 @@
         </p:blipFill>
         <p:spPr>
           <a:xfrm>
-            <a:off x="8662020" y="2749052"/>
-            <a:ext cx="317480" cy="317480"/>
+            <a:off x="5962711" y="4877775"/>
+            <a:ext cx="266273" cy="266273"/>
           </a:xfrm>
           <a:prstGeom prst="rect">
             <a:avLst/>
@@ -20970,30 +19768,30 @@
       </p:pic>
       <p:sp>
         <p:nvSpPr>
-          <p:cNvPr id="19" name="Text 14"/>
-          <p:cNvSpPr/>
-          <p:nvPr/>
-        </p:nvSpPr>
-        <p:spPr>
-          <a:xfrm>
-            <a:off x="8537296" y="3355848"/>
-            <a:ext cx="2798064" cy="237744"/>
-          </a:xfrm>
-          <a:prstGeom prst="rect">
-            <a:avLst/>
-          </a:prstGeom>
-          <a:noFill/>
-          <a:ln/>
-        </p:spPr>
-        <p:txBody>
-          <a:bodyPr wrap="square" lIns="0" tIns="0" rIns="0" bIns="0" rtlCol="0" anchor="ctr"/>
-          <a:lstStyle/>
-          <a:p>
-            <a:pPr indent="0" marL="0">
-              <a:buNone/>
-            </a:pPr>
-            <a:r>
-              <a:rPr lang="en-US" sz="950" b="1" spc="200" kern="0" dirty="0">
+          <p:cNvPr id="21" name="Text 16"/>
+          <p:cNvSpPr/>
+          <p:nvPr/>
+        </p:nvSpPr>
+        <p:spPr>
+          <a:xfrm>
+            <a:off x="4221328" y="5321808"/>
+            <a:ext cx="3749040" cy="219456"/>
+          </a:xfrm>
+          <a:prstGeom prst="rect">
+            <a:avLst/>
+          </a:prstGeom>
+          <a:noFill/>
+          <a:ln/>
+        </p:spPr>
+        <p:txBody>
+          <a:bodyPr wrap="square" lIns="0" tIns="0" rIns="0" bIns="0" rtlCol="0" anchor="ctr"/>
+          <a:lstStyle/>
+          <a:p>
+            <a:pPr algn="ctr" indent="0" marL="0">
+              <a:buNone/>
+            </a:pPr>
+            <a:r>
+              <a:rPr lang="en-US" sz="850" b="1" spc="200" kern="0" dirty="0">
                 <a:solidFill>
                   <a:srgbClr val="9B9DA3"/>
                 </a:solidFill>
@@ -21001,38 +19799,38 @@
                 <a:ea typeface="Arial" pitchFamily="34" charset="-122"/>
                 <a:cs typeface="Arial" pitchFamily="34" charset="-120"/>
               </a:rPr>
-              <a:t>LA BIBLIOTHÈQUE</a:t>
-            </a:r>
-            <a:endParaRPr lang="en-US" sz="950" dirty="0"/>
-          </a:p>
-        </p:txBody>
-      </p:sp>
-      <p:sp>
-        <p:nvSpPr>
-          <p:cNvPr id="20" name="Text 15"/>
-          <p:cNvSpPr/>
-          <p:nvPr/>
-        </p:nvSpPr>
-        <p:spPr>
-          <a:xfrm>
-            <a:off x="8537296" y="3611880"/>
-            <a:ext cx="2798064" cy="384048"/>
-          </a:xfrm>
-          <a:prstGeom prst="rect">
-            <a:avLst/>
-          </a:prstGeom>
-          <a:noFill/>
-          <a:ln/>
-        </p:spPr>
-        <p:txBody>
-          <a:bodyPr wrap="square" lIns="0" tIns="0" rIns="0" bIns="0" rtlCol="0" anchor="ctr"/>
-          <a:lstStyle/>
-          <a:p>
-            <a:pPr indent="0" marL="0">
-              <a:buNone/>
-            </a:pPr>
-            <a:r>
-              <a:rPr lang="en-US" sz="2100" b="1" dirty="0">
+              <a:t>LA TUYAUTERIE</a:t>
+            </a:r>
+            <a:endParaRPr lang="en-US" sz="850" dirty="0"/>
+          </a:p>
+        </p:txBody>
+      </p:sp>
+      <p:sp>
+        <p:nvSpPr>
+          <p:cNvPr id="22" name="Text 17"/>
+          <p:cNvSpPr/>
+          <p:nvPr/>
+        </p:nvSpPr>
+        <p:spPr>
+          <a:xfrm>
+            <a:off x="4221328" y="5559552"/>
+            <a:ext cx="3749040" cy="457200"/>
+          </a:xfrm>
+          <a:prstGeom prst="rect">
+            <a:avLst/>
+          </a:prstGeom>
+          <a:noFill/>
+          <a:ln/>
+        </p:spPr>
+        <p:txBody>
+          <a:bodyPr wrap="square" lIns="0" tIns="0" rIns="0" bIns="0" rtlCol="0" anchor="ctr"/>
+          <a:lstStyle/>
+          <a:p>
+            <a:pPr algn="ctr" indent="0" marL="0">
+              <a:buNone/>
+            </a:pPr>
+            <a:r>
+              <a:rPr lang="en-US" sz="1800" b="1" dirty="0">
                 <a:solidFill>
                   <a:srgbClr val="414142"/>
                 </a:solidFill>
@@ -21040,37 +19838,9 @@
                 <a:ea typeface="Arial" pitchFamily="34" charset="-122"/>
                 <a:cs typeface="Arial" pitchFamily="34" charset="-120"/>
               </a:rPr>
-              <a:t>Salesforce</a:t>
-            </a:r>
-            <a:endParaRPr lang="en-US" sz="2100" dirty="0"/>
-          </a:p>
-        </p:txBody>
-      </p:sp>
-      <p:sp>
-        <p:nvSpPr>
-          <p:cNvPr id="21" name="Text 16"/>
-          <p:cNvSpPr/>
-          <p:nvPr/>
-        </p:nvSpPr>
-        <p:spPr>
-          <a:xfrm>
-            <a:off x="8537296" y="4050792"/>
-            <a:ext cx="2798064" cy="822960"/>
-          </a:xfrm>
-          <a:prstGeom prst="rect">
-            <a:avLst/>
-          </a:prstGeom>
-          <a:noFill/>
-          <a:ln/>
-        </p:spPr>
-        <p:txBody>
-          <a:bodyPr wrap="square" lIns="0" tIns="0" rIns="0" bIns="0" rtlCol="0" anchor="ctr"/>
-          <a:lstStyle/>
-          <a:p>
-            <a:pPr indent="0" marL="0">
-              <a:lnSpc>
-                <a:spcPts val="1600"/>
-              </a:lnSpc>
+              <a:t>n8n</a:t>
+            </a:r>
+            <a:pPr algn="ctr" indent="0" marL="0">
               <a:buNone/>
             </a:pPr>
             <a:r>
@@ -21082,61 +19852,11 @@
                 <a:ea typeface="Arial" pitchFamily="34" charset="-122"/>
                 <a:cs typeface="Arial" pitchFamily="34" charset="-120"/>
               </a:rPr>
-              <a:t>Comptes, contacts, historique. C'est là que tout doit finir, trié, proprement rangé.</a:t>
-            </a:r>
-            <a:endParaRPr lang="en-US" sz="1200" dirty="0"/>
-          </a:p>
-        </p:txBody>
-      </p:sp>
-      <p:sp>
-        <p:nvSpPr>
-          <p:cNvPr id="22" name="Shape 17"/>
-          <p:cNvSpPr/>
-          <p:nvPr/>
-        </p:nvSpPr>
-        <p:spPr>
-          <a:xfrm>
-            <a:off x="4001872" y="3657600"/>
-            <a:ext cx="347472" cy="0"/>
-          </a:xfrm>
-          <a:prstGeom prst="line">
-            <a:avLst/>
-          </a:prstGeom>
-          <a:noFill/>
-          <a:ln w="19050">
-            <a:solidFill>
-              <a:srgbClr val="EA4B71"/>
-            </a:solidFill>
-            <a:prstDash val="solid"/>
-            <a:headEnd type="oval"/>
-            <a:tailEnd type="triangle"/>
-          </a:ln>
-        </p:spPr>
-      </p:sp>
-      <p:sp>
-        <p:nvSpPr>
-          <p:cNvPr id="23" name="Shape 18"/>
-          <p:cNvSpPr/>
-          <p:nvPr/>
-        </p:nvSpPr>
-        <p:spPr>
-          <a:xfrm>
-            <a:off x="7842352" y="3657600"/>
-            <a:ext cx="347472" cy="0"/>
-          </a:xfrm>
-          <a:prstGeom prst="line">
-            <a:avLst/>
-          </a:prstGeom>
-          <a:noFill/>
-          <a:ln w="19050">
-            <a:solidFill>
-              <a:srgbClr val="EA4B71"/>
-            </a:solidFill>
-            <a:prstDash val="solid"/>
-            <a:headEnd type="oval"/>
-            <a:tailEnd type="triangle"/>
-          </a:ln>
-        </p:spPr>
+              <a:t>   C'est elle qui les fait dialoguer.</a:t>
+            </a:r>
+            <a:endParaRPr lang="en-US" sz="1800" dirty="0"/>
+          </a:p>
+        </p:txBody>
       </p:sp>
     </p:spTree>
   </p:cSld>
@@ -21191,7 +19911,7 @@
         <p:spPr>
           <a:xfrm>
             <a:off x="548640" y="640080"/>
-            <a:ext cx="5486400" cy="274320"/>
+            <a:ext cx="5486400" cy="256032"/>
           </a:xfrm>
           <a:prstGeom prst="rect">
             <a:avLst/>
@@ -21207,7 +19927,7 @@
               <a:buNone/>
             </a:pPr>
             <a:r>
-              <a:rPr lang="en-US" sz="1100" b="1" spc="300" kern="0" dirty="0">
+              <a:rPr lang="en-US" sz="900" b="1" spc="250" kern="0" dirty="0">
                 <a:solidFill>
                   <a:srgbClr val="0488C1"/>
                 </a:solidFill>
@@ -21217,7 +19937,7 @@
               </a:rPr>
               <a:t>CAS 2 · AVANT LE RENDEZ-VOUS</a:t>
             </a:r>
-            <a:endParaRPr lang="en-US" sz="1100" dirty="0"/>
+            <a:endParaRPr lang="en-US" sz="900" dirty="0"/>
           </a:p>
         </p:txBody>
       </p:sp>
@@ -21283,12 +20003,12 @@
           <a:p>
             <a:pPr indent="0" marL="0">
               <a:lnSpc>
-                <a:spcPts val="1650"/>
+                <a:spcPts val="1700"/>
               </a:lnSpc>
               <a:buNone/>
             </a:pPr>
             <a:r>
-              <a:rPr lang="en-US" sz="1200" i="1" dirty="0">
+              <a:rPr lang="en-US" sz="1250" i="1" dirty="0">
                 <a:solidFill>
                   <a:srgbClr val="6B6D72"/>
                 </a:solidFill>
@@ -21300,12 +20020,12 @@
             </a:r>
             <a:pPr indent="0" marL="0">
               <a:lnSpc>
-                <a:spcPts val="1650"/>
+                <a:spcPts val="1700"/>
               </a:lnSpc>
               <a:buNone/>
             </a:pPr>
             <a:r>
-              <a:rPr lang="en-US" sz="1200" b="1" i="1" dirty="0">
+              <a:rPr lang="en-US" sz="1250" b="1" i="1" dirty="0">
                 <a:solidFill>
                   <a:srgbClr val="036A96"/>
                 </a:solidFill>
@@ -21317,12 +20037,12 @@
             </a:r>
             <a:pPr indent="0" marL="0">
               <a:lnSpc>
-                <a:spcPts val="1650"/>
+                <a:spcPts val="1700"/>
               </a:lnSpc>
               <a:buNone/>
             </a:pPr>
             <a:r>
-              <a:rPr lang="en-US" sz="1200" i="1" dirty="0">
+              <a:rPr lang="en-US" sz="1250" i="1" dirty="0">
                 <a:solidFill>
                   <a:srgbClr val="6B6D72"/>
                 </a:solidFill>
@@ -21334,12 +20054,12 @@
             </a:r>
             <a:pPr indent="0" marL="0">
               <a:lnSpc>
-                <a:spcPts val="1650"/>
+                <a:spcPts val="1700"/>
               </a:lnSpc>
               <a:buNone/>
             </a:pPr>
             <a:r>
-              <a:rPr lang="en-US" sz="1200" b="1" i="1" dirty="0">
+              <a:rPr lang="en-US" sz="1250" b="1" i="1" dirty="0">
                 <a:solidFill>
                   <a:srgbClr val="036A96"/>
                 </a:solidFill>
@@ -21351,12 +20071,12 @@
             </a:r>
             <a:pPr indent="0" marL="0">
               <a:lnSpc>
-                <a:spcPts val="1650"/>
+                <a:spcPts val="1700"/>
               </a:lnSpc>
               <a:buNone/>
             </a:pPr>
             <a:r>
-              <a:rPr lang="en-US" sz="1200" i="1" dirty="0">
+              <a:rPr lang="en-US" sz="1250" i="1" dirty="0">
                 <a:solidFill>
                   <a:srgbClr val="6B6D72"/>
                 </a:solidFill>
@@ -21368,12 +20088,12 @@
             </a:r>
             <a:pPr indent="0" marL="0">
               <a:lnSpc>
-                <a:spcPts val="1650"/>
+                <a:spcPts val="1700"/>
               </a:lnSpc>
               <a:buNone/>
             </a:pPr>
             <a:r>
-              <a:rPr lang="en-US" sz="1200" b="1" i="1" dirty="0">
+              <a:rPr lang="en-US" sz="1250" b="1" i="1" dirty="0">
                 <a:solidFill>
                   <a:srgbClr val="036A96"/>
                 </a:solidFill>
@@ -21385,12 +20105,12 @@
             </a:r>
             <a:pPr indent="0" marL="0">
               <a:lnSpc>
-                <a:spcPts val="1650"/>
+                <a:spcPts val="1700"/>
               </a:lnSpc>
               <a:buNone/>
             </a:pPr>
             <a:r>
-              <a:rPr lang="en-US" sz="1200" i="1" dirty="0">
+              <a:rPr lang="en-US" sz="1250" i="1" dirty="0">
                 <a:solidFill>
                   <a:srgbClr val="6B6D72"/>
                 </a:solidFill>
@@ -21400,7 +20120,7 @@
               </a:rPr>
               <a:t>. LinkedIn aussi, à prendre avec un peu de recul. Vous arrivez préparé, sans rien avoir ouvert.</a:t>
             </a:r>
-            <a:endParaRPr lang="en-US" sz="1200" dirty="0"/>
+            <a:endParaRPr lang="en-US" sz="1250" dirty="0"/>
           </a:p>
         </p:txBody>
       </p:sp>
@@ -22169,7 +20889,7 @@
         <p:spPr>
           <a:xfrm>
             <a:off x="548640" y="384048"/>
-            <a:ext cx="11064240" cy="274320"/>
+            <a:ext cx="11064240" cy="256032"/>
           </a:xfrm>
           <a:prstGeom prst="rect">
             <a:avLst/>
@@ -22185,7 +20905,7 @@
               <a:buNone/>
             </a:pPr>
             <a:r>
-              <a:rPr lang="en-US" sz="1100" b="1" spc="300" kern="0" dirty="0">
+              <a:rPr lang="en-US" sz="900" b="1" spc="250" kern="0" dirty="0">
                 <a:solidFill>
                   <a:srgbClr val="0488C1"/>
                 </a:solidFill>
@@ -22195,7 +20915,7 @@
               </a:rPr>
               <a:t>BRIEF EXPRESS · LE RÉSULTAT</a:t>
             </a:r>
-            <a:endParaRPr lang="en-US" sz="1100" dirty="0"/>
+            <a:endParaRPr lang="en-US" sz="900" dirty="0"/>
           </a:p>
         </p:txBody>
       </p:sp>
@@ -24199,8 +22919,8 @@
         </p:nvSpPr>
         <p:spPr>
           <a:xfrm>
-            <a:off x="3809848" y="822960"/>
-            <a:ext cx="4572000" cy="4572000"/>
+            <a:off x="3718408" y="685800"/>
+            <a:ext cx="4754880" cy="4754880"/>
           </a:xfrm>
           <a:prstGeom prst="ellipse">
             <a:avLst/>
@@ -24219,8 +22939,8 @@
         </p:nvSpPr>
         <p:spPr>
           <a:xfrm>
-            <a:off x="0" y="1325880"/>
-            <a:ext cx="12191695" cy="2560320"/>
+            <a:off x="0" y="1051560"/>
+            <a:ext cx="12191695" cy="3017520"/>
           </a:xfrm>
           <a:prstGeom prst="rect">
             <a:avLst/>
@@ -24236,9 +22956,9 @@
               <a:buNone/>
             </a:pPr>
             <a:r>
-              <a:rPr lang="en-US" sz="15000" b="1" dirty="0">
-                <a:solidFill>
-                  <a:srgbClr val="0488C1"/>
+              <a:rPr lang="en-US" sz="18000" b="1" dirty="0">
+                <a:solidFill>
+                  <a:srgbClr val="049ED5"/>
                 </a:solidFill>
                 <a:latin typeface="Arial" pitchFamily="34" charset="0"/>
                 <a:ea typeface="Arial" pitchFamily="34" charset="-122"/>
@@ -24246,7 +22966,7 @@
               </a:rPr>
               <a:t>03</a:t>
             </a:r>
-            <a:endParaRPr lang="en-US" sz="15000" dirty="0"/>
+            <a:endParaRPr lang="en-US" sz="18000" dirty="0"/>
           </a:p>
         </p:txBody>
       </p:sp>
@@ -24258,7 +22978,7 @@
         </p:nvSpPr>
         <p:spPr>
           <a:xfrm>
-            <a:off x="914400" y="4206240"/>
+            <a:off x="914400" y="4434840"/>
             <a:ext cx="10362895" cy="640080"/>
           </a:xfrm>
           <a:prstGeom prst="rect">
@@ -24341,24 +23061,24 @@
         </p:nvSpPr>
         <p:spPr>
           <a:xfrm>
-            <a:off x="548640" y="640080"/>
-            <a:ext cx="5577840" cy="274320"/>
-          </a:xfrm>
-          <a:prstGeom prst="rect">
-            <a:avLst/>
-          </a:prstGeom>
-          <a:noFill/>
-          <a:ln/>
-        </p:spPr>
-        <p:txBody>
-          <a:bodyPr wrap="square" lIns="0" tIns="0" rIns="0" bIns="0" rtlCol="0" anchor="ctr"/>
-          <a:lstStyle/>
-          <a:p>
-            <a:pPr algn="l" indent="0" marL="0">
-              <a:buNone/>
-            </a:pPr>
-            <a:r>
-              <a:rPr lang="en-US" sz="1100" b="1" spc="300" kern="0" dirty="0">
+            <a:off x="548640" y="1828800"/>
+            <a:ext cx="11064240" cy="256032"/>
+          </a:xfrm>
+          <a:prstGeom prst="rect">
+            <a:avLst/>
+          </a:prstGeom>
+          <a:noFill/>
+          <a:ln/>
+        </p:spPr>
+        <p:txBody>
+          <a:bodyPr wrap="square" lIns="0" tIns="0" rIns="0" bIns="0" rtlCol="0" anchor="ctr"/>
+          <a:lstStyle/>
+          <a:p>
+            <a:pPr algn="ctr" indent="0" marL="0">
+              <a:buNone/>
+            </a:pPr>
+            <a:r>
+              <a:rPr lang="en-US" sz="900" b="1" spc="250" kern="0" dirty="0">
                 <a:solidFill>
                   <a:srgbClr val="0488C1"/>
                 </a:solidFill>
@@ -24368,7 +23088,7 @@
               </a:rPr>
               <a:t>CAS 3 · VIRTUAL BRAIN</a:t>
             </a:r>
-            <a:endParaRPr lang="en-US" sz="1100" dirty="0"/>
+            <a:endParaRPr lang="en-US" sz="900" dirty="0"/>
           </a:p>
         </p:txBody>
       </p:sp>
@@ -24380,20 +23100,20 @@
         </p:nvSpPr>
         <p:spPr>
           <a:xfrm>
-            <a:off x="548640" y="987552"/>
-            <a:ext cx="5577840" cy="1051560"/>
-          </a:xfrm>
-          <a:prstGeom prst="rect">
-            <a:avLst/>
-          </a:prstGeom>
-          <a:noFill/>
-          <a:ln/>
-        </p:spPr>
-        <p:txBody>
-          <a:bodyPr wrap="square" lIns="0" tIns="0" rIns="0" bIns="0" rtlCol="0" anchor="ctr"/>
-          <a:lstStyle/>
-          <a:p>
-            <a:pPr algn="l" indent="0" marL="0">
+            <a:off x="548640" y="2194560"/>
+            <a:ext cx="11064240" cy="594360"/>
+          </a:xfrm>
+          <a:prstGeom prst="rect">
+            <a:avLst/>
+          </a:prstGeom>
+          <a:noFill/>
+          <a:ln/>
+        </p:spPr>
+        <p:txBody>
+          <a:bodyPr wrap="square" lIns="0" tIns="0" rIns="0" bIns="0" rtlCol="0" anchor="ctr"/>
+          <a:lstStyle/>
+          <a:p>
+            <a:pPr algn="ctr" indent="0" marL="0">
               <a:buNone/>
             </a:pPr>
             <a:r>
@@ -24419,20 +23139,20 @@
         </p:nvSpPr>
         <p:spPr>
           <a:xfrm>
-            <a:off x="548640" y="2121408"/>
-            <a:ext cx="5394960" cy="1234440"/>
-          </a:xfrm>
-          <a:prstGeom prst="rect">
-            <a:avLst/>
-          </a:prstGeom>
-          <a:noFill/>
-          <a:ln/>
-        </p:spPr>
-        <p:txBody>
-          <a:bodyPr wrap="square" lIns="0" tIns="0" rIns="0" bIns="0" rtlCol="0" anchor="ctr"/>
-          <a:lstStyle/>
-          <a:p>
-            <a:pPr indent="0" marL="0">
+            <a:off x="2194560" y="3063240"/>
+            <a:ext cx="7799832" cy="960120"/>
+          </a:xfrm>
+          <a:prstGeom prst="rect">
+            <a:avLst/>
+          </a:prstGeom>
+          <a:noFill/>
+          <a:ln/>
+        </p:spPr>
+        <p:txBody>
+          <a:bodyPr wrap="square" lIns="0" tIns="0" rIns="0" bIns="0" rtlCol="0" anchor="ctr"/>
+          <a:lstStyle/>
+          <a:p>
+            <a:pPr algn="ctr" indent="0" marL="0">
               <a:lnSpc>
                 <a:spcPts val="1700"/>
               </a:lnSpc>
@@ -24505,24 +23225,24 @@
         </p:nvSpPr>
         <p:spPr>
           <a:xfrm>
-            <a:off x="548640" y="640080"/>
-            <a:ext cx="5577840" cy="274320"/>
-          </a:xfrm>
-          <a:prstGeom prst="rect">
-            <a:avLst/>
-          </a:prstGeom>
-          <a:noFill/>
-          <a:ln/>
-        </p:spPr>
-        <p:txBody>
-          <a:bodyPr wrap="square" lIns="0" tIns="0" rIns="0" bIns="0" rtlCol="0" anchor="ctr"/>
-          <a:lstStyle/>
-          <a:p>
-            <a:pPr algn="l" indent="0" marL="0">
-              <a:buNone/>
-            </a:pPr>
-            <a:r>
-              <a:rPr lang="en-US" sz="1100" b="1" spc="300" kern="0" dirty="0">
+            <a:off x="548640" y="457200"/>
+            <a:ext cx="11064240" cy="256032"/>
+          </a:xfrm>
+          <a:prstGeom prst="rect">
+            <a:avLst/>
+          </a:prstGeom>
+          <a:noFill/>
+          <a:ln/>
+        </p:spPr>
+        <p:txBody>
+          <a:bodyPr wrap="square" lIns="0" tIns="0" rIns="0" bIns="0" rtlCol="0" anchor="ctr"/>
+          <a:lstStyle/>
+          <a:p>
+            <a:pPr algn="ctr" indent="0" marL="0">
+              <a:buNone/>
+            </a:pPr>
+            <a:r>
+              <a:rPr lang="en-US" sz="900" b="1" spc="250" kern="0" dirty="0">
                 <a:solidFill>
                   <a:srgbClr val="0488C1"/>
                 </a:solidFill>
@@ -24532,7 +23252,7 @@
               </a:rPr>
               <a:t>CAS 3 · VIRTUAL BRAIN</a:t>
             </a:r>
-            <a:endParaRPr lang="en-US" sz="1100" dirty="0"/>
+            <a:endParaRPr lang="en-US" sz="900" dirty="0"/>
           </a:p>
         </p:txBody>
       </p:sp>
@@ -24544,20 +23264,20 @@
         </p:nvSpPr>
         <p:spPr>
           <a:xfrm>
-            <a:off x="548640" y="987552"/>
-            <a:ext cx="5577840" cy="1051560"/>
-          </a:xfrm>
-          <a:prstGeom prst="rect">
-            <a:avLst/>
-          </a:prstGeom>
-          <a:noFill/>
-          <a:ln/>
-        </p:spPr>
-        <p:txBody>
-          <a:bodyPr wrap="square" lIns="0" tIns="0" rIns="0" bIns="0" rtlCol="0" anchor="ctr"/>
-          <a:lstStyle/>
-          <a:p>
-            <a:pPr algn="l" indent="0" marL="0">
+            <a:off x="548640" y="804672"/>
+            <a:ext cx="11064240" cy="594360"/>
+          </a:xfrm>
+          <a:prstGeom prst="rect">
+            <a:avLst/>
+          </a:prstGeom>
+          <a:noFill/>
+          <a:ln/>
+        </p:spPr>
+        <p:txBody>
+          <a:bodyPr wrap="square" lIns="0" tIns="0" rIns="0" bIns="0" rtlCol="0" anchor="ctr"/>
+          <a:lstStyle/>
+          <a:p>
+            <a:pPr algn="ctr" indent="0" marL="0">
               <a:buNone/>
             </a:pPr>
             <a:r>
@@ -24583,20 +23303,20 @@
         </p:nvSpPr>
         <p:spPr>
           <a:xfrm>
-            <a:off x="548640" y="2121408"/>
-            <a:ext cx="5394960" cy="1234440"/>
-          </a:xfrm>
-          <a:prstGeom prst="rect">
-            <a:avLst/>
-          </a:prstGeom>
-          <a:noFill/>
-          <a:ln/>
-        </p:spPr>
-        <p:txBody>
-          <a:bodyPr wrap="square" lIns="0" tIns="0" rIns="0" bIns="0" rtlCol="0" anchor="ctr"/>
-          <a:lstStyle/>
-          <a:p>
-            <a:pPr indent="0" marL="0">
+            <a:off x="2194560" y="1481328"/>
+            <a:ext cx="7799832" cy="960120"/>
+          </a:xfrm>
+          <a:prstGeom prst="rect">
+            <a:avLst/>
+          </a:prstGeom>
+          <a:noFill/>
+          <a:ln/>
+        </p:spPr>
+        <p:txBody>
+          <a:bodyPr wrap="square" lIns="0" tIns="0" rIns="0" bIns="0" rtlCol="0" anchor="ctr"/>
+          <a:lstStyle/>
+          <a:p>
+            <a:pPr algn="ctr" indent="0" marL="0">
               <a:lnSpc>
                 <a:spcPts val="1700"/>
               </a:lnSpc>
@@ -24625,7 +23345,7 @@
         </p:nvSpPr>
         <p:spPr>
           <a:xfrm>
-            <a:off x="548640" y="3520440"/>
+            <a:off x="3581248" y="3017520"/>
             <a:ext cx="5029200" cy="2743200"/>
           </a:xfrm>
           <a:prstGeom prst="roundRect">
@@ -24659,7 +23379,7 @@
         </p:nvSpPr>
         <p:spPr>
           <a:xfrm>
-            <a:off x="822960" y="3666744"/>
+            <a:off x="3855568" y="3163824"/>
             <a:ext cx="4480560" cy="274320"/>
           </a:xfrm>
           <a:prstGeom prst="rect">
@@ -24712,7 +23432,7 @@
         </p:nvSpPr>
         <p:spPr>
           <a:xfrm>
-            <a:off x="548640" y="4014216"/>
+            <a:off x="3581248" y="3511296"/>
             <a:ext cx="5029200" cy="0"/>
           </a:xfrm>
           <a:prstGeom prst="line">
@@ -24735,7 +23455,7 @@
         </p:nvSpPr>
         <p:spPr>
           <a:xfrm>
-            <a:off x="822960" y="4142232"/>
+            <a:off x="3855568" y="3639312"/>
             <a:ext cx="4480560" cy="219456"/>
           </a:xfrm>
           <a:prstGeom prst="rect">
@@ -24774,7 +23494,7 @@
         </p:nvSpPr>
         <p:spPr>
           <a:xfrm>
-            <a:off x="822960" y="4398264"/>
+            <a:off x="3855568" y="3895344"/>
             <a:ext cx="987552" cy="329184"/>
           </a:xfrm>
           <a:prstGeom prst="roundRect">
@@ -24801,7 +23521,7 @@
         </p:nvSpPr>
         <p:spPr>
           <a:xfrm>
-            <a:off x="822960" y="4398264"/>
+            <a:off x="3855568" y="3895344"/>
             <a:ext cx="987552" cy="329184"/>
           </a:xfrm>
           <a:prstGeom prst="rect">
@@ -24840,7 +23560,7 @@
         </p:nvSpPr>
         <p:spPr>
           <a:xfrm>
-            <a:off x="2331720" y="4398264"/>
+            <a:off x="5364328" y="3895344"/>
             <a:ext cx="1609344" cy="329184"/>
           </a:xfrm>
           <a:prstGeom prst="roundRect">
@@ -24867,7 +23587,7 @@
         </p:nvSpPr>
         <p:spPr>
           <a:xfrm>
-            <a:off x="2331720" y="4398264"/>
+            <a:off x="5364328" y="3895344"/>
             <a:ext cx="1609344" cy="329184"/>
           </a:xfrm>
           <a:prstGeom prst="rect">
@@ -24906,7 +23626,7 @@
         </p:nvSpPr>
         <p:spPr>
           <a:xfrm>
-            <a:off x="3840480" y="4434840"/>
+            <a:off x="6873088" y="3931920"/>
             <a:ext cx="1463040" cy="274320"/>
           </a:xfrm>
           <a:prstGeom prst="rect">
@@ -24945,7 +23665,7 @@
         </p:nvSpPr>
         <p:spPr>
           <a:xfrm>
-            <a:off x="822960" y="4873752"/>
+            <a:off x="3855568" y="4370832"/>
             <a:ext cx="4480560" cy="219456"/>
           </a:xfrm>
           <a:prstGeom prst="rect">
@@ -24984,7 +23704,7 @@
         </p:nvSpPr>
         <p:spPr>
           <a:xfrm>
-            <a:off x="822960" y="5129784"/>
+            <a:off x="3855568" y="4626864"/>
             <a:ext cx="4480560" cy="365760"/>
           </a:xfrm>
           <a:prstGeom prst="roundRect">
@@ -25011,7 +23731,7 @@
         </p:nvSpPr>
         <p:spPr>
           <a:xfrm>
-            <a:off x="960120" y="5129784"/>
+            <a:off x="3992728" y="4626864"/>
             <a:ext cx="4206240" cy="365760"/>
           </a:xfrm>
           <a:prstGeom prst="rect">
@@ -25050,7 +23770,7 @@
         </p:nvSpPr>
         <p:spPr>
           <a:xfrm>
-            <a:off x="822960" y="5660136"/>
+            <a:off x="3855568" y="5157216"/>
             <a:ext cx="1371600" cy="384048"/>
           </a:xfrm>
           <a:prstGeom prst="roundRect">
@@ -25072,7 +23792,7 @@
         </p:nvSpPr>
         <p:spPr>
           <a:xfrm>
-            <a:off x="822960" y="5660136"/>
+            <a:off x="3855568" y="5157216"/>
             <a:ext cx="1371600" cy="384048"/>
           </a:xfrm>
           <a:prstGeom prst="rect">
@@ -25111,7 +23831,7 @@
         </p:nvSpPr>
         <p:spPr>
           <a:xfrm>
-            <a:off x="2377440" y="5715000"/>
+            <a:off x="5410048" y="5212080"/>
             <a:ext cx="2926080" cy="274320"/>
           </a:xfrm>
           <a:prstGeom prst="rect">
@@ -25149,7 +23869,7 @@
   </p:clrMapOvr>
   <mc:AlternateContent xmlns:mc="http://schemas.openxmlformats.org/markup-compatibility/2006">
     <mc:Choice xmlns:p159="http://schemas.microsoft.com/office/powerpoint/2015/09/main" Requires="p159">
-      <p:transition xmlns:p14="http://schemas.microsoft.com/office/powerpoint/2010/main" spd="slow" p14:dur="700" advTm="1500">
+      <p:transition xmlns:p14="http://schemas.microsoft.com/office/powerpoint/2010/main" spd="slow" p14:dur="800" advTm="1500">
         <p159:morph option="byObject"/>
       </p:transition>
     </mc:Choice>
@@ -25194,24 +23914,24 @@
         </p:nvSpPr>
         <p:spPr>
           <a:xfrm>
-            <a:off x="548640" y="640080"/>
-            <a:ext cx="5577840" cy="274320"/>
-          </a:xfrm>
-          <a:prstGeom prst="rect">
-            <a:avLst/>
-          </a:prstGeom>
-          <a:noFill/>
-          <a:ln/>
-        </p:spPr>
-        <p:txBody>
-          <a:bodyPr wrap="square" lIns="0" tIns="0" rIns="0" bIns="0" rtlCol="0" anchor="ctr"/>
-          <a:lstStyle/>
-          <a:p>
-            <a:pPr algn="l" indent="0" marL="0">
-              <a:buNone/>
-            </a:pPr>
-            <a:r>
-              <a:rPr lang="en-US" sz="1100" b="1" spc="300" kern="0" dirty="0">
+            <a:off x="548640" y="457200"/>
+            <a:ext cx="11064240" cy="256032"/>
+          </a:xfrm>
+          <a:prstGeom prst="rect">
+            <a:avLst/>
+          </a:prstGeom>
+          <a:noFill/>
+          <a:ln/>
+        </p:spPr>
+        <p:txBody>
+          <a:bodyPr wrap="square" lIns="0" tIns="0" rIns="0" bIns="0" rtlCol="0" anchor="ctr"/>
+          <a:lstStyle/>
+          <a:p>
+            <a:pPr algn="ctr" indent="0" marL="0">
+              <a:buNone/>
+            </a:pPr>
+            <a:r>
+              <a:rPr lang="en-US" sz="900" b="1" spc="250" kern="0" dirty="0">
                 <a:solidFill>
                   <a:srgbClr val="0488C1"/>
                 </a:solidFill>
@@ -25221,7 +23941,7 @@
               </a:rPr>
               <a:t>CAS 3 · VIRTUAL BRAIN</a:t>
             </a:r>
-            <a:endParaRPr lang="en-US" sz="1100" dirty="0"/>
+            <a:endParaRPr lang="en-US" sz="900" dirty="0"/>
           </a:p>
         </p:txBody>
       </p:sp>
@@ -25233,20 +23953,20 @@
         </p:nvSpPr>
         <p:spPr>
           <a:xfrm>
-            <a:off x="548640" y="987552"/>
-            <a:ext cx="5577840" cy="1051560"/>
-          </a:xfrm>
-          <a:prstGeom prst="rect">
-            <a:avLst/>
-          </a:prstGeom>
-          <a:noFill/>
-          <a:ln/>
-        </p:spPr>
-        <p:txBody>
-          <a:bodyPr wrap="square" lIns="0" tIns="0" rIns="0" bIns="0" rtlCol="0" anchor="ctr"/>
-          <a:lstStyle/>
-          <a:p>
-            <a:pPr algn="l" indent="0" marL="0">
+            <a:off x="548640" y="804672"/>
+            <a:ext cx="11064240" cy="594360"/>
+          </a:xfrm>
+          <a:prstGeom prst="rect">
+            <a:avLst/>
+          </a:prstGeom>
+          <a:noFill/>
+          <a:ln/>
+        </p:spPr>
+        <p:txBody>
+          <a:bodyPr wrap="square" lIns="0" tIns="0" rIns="0" bIns="0" rtlCol="0" anchor="ctr"/>
+          <a:lstStyle/>
+          <a:p>
+            <a:pPr algn="ctr" indent="0" marL="0">
               <a:buNone/>
             </a:pPr>
             <a:r>
@@ -25272,20 +23992,20 @@
         </p:nvSpPr>
         <p:spPr>
           <a:xfrm>
-            <a:off x="548640" y="2121408"/>
-            <a:ext cx="5394960" cy="1234440"/>
-          </a:xfrm>
-          <a:prstGeom prst="rect">
-            <a:avLst/>
-          </a:prstGeom>
-          <a:noFill/>
-          <a:ln/>
-        </p:spPr>
-        <p:txBody>
-          <a:bodyPr wrap="square" lIns="0" tIns="0" rIns="0" bIns="0" rtlCol="0" anchor="ctr"/>
-          <a:lstStyle/>
-          <a:p>
-            <a:pPr indent="0" marL="0">
+            <a:off x="2194560" y="1481328"/>
+            <a:ext cx="7799832" cy="960120"/>
+          </a:xfrm>
+          <a:prstGeom prst="rect">
+            <a:avLst/>
+          </a:prstGeom>
+          <a:noFill/>
+          <a:ln/>
+        </p:spPr>
+        <p:txBody>
+          <a:bodyPr wrap="square" lIns="0" tIns="0" rIns="0" bIns="0" rtlCol="0" anchor="ctr"/>
+          <a:lstStyle/>
+          <a:p>
+            <a:pPr algn="ctr" indent="0" marL="0">
               <a:lnSpc>
                 <a:spcPts val="1700"/>
               </a:lnSpc>
@@ -25314,7 +24034,7 @@
         </p:nvSpPr>
         <p:spPr>
           <a:xfrm>
-            <a:off x="548640" y="3520440"/>
+            <a:off x="3581248" y="3017520"/>
             <a:ext cx="5029200" cy="2743200"/>
           </a:xfrm>
           <a:prstGeom prst="roundRect">
@@ -25348,7 +24068,7 @@
         </p:nvSpPr>
         <p:spPr>
           <a:xfrm>
-            <a:off x="822960" y="3666744"/>
+            <a:off x="3855568" y="3163824"/>
             <a:ext cx="4480560" cy="274320"/>
           </a:xfrm>
           <a:prstGeom prst="rect">
@@ -25401,7 +24121,7 @@
         </p:nvSpPr>
         <p:spPr>
           <a:xfrm>
-            <a:off x="548640" y="4014216"/>
+            <a:off x="3581248" y="3511296"/>
             <a:ext cx="5029200" cy="0"/>
           </a:xfrm>
           <a:prstGeom prst="line">
@@ -25424,7 +24144,7 @@
         </p:nvSpPr>
         <p:spPr>
           <a:xfrm>
-            <a:off x="822960" y="4142232"/>
+            <a:off x="3855568" y="3639312"/>
             <a:ext cx="4480560" cy="219456"/>
           </a:xfrm>
           <a:prstGeom prst="rect">
@@ -25463,7 +24183,7 @@
         </p:nvSpPr>
         <p:spPr>
           <a:xfrm>
-            <a:off x="822960" y="4398264"/>
+            <a:off x="3855568" y="3895344"/>
             <a:ext cx="987552" cy="329184"/>
           </a:xfrm>
           <a:prstGeom prst="roundRect">
@@ -25490,7 +24210,7 @@
         </p:nvSpPr>
         <p:spPr>
           <a:xfrm>
-            <a:off x="822960" y="4398264"/>
+            <a:off x="3855568" y="3895344"/>
             <a:ext cx="987552" cy="329184"/>
           </a:xfrm>
           <a:prstGeom prst="rect">
@@ -25529,7 +24249,7 @@
         </p:nvSpPr>
         <p:spPr>
           <a:xfrm>
-            <a:off x="2331720" y="4398264"/>
+            <a:off x="5364328" y="3895344"/>
             <a:ext cx="1609344" cy="329184"/>
           </a:xfrm>
           <a:prstGeom prst="roundRect">
@@ -25556,7 +24276,7 @@
         </p:nvSpPr>
         <p:spPr>
           <a:xfrm>
-            <a:off x="2331720" y="4398264"/>
+            <a:off x="5364328" y="3895344"/>
             <a:ext cx="1609344" cy="329184"/>
           </a:xfrm>
           <a:prstGeom prst="rect">
@@ -25595,7 +24315,7 @@
         </p:nvSpPr>
         <p:spPr>
           <a:xfrm>
-            <a:off x="3840480" y="4434840"/>
+            <a:off x="6873088" y="3931920"/>
             <a:ext cx="1463040" cy="274320"/>
           </a:xfrm>
           <a:prstGeom prst="rect">
@@ -25634,7 +24354,7 @@
         </p:nvSpPr>
         <p:spPr>
           <a:xfrm>
-            <a:off x="822960" y="4873752"/>
+            <a:off x="3855568" y="4370832"/>
             <a:ext cx="4480560" cy="219456"/>
           </a:xfrm>
           <a:prstGeom prst="rect">
@@ -25673,7 +24393,7 @@
         </p:nvSpPr>
         <p:spPr>
           <a:xfrm>
-            <a:off x="822960" y="5129784"/>
+            <a:off x="3855568" y="4626864"/>
             <a:ext cx="4480560" cy="365760"/>
           </a:xfrm>
           <a:prstGeom prst="roundRect">
@@ -25700,7 +24420,7 @@
         </p:nvSpPr>
         <p:spPr>
           <a:xfrm>
-            <a:off x="960120" y="5129784"/>
+            <a:off x="3992728" y="4626864"/>
             <a:ext cx="4206240" cy="365760"/>
           </a:xfrm>
           <a:prstGeom prst="rect">
@@ -25739,7 +24459,7 @@
         </p:nvSpPr>
         <p:spPr>
           <a:xfrm>
-            <a:off x="822960" y="5660136"/>
+            <a:off x="3855568" y="5157216"/>
             <a:ext cx="1371600" cy="384048"/>
           </a:xfrm>
           <a:prstGeom prst="roundRect">
@@ -25761,7 +24481,7 @@
         </p:nvSpPr>
         <p:spPr>
           <a:xfrm>
-            <a:off x="822960" y="5660136"/>
+            <a:off x="3855568" y="5157216"/>
             <a:ext cx="1371600" cy="384048"/>
           </a:xfrm>
           <a:prstGeom prst="rect">
@@ -25800,7 +24520,7 @@
         </p:nvSpPr>
         <p:spPr>
           <a:xfrm>
-            <a:off x="2377440" y="5715000"/>
+            <a:off x="5410048" y="5212080"/>
             <a:ext cx="2926080" cy="274320"/>
           </a:xfrm>
           <a:prstGeom prst="rect">
@@ -25883,24 +24603,24 @@
         </p:nvSpPr>
         <p:spPr>
           <a:xfrm>
-            <a:off x="548640" y="640080"/>
-            <a:ext cx="5577840" cy="274320"/>
-          </a:xfrm>
-          <a:prstGeom prst="rect">
-            <a:avLst/>
-          </a:prstGeom>
-          <a:noFill/>
-          <a:ln/>
-        </p:spPr>
-        <p:txBody>
-          <a:bodyPr wrap="square" lIns="0" tIns="0" rIns="0" bIns="0" rtlCol="0" anchor="ctr"/>
-          <a:lstStyle/>
-          <a:p>
-            <a:pPr algn="l" indent="0" marL="0">
-              <a:buNone/>
-            </a:pPr>
-            <a:r>
-              <a:rPr lang="en-US" sz="1100" b="1" spc="300" kern="0" dirty="0">
+            <a:off x="548640" y="457200"/>
+            <a:ext cx="11064240" cy="256032"/>
+          </a:xfrm>
+          <a:prstGeom prst="rect">
+            <a:avLst/>
+          </a:prstGeom>
+          <a:noFill/>
+          <a:ln/>
+        </p:spPr>
+        <p:txBody>
+          <a:bodyPr wrap="square" lIns="0" tIns="0" rIns="0" bIns="0" rtlCol="0" anchor="ctr"/>
+          <a:lstStyle/>
+          <a:p>
+            <a:pPr algn="ctr" indent="0" marL="0">
+              <a:buNone/>
+            </a:pPr>
+            <a:r>
+              <a:rPr lang="en-US" sz="900" b="1" spc="250" kern="0" dirty="0">
                 <a:solidFill>
                   <a:srgbClr val="0488C1"/>
                 </a:solidFill>
@@ -25910,7 +24630,7 @@
               </a:rPr>
               <a:t>CAS 3 · VIRTUAL BRAIN</a:t>
             </a:r>
-            <a:endParaRPr lang="en-US" sz="1100" dirty="0"/>
+            <a:endParaRPr lang="en-US" sz="900" dirty="0"/>
           </a:p>
         </p:txBody>
       </p:sp>
@@ -25922,20 +24642,20 @@
         </p:nvSpPr>
         <p:spPr>
           <a:xfrm>
-            <a:off x="548640" y="987552"/>
-            <a:ext cx="5577840" cy="1051560"/>
-          </a:xfrm>
-          <a:prstGeom prst="rect">
-            <a:avLst/>
-          </a:prstGeom>
-          <a:noFill/>
-          <a:ln/>
-        </p:spPr>
-        <p:txBody>
-          <a:bodyPr wrap="square" lIns="0" tIns="0" rIns="0" bIns="0" rtlCol="0" anchor="ctr"/>
-          <a:lstStyle/>
-          <a:p>
-            <a:pPr algn="l" indent="0" marL="0">
+            <a:off x="548640" y="804672"/>
+            <a:ext cx="11064240" cy="594360"/>
+          </a:xfrm>
+          <a:prstGeom prst="rect">
+            <a:avLst/>
+          </a:prstGeom>
+          <a:noFill/>
+          <a:ln/>
+        </p:spPr>
+        <p:txBody>
+          <a:bodyPr wrap="square" lIns="0" tIns="0" rIns="0" bIns="0" rtlCol="0" anchor="ctr"/>
+          <a:lstStyle/>
+          <a:p>
+            <a:pPr algn="ctr" indent="0" marL="0">
               <a:buNone/>
             </a:pPr>
             <a:r>
@@ -25961,20 +24681,20 @@
         </p:nvSpPr>
         <p:spPr>
           <a:xfrm>
-            <a:off x="548640" y="2121408"/>
-            <a:ext cx="5394960" cy="1234440"/>
-          </a:xfrm>
-          <a:prstGeom prst="rect">
-            <a:avLst/>
-          </a:prstGeom>
-          <a:noFill/>
-          <a:ln/>
-        </p:spPr>
-        <p:txBody>
-          <a:bodyPr wrap="square" lIns="0" tIns="0" rIns="0" bIns="0" rtlCol="0" anchor="ctr"/>
-          <a:lstStyle/>
-          <a:p>
-            <a:pPr indent="0" marL="0">
+            <a:off x="2194560" y="1481328"/>
+            <a:ext cx="7799832" cy="960120"/>
+          </a:xfrm>
+          <a:prstGeom prst="rect">
+            <a:avLst/>
+          </a:prstGeom>
+          <a:noFill/>
+          <a:ln/>
+        </p:spPr>
+        <p:txBody>
+          <a:bodyPr wrap="square" lIns="0" tIns="0" rIns="0" bIns="0" rtlCol="0" anchor="ctr"/>
+          <a:lstStyle/>
+          <a:p>
+            <a:pPr algn="ctr" indent="0" marL="0">
               <a:lnSpc>
                 <a:spcPts val="1700"/>
               </a:lnSpc>
@@ -26003,7 +24723,7 @@
         </p:nvSpPr>
         <p:spPr>
           <a:xfrm>
-            <a:off x="548640" y="3520440"/>
+            <a:off x="548640" y="3017520"/>
             <a:ext cx="5029200" cy="2743200"/>
           </a:xfrm>
           <a:prstGeom prst="roundRect">
@@ -26037,7 +24757,7 @@
         </p:nvSpPr>
         <p:spPr>
           <a:xfrm>
-            <a:off x="822960" y="3666744"/>
+            <a:off x="822960" y="3163824"/>
             <a:ext cx="4480560" cy="274320"/>
           </a:xfrm>
           <a:prstGeom prst="rect">
@@ -26090,7 +24810,7 @@
         </p:nvSpPr>
         <p:spPr>
           <a:xfrm>
-            <a:off x="548640" y="4014216"/>
+            <a:off x="548640" y="3511296"/>
             <a:ext cx="5029200" cy="0"/>
           </a:xfrm>
           <a:prstGeom prst="line">
@@ -26113,7 +24833,7 @@
         </p:nvSpPr>
         <p:spPr>
           <a:xfrm>
-            <a:off x="822960" y="4142232"/>
+            <a:off x="822960" y="3639312"/>
             <a:ext cx="4480560" cy="219456"/>
           </a:xfrm>
           <a:prstGeom prst="rect">
@@ -26152,7 +24872,7 @@
         </p:nvSpPr>
         <p:spPr>
           <a:xfrm>
-            <a:off x="822960" y="4398264"/>
+            <a:off x="822960" y="3895344"/>
             <a:ext cx="987552" cy="329184"/>
           </a:xfrm>
           <a:prstGeom prst="roundRect">
@@ -26179,7 +24899,7 @@
         </p:nvSpPr>
         <p:spPr>
           <a:xfrm>
-            <a:off x="822960" y="4398264"/>
+            <a:off x="822960" y="3895344"/>
             <a:ext cx="987552" cy="329184"/>
           </a:xfrm>
           <a:prstGeom prst="rect">
@@ -26218,7 +24938,7 @@
         </p:nvSpPr>
         <p:spPr>
           <a:xfrm>
-            <a:off x="2331720" y="4398264"/>
+            <a:off x="2331720" y="3895344"/>
             <a:ext cx="1609344" cy="329184"/>
           </a:xfrm>
           <a:prstGeom prst="roundRect">
@@ -26245,7 +24965,7 @@
         </p:nvSpPr>
         <p:spPr>
           <a:xfrm>
-            <a:off x="2331720" y="4398264"/>
+            <a:off x="2331720" y="3895344"/>
             <a:ext cx="1609344" cy="329184"/>
           </a:xfrm>
           <a:prstGeom prst="rect">
@@ -26284,7 +25004,7 @@
         </p:nvSpPr>
         <p:spPr>
           <a:xfrm>
-            <a:off x="3840480" y="4434840"/>
+            <a:off x="3840480" y="3931920"/>
             <a:ext cx="1463040" cy="274320"/>
           </a:xfrm>
           <a:prstGeom prst="rect">
@@ -26323,7 +25043,7 @@
         </p:nvSpPr>
         <p:spPr>
           <a:xfrm>
-            <a:off x="822960" y="4873752"/>
+            <a:off x="822960" y="4370832"/>
             <a:ext cx="4480560" cy="219456"/>
           </a:xfrm>
           <a:prstGeom prst="rect">
@@ -26362,7 +25082,7 @@
         </p:nvSpPr>
         <p:spPr>
           <a:xfrm>
-            <a:off x="822960" y="5129784"/>
+            <a:off x="822960" y="4626864"/>
             <a:ext cx="4480560" cy="365760"/>
           </a:xfrm>
           <a:prstGeom prst="roundRect">
@@ -26389,7 +25109,7 @@
         </p:nvSpPr>
         <p:spPr>
           <a:xfrm>
-            <a:off x="960120" y="5129784"/>
+            <a:off x="960120" y="4626864"/>
             <a:ext cx="4206240" cy="365760"/>
           </a:xfrm>
           <a:prstGeom prst="rect">
@@ -26428,7 +25148,7 @@
         </p:nvSpPr>
         <p:spPr>
           <a:xfrm>
-            <a:off x="822960" y="5660136"/>
+            <a:off x="822960" y="5157216"/>
             <a:ext cx="1371600" cy="384048"/>
           </a:xfrm>
           <a:prstGeom prst="roundRect">
@@ -26450,7 +25170,7 @@
         </p:nvSpPr>
         <p:spPr>
           <a:xfrm>
-            <a:off x="822960" y="5660136"/>
+            <a:off x="822960" y="5157216"/>
             <a:ext cx="1371600" cy="384048"/>
           </a:xfrm>
           <a:prstGeom prst="rect">
@@ -26489,7 +25209,7 @@
         </p:nvSpPr>
         <p:spPr>
           <a:xfrm>
-            <a:off x="2377440" y="5715000"/>
+            <a:off x="2377440" y="5212080"/>
             <a:ext cx="2926080" cy="274320"/>
           </a:xfrm>
           <a:prstGeom prst="rect">
@@ -26528,12 +25248,12 @@
         </p:nvSpPr>
         <p:spPr>
           <a:xfrm>
-            <a:off x="6126480" y="777240"/>
-            <a:ext cx="1709928" cy="1554480"/>
+            <a:off x="6126480" y="2743200"/>
+            <a:ext cx="1709928" cy="1417320"/>
           </a:xfrm>
           <a:prstGeom prst="roundRect">
             <a:avLst>
-              <a:gd name="adj" fmla="val 5294"/>
+              <a:gd name="adj" fmla="val 5806"/>
             </a:avLst>
           </a:prstGeom>
           <a:solidFill>
@@ -26562,8 +25282,8 @@
         </p:nvSpPr>
         <p:spPr>
           <a:xfrm>
-            <a:off x="6236208" y="914400"/>
-            <a:ext cx="1490472" cy="502920"/>
+            <a:off x="6236208" y="2871216"/>
+            <a:ext cx="1490472" cy="457200"/>
           </a:xfrm>
           <a:prstGeom prst="rect">
             <a:avLst/>
@@ -26579,7 +25299,7 @@
               <a:buNone/>
             </a:pPr>
             <a:r>
-              <a:rPr lang="en-US" sz="2400" b="1" dirty="0">
+              <a:rPr lang="en-US" sz="2200" b="1" dirty="0">
                 <a:solidFill>
                   <a:srgbClr val="0488C1"/>
                 </a:solidFill>
@@ -26589,7 +25309,7 @@
               </a:rPr>
               <a:t>104</a:t>
             </a:r>
-            <a:endParaRPr lang="en-US" sz="2400" dirty="0"/>
+            <a:endParaRPr lang="en-US" sz="2200" dirty="0"/>
           </a:p>
         </p:txBody>
       </p:sp>
@@ -26601,8 +25321,8 @@
         </p:nvSpPr>
         <p:spPr>
           <a:xfrm>
-            <a:off x="6254496" y="1463040"/>
-            <a:ext cx="1453896" cy="731520"/>
+            <a:off x="6254496" y="3364992"/>
+            <a:ext cx="1453896" cy="713232"/>
           </a:xfrm>
           <a:prstGeom prst="rect">
             <a:avLst/>
@@ -26643,12 +25363,12 @@
         </p:nvSpPr>
         <p:spPr>
           <a:xfrm>
-            <a:off x="8019288" y="777240"/>
-            <a:ext cx="1709928" cy="1554480"/>
+            <a:off x="8019288" y="2743200"/>
+            <a:ext cx="1709928" cy="1417320"/>
           </a:xfrm>
           <a:prstGeom prst="roundRect">
             <a:avLst>
-              <a:gd name="adj" fmla="val 5294"/>
+              <a:gd name="adj" fmla="val 5806"/>
             </a:avLst>
           </a:prstGeom>
           <a:solidFill>
@@ -26677,8 +25397,8 @@
         </p:nvSpPr>
         <p:spPr>
           <a:xfrm>
-            <a:off x="8129016" y="914400"/>
-            <a:ext cx="1490472" cy="502920"/>
+            <a:off x="8129016" y="2871216"/>
+            <a:ext cx="1490472" cy="457200"/>
           </a:xfrm>
           <a:prstGeom prst="rect">
             <a:avLst/>
@@ -26694,7 +25414,7 @@
               <a:buNone/>
             </a:pPr>
             <a:r>
-              <a:rPr lang="en-US" sz="2400" b="1" dirty="0">
+              <a:rPr lang="en-US" sz="2200" b="1" dirty="0">
                 <a:solidFill>
                   <a:srgbClr val="0488C1"/>
                 </a:solidFill>
@@ -26704,7 +25424,7 @@
               </a:rPr>
               <a:t>22,2 M€</a:t>
             </a:r>
-            <a:endParaRPr lang="en-US" sz="2400" dirty="0"/>
+            <a:endParaRPr lang="en-US" sz="2200" dirty="0"/>
           </a:p>
         </p:txBody>
       </p:sp>
@@ -26716,8 +25436,8 @@
         </p:nvSpPr>
         <p:spPr>
           <a:xfrm>
-            <a:off x="8147304" y="1463040"/>
-            <a:ext cx="1453896" cy="731520"/>
+            <a:off x="8147304" y="3364992"/>
+            <a:ext cx="1453896" cy="713232"/>
           </a:xfrm>
           <a:prstGeom prst="rect">
             <a:avLst/>
@@ -26758,12 +25478,12 @@
         </p:nvSpPr>
         <p:spPr>
           <a:xfrm>
-            <a:off x="9912096" y="777240"/>
-            <a:ext cx="1709928" cy="1554480"/>
+            <a:off x="9912096" y="2743200"/>
+            <a:ext cx="1709928" cy="1417320"/>
           </a:xfrm>
           <a:prstGeom prst="roundRect">
             <a:avLst>
-              <a:gd name="adj" fmla="val 5294"/>
+              <a:gd name="adj" fmla="val 5806"/>
             </a:avLst>
           </a:prstGeom>
           <a:solidFill>
@@ -26792,8 +25512,8 @@
         </p:nvSpPr>
         <p:spPr>
           <a:xfrm>
-            <a:off x="10021824" y="914400"/>
-            <a:ext cx="1490472" cy="502920"/>
+            <a:off x="10021824" y="2871216"/>
+            <a:ext cx="1490472" cy="457200"/>
           </a:xfrm>
           <a:prstGeom prst="rect">
             <a:avLst/>
@@ -26809,7 +25529,7 @@
               <a:buNone/>
             </a:pPr>
             <a:r>
-              <a:rPr lang="en-US" sz="2400" b="1" dirty="0">
+              <a:rPr lang="en-US" sz="2200" b="1" dirty="0">
                 <a:solidFill>
                   <a:srgbClr val="0488C1"/>
                 </a:solidFill>
@@ -26819,7 +25539,7 @@
               </a:rPr>
               <a:t>545</a:t>
             </a:r>
-            <a:endParaRPr lang="en-US" sz="2400" dirty="0"/>
+            <a:endParaRPr lang="en-US" sz="2200" dirty="0"/>
           </a:p>
         </p:txBody>
       </p:sp>
@@ -26831,8 +25551,8 @@
         </p:nvSpPr>
         <p:spPr>
           <a:xfrm>
-            <a:off x="10040112" y="1463040"/>
-            <a:ext cx="1453896" cy="731520"/>
+            <a:off x="10040112" y="3364992"/>
+            <a:ext cx="1453896" cy="713232"/>
           </a:xfrm>
           <a:prstGeom prst="rect">
             <a:avLst/>
@@ -26873,12 +25593,12 @@
         </p:nvSpPr>
         <p:spPr>
           <a:xfrm>
-            <a:off x="6126480" y="2606040"/>
-            <a:ext cx="5486400" cy="3657600"/>
+            <a:off x="6126480" y="4343400"/>
+            <a:ext cx="5486400" cy="2331720"/>
           </a:xfrm>
           <a:prstGeom prst="roundRect">
             <a:avLst>
-              <a:gd name="adj" fmla="val 2250"/>
+              <a:gd name="adj" fmla="val 3529"/>
             </a:avLst>
           </a:prstGeom>
           <a:solidFill>
@@ -26907,24 +25627,24 @@
         </p:nvSpPr>
         <p:spPr>
           <a:xfrm>
-            <a:off x="6400800" y="2770632"/>
-            <a:ext cx="4937760" cy="274320"/>
-          </a:xfrm>
-          <a:prstGeom prst="rect">
-            <a:avLst/>
-          </a:prstGeom>
-          <a:noFill/>
-          <a:ln/>
-        </p:spPr>
-        <p:txBody>
-          <a:bodyPr wrap="square" lIns="0" tIns="0" rIns="0" bIns="0" rtlCol="0" anchor="ctr"/>
-          <a:lstStyle/>
-          <a:p>
-            <a:pPr indent="0" marL="0">
-              <a:buNone/>
-            </a:pPr>
-            <a:r>
-              <a:rPr lang="en-US" sz="1200" b="1" dirty="0">
+            <a:off x="6400800" y="4453128"/>
+            <a:ext cx="4937760" cy="256032"/>
+          </a:xfrm>
+          <a:prstGeom prst="rect">
+            <a:avLst/>
+          </a:prstGeom>
+          <a:noFill/>
+          <a:ln/>
+        </p:spPr>
+        <p:txBody>
+          <a:bodyPr wrap="square" lIns="0" tIns="0" rIns="0" bIns="0" rtlCol="0" anchor="ctr"/>
+          <a:lstStyle/>
+          <a:p>
+            <a:pPr indent="0" marL="0">
+              <a:buNone/>
+            </a:pPr>
+            <a:r>
+              <a:rPr lang="en-US" sz="1150" b="1" dirty="0">
                 <a:solidFill>
                   <a:srgbClr val="25262A"/>
                 </a:solidFill>
@@ -26934,7 +25654,7 @@
               </a:rPr>
               <a:t>Cartographie CEBPL · extrait</a:t>
             </a:r>
-            <a:endParaRPr lang="en-US" sz="1200" dirty="0"/>
+            <a:endParaRPr lang="en-US" sz="1150" dirty="0"/>
           </a:p>
         </p:txBody>
       </p:sp>
@@ -26946,7 +25666,7 @@
         </p:nvSpPr>
         <p:spPr>
           <a:xfrm>
-            <a:off x="6126480" y="3136392"/>
+            <a:off x="6126480" y="4764024"/>
             <a:ext cx="5486400" cy="0"/>
           </a:xfrm>
           <a:prstGeom prst="line">
@@ -26969,24 +25689,24 @@
         </p:nvSpPr>
         <p:spPr>
           <a:xfrm>
-            <a:off x="6400800" y="3355848"/>
-            <a:ext cx="2743200" cy="274320"/>
-          </a:xfrm>
-          <a:prstGeom prst="rect">
-            <a:avLst/>
-          </a:prstGeom>
-          <a:noFill/>
-          <a:ln/>
-        </p:spPr>
-        <p:txBody>
-          <a:bodyPr wrap="square" lIns="0" tIns="0" rIns="0" bIns="0" rtlCol="0" anchor="ctr"/>
-          <a:lstStyle/>
-          <a:p>
-            <a:pPr indent="0" marL="0">
-              <a:buNone/>
-            </a:pPr>
-            <a:r>
-              <a:rPr lang="en-US" sz="1050" dirty="0">
+            <a:off x="6400800" y="4855464"/>
+            <a:ext cx="2743200" cy="237744"/>
+          </a:xfrm>
+          <a:prstGeom prst="rect">
+            <a:avLst/>
+          </a:prstGeom>
+          <a:noFill/>
+          <a:ln/>
+        </p:spPr>
+        <p:txBody>
+          <a:bodyPr wrap="square" lIns="0" tIns="0" rIns="0" bIns="0" rtlCol="0" anchor="ctr"/>
+          <a:lstStyle/>
+          <a:p>
+            <a:pPr indent="0" marL="0">
+              <a:buNone/>
+            </a:pPr>
+            <a:r>
+              <a:rPr lang="en-US" sz="1000" dirty="0">
                 <a:solidFill>
                   <a:srgbClr val="25262A"/>
                 </a:solidFill>
@@ -26996,7 +25716,7 @@
               </a:rPr>
               <a:t>Caisse d'Épargne BPL</a:t>
             </a:r>
-            <a:endParaRPr lang="en-US" sz="1050" dirty="0"/>
+            <a:endParaRPr lang="en-US" sz="1000" dirty="0"/>
           </a:p>
         </p:txBody>
       </p:sp>
@@ -27008,8 +25728,8 @@
         </p:nvSpPr>
         <p:spPr>
           <a:xfrm>
-            <a:off x="10378440" y="3355848"/>
-            <a:ext cx="960120" cy="274320"/>
+            <a:off x="10378440" y="4855464"/>
+            <a:ext cx="960120" cy="237744"/>
           </a:xfrm>
           <a:prstGeom prst="rect">
             <a:avLst/>
@@ -27025,7 +25745,7 @@
               <a:buNone/>
             </a:pPr>
             <a:r>
-              <a:rPr lang="en-US" sz="1050" b="1" dirty="0">
+              <a:rPr lang="en-US" sz="1000" b="1" dirty="0">
                 <a:solidFill>
                   <a:srgbClr val="414142"/>
                 </a:solidFill>
@@ -27035,7 +25755,7 @@
               </a:rPr>
               <a:t>22,2 M€</a:t>
             </a:r>
-            <a:endParaRPr lang="en-US" sz="1050" dirty="0"/>
+            <a:endParaRPr lang="en-US" sz="1000" dirty="0"/>
           </a:p>
         </p:txBody>
       </p:sp>
@@ -27047,12 +25767,12 @@
         </p:nvSpPr>
         <p:spPr>
           <a:xfrm>
-            <a:off x="6400800" y="3666744"/>
-            <a:ext cx="1920240" cy="109728"/>
+            <a:off x="6400800" y="5120640"/>
+            <a:ext cx="1920240" cy="100584"/>
           </a:xfrm>
           <a:prstGeom prst="roundRect">
             <a:avLst>
-              <a:gd name="adj" fmla="val 41667"/>
+              <a:gd name="adj" fmla="val 45455"/>
             </a:avLst>
           </a:prstGeom>
           <a:solidFill>
@@ -27069,12 +25789,12 @@
         </p:nvSpPr>
         <p:spPr>
           <a:xfrm>
-            <a:off x="6400800" y="3666744"/>
-            <a:ext cx="109728" cy="109728"/>
+            <a:off x="6400800" y="5120640"/>
+            <a:ext cx="109728" cy="100584"/>
           </a:xfrm>
           <a:prstGeom prst="roundRect">
             <a:avLst>
-              <a:gd name="adj" fmla="val 41667"/>
+              <a:gd name="adj" fmla="val 45455"/>
             </a:avLst>
           </a:prstGeom>
           <a:solidFill>
@@ -27091,24 +25811,24 @@
         </p:nvSpPr>
         <p:spPr>
           <a:xfrm>
-            <a:off x="6400800" y="4014216"/>
-            <a:ext cx="2743200" cy="274320"/>
-          </a:xfrm>
-          <a:prstGeom prst="rect">
-            <a:avLst/>
-          </a:prstGeom>
-          <a:noFill/>
-          <a:ln/>
-        </p:spPr>
-        <p:txBody>
-          <a:bodyPr wrap="square" lIns="0" tIns="0" rIns="0" bIns="0" rtlCol="0" anchor="ctr"/>
-          <a:lstStyle/>
-          <a:p>
-            <a:pPr indent="0" marL="0">
-              <a:buNone/>
-            </a:pPr>
-            <a:r>
-              <a:rPr lang="en-US" sz="1050" dirty="0">
+            <a:off x="6400800" y="5303520"/>
+            <a:ext cx="2743200" cy="237744"/>
+          </a:xfrm>
+          <a:prstGeom prst="rect">
+            <a:avLst/>
+          </a:prstGeom>
+          <a:noFill/>
+          <a:ln/>
+        </p:spPr>
+        <p:txBody>
+          <a:bodyPr wrap="square" lIns="0" tIns="0" rIns="0" bIns="0" rtlCol="0" anchor="ctr"/>
+          <a:lstStyle/>
+          <a:p>
+            <a:pPr indent="0" marL="0">
+              <a:buNone/>
+            </a:pPr>
+            <a:r>
+              <a:rPr lang="en-US" sz="1000" dirty="0">
                 <a:solidFill>
                   <a:srgbClr val="25262A"/>
                 </a:solidFill>
@@ -27118,7 +25838,7 @@
               </a:rPr>
               <a:t>Banque Populaire Grand Ouest</a:t>
             </a:r>
-            <a:endParaRPr lang="en-US" sz="1050" dirty="0"/>
+            <a:endParaRPr lang="en-US" sz="1000" dirty="0"/>
           </a:p>
         </p:txBody>
       </p:sp>
@@ -27130,8 +25850,8 @@
         </p:nvSpPr>
         <p:spPr>
           <a:xfrm>
-            <a:off x="10378440" y="4014216"/>
-            <a:ext cx="960120" cy="274320"/>
+            <a:off x="10378440" y="5303520"/>
+            <a:ext cx="960120" cy="237744"/>
           </a:xfrm>
           <a:prstGeom prst="rect">
             <a:avLst/>
@@ -27147,7 +25867,7 @@
               <a:buNone/>
             </a:pPr>
             <a:r>
-              <a:rPr lang="en-US" sz="1050" b="1" dirty="0">
+              <a:rPr lang="en-US" sz="1000" b="1" dirty="0">
                 <a:solidFill>
                   <a:srgbClr val="414142"/>
                 </a:solidFill>
@@ -27157,7 +25877,7 @@
               </a:rPr>
               <a:t>14,8 M€</a:t>
             </a:r>
-            <a:endParaRPr lang="en-US" sz="1050" dirty="0"/>
+            <a:endParaRPr lang="en-US" sz="1000" dirty="0"/>
           </a:p>
         </p:txBody>
       </p:sp>
@@ -27169,12 +25889,12 @@
         </p:nvSpPr>
         <p:spPr>
           <a:xfrm>
-            <a:off x="6400800" y="4325112"/>
-            <a:ext cx="1920240" cy="109728"/>
+            <a:off x="6400800" y="5568696"/>
+            <a:ext cx="1920240" cy="100584"/>
           </a:xfrm>
           <a:prstGeom prst="roundRect">
             <a:avLst>
-              <a:gd name="adj" fmla="val 41667"/>
+              <a:gd name="adj" fmla="val 45455"/>
             </a:avLst>
           </a:prstGeom>
           <a:solidFill>
@@ -27191,12 +25911,12 @@
         </p:nvSpPr>
         <p:spPr>
           <a:xfrm>
-            <a:off x="6400800" y="4325112"/>
-            <a:ext cx="109728" cy="109728"/>
+            <a:off x="6400800" y="5568696"/>
+            <a:ext cx="109728" cy="100584"/>
           </a:xfrm>
           <a:prstGeom prst="roundRect">
             <a:avLst>
-              <a:gd name="adj" fmla="val 41667"/>
+              <a:gd name="adj" fmla="val 45455"/>
             </a:avLst>
           </a:prstGeom>
           <a:solidFill>
@@ -27213,24 +25933,24 @@
         </p:nvSpPr>
         <p:spPr>
           <a:xfrm>
-            <a:off x="6400800" y="4672584"/>
-            <a:ext cx="2743200" cy="274320"/>
-          </a:xfrm>
-          <a:prstGeom prst="rect">
-            <a:avLst/>
-          </a:prstGeom>
-          <a:noFill/>
-          <a:ln/>
-        </p:spPr>
-        <p:txBody>
-          <a:bodyPr wrap="square" lIns="0" tIns="0" rIns="0" bIns="0" rtlCol="0" anchor="ctr"/>
-          <a:lstStyle/>
-          <a:p>
-            <a:pPr indent="0" marL="0">
-              <a:buNone/>
-            </a:pPr>
-            <a:r>
-              <a:rPr lang="en-US" sz="1050" dirty="0">
+            <a:off x="6400800" y="5751576"/>
+            <a:ext cx="2743200" cy="237744"/>
+          </a:xfrm>
+          <a:prstGeom prst="rect">
+            <a:avLst/>
+          </a:prstGeom>
+          <a:noFill/>
+          <a:ln/>
+        </p:spPr>
+        <p:txBody>
+          <a:bodyPr wrap="square" lIns="0" tIns="0" rIns="0" bIns="0" rtlCol="0" anchor="ctr"/>
+          <a:lstStyle/>
+          <a:p>
+            <a:pPr indent="0" marL="0">
+              <a:buNone/>
+            </a:pPr>
+            <a:r>
+              <a:rPr lang="en-US" sz="1000" dirty="0">
                 <a:solidFill>
                   <a:srgbClr val="25262A"/>
                 </a:solidFill>
@@ -27240,7 +25960,7 @@
               </a:rPr>
               <a:t>Crédit Agricole</a:t>
             </a:r>
-            <a:endParaRPr lang="en-US" sz="1050" dirty="0"/>
+            <a:endParaRPr lang="en-US" sz="1000" dirty="0"/>
           </a:p>
         </p:txBody>
       </p:sp>
@@ -27252,8 +25972,8 @@
         </p:nvSpPr>
         <p:spPr>
           <a:xfrm>
-            <a:off x="10378440" y="4672584"/>
-            <a:ext cx="960120" cy="274320"/>
+            <a:off x="10378440" y="5751576"/>
+            <a:ext cx="960120" cy="237744"/>
           </a:xfrm>
           <a:prstGeom prst="rect">
             <a:avLst/>
@@ -27269,7 +25989,7 @@
               <a:buNone/>
             </a:pPr>
             <a:r>
-              <a:rPr lang="en-US" sz="1050" b="1" dirty="0">
+              <a:rPr lang="en-US" sz="1000" b="1" dirty="0">
                 <a:solidFill>
                   <a:srgbClr val="414142"/>
                 </a:solidFill>
@@ -27279,7 +25999,7 @@
               </a:rPr>
               <a:t>11,3 M€</a:t>
             </a:r>
-            <a:endParaRPr lang="en-US" sz="1050" dirty="0"/>
+            <a:endParaRPr lang="en-US" sz="1000" dirty="0"/>
           </a:p>
         </p:txBody>
       </p:sp>
@@ -27291,12 +26011,12 @@
         </p:nvSpPr>
         <p:spPr>
           <a:xfrm>
-            <a:off x="6400800" y="4983480"/>
-            <a:ext cx="1920240" cy="109728"/>
+            <a:off x="6400800" y="6016752"/>
+            <a:ext cx="1920240" cy="100584"/>
           </a:xfrm>
           <a:prstGeom prst="roundRect">
             <a:avLst>
-              <a:gd name="adj" fmla="val 41667"/>
+              <a:gd name="adj" fmla="val 45455"/>
             </a:avLst>
           </a:prstGeom>
           <a:solidFill>
@@ -27313,12 +26033,12 @@
         </p:nvSpPr>
         <p:spPr>
           <a:xfrm>
-            <a:off x="6400800" y="4983480"/>
-            <a:ext cx="109728" cy="109728"/>
+            <a:off x="6400800" y="6016752"/>
+            <a:ext cx="109728" cy="100584"/>
           </a:xfrm>
           <a:prstGeom prst="roundRect">
             <a:avLst>
-              <a:gd name="adj" fmla="val 41667"/>
+              <a:gd name="adj" fmla="val 45455"/>
             </a:avLst>
           </a:prstGeom>
           <a:solidFill>
@@ -27335,24 +26055,24 @@
         </p:nvSpPr>
         <p:spPr>
           <a:xfrm>
-            <a:off x="6400800" y="5330952"/>
-            <a:ext cx="2743200" cy="274320"/>
-          </a:xfrm>
-          <a:prstGeom prst="rect">
-            <a:avLst/>
-          </a:prstGeom>
-          <a:noFill/>
-          <a:ln/>
-        </p:spPr>
-        <p:txBody>
-          <a:bodyPr wrap="square" lIns="0" tIns="0" rIns="0" bIns="0" rtlCol="0" anchor="ctr"/>
-          <a:lstStyle/>
-          <a:p>
-            <a:pPr indent="0" marL="0">
-              <a:buNone/>
-            </a:pPr>
-            <a:r>
-              <a:rPr lang="en-US" sz="1050" dirty="0">
+            <a:off x="6400800" y="6199632"/>
+            <a:ext cx="2743200" cy="237744"/>
+          </a:xfrm>
+          <a:prstGeom prst="rect">
+            <a:avLst/>
+          </a:prstGeom>
+          <a:noFill/>
+          <a:ln/>
+        </p:spPr>
+        <p:txBody>
+          <a:bodyPr wrap="square" lIns="0" tIns="0" rIns="0" bIns="0" rtlCol="0" anchor="ctr"/>
+          <a:lstStyle/>
+          <a:p>
+            <a:pPr indent="0" marL="0">
+              <a:buNone/>
+            </a:pPr>
+            <a:r>
+              <a:rPr lang="en-US" sz="1000" dirty="0">
                 <a:solidFill>
                   <a:srgbClr val="25262A"/>
                 </a:solidFill>
@@ -27362,7 +26082,7 @@
               </a:rPr>
               <a:t>Autres, 12 établissements</a:t>
             </a:r>
-            <a:endParaRPr lang="en-US" sz="1050" dirty="0"/>
+            <a:endParaRPr lang="en-US" sz="1000" dirty="0"/>
           </a:p>
         </p:txBody>
       </p:sp>
@@ -27374,8 +26094,8 @@
         </p:nvSpPr>
         <p:spPr>
           <a:xfrm>
-            <a:off x="10378440" y="5330952"/>
-            <a:ext cx="960120" cy="274320"/>
+            <a:off x="10378440" y="6199632"/>
+            <a:ext cx="960120" cy="237744"/>
           </a:xfrm>
           <a:prstGeom prst="rect">
             <a:avLst/>
@@ -27391,7 +26111,7 @@
               <a:buNone/>
             </a:pPr>
             <a:r>
-              <a:rPr lang="en-US" sz="1050" b="1" dirty="0">
+              <a:rPr lang="en-US" sz="1000" b="1" dirty="0">
                 <a:solidFill>
                   <a:srgbClr val="414142"/>
                 </a:solidFill>
@@ -27401,7 +26121,7 @@
               </a:rPr>
               <a:t>31,5 M€</a:t>
             </a:r>
-            <a:endParaRPr lang="en-US" sz="1050" dirty="0"/>
+            <a:endParaRPr lang="en-US" sz="1000" dirty="0"/>
           </a:p>
         </p:txBody>
       </p:sp>
@@ -27413,12 +26133,12 @@
         </p:nvSpPr>
         <p:spPr>
           <a:xfrm>
-            <a:off x="6400800" y="5641848"/>
-            <a:ext cx="1920240" cy="109728"/>
+            <a:off x="6400800" y="6464808"/>
+            <a:ext cx="1920240" cy="100584"/>
           </a:xfrm>
           <a:prstGeom prst="roundRect">
             <a:avLst>
-              <a:gd name="adj" fmla="val 41667"/>
+              <a:gd name="adj" fmla="val 45455"/>
             </a:avLst>
           </a:prstGeom>
           <a:solidFill>
@@ -27435,12 +26155,12 @@
         </p:nvSpPr>
         <p:spPr>
           <a:xfrm>
-            <a:off x="6400800" y="5641848"/>
-            <a:ext cx="109728" cy="109728"/>
+            <a:off x="6400800" y="6464808"/>
+            <a:ext cx="109728" cy="100584"/>
           </a:xfrm>
           <a:prstGeom prst="roundRect">
             <a:avLst>
-              <a:gd name="adj" fmla="val 41667"/>
+              <a:gd name="adj" fmla="val 45455"/>
             </a:avLst>
           </a:prstGeom>
           <a:solidFill>
@@ -27448,45 +26168,6 @@
           </a:solidFill>
           <a:ln/>
         </p:spPr>
-      </p:sp>
-      <p:sp>
-        <p:nvSpPr>
-          <p:cNvPr id="48" name="Text 46"/>
-          <p:cNvSpPr/>
-          <p:nvPr/>
-        </p:nvSpPr>
-        <p:spPr>
-          <a:xfrm>
-            <a:off x="6400800" y="5879592"/>
-            <a:ext cx="4937760" cy="274320"/>
-          </a:xfrm>
-          <a:prstGeom prst="rect">
-            <a:avLst/>
-          </a:prstGeom>
-          <a:noFill/>
-          <a:ln/>
-        </p:spPr>
-        <p:txBody>
-          <a:bodyPr wrap="square" lIns="0" tIns="0" rIns="0" bIns="0" rtlCol="0" anchor="ctr"/>
-          <a:lstStyle/>
-          <a:p>
-            <a:pPr indent="0" marL="0">
-              <a:buNone/>
-            </a:pPr>
-            <a:r>
-              <a:rPr lang="en-US" sz="900" i="1" dirty="0">
-                <a:solidFill>
-                  <a:srgbClr val="9B9DA3"/>
-                </a:solidFill>
-                <a:latin typeface="Arial" pitchFamily="34" charset="0"/>
-                <a:ea typeface="Arial" pitchFamily="34" charset="-122"/>
-                <a:cs typeface="Arial" pitchFamily="34" charset="-120"/>
-              </a:rPr>
-              <a:t>Deux régions, une banque : l'analyse tombe, données sensibles comprises.</a:t>
-            </a:r>
-            <a:endParaRPr lang="en-US" sz="900" dirty="0"/>
-          </a:p>
-        </p:txBody>
       </p:sp>
     </p:spTree>
   </p:cSld>
@@ -27495,7 +26176,7 @@
   </p:clrMapOvr>
   <mc:AlternateContent xmlns:mc="http://schemas.openxmlformats.org/markup-compatibility/2006">
     <mc:Choice xmlns:p159="http://schemas.microsoft.com/office/powerpoint/2015/09/main" Requires="p159">
-      <p:transition xmlns:p14="http://schemas.microsoft.com/office/powerpoint/2010/main" spd="slow" p14:dur="700" advTm="400">
+      <p:transition xmlns:p14="http://schemas.microsoft.com/office/powerpoint/2010/main" spd="slow" p14:dur="800" advTm="400">
         <p159:morph option="byObject"/>
       </p:transition>
     </mc:Choice>
@@ -27540,24 +26221,24 @@
         </p:nvSpPr>
         <p:spPr>
           <a:xfrm>
-            <a:off x="548640" y="640080"/>
-            <a:ext cx="5577840" cy="274320"/>
-          </a:xfrm>
-          <a:prstGeom prst="rect">
-            <a:avLst/>
-          </a:prstGeom>
-          <a:noFill/>
-          <a:ln/>
-        </p:spPr>
-        <p:txBody>
-          <a:bodyPr wrap="square" lIns="0" tIns="0" rIns="0" bIns="0" rtlCol="0" anchor="ctr"/>
-          <a:lstStyle/>
-          <a:p>
-            <a:pPr algn="l" indent="0" marL="0">
-              <a:buNone/>
-            </a:pPr>
-            <a:r>
-              <a:rPr lang="en-US" sz="1100" b="1" spc="300" kern="0" dirty="0">
+            <a:off x="548640" y="457200"/>
+            <a:ext cx="11064240" cy="256032"/>
+          </a:xfrm>
+          <a:prstGeom prst="rect">
+            <a:avLst/>
+          </a:prstGeom>
+          <a:noFill/>
+          <a:ln/>
+        </p:spPr>
+        <p:txBody>
+          <a:bodyPr wrap="square" lIns="0" tIns="0" rIns="0" bIns="0" rtlCol="0" anchor="ctr"/>
+          <a:lstStyle/>
+          <a:p>
+            <a:pPr algn="ctr" indent="0" marL="0">
+              <a:buNone/>
+            </a:pPr>
+            <a:r>
+              <a:rPr lang="en-US" sz="900" b="1" spc="250" kern="0" dirty="0">
                 <a:solidFill>
                   <a:srgbClr val="0488C1"/>
                 </a:solidFill>
@@ -27567,7 +26248,7 @@
               </a:rPr>
               <a:t>CAS 3 · VIRTUAL BRAIN</a:t>
             </a:r>
-            <a:endParaRPr lang="en-US" sz="1100" dirty="0"/>
+            <a:endParaRPr lang="en-US" sz="900" dirty="0"/>
           </a:p>
         </p:txBody>
       </p:sp>
@@ -27579,20 +26260,20 @@
         </p:nvSpPr>
         <p:spPr>
           <a:xfrm>
-            <a:off x="548640" y="987552"/>
-            <a:ext cx="5577840" cy="1051560"/>
-          </a:xfrm>
-          <a:prstGeom prst="rect">
-            <a:avLst/>
-          </a:prstGeom>
-          <a:noFill/>
-          <a:ln/>
-        </p:spPr>
-        <p:txBody>
-          <a:bodyPr wrap="square" lIns="0" tIns="0" rIns="0" bIns="0" rtlCol="0" anchor="ctr"/>
-          <a:lstStyle/>
-          <a:p>
-            <a:pPr algn="l" indent="0" marL="0">
+            <a:off x="548640" y="804672"/>
+            <a:ext cx="11064240" cy="594360"/>
+          </a:xfrm>
+          <a:prstGeom prst="rect">
+            <a:avLst/>
+          </a:prstGeom>
+          <a:noFill/>
+          <a:ln/>
+        </p:spPr>
+        <p:txBody>
+          <a:bodyPr wrap="square" lIns="0" tIns="0" rIns="0" bIns="0" rtlCol="0" anchor="ctr"/>
+          <a:lstStyle/>
+          <a:p>
+            <a:pPr algn="ctr" indent="0" marL="0">
               <a:buNone/>
             </a:pPr>
             <a:r>
@@ -27618,20 +26299,20 @@
         </p:nvSpPr>
         <p:spPr>
           <a:xfrm>
-            <a:off x="548640" y="2121408"/>
-            <a:ext cx="5394960" cy="1234440"/>
-          </a:xfrm>
-          <a:prstGeom prst="rect">
-            <a:avLst/>
-          </a:prstGeom>
-          <a:noFill/>
-          <a:ln/>
-        </p:spPr>
-        <p:txBody>
-          <a:bodyPr wrap="square" lIns="0" tIns="0" rIns="0" bIns="0" rtlCol="0" anchor="ctr"/>
-          <a:lstStyle/>
-          <a:p>
-            <a:pPr indent="0" marL="0">
+            <a:off x="2194560" y="1481328"/>
+            <a:ext cx="7799832" cy="960120"/>
+          </a:xfrm>
+          <a:prstGeom prst="rect">
+            <a:avLst/>
+          </a:prstGeom>
+          <a:noFill/>
+          <a:ln/>
+        </p:spPr>
+        <p:txBody>
+          <a:bodyPr wrap="square" lIns="0" tIns="0" rIns="0" bIns="0" rtlCol="0" anchor="ctr"/>
+          <a:lstStyle/>
+          <a:p>
+            <a:pPr algn="ctr" indent="0" marL="0">
               <a:lnSpc>
                 <a:spcPts val="1700"/>
               </a:lnSpc>
@@ -27660,7 +26341,7 @@
         </p:nvSpPr>
         <p:spPr>
           <a:xfrm>
-            <a:off x="548640" y="3520440"/>
+            <a:off x="548640" y="3017520"/>
             <a:ext cx="5029200" cy="2743200"/>
           </a:xfrm>
           <a:prstGeom prst="roundRect">
@@ -27694,7 +26375,7 @@
         </p:nvSpPr>
         <p:spPr>
           <a:xfrm>
-            <a:off x="822960" y="3666744"/>
+            <a:off x="822960" y="3163824"/>
             <a:ext cx="4480560" cy="274320"/>
           </a:xfrm>
           <a:prstGeom prst="rect">
@@ -27747,7 +26428,7 @@
         </p:nvSpPr>
         <p:spPr>
           <a:xfrm>
-            <a:off x="548640" y="4014216"/>
+            <a:off x="548640" y="3511296"/>
             <a:ext cx="5029200" cy="0"/>
           </a:xfrm>
           <a:prstGeom prst="line">
@@ -27770,7 +26451,7 @@
         </p:nvSpPr>
         <p:spPr>
           <a:xfrm>
-            <a:off x="822960" y="4142232"/>
+            <a:off x="822960" y="3639312"/>
             <a:ext cx="4480560" cy="219456"/>
           </a:xfrm>
           <a:prstGeom prst="rect">
@@ -27809,7 +26490,7 @@
         </p:nvSpPr>
         <p:spPr>
           <a:xfrm>
-            <a:off x="822960" y="4398264"/>
+            <a:off x="822960" y="3895344"/>
             <a:ext cx="987552" cy="329184"/>
           </a:xfrm>
           <a:prstGeom prst="roundRect">
@@ -27836,7 +26517,7 @@
         </p:nvSpPr>
         <p:spPr>
           <a:xfrm>
-            <a:off x="822960" y="4398264"/>
+            <a:off x="822960" y="3895344"/>
             <a:ext cx="987552" cy="329184"/>
           </a:xfrm>
           <a:prstGeom prst="rect">
@@ -27875,7 +26556,7 @@
         </p:nvSpPr>
         <p:spPr>
           <a:xfrm>
-            <a:off x="2331720" y="4398264"/>
+            <a:off x="2331720" y="3895344"/>
             <a:ext cx="1609344" cy="329184"/>
           </a:xfrm>
           <a:prstGeom prst="roundRect">
@@ -27902,7 +26583,7 @@
         </p:nvSpPr>
         <p:spPr>
           <a:xfrm>
-            <a:off x="2331720" y="4398264"/>
+            <a:off x="2331720" y="3895344"/>
             <a:ext cx="1609344" cy="329184"/>
           </a:xfrm>
           <a:prstGeom prst="rect">
@@ -27941,7 +26622,7 @@
         </p:nvSpPr>
         <p:spPr>
           <a:xfrm>
-            <a:off x="3840480" y="4434840"/>
+            <a:off x="3840480" y="3931920"/>
             <a:ext cx="1463040" cy="274320"/>
           </a:xfrm>
           <a:prstGeom prst="rect">
@@ -27980,7 +26661,7 @@
         </p:nvSpPr>
         <p:spPr>
           <a:xfrm>
-            <a:off x="822960" y="4873752"/>
+            <a:off x="822960" y="4370832"/>
             <a:ext cx="4480560" cy="219456"/>
           </a:xfrm>
           <a:prstGeom prst="rect">
@@ -28019,7 +26700,7 @@
         </p:nvSpPr>
         <p:spPr>
           <a:xfrm>
-            <a:off x="822960" y="5129784"/>
+            <a:off x="822960" y="4626864"/>
             <a:ext cx="4480560" cy="365760"/>
           </a:xfrm>
           <a:prstGeom prst="roundRect">
@@ -28046,7 +26727,7 @@
         </p:nvSpPr>
         <p:spPr>
           <a:xfrm>
-            <a:off x="960120" y="5129784"/>
+            <a:off x="960120" y="4626864"/>
             <a:ext cx="4206240" cy="365760"/>
           </a:xfrm>
           <a:prstGeom prst="rect">
@@ -28085,7 +26766,7 @@
         </p:nvSpPr>
         <p:spPr>
           <a:xfrm>
-            <a:off x="822960" y="5660136"/>
+            <a:off x="822960" y="5157216"/>
             <a:ext cx="1371600" cy="384048"/>
           </a:xfrm>
           <a:prstGeom prst="roundRect">
@@ -28107,7 +26788,7 @@
         </p:nvSpPr>
         <p:spPr>
           <a:xfrm>
-            <a:off x="822960" y="5660136"/>
+            <a:off x="822960" y="5157216"/>
             <a:ext cx="1371600" cy="384048"/>
           </a:xfrm>
           <a:prstGeom prst="rect">
@@ -28146,7 +26827,7 @@
         </p:nvSpPr>
         <p:spPr>
           <a:xfrm>
-            <a:off x="2377440" y="5715000"/>
+            <a:off x="2377440" y="5212080"/>
             <a:ext cx="2926080" cy="274320"/>
           </a:xfrm>
           <a:prstGeom prst="rect">
@@ -28185,12 +26866,12 @@
         </p:nvSpPr>
         <p:spPr>
           <a:xfrm>
-            <a:off x="6126480" y="777240"/>
-            <a:ext cx="1709928" cy="1554480"/>
+            <a:off x="6126480" y="2743200"/>
+            <a:ext cx="1709928" cy="1417320"/>
           </a:xfrm>
           <a:prstGeom prst="roundRect">
             <a:avLst>
-              <a:gd name="adj" fmla="val 5294"/>
+              <a:gd name="adj" fmla="val 5806"/>
             </a:avLst>
           </a:prstGeom>
           <a:solidFill>
@@ -28219,8 +26900,8 @@
         </p:nvSpPr>
         <p:spPr>
           <a:xfrm>
-            <a:off x="6236208" y="914400"/>
-            <a:ext cx="1490472" cy="502920"/>
+            <a:off x="6236208" y="2871216"/>
+            <a:ext cx="1490472" cy="457200"/>
           </a:xfrm>
           <a:prstGeom prst="rect">
             <a:avLst/>
@@ -28236,7 +26917,7 @@
               <a:buNone/>
             </a:pPr>
             <a:r>
-              <a:rPr lang="en-US" sz="2400" b="1" dirty="0">
+              <a:rPr lang="en-US" sz="2200" b="1" dirty="0">
                 <a:solidFill>
                   <a:srgbClr val="0488C1"/>
                 </a:solidFill>
@@ -28246,7 +26927,7 @@
               </a:rPr>
               <a:t>104</a:t>
             </a:r>
-            <a:endParaRPr lang="en-US" sz="2400" dirty="0"/>
+            <a:endParaRPr lang="en-US" sz="2200" dirty="0"/>
           </a:p>
         </p:txBody>
       </p:sp>
@@ -28258,8 +26939,8 @@
         </p:nvSpPr>
         <p:spPr>
           <a:xfrm>
-            <a:off x="6254496" y="1463040"/>
-            <a:ext cx="1453896" cy="731520"/>
+            <a:off x="6254496" y="3364992"/>
+            <a:ext cx="1453896" cy="713232"/>
           </a:xfrm>
           <a:prstGeom prst="rect">
             <a:avLst/>
@@ -28300,12 +26981,12 @@
         </p:nvSpPr>
         <p:spPr>
           <a:xfrm>
-            <a:off x="8019288" y="777240"/>
-            <a:ext cx="1709928" cy="1554480"/>
+            <a:off x="8019288" y="2743200"/>
+            <a:ext cx="1709928" cy="1417320"/>
           </a:xfrm>
           <a:prstGeom prst="roundRect">
             <a:avLst>
-              <a:gd name="adj" fmla="val 5294"/>
+              <a:gd name="adj" fmla="val 5806"/>
             </a:avLst>
           </a:prstGeom>
           <a:solidFill>
@@ -28334,8 +27015,8 @@
         </p:nvSpPr>
         <p:spPr>
           <a:xfrm>
-            <a:off x="8129016" y="914400"/>
-            <a:ext cx="1490472" cy="502920"/>
+            <a:off x="8129016" y="2871216"/>
+            <a:ext cx="1490472" cy="457200"/>
           </a:xfrm>
           <a:prstGeom prst="rect">
             <a:avLst/>
@@ -28351,7 +27032,7 @@
               <a:buNone/>
             </a:pPr>
             <a:r>
-              <a:rPr lang="en-US" sz="2400" b="1" dirty="0">
+              <a:rPr lang="en-US" sz="2200" b="1" dirty="0">
                 <a:solidFill>
                   <a:srgbClr val="0488C1"/>
                 </a:solidFill>
@@ -28361,7 +27042,7 @@
               </a:rPr>
               <a:t>22,2 M€</a:t>
             </a:r>
-            <a:endParaRPr lang="en-US" sz="2400" dirty="0"/>
+            <a:endParaRPr lang="en-US" sz="2200" dirty="0"/>
           </a:p>
         </p:txBody>
       </p:sp>
@@ -28373,8 +27054,8 @@
         </p:nvSpPr>
         <p:spPr>
           <a:xfrm>
-            <a:off x="8147304" y="1463040"/>
-            <a:ext cx="1453896" cy="731520"/>
+            <a:off x="8147304" y="3364992"/>
+            <a:ext cx="1453896" cy="713232"/>
           </a:xfrm>
           <a:prstGeom prst="rect">
             <a:avLst/>
@@ -28415,12 +27096,12 @@
         </p:nvSpPr>
         <p:spPr>
           <a:xfrm>
-            <a:off x="9912096" y="777240"/>
-            <a:ext cx="1709928" cy="1554480"/>
+            <a:off x="9912096" y="2743200"/>
+            <a:ext cx="1709928" cy="1417320"/>
           </a:xfrm>
           <a:prstGeom prst="roundRect">
             <a:avLst>
-              <a:gd name="adj" fmla="val 5294"/>
+              <a:gd name="adj" fmla="val 5806"/>
             </a:avLst>
           </a:prstGeom>
           <a:solidFill>
@@ -28449,8 +27130,8 @@
         </p:nvSpPr>
         <p:spPr>
           <a:xfrm>
-            <a:off x="10021824" y="914400"/>
-            <a:ext cx="1490472" cy="502920"/>
+            <a:off x="10021824" y="2871216"/>
+            <a:ext cx="1490472" cy="457200"/>
           </a:xfrm>
           <a:prstGeom prst="rect">
             <a:avLst/>
@@ -28466,7 +27147,7 @@
               <a:buNone/>
             </a:pPr>
             <a:r>
-              <a:rPr lang="en-US" sz="2400" b="1" dirty="0">
+              <a:rPr lang="en-US" sz="2200" b="1" dirty="0">
                 <a:solidFill>
                   <a:srgbClr val="0488C1"/>
                 </a:solidFill>
@@ -28476,7 +27157,7 @@
               </a:rPr>
               <a:t>545</a:t>
             </a:r>
-            <a:endParaRPr lang="en-US" sz="2400" dirty="0"/>
+            <a:endParaRPr lang="en-US" sz="2200" dirty="0"/>
           </a:p>
         </p:txBody>
       </p:sp>
@@ -28488,8 +27169,8 @@
         </p:nvSpPr>
         <p:spPr>
           <a:xfrm>
-            <a:off x="10040112" y="1463040"/>
-            <a:ext cx="1453896" cy="731520"/>
+            <a:off x="10040112" y="3364992"/>
+            <a:ext cx="1453896" cy="713232"/>
           </a:xfrm>
           <a:prstGeom prst="rect">
             <a:avLst/>
@@ -28530,12 +27211,12 @@
         </p:nvSpPr>
         <p:spPr>
           <a:xfrm>
-            <a:off x="6126480" y="2606040"/>
-            <a:ext cx="5486400" cy="3657600"/>
+            <a:off x="6126480" y="4343400"/>
+            <a:ext cx="5486400" cy="2331720"/>
           </a:xfrm>
           <a:prstGeom prst="roundRect">
             <a:avLst>
-              <a:gd name="adj" fmla="val 2250"/>
+              <a:gd name="adj" fmla="val 3529"/>
             </a:avLst>
           </a:prstGeom>
           <a:solidFill>
@@ -28564,24 +27245,24 @@
         </p:nvSpPr>
         <p:spPr>
           <a:xfrm>
-            <a:off x="6400800" y="2770632"/>
-            <a:ext cx="4937760" cy="274320"/>
-          </a:xfrm>
-          <a:prstGeom prst="rect">
-            <a:avLst/>
-          </a:prstGeom>
-          <a:noFill/>
-          <a:ln/>
-        </p:spPr>
-        <p:txBody>
-          <a:bodyPr wrap="square" lIns="0" tIns="0" rIns="0" bIns="0" rtlCol="0" anchor="ctr"/>
-          <a:lstStyle/>
-          <a:p>
-            <a:pPr indent="0" marL="0">
-              <a:buNone/>
-            </a:pPr>
-            <a:r>
-              <a:rPr lang="en-US" sz="1200" b="1" dirty="0">
+            <a:off x="6400800" y="4453128"/>
+            <a:ext cx="4937760" cy="256032"/>
+          </a:xfrm>
+          <a:prstGeom prst="rect">
+            <a:avLst/>
+          </a:prstGeom>
+          <a:noFill/>
+          <a:ln/>
+        </p:spPr>
+        <p:txBody>
+          <a:bodyPr wrap="square" lIns="0" tIns="0" rIns="0" bIns="0" rtlCol="0" anchor="ctr"/>
+          <a:lstStyle/>
+          <a:p>
+            <a:pPr indent="0" marL="0">
+              <a:buNone/>
+            </a:pPr>
+            <a:r>
+              <a:rPr lang="en-US" sz="1150" b="1" dirty="0">
                 <a:solidFill>
                   <a:srgbClr val="25262A"/>
                 </a:solidFill>
@@ -28591,7 +27272,7 @@
               </a:rPr>
               <a:t>Cartographie CEBPL · extrait</a:t>
             </a:r>
-            <a:endParaRPr lang="en-US" sz="1200" dirty="0"/>
+            <a:endParaRPr lang="en-US" sz="1150" dirty="0"/>
           </a:p>
         </p:txBody>
       </p:sp>
@@ -28603,7 +27284,7 @@
         </p:nvSpPr>
         <p:spPr>
           <a:xfrm>
-            <a:off x="6126480" y="3136392"/>
+            <a:off x="6126480" y="4764024"/>
             <a:ext cx="5486400" cy="0"/>
           </a:xfrm>
           <a:prstGeom prst="line">
@@ -28626,24 +27307,24 @@
         </p:nvSpPr>
         <p:spPr>
           <a:xfrm>
-            <a:off x="6400800" y="3355848"/>
-            <a:ext cx="2743200" cy="274320"/>
-          </a:xfrm>
-          <a:prstGeom prst="rect">
-            <a:avLst/>
-          </a:prstGeom>
-          <a:noFill/>
-          <a:ln/>
-        </p:spPr>
-        <p:txBody>
-          <a:bodyPr wrap="square" lIns="0" tIns="0" rIns="0" bIns="0" rtlCol="0" anchor="ctr"/>
-          <a:lstStyle/>
-          <a:p>
-            <a:pPr indent="0" marL="0">
-              <a:buNone/>
-            </a:pPr>
-            <a:r>
-              <a:rPr lang="en-US" sz="1050" dirty="0">
+            <a:off x="6400800" y="4855464"/>
+            <a:ext cx="2743200" cy="237744"/>
+          </a:xfrm>
+          <a:prstGeom prst="rect">
+            <a:avLst/>
+          </a:prstGeom>
+          <a:noFill/>
+          <a:ln/>
+        </p:spPr>
+        <p:txBody>
+          <a:bodyPr wrap="square" lIns="0" tIns="0" rIns="0" bIns="0" rtlCol="0" anchor="ctr"/>
+          <a:lstStyle/>
+          <a:p>
+            <a:pPr indent="0" marL="0">
+              <a:buNone/>
+            </a:pPr>
+            <a:r>
+              <a:rPr lang="en-US" sz="1000" dirty="0">
                 <a:solidFill>
                   <a:srgbClr val="25262A"/>
                 </a:solidFill>
@@ -28653,7 +27334,7 @@
               </a:rPr>
               <a:t>Caisse d'Épargne BPL</a:t>
             </a:r>
-            <a:endParaRPr lang="en-US" sz="1050" dirty="0"/>
+            <a:endParaRPr lang="en-US" sz="1000" dirty="0"/>
           </a:p>
         </p:txBody>
       </p:sp>
@@ -28665,8 +27346,8 @@
         </p:nvSpPr>
         <p:spPr>
           <a:xfrm>
-            <a:off x="10378440" y="3355848"/>
-            <a:ext cx="960120" cy="274320"/>
+            <a:off x="10378440" y="4855464"/>
+            <a:ext cx="960120" cy="237744"/>
           </a:xfrm>
           <a:prstGeom prst="rect">
             <a:avLst/>
@@ -28682,7 +27363,7 @@
               <a:buNone/>
             </a:pPr>
             <a:r>
-              <a:rPr lang="en-US" sz="1050" b="1" dirty="0">
+              <a:rPr lang="en-US" sz="1000" b="1" dirty="0">
                 <a:solidFill>
                   <a:srgbClr val="414142"/>
                 </a:solidFill>
@@ -28692,7 +27373,7 @@
               </a:rPr>
               <a:t>22,2 M€</a:t>
             </a:r>
-            <a:endParaRPr lang="en-US" sz="1050" dirty="0"/>
+            <a:endParaRPr lang="en-US" sz="1000" dirty="0"/>
           </a:p>
         </p:txBody>
       </p:sp>
@@ -28704,12 +27385,12 @@
         </p:nvSpPr>
         <p:spPr>
           <a:xfrm>
-            <a:off x="6400800" y="3666744"/>
-            <a:ext cx="1920240" cy="109728"/>
+            <a:off x="6400800" y="5120640"/>
+            <a:ext cx="1920240" cy="100584"/>
           </a:xfrm>
           <a:prstGeom prst="roundRect">
             <a:avLst>
-              <a:gd name="adj" fmla="val 41667"/>
+              <a:gd name="adj" fmla="val 45455"/>
             </a:avLst>
           </a:prstGeom>
           <a:solidFill>
@@ -28726,12 +27407,12 @@
         </p:nvSpPr>
         <p:spPr>
           <a:xfrm>
-            <a:off x="6400800" y="3666744"/>
-            <a:ext cx="1353312" cy="109728"/>
+            <a:off x="6400800" y="5120640"/>
+            <a:ext cx="1353312" cy="100584"/>
           </a:xfrm>
           <a:prstGeom prst="roundRect">
             <a:avLst>
-              <a:gd name="adj" fmla="val 41667"/>
+              <a:gd name="adj" fmla="val 45455"/>
             </a:avLst>
           </a:prstGeom>
           <a:solidFill>
@@ -28748,24 +27429,24 @@
         </p:nvSpPr>
         <p:spPr>
           <a:xfrm>
-            <a:off x="6400800" y="4014216"/>
-            <a:ext cx="2743200" cy="274320"/>
-          </a:xfrm>
-          <a:prstGeom prst="rect">
-            <a:avLst/>
-          </a:prstGeom>
-          <a:noFill/>
-          <a:ln/>
-        </p:spPr>
-        <p:txBody>
-          <a:bodyPr wrap="square" lIns="0" tIns="0" rIns="0" bIns="0" rtlCol="0" anchor="ctr"/>
-          <a:lstStyle/>
-          <a:p>
-            <a:pPr indent="0" marL="0">
-              <a:buNone/>
-            </a:pPr>
-            <a:r>
-              <a:rPr lang="en-US" sz="1050" dirty="0">
+            <a:off x="6400800" y="5303520"/>
+            <a:ext cx="2743200" cy="237744"/>
+          </a:xfrm>
+          <a:prstGeom prst="rect">
+            <a:avLst/>
+          </a:prstGeom>
+          <a:noFill/>
+          <a:ln/>
+        </p:spPr>
+        <p:txBody>
+          <a:bodyPr wrap="square" lIns="0" tIns="0" rIns="0" bIns="0" rtlCol="0" anchor="ctr"/>
+          <a:lstStyle/>
+          <a:p>
+            <a:pPr indent="0" marL="0">
+              <a:buNone/>
+            </a:pPr>
+            <a:r>
+              <a:rPr lang="en-US" sz="1000" dirty="0">
                 <a:solidFill>
                   <a:srgbClr val="25262A"/>
                 </a:solidFill>
@@ -28775,7 +27456,7 @@
               </a:rPr>
               <a:t>Banque Populaire Grand Ouest</a:t>
             </a:r>
-            <a:endParaRPr lang="en-US" sz="1050" dirty="0"/>
+            <a:endParaRPr lang="en-US" sz="1000" dirty="0"/>
           </a:p>
         </p:txBody>
       </p:sp>
@@ -28787,8 +27468,8 @@
         </p:nvSpPr>
         <p:spPr>
           <a:xfrm>
-            <a:off x="10378440" y="4014216"/>
-            <a:ext cx="960120" cy="274320"/>
+            <a:off x="10378440" y="5303520"/>
+            <a:ext cx="960120" cy="237744"/>
           </a:xfrm>
           <a:prstGeom prst="rect">
             <a:avLst/>
@@ -28804,7 +27485,7 @@
               <a:buNone/>
             </a:pPr>
             <a:r>
-              <a:rPr lang="en-US" sz="1050" b="1" dirty="0">
+              <a:rPr lang="en-US" sz="1000" b="1" dirty="0">
                 <a:solidFill>
                   <a:srgbClr val="414142"/>
                 </a:solidFill>
@@ -28814,7 +27495,7 @@
               </a:rPr>
               <a:t>14,8 M€</a:t>
             </a:r>
-            <a:endParaRPr lang="en-US" sz="1050" dirty="0"/>
+            <a:endParaRPr lang="en-US" sz="1000" dirty="0"/>
           </a:p>
         </p:txBody>
       </p:sp>
@@ -28826,12 +27507,12 @@
         </p:nvSpPr>
         <p:spPr>
           <a:xfrm>
-            <a:off x="6400800" y="4325112"/>
-            <a:ext cx="1920240" cy="109728"/>
+            <a:off x="6400800" y="5568696"/>
+            <a:ext cx="1920240" cy="100584"/>
           </a:xfrm>
           <a:prstGeom prst="roundRect">
             <a:avLst>
-              <a:gd name="adj" fmla="val 41667"/>
+              <a:gd name="adj" fmla="val 45455"/>
             </a:avLst>
           </a:prstGeom>
           <a:solidFill>
@@ -28848,12 +27529,12 @@
         </p:nvSpPr>
         <p:spPr>
           <a:xfrm>
-            <a:off x="6400800" y="4325112"/>
-            <a:ext cx="902208" cy="109728"/>
+            <a:off x="6400800" y="5568696"/>
+            <a:ext cx="902208" cy="100584"/>
           </a:xfrm>
           <a:prstGeom prst="roundRect">
             <a:avLst>
-              <a:gd name="adj" fmla="val 41667"/>
+              <a:gd name="adj" fmla="val 45455"/>
             </a:avLst>
           </a:prstGeom>
           <a:solidFill>
@@ -28870,24 +27551,24 @@
         </p:nvSpPr>
         <p:spPr>
           <a:xfrm>
-            <a:off x="6400800" y="4672584"/>
-            <a:ext cx="2743200" cy="274320"/>
-          </a:xfrm>
-          <a:prstGeom prst="rect">
-            <a:avLst/>
-          </a:prstGeom>
-          <a:noFill/>
-          <a:ln/>
-        </p:spPr>
-        <p:txBody>
-          <a:bodyPr wrap="square" lIns="0" tIns="0" rIns="0" bIns="0" rtlCol="0" anchor="ctr"/>
-          <a:lstStyle/>
-          <a:p>
-            <a:pPr indent="0" marL="0">
-              <a:buNone/>
-            </a:pPr>
-            <a:r>
-              <a:rPr lang="en-US" sz="1050" dirty="0">
+            <a:off x="6400800" y="5751576"/>
+            <a:ext cx="2743200" cy="237744"/>
+          </a:xfrm>
+          <a:prstGeom prst="rect">
+            <a:avLst/>
+          </a:prstGeom>
+          <a:noFill/>
+          <a:ln/>
+        </p:spPr>
+        <p:txBody>
+          <a:bodyPr wrap="square" lIns="0" tIns="0" rIns="0" bIns="0" rtlCol="0" anchor="ctr"/>
+          <a:lstStyle/>
+          <a:p>
+            <a:pPr indent="0" marL="0">
+              <a:buNone/>
+            </a:pPr>
+            <a:r>
+              <a:rPr lang="en-US" sz="1000" dirty="0">
                 <a:solidFill>
                   <a:srgbClr val="25262A"/>
                 </a:solidFill>
@@ -28897,7 +27578,7 @@
               </a:rPr>
               <a:t>Crédit Agricole</a:t>
             </a:r>
-            <a:endParaRPr lang="en-US" sz="1050" dirty="0"/>
+            <a:endParaRPr lang="en-US" sz="1000" dirty="0"/>
           </a:p>
         </p:txBody>
       </p:sp>
@@ -28909,8 +27590,8 @@
         </p:nvSpPr>
         <p:spPr>
           <a:xfrm>
-            <a:off x="10378440" y="4672584"/>
-            <a:ext cx="960120" cy="274320"/>
+            <a:off x="10378440" y="5751576"/>
+            <a:ext cx="960120" cy="237744"/>
           </a:xfrm>
           <a:prstGeom prst="rect">
             <a:avLst/>
@@ -28926,7 +27607,7 @@
               <a:buNone/>
             </a:pPr>
             <a:r>
-              <a:rPr lang="en-US" sz="1050" b="1" dirty="0">
+              <a:rPr lang="en-US" sz="1000" b="1" dirty="0">
                 <a:solidFill>
                   <a:srgbClr val="414142"/>
                 </a:solidFill>
@@ -28936,7 +27617,7 @@
               </a:rPr>
               <a:t>11,3 M€</a:t>
             </a:r>
-            <a:endParaRPr lang="en-US" sz="1050" dirty="0"/>
+            <a:endParaRPr lang="en-US" sz="1000" dirty="0"/>
           </a:p>
         </p:txBody>
       </p:sp>
@@ -28948,12 +27629,12 @@
         </p:nvSpPr>
         <p:spPr>
           <a:xfrm>
-            <a:off x="6400800" y="4983480"/>
-            <a:ext cx="1920240" cy="109728"/>
+            <a:off x="6400800" y="6016752"/>
+            <a:ext cx="1920240" cy="100584"/>
           </a:xfrm>
           <a:prstGeom prst="roundRect">
             <a:avLst>
-              <a:gd name="adj" fmla="val 41667"/>
+              <a:gd name="adj" fmla="val 45455"/>
             </a:avLst>
           </a:prstGeom>
           <a:solidFill>
@@ -28970,12 +27651,12 @@
         </p:nvSpPr>
         <p:spPr>
           <a:xfrm>
-            <a:off x="6400800" y="4983480"/>
-            <a:ext cx="688848" cy="109728"/>
+            <a:off x="6400800" y="6016752"/>
+            <a:ext cx="688848" cy="100584"/>
           </a:xfrm>
           <a:prstGeom prst="roundRect">
             <a:avLst>
-              <a:gd name="adj" fmla="val 41667"/>
+              <a:gd name="adj" fmla="val 45455"/>
             </a:avLst>
           </a:prstGeom>
           <a:solidFill>
@@ -28992,24 +27673,24 @@
         </p:nvSpPr>
         <p:spPr>
           <a:xfrm>
-            <a:off x="6400800" y="5330952"/>
-            <a:ext cx="2743200" cy="274320"/>
-          </a:xfrm>
-          <a:prstGeom prst="rect">
-            <a:avLst/>
-          </a:prstGeom>
-          <a:noFill/>
-          <a:ln/>
-        </p:spPr>
-        <p:txBody>
-          <a:bodyPr wrap="square" lIns="0" tIns="0" rIns="0" bIns="0" rtlCol="0" anchor="ctr"/>
-          <a:lstStyle/>
-          <a:p>
-            <a:pPr indent="0" marL="0">
-              <a:buNone/>
-            </a:pPr>
-            <a:r>
-              <a:rPr lang="en-US" sz="1050" dirty="0">
+            <a:off x="6400800" y="6199632"/>
+            <a:ext cx="2743200" cy="237744"/>
+          </a:xfrm>
+          <a:prstGeom prst="rect">
+            <a:avLst/>
+          </a:prstGeom>
+          <a:noFill/>
+          <a:ln/>
+        </p:spPr>
+        <p:txBody>
+          <a:bodyPr wrap="square" lIns="0" tIns="0" rIns="0" bIns="0" rtlCol="0" anchor="ctr"/>
+          <a:lstStyle/>
+          <a:p>
+            <a:pPr indent="0" marL="0">
+              <a:buNone/>
+            </a:pPr>
+            <a:r>
+              <a:rPr lang="en-US" sz="1000" dirty="0">
                 <a:solidFill>
                   <a:srgbClr val="25262A"/>
                 </a:solidFill>
@@ -29019,7 +27700,7 @@
               </a:rPr>
               <a:t>Autres, 12 établissements</a:t>
             </a:r>
-            <a:endParaRPr lang="en-US" sz="1050" dirty="0"/>
+            <a:endParaRPr lang="en-US" sz="1000" dirty="0"/>
           </a:p>
         </p:txBody>
       </p:sp>
@@ -29031,8 +27712,8 @@
         </p:nvSpPr>
         <p:spPr>
           <a:xfrm>
-            <a:off x="10378440" y="5330952"/>
-            <a:ext cx="960120" cy="274320"/>
+            <a:off x="10378440" y="6199632"/>
+            <a:ext cx="960120" cy="237744"/>
           </a:xfrm>
           <a:prstGeom prst="rect">
             <a:avLst/>
@@ -29048,7 +27729,7 @@
               <a:buNone/>
             </a:pPr>
             <a:r>
-              <a:rPr lang="en-US" sz="1050" b="1" dirty="0">
+              <a:rPr lang="en-US" sz="1000" b="1" dirty="0">
                 <a:solidFill>
                   <a:srgbClr val="414142"/>
                 </a:solidFill>
@@ -29058,7 +27739,7 @@
               </a:rPr>
               <a:t>31,5 M€</a:t>
             </a:r>
-            <a:endParaRPr lang="en-US" sz="1050" dirty="0"/>
+            <a:endParaRPr lang="en-US" sz="1000" dirty="0"/>
           </a:p>
         </p:txBody>
       </p:sp>
@@ -29070,12 +27751,12 @@
         </p:nvSpPr>
         <p:spPr>
           <a:xfrm>
-            <a:off x="6400800" y="5641848"/>
-            <a:ext cx="1920240" cy="109728"/>
+            <a:off x="6400800" y="6464808"/>
+            <a:ext cx="1920240" cy="100584"/>
           </a:xfrm>
           <a:prstGeom prst="roundRect">
             <a:avLst>
-              <a:gd name="adj" fmla="val 41667"/>
+              <a:gd name="adj" fmla="val 45455"/>
             </a:avLst>
           </a:prstGeom>
           <a:solidFill>
@@ -29092,12 +27773,12 @@
         </p:nvSpPr>
         <p:spPr>
           <a:xfrm>
-            <a:off x="6400800" y="5641848"/>
-            <a:ext cx="1920240" cy="109728"/>
+            <a:off x="6400800" y="6464808"/>
+            <a:ext cx="1920240" cy="100584"/>
           </a:xfrm>
           <a:prstGeom prst="roundRect">
             <a:avLst>
-              <a:gd name="adj" fmla="val 41667"/>
+              <a:gd name="adj" fmla="val 45455"/>
             </a:avLst>
           </a:prstGeom>
           <a:solidFill>
@@ -29105,45 +27786,6 @@
           </a:solidFill>
           <a:ln/>
         </p:spPr>
-      </p:sp>
-      <p:sp>
-        <p:nvSpPr>
-          <p:cNvPr id="48" name="Text 46"/>
-          <p:cNvSpPr/>
-          <p:nvPr/>
-        </p:nvSpPr>
-        <p:spPr>
-          <a:xfrm>
-            <a:off x="6400800" y="5879592"/>
-            <a:ext cx="4937760" cy="274320"/>
-          </a:xfrm>
-          <a:prstGeom prst="rect">
-            <a:avLst/>
-          </a:prstGeom>
-          <a:noFill/>
-          <a:ln/>
-        </p:spPr>
-        <p:txBody>
-          <a:bodyPr wrap="square" lIns="0" tIns="0" rIns="0" bIns="0" rtlCol="0" anchor="ctr"/>
-          <a:lstStyle/>
-          <a:p>
-            <a:pPr indent="0" marL="0">
-              <a:buNone/>
-            </a:pPr>
-            <a:r>
-              <a:rPr lang="en-US" sz="900" i="1" dirty="0">
-                <a:solidFill>
-                  <a:srgbClr val="9B9DA3"/>
-                </a:solidFill>
-                <a:latin typeface="Arial" pitchFamily="34" charset="0"/>
-                <a:ea typeface="Arial" pitchFamily="34" charset="-122"/>
-                <a:cs typeface="Arial" pitchFamily="34" charset="-120"/>
-              </a:rPr>
-              <a:t>Deux régions, une banque : l'analyse tombe, données sensibles comprises.</a:t>
-            </a:r>
-            <a:endParaRPr lang="en-US" sz="900" dirty="0"/>
-          </a:p>
-        </p:txBody>
       </p:sp>
     </p:spTree>
   </p:cSld>
@@ -29198,7 +27840,7 @@
         <p:spPr>
           <a:xfrm>
             <a:off x="548640" y="822960"/>
-            <a:ext cx="11064240" cy="274320"/>
+            <a:ext cx="11064240" cy="256032"/>
           </a:xfrm>
           <a:prstGeom prst="rect">
             <a:avLst/>
@@ -29214,7 +27856,7 @@
               <a:buNone/>
             </a:pPr>
             <a:r>
-              <a:rPr lang="en-US" sz="1100" b="1" spc="300" kern="0" dirty="0">
+              <a:rPr lang="en-US" sz="900" b="1" spc="250" kern="0" dirty="0">
                 <a:solidFill>
                   <a:srgbClr val="0488C1"/>
                 </a:solidFill>
@@ -29224,7 +27866,7 @@
               </a:rPr>
               <a:t>EN SORTANT D'ICI</a:t>
             </a:r>
-            <a:endParaRPr lang="en-US" sz="1100" dirty="0"/>
+            <a:endParaRPr lang="en-US" sz="900" dirty="0"/>
           </a:p>
         </p:txBody>
       </p:sp>
@@ -29320,7 +27962,7 @@
         <p:spPr>
           <a:xfrm>
             <a:off x="548640" y="822960"/>
-            <a:ext cx="11064240" cy="274320"/>
+            <a:ext cx="11064240" cy="256032"/>
           </a:xfrm>
           <a:prstGeom prst="rect">
             <a:avLst/>
@@ -29336,7 +27978,7 @@
               <a:buNone/>
             </a:pPr>
             <a:r>
-              <a:rPr lang="en-US" sz="1100" b="1" spc="300" kern="0" dirty="0">
+              <a:rPr lang="en-US" sz="900" b="1" spc="250" kern="0" dirty="0">
                 <a:solidFill>
                   <a:srgbClr val="0488C1"/>
                 </a:solidFill>
@@ -29346,7 +27988,7 @@
               </a:rPr>
               <a:t>EN SORTANT D'ICI</a:t>
             </a:r>
-            <a:endParaRPr lang="en-US" sz="1100" dirty="0"/>
+            <a:endParaRPr lang="en-US" sz="900" dirty="0"/>
           </a:p>
         </p:txBody>
       </p:sp>
@@ -29933,7 +28575,7 @@
         <p:spPr>
           <a:xfrm>
             <a:off x="548640" y="2148840"/>
-            <a:ext cx="11064240" cy="274320"/>
+            <a:ext cx="11064240" cy="256032"/>
           </a:xfrm>
           <a:prstGeom prst="rect">
             <a:avLst/>
@@ -29949,7 +28591,7 @@
               <a:buNone/>
             </a:pPr>
             <a:r>
-              <a:rPr lang="en-US" sz="1100" b="1" spc="300" kern="0" dirty="0">
+              <a:rPr lang="en-US" sz="900" b="1" spc="250" kern="0" dirty="0">
                 <a:solidFill>
                   <a:srgbClr val="0488C1"/>
                 </a:solidFill>
@@ -29959,7 +28601,7 @@
               </a:rPr>
               <a:t>À VOUS</a:t>
             </a:r>
-            <a:endParaRPr lang="en-US" sz="1100" dirty="0"/>
+            <a:endParaRPr lang="en-US" sz="900" dirty="0"/>
           </a:p>
         </p:txBody>
       </p:sp>

--- a/LIA-concretement-CC-anime.pptx
+++ b/LIA-concretement-CC-anime.pptx
@@ -6210,6 +6210,474 @@
       </p:transition>
     </mc:Fallback>
   </mc:AlternateContent>
+  <p:timing>
+    <p:tnLst>
+      <p:par>
+        <p:cTn id="1" dur="indefinite" restart="never" nodeType="tmRoot">
+          <p:childTnLst>
+            <p:seq concurrent="1" nextAc="seek">
+              <p:cTn id="2" dur="indefinite" nodeType="mainSeq">
+                <p:childTnLst>
+                  <p:par>
+                    <p:cTn id="3" fill="hold">
+                      <p:stCondLst>
+                        <p:cond delay="0"/>
+                      </p:stCondLst>
+                      <p:childTnLst>
+                        <p:par>
+                          <p:cTn id="4" fill="hold">
+                            <p:stCondLst>
+                              <p:cond delay="0"/>
+                            </p:stCondLst>
+                            <p:childTnLst>
+                              <p:par>
+                                <p:cTn id="5" presetID="10" presetClass="entr" presetSubtype="0" fill="hold" grpId="0" nodeType="withEffect">
+                                  <p:stCondLst>
+                                    <p:cond delay="0"/>
+                                  </p:stCondLst>
+                                  <p:childTnLst>
+                                    <p:set>
+                                      <p:cBhvr>
+                                        <p:cTn id="6" dur="1" fill="hold">
+                                          <p:stCondLst>
+                                            <p:cond delay="0"/>
+                                          </p:stCondLst>
+                                        </p:cTn>
+                                        <p:tgtEl>
+                                          <p:spTgt spid="4"/>
+                                        </p:tgtEl>
+                                        <p:attrNameLst>
+                                          <p:attrName>style.visibility</p:attrName>
+                                        </p:attrNameLst>
+                                      </p:cBhvr>
+                                      <p:to>
+                                        <p:strVal val="visible"/>
+                                      </p:to>
+                                    </p:set>
+                                    <p:animEffect transition="in" filter="fade">
+                                      <p:cBhvr>
+                                        <p:cTn id="7" dur="600"/>
+                                        <p:tgtEl>
+                                          <p:spTgt spid="4"/>
+                                        </p:tgtEl>
+                                      </p:cBhvr>
+                                    </p:animEffect>
+                                  </p:childTnLst>
+                                </p:cTn>
+                              </p:par>
+                              <p:par>
+                                <p:cTn id="8" presetID="10" presetClass="entr" presetSubtype="0" fill="hold" grpId="0" nodeType="withEffect">
+                                  <p:stCondLst>
+                                    <p:cond delay="0"/>
+                                  </p:stCondLst>
+                                  <p:childTnLst>
+                                    <p:set>
+                                      <p:cBhvr>
+                                        <p:cTn id="9" dur="1" fill="hold">
+                                          <p:stCondLst>
+                                            <p:cond delay="0"/>
+                                          </p:stCondLst>
+                                        </p:cTn>
+                                        <p:tgtEl>
+                                          <p:spTgt spid="5"/>
+                                        </p:tgtEl>
+                                        <p:attrNameLst>
+                                          <p:attrName>style.visibility</p:attrName>
+                                        </p:attrNameLst>
+                                      </p:cBhvr>
+                                      <p:to>
+                                        <p:strVal val="visible"/>
+                                      </p:to>
+                                    </p:set>
+                                    <p:animEffect transition="in" filter="fade">
+                                      <p:cBhvr>
+                                        <p:cTn id="10" dur="600"/>
+                                        <p:tgtEl>
+                                          <p:spTgt spid="5"/>
+                                        </p:tgtEl>
+                                      </p:cBhvr>
+                                    </p:animEffect>
+                                  </p:childTnLst>
+                                </p:cTn>
+                              </p:par>
+                              <p:par>
+                                <p:cTn id="11" presetID="10" presetClass="entr" presetSubtype="0" fill="hold" grpId="0" nodeType="withEffect">
+                                  <p:stCondLst>
+                                    <p:cond delay="0"/>
+                                  </p:stCondLst>
+                                  <p:childTnLst>
+                                    <p:set>
+                                      <p:cBhvr>
+                                        <p:cTn id="12" dur="1" fill="hold">
+                                          <p:stCondLst>
+                                            <p:cond delay="0"/>
+                                          </p:stCondLst>
+                                        </p:cTn>
+                                        <p:tgtEl>
+                                          <p:spTgt spid="6"/>
+                                        </p:tgtEl>
+                                        <p:attrNameLst>
+                                          <p:attrName>style.visibility</p:attrName>
+                                        </p:attrNameLst>
+                                      </p:cBhvr>
+                                      <p:to>
+                                        <p:strVal val="visible"/>
+                                      </p:to>
+                                    </p:set>
+                                    <p:animEffect transition="in" filter="fade">
+                                      <p:cBhvr>
+                                        <p:cTn id="13" dur="600"/>
+                                        <p:tgtEl>
+                                          <p:spTgt spid="6"/>
+                                        </p:tgtEl>
+                                      </p:cBhvr>
+                                    </p:animEffect>
+                                  </p:childTnLst>
+                                </p:cTn>
+                              </p:par>
+                              <p:par>
+                                <p:cTn id="14" presetID="10" presetClass="entr" presetSubtype="0" fill="hold" grpId="0" nodeType="withEffect">
+                                  <p:stCondLst>
+                                    <p:cond delay="1200"/>
+                                  </p:stCondLst>
+                                  <p:childTnLst>
+                                    <p:set>
+                                      <p:cBhvr>
+                                        <p:cTn id="15" dur="1" fill="hold">
+                                          <p:stCondLst>
+                                            <p:cond delay="0"/>
+                                          </p:stCondLst>
+                                        </p:cTn>
+                                        <p:tgtEl>
+                                          <p:spTgt spid="7"/>
+                                        </p:tgtEl>
+                                        <p:attrNameLst>
+                                          <p:attrName>style.visibility</p:attrName>
+                                        </p:attrNameLst>
+                                      </p:cBhvr>
+                                      <p:to>
+                                        <p:strVal val="visible"/>
+                                      </p:to>
+                                    </p:set>
+                                    <p:animEffect transition="in" filter="fade">
+                                      <p:cBhvr>
+                                        <p:cTn id="16" dur="600"/>
+                                        <p:tgtEl>
+                                          <p:spTgt spid="7"/>
+                                        </p:tgtEl>
+                                      </p:cBhvr>
+                                    </p:animEffect>
+                                  </p:childTnLst>
+                                </p:cTn>
+                              </p:par>
+                              <p:par>
+                                <p:cTn id="17" presetID="10" presetClass="entr" presetSubtype="0" fill="hold" grpId="0" nodeType="withEffect">
+                                  <p:stCondLst>
+                                    <p:cond delay="1200"/>
+                                  </p:stCondLst>
+                                  <p:childTnLst>
+                                    <p:set>
+                                      <p:cBhvr>
+                                        <p:cTn id="18" dur="1" fill="hold">
+                                          <p:stCondLst>
+                                            <p:cond delay="0"/>
+                                          </p:stCondLst>
+                                        </p:cTn>
+                                        <p:tgtEl>
+                                          <p:spTgt spid="8"/>
+                                        </p:tgtEl>
+                                        <p:attrNameLst>
+                                          <p:attrName>style.visibility</p:attrName>
+                                        </p:attrNameLst>
+                                      </p:cBhvr>
+                                      <p:to>
+                                        <p:strVal val="visible"/>
+                                      </p:to>
+                                    </p:set>
+                                    <p:animEffect transition="in" filter="fade">
+                                      <p:cBhvr>
+                                        <p:cTn id="19" dur="600"/>
+                                        <p:tgtEl>
+                                          <p:spTgt spid="8"/>
+                                        </p:tgtEl>
+                                      </p:cBhvr>
+                                    </p:animEffect>
+                                  </p:childTnLst>
+                                </p:cTn>
+                              </p:par>
+                              <p:par>
+                                <p:cTn id="20" presetID="10" presetClass="entr" presetSubtype="0" fill="hold" grpId="0" nodeType="withEffect">
+                                  <p:stCondLst>
+                                    <p:cond delay="1200"/>
+                                  </p:stCondLst>
+                                  <p:childTnLst>
+                                    <p:set>
+                                      <p:cBhvr>
+                                        <p:cTn id="21" dur="1" fill="hold">
+                                          <p:stCondLst>
+                                            <p:cond delay="0"/>
+                                          </p:stCondLst>
+                                        </p:cTn>
+                                        <p:tgtEl>
+                                          <p:spTgt spid="9"/>
+                                        </p:tgtEl>
+                                        <p:attrNameLst>
+                                          <p:attrName>style.visibility</p:attrName>
+                                        </p:attrNameLst>
+                                      </p:cBhvr>
+                                      <p:to>
+                                        <p:strVal val="visible"/>
+                                      </p:to>
+                                    </p:set>
+                                    <p:animEffect transition="in" filter="fade">
+                                      <p:cBhvr>
+                                        <p:cTn id="22" dur="600"/>
+                                        <p:tgtEl>
+                                          <p:spTgt spid="9"/>
+                                        </p:tgtEl>
+                                      </p:cBhvr>
+                                    </p:animEffect>
+                                  </p:childTnLst>
+                                </p:cTn>
+                              </p:par>
+                              <p:par>
+                                <p:cTn id="23" presetID="10" presetClass="entr" presetSubtype="0" fill="hold" grpId="0" nodeType="withEffect">
+                                  <p:stCondLst>
+                                    <p:cond delay="2400"/>
+                                  </p:stCondLst>
+                                  <p:childTnLst>
+                                    <p:set>
+                                      <p:cBhvr>
+                                        <p:cTn id="24" dur="1" fill="hold">
+                                          <p:stCondLst>
+                                            <p:cond delay="0"/>
+                                          </p:stCondLst>
+                                        </p:cTn>
+                                        <p:tgtEl>
+                                          <p:spTgt spid="10"/>
+                                        </p:tgtEl>
+                                        <p:attrNameLst>
+                                          <p:attrName>style.visibility</p:attrName>
+                                        </p:attrNameLst>
+                                      </p:cBhvr>
+                                      <p:to>
+                                        <p:strVal val="visible"/>
+                                      </p:to>
+                                    </p:set>
+                                    <p:animEffect transition="in" filter="fade">
+                                      <p:cBhvr>
+                                        <p:cTn id="25" dur="600"/>
+                                        <p:tgtEl>
+                                          <p:spTgt spid="10"/>
+                                        </p:tgtEl>
+                                      </p:cBhvr>
+                                    </p:animEffect>
+                                  </p:childTnLst>
+                                </p:cTn>
+                              </p:par>
+                              <p:par>
+                                <p:cTn id="26" presetID="10" presetClass="entr" presetSubtype="0" fill="hold" grpId="0" nodeType="withEffect">
+                                  <p:stCondLst>
+                                    <p:cond delay="2400"/>
+                                  </p:stCondLst>
+                                  <p:childTnLst>
+                                    <p:set>
+                                      <p:cBhvr>
+                                        <p:cTn id="27" dur="1" fill="hold">
+                                          <p:stCondLst>
+                                            <p:cond delay="0"/>
+                                          </p:stCondLst>
+                                        </p:cTn>
+                                        <p:tgtEl>
+                                          <p:spTgt spid="11"/>
+                                        </p:tgtEl>
+                                        <p:attrNameLst>
+                                          <p:attrName>style.visibility</p:attrName>
+                                        </p:attrNameLst>
+                                      </p:cBhvr>
+                                      <p:to>
+                                        <p:strVal val="visible"/>
+                                      </p:to>
+                                    </p:set>
+                                    <p:animEffect transition="in" filter="fade">
+                                      <p:cBhvr>
+                                        <p:cTn id="28" dur="600"/>
+                                        <p:tgtEl>
+                                          <p:spTgt spid="11"/>
+                                        </p:tgtEl>
+                                      </p:cBhvr>
+                                    </p:animEffect>
+                                  </p:childTnLst>
+                                </p:cTn>
+                              </p:par>
+                              <p:par>
+                                <p:cTn id="29" presetID="10" presetClass="entr" presetSubtype="0" fill="hold" grpId="0" nodeType="withEffect">
+                                  <p:stCondLst>
+                                    <p:cond delay="2400"/>
+                                  </p:stCondLst>
+                                  <p:childTnLst>
+                                    <p:set>
+                                      <p:cBhvr>
+                                        <p:cTn id="30" dur="1" fill="hold">
+                                          <p:stCondLst>
+                                            <p:cond delay="0"/>
+                                          </p:stCondLst>
+                                        </p:cTn>
+                                        <p:tgtEl>
+                                          <p:spTgt spid="12"/>
+                                        </p:tgtEl>
+                                        <p:attrNameLst>
+                                          <p:attrName>style.visibility</p:attrName>
+                                        </p:attrNameLst>
+                                      </p:cBhvr>
+                                      <p:to>
+                                        <p:strVal val="visible"/>
+                                      </p:to>
+                                    </p:set>
+                                    <p:animEffect transition="in" filter="fade">
+                                      <p:cBhvr>
+                                        <p:cTn id="31" dur="600"/>
+                                        <p:tgtEl>
+                                          <p:spTgt spid="12"/>
+                                        </p:tgtEl>
+                                      </p:cBhvr>
+                                    </p:animEffect>
+                                  </p:childTnLst>
+                                </p:cTn>
+                              </p:par>
+                              <p:par>
+                                <p:cTn id="32" presetID="10" presetClass="entr" presetSubtype="0" fill="hold" grpId="0" nodeType="withEffect">
+                                  <p:stCondLst>
+                                    <p:cond delay="3600"/>
+                                  </p:stCondLst>
+                                  <p:childTnLst>
+                                    <p:set>
+                                      <p:cBhvr>
+                                        <p:cTn id="33" dur="1" fill="hold">
+                                          <p:stCondLst>
+                                            <p:cond delay="0"/>
+                                          </p:stCondLst>
+                                        </p:cTn>
+                                        <p:tgtEl>
+                                          <p:spTgt spid="13"/>
+                                        </p:tgtEl>
+                                        <p:attrNameLst>
+                                          <p:attrName>style.visibility</p:attrName>
+                                        </p:attrNameLst>
+                                      </p:cBhvr>
+                                      <p:to>
+                                        <p:strVal val="visible"/>
+                                      </p:to>
+                                    </p:set>
+                                    <p:animEffect transition="in" filter="fade">
+                                      <p:cBhvr>
+                                        <p:cTn id="34" dur="600"/>
+                                        <p:tgtEl>
+                                          <p:spTgt spid="13"/>
+                                        </p:tgtEl>
+                                      </p:cBhvr>
+                                    </p:animEffect>
+                                  </p:childTnLst>
+                                </p:cTn>
+                              </p:par>
+                              <p:par>
+                                <p:cTn id="35" presetID="10" presetClass="entr" presetSubtype="0" fill="hold" grpId="0" nodeType="withEffect">
+                                  <p:stCondLst>
+                                    <p:cond delay="3600"/>
+                                  </p:stCondLst>
+                                  <p:childTnLst>
+                                    <p:set>
+                                      <p:cBhvr>
+                                        <p:cTn id="36" dur="1" fill="hold">
+                                          <p:stCondLst>
+                                            <p:cond delay="0"/>
+                                          </p:stCondLst>
+                                        </p:cTn>
+                                        <p:tgtEl>
+                                          <p:spTgt spid="14"/>
+                                        </p:tgtEl>
+                                        <p:attrNameLst>
+                                          <p:attrName>style.visibility</p:attrName>
+                                        </p:attrNameLst>
+                                      </p:cBhvr>
+                                      <p:to>
+                                        <p:strVal val="visible"/>
+                                      </p:to>
+                                    </p:set>
+                                    <p:animEffect transition="in" filter="fade">
+                                      <p:cBhvr>
+                                        <p:cTn id="37" dur="600"/>
+                                        <p:tgtEl>
+                                          <p:spTgt spid="14"/>
+                                        </p:tgtEl>
+                                      </p:cBhvr>
+                                    </p:animEffect>
+                                  </p:childTnLst>
+                                </p:cTn>
+                              </p:par>
+                              <p:par>
+                                <p:cTn id="38" presetID="10" presetClass="entr" presetSubtype="0" fill="hold" grpId="0" nodeType="withEffect">
+                                  <p:stCondLst>
+                                    <p:cond delay="3600"/>
+                                  </p:stCondLst>
+                                  <p:childTnLst>
+                                    <p:set>
+                                      <p:cBhvr>
+                                        <p:cTn id="39" dur="1" fill="hold">
+                                          <p:stCondLst>
+                                            <p:cond delay="0"/>
+                                          </p:stCondLst>
+                                        </p:cTn>
+                                        <p:tgtEl>
+                                          <p:spTgt spid="15"/>
+                                        </p:tgtEl>
+                                        <p:attrNameLst>
+                                          <p:attrName>style.visibility</p:attrName>
+                                        </p:attrNameLst>
+                                      </p:cBhvr>
+                                      <p:to>
+                                        <p:strVal val="visible"/>
+                                      </p:to>
+                                    </p:set>
+                                    <p:animEffect transition="in" filter="fade">
+                                      <p:cBhvr>
+                                        <p:cTn id="40" dur="600"/>
+                                        <p:tgtEl>
+                                          <p:spTgt spid="15"/>
+                                        </p:tgtEl>
+                                      </p:cBhvr>
+                                    </p:animEffect>
+                                  </p:childTnLst>
+                                </p:cTn>
+                              </p:par>
+                            </p:childTnLst>
+                          </p:cTn>
+                        </p:par>
+                      </p:childTnLst>
+                    </p:cTn>
+                  </p:par>
+                </p:childTnLst>
+              </p:cTn>
+              <p:prevCondLst>
+                <p:cond evt="onPrev" delay="0">
+                  <p:tgtEl>
+                    <p:sldTgt/>
+                  </p:tgtEl>
+                </p:cond>
+              </p:prevCondLst>
+              <p:nextCondLst>
+                <p:cond evt="onNext" delay="0">
+                  <p:tgtEl>
+                    <p:sldTgt/>
+                  </p:tgtEl>
+                </p:cond>
+              </p:nextCondLst>
+            </p:seq>
+          </p:childTnLst>
+        </p:cTn>
+      </p:par>
+    </p:tnLst>
+  </p:timing>
 </p:sld>
 </file>
 
@@ -19875,6 +20343,754 @@
       </p:transition>
     </mc:Fallback>
   </mc:AlternateContent>
+  <p:timing>
+    <p:tnLst>
+      <p:par>
+        <p:cTn id="1" dur="indefinite" restart="never" nodeType="tmRoot">
+          <p:childTnLst>
+            <p:seq concurrent="1" nextAc="seek">
+              <p:cTn id="2" dur="indefinite" nodeType="mainSeq">
+                <p:childTnLst>
+                  <p:par>
+                    <p:cTn id="3" fill="hold">
+                      <p:stCondLst>
+                        <p:cond delay="0"/>
+                      </p:stCondLst>
+                      <p:childTnLst>
+                        <p:par>
+                          <p:cTn id="4" fill="hold">
+                            <p:stCondLst>
+                              <p:cond delay="0"/>
+                            </p:stCondLst>
+                            <p:childTnLst>
+                              <p:par>
+                                <p:cTn id="5" presetID="10" presetClass="entr" presetSubtype="0" fill="hold" grpId="0" nodeType="withEffect">
+                                  <p:stCondLst>
+                                    <p:cond delay="0"/>
+                                  </p:stCondLst>
+                                  <p:childTnLst>
+                                    <p:set>
+                                      <p:cBhvr>
+                                        <p:cTn id="6" dur="1" fill="hold">
+                                          <p:stCondLst>
+                                            <p:cond delay="0"/>
+                                          </p:stCondLst>
+                                        </p:cTn>
+                                        <p:tgtEl>
+                                          <p:spTgt spid="6"/>
+                                        </p:tgtEl>
+                                        <p:attrNameLst>
+                                          <p:attrName>style.visibility</p:attrName>
+                                        </p:attrNameLst>
+                                      </p:cBhvr>
+                                      <p:to>
+                                        <p:strVal val="visible"/>
+                                      </p:to>
+                                    </p:set>
+                                    <p:animEffect transition="in" filter="fade">
+                                      <p:cBhvr>
+                                        <p:cTn id="7" dur="450"/>
+                                        <p:tgtEl>
+                                          <p:spTgt spid="6"/>
+                                        </p:tgtEl>
+                                      </p:cBhvr>
+                                    </p:animEffect>
+                                  </p:childTnLst>
+                                </p:cTn>
+                              </p:par>
+                              <p:par>
+                                <p:cTn id="8" presetID="10" presetClass="entr" presetSubtype="0" fill="hold" grpId="0" nodeType="withEffect">
+                                  <p:stCondLst>
+                                    <p:cond delay="0"/>
+                                  </p:stCondLst>
+                                  <p:childTnLst>
+                                    <p:set>
+                                      <p:cBhvr>
+                                        <p:cTn id="9" dur="1" fill="hold">
+                                          <p:stCondLst>
+                                            <p:cond delay="0"/>
+                                          </p:stCondLst>
+                                        </p:cTn>
+                                        <p:tgtEl>
+                                          <p:spTgt spid="7"/>
+                                        </p:tgtEl>
+                                        <p:attrNameLst>
+                                          <p:attrName>style.visibility</p:attrName>
+                                        </p:attrNameLst>
+                                      </p:cBhvr>
+                                      <p:to>
+                                        <p:strVal val="visible"/>
+                                      </p:to>
+                                    </p:set>
+                                    <p:animEffect transition="in" filter="fade">
+                                      <p:cBhvr>
+                                        <p:cTn id="10" dur="450"/>
+                                        <p:tgtEl>
+                                          <p:spTgt spid="7"/>
+                                        </p:tgtEl>
+                                      </p:cBhvr>
+                                    </p:animEffect>
+                                  </p:childTnLst>
+                                </p:cTn>
+                              </p:par>
+                              <p:par>
+                                <p:cTn id="11" presetID="10" presetClass="entr" presetSubtype="0" fill="hold" grpId="0" nodeType="withEffect">
+                                  <p:stCondLst>
+                                    <p:cond delay="0"/>
+                                  </p:stCondLst>
+                                  <p:childTnLst>
+                                    <p:set>
+                                      <p:cBhvr>
+                                        <p:cTn id="12" dur="1" fill="hold">
+                                          <p:stCondLst>
+                                            <p:cond delay="0"/>
+                                          </p:stCondLst>
+                                        </p:cTn>
+                                        <p:tgtEl>
+                                          <p:spTgt spid="8"/>
+                                        </p:tgtEl>
+                                        <p:attrNameLst>
+                                          <p:attrName>style.visibility</p:attrName>
+                                        </p:attrNameLst>
+                                      </p:cBhvr>
+                                      <p:to>
+                                        <p:strVal val="visible"/>
+                                      </p:to>
+                                    </p:set>
+                                    <p:animEffect transition="in" filter="fade">
+                                      <p:cBhvr>
+                                        <p:cTn id="13" dur="450"/>
+                                        <p:tgtEl>
+                                          <p:spTgt spid="8"/>
+                                        </p:tgtEl>
+                                      </p:cBhvr>
+                                    </p:animEffect>
+                                  </p:childTnLst>
+                                </p:cTn>
+                              </p:par>
+                              <p:par>
+                                <p:cTn id="14" presetID="10" presetClass="entr" presetSubtype="0" fill="hold" grpId="0" nodeType="withEffect">
+                                  <p:stCondLst>
+                                    <p:cond delay="0"/>
+                                  </p:stCondLst>
+                                  <p:childTnLst>
+                                    <p:set>
+                                      <p:cBhvr>
+                                        <p:cTn id="15" dur="1" fill="hold">
+                                          <p:stCondLst>
+                                            <p:cond delay="0"/>
+                                          </p:stCondLst>
+                                        </p:cTn>
+                                        <p:tgtEl>
+                                          <p:spTgt spid="9"/>
+                                        </p:tgtEl>
+                                        <p:attrNameLst>
+                                          <p:attrName>style.visibility</p:attrName>
+                                        </p:attrNameLst>
+                                      </p:cBhvr>
+                                      <p:to>
+                                        <p:strVal val="visible"/>
+                                      </p:to>
+                                    </p:set>
+                                    <p:animEffect transition="in" filter="fade">
+                                      <p:cBhvr>
+                                        <p:cTn id="16" dur="450"/>
+                                        <p:tgtEl>
+                                          <p:spTgt spid="9"/>
+                                        </p:tgtEl>
+                                      </p:cBhvr>
+                                    </p:animEffect>
+                                  </p:childTnLst>
+                                </p:cTn>
+                              </p:par>
+                              <p:par>
+                                <p:cTn id="17" presetID="10" presetClass="entr" presetSubtype="0" fill="hold" grpId="0" nodeType="withEffect">
+                                  <p:stCondLst>
+                                    <p:cond delay="0"/>
+                                  </p:stCondLst>
+                                  <p:childTnLst>
+                                    <p:set>
+                                      <p:cBhvr>
+                                        <p:cTn id="18" dur="1" fill="hold">
+                                          <p:stCondLst>
+                                            <p:cond delay="0"/>
+                                          </p:stCondLst>
+                                        </p:cTn>
+                                        <p:tgtEl>
+                                          <p:spTgt spid="10"/>
+                                        </p:tgtEl>
+                                        <p:attrNameLst>
+                                          <p:attrName>style.visibility</p:attrName>
+                                        </p:attrNameLst>
+                                      </p:cBhvr>
+                                      <p:to>
+                                        <p:strVal val="visible"/>
+                                      </p:to>
+                                    </p:set>
+                                    <p:animEffect transition="in" filter="fade">
+                                      <p:cBhvr>
+                                        <p:cTn id="19" dur="450"/>
+                                        <p:tgtEl>
+                                          <p:spTgt spid="10"/>
+                                        </p:tgtEl>
+                                      </p:cBhvr>
+                                    </p:animEffect>
+                                  </p:childTnLst>
+                                </p:cTn>
+                              </p:par>
+                              <p:par>
+                                <p:cTn id="20" presetID="10" presetClass="entr" presetSubtype="0" fill="hold" grpId="0" nodeType="withEffect">
+                                  <p:stCondLst>
+                                    <p:cond delay="0"/>
+                                  </p:stCondLst>
+                                  <p:childTnLst>
+                                    <p:set>
+                                      <p:cBhvr>
+                                        <p:cTn id="21" dur="1" fill="hold">
+                                          <p:stCondLst>
+                                            <p:cond delay="0"/>
+                                          </p:stCondLst>
+                                        </p:cTn>
+                                        <p:tgtEl>
+                                          <p:spTgt spid="11"/>
+                                        </p:tgtEl>
+                                        <p:attrNameLst>
+                                          <p:attrName>style.visibility</p:attrName>
+                                        </p:attrNameLst>
+                                      </p:cBhvr>
+                                      <p:to>
+                                        <p:strVal val="visible"/>
+                                      </p:to>
+                                    </p:set>
+                                    <p:animEffect transition="in" filter="fade">
+                                      <p:cBhvr>
+                                        <p:cTn id="22" dur="450"/>
+                                        <p:tgtEl>
+                                          <p:spTgt spid="11"/>
+                                        </p:tgtEl>
+                                      </p:cBhvr>
+                                    </p:animEffect>
+                                  </p:childTnLst>
+                                </p:cTn>
+                              </p:par>
+                              <p:par>
+                                <p:cTn id="23" presetID="10" presetClass="entr" presetSubtype="0" fill="hold" grpId="0" nodeType="withEffect">
+                                  <p:stCondLst>
+                                    <p:cond delay="180"/>
+                                  </p:stCondLst>
+                                  <p:childTnLst>
+                                    <p:set>
+                                      <p:cBhvr>
+                                        <p:cTn id="24" dur="1" fill="hold">
+                                          <p:stCondLst>
+                                            <p:cond delay="0"/>
+                                          </p:stCondLst>
+                                        </p:cTn>
+                                        <p:tgtEl>
+                                          <p:spTgt spid="12"/>
+                                        </p:tgtEl>
+                                        <p:attrNameLst>
+                                          <p:attrName>style.visibility</p:attrName>
+                                        </p:attrNameLst>
+                                      </p:cBhvr>
+                                      <p:to>
+                                        <p:strVal val="visible"/>
+                                      </p:to>
+                                    </p:set>
+                                    <p:animEffect transition="in" filter="fade">
+                                      <p:cBhvr>
+                                        <p:cTn id="25" dur="450"/>
+                                        <p:tgtEl>
+                                          <p:spTgt spid="12"/>
+                                        </p:tgtEl>
+                                      </p:cBhvr>
+                                    </p:animEffect>
+                                  </p:childTnLst>
+                                </p:cTn>
+                              </p:par>
+                              <p:par>
+                                <p:cTn id="26" presetID="10" presetClass="entr" presetSubtype="0" fill="hold" grpId="0" nodeType="withEffect">
+                                  <p:stCondLst>
+                                    <p:cond delay="180"/>
+                                  </p:stCondLst>
+                                  <p:childTnLst>
+                                    <p:set>
+                                      <p:cBhvr>
+                                        <p:cTn id="27" dur="1" fill="hold">
+                                          <p:stCondLst>
+                                            <p:cond delay="0"/>
+                                          </p:stCondLst>
+                                        </p:cTn>
+                                        <p:tgtEl>
+                                          <p:spTgt spid="13"/>
+                                        </p:tgtEl>
+                                        <p:attrNameLst>
+                                          <p:attrName>style.visibility</p:attrName>
+                                        </p:attrNameLst>
+                                      </p:cBhvr>
+                                      <p:to>
+                                        <p:strVal val="visible"/>
+                                      </p:to>
+                                    </p:set>
+                                    <p:animEffect transition="in" filter="fade">
+                                      <p:cBhvr>
+                                        <p:cTn id="28" dur="450"/>
+                                        <p:tgtEl>
+                                          <p:spTgt spid="13"/>
+                                        </p:tgtEl>
+                                      </p:cBhvr>
+                                    </p:animEffect>
+                                  </p:childTnLst>
+                                </p:cTn>
+                              </p:par>
+                              <p:par>
+                                <p:cTn id="29" presetID="10" presetClass="entr" presetSubtype="0" fill="hold" grpId="0" nodeType="withEffect">
+                                  <p:stCondLst>
+                                    <p:cond delay="180"/>
+                                  </p:stCondLst>
+                                  <p:childTnLst>
+                                    <p:set>
+                                      <p:cBhvr>
+                                        <p:cTn id="30" dur="1" fill="hold">
+                                          <p:stCondLst>
+                                            <p:cond delay="0"/>
+                                          </p:stCondLst>
+                                        </p:cTn>
+                                        <p:tgtEl>
+                                          <p:spTgt spid="14"/>
+                                        </p:tgtEl>
+                                        <p:attrNameLst>
+                                          <p:attrName>style.visibility</p:attrName>
+                                        </p:attrNameLst>
+                                      </p:cBhvr>
+                                      <p:to>
+                                        <p:strVal val="visible"/>
+                                      </p:to>
+                                    </p:set>
+                                    <p:animEffect transition="in" filter="fade">
+                                      <p:cBhvr>
+                                        <p:cTn id="31" dur="450"/>
+                                        <p:tgtEl>
+                                          <p:spTgt spid="14"/>
+                                        </p:tgtEl>
+                                      </p:cBhvr>
+                                    </p:animEffect>
+                                  </p:childTnLst>
+                                </p:cTn>
+                              </p:par>
+                              <p:par>
+                                <p:cTn id="32" presetID="10" presetClass="entr" presetSubtype="0" fill="hold" grpId="0" nodeType="withEffect">
+                                  <p:stCondLst>
+                                    <p:cond delay="180"/>
+                                  </p:stCondLst>
+                                  <p:childTnLst>
+                                    <p:set>
+                                      <p:cBhvr>
+                                        <p:cTn id="33" dur="1" fill="hold">
+                                          <p:stCondLst>
+                                            <p:cond delay="0"/>
+                                          </p:stCondLst>
+                                        </p:cTn>
+                                        <p:tgtEl>
+                                          <p:spTgt spid="15"/>
+                                        </p:tgtEl>
+                                        <p:attrNameLst>
+                                          <p:attrName>style.visibility</p:attrName>
+                                        </p:attrNameLst>
+                                      </p:cBhvr>
+                                      <p:to>
+                                        <p:strVal val="visible"/>
+                                      </p:to>
+                                    </p:set>
+                                    <p:animEffect transition="in" filter="fade">
+                                      <p:cBhvr>
+                                        <p:cTn id="34" dur="450"/>
+                                        <p:tgtEl>
+                                          <p:spTgt spid="15"/>
+                                        </p:tgtEl>
+                                      </p:cBhvr>
+                                    </p:animEffect>
+                                  </p:childTnLst>
+                                </p:cTn>
+                              </p:par>
+                              <p:par>
+                                <p:cTn id="35" presetID="10" presetClass="entr" presetSubtype="0" fill="hold" grpId="0" nodeType="withEffect">
+                                  <p:stCondLst>
+                                    <p:cond delay="180"/>
+                                  </p:stCondLst>
+                                  <p:childTnLst>
+                                    <p:set>
+                                      <p:cBhvr>
+                                        <p:cTn id="36" dur="1" fill="hold">
+                                          <p:stCondLst>
+                                            <p:cond delay="0"/>
+                                          </p:stCondLst>
+                                        </p:cTn>
+                                        <p:tgtEl>
+                                          <p:spTgt spid="16"/>
+                                        </p:tgtEl>
+                                        <p:attrNameLst>
+                                          <p:attrName>style.visibility</p:attrName>
+                                        </p:attrNameLst>
+                                      </p:cBhvr>
+                                      <p:to>
+                                        <p:strVal val="visible"/>
+                                      </p:to>
+                                    </p:set>
+                                    <p:animEffect transition="in" filter="fade">
+                                      <p:cBhvr>
+                                        <p:cTn id="37" dur="450"/>
+                                        <p:tgtEl>
+                                          <p:spTgt spid="16"/>
+                                        </p:tgtEl>
+                                      </p:cBhvr>
+                                    </p:animEffect>
+                                  </p:childTnLst>
+                                </p:cTn>
+                              </p:par>
+                              <p:par>
+                                <p:cTn id="38" presetID="10" presetClass="entr" presetSubtype="0" fill="hold" grpId="0" nodeType="withEffect">
+                                  <p:stCondLst>
+                                    <p:cond delay="180"/>
+                                  </p:stCondLst>
+                                  <p:childTnLst>
+                                    <p:set>
+                                      <p:cBhvr>
+                                        <p:cTn id="39" dur="1" fill="hold">
+                                          <p:stCondLst>
+                                            <p:cond delay="0"/>
+                                          </p:stCondLst>
+                                        </p:cTn>
+                                        <p:tgtEl>
+                                          <p:spTgt spid="17"/>
+                                        </p:tgtEl>
+                                        <p:attrNameLst>
+                                          <p:attrName>style.visibility</p:attrName>
+                                        </p:attrNameLst>
+                                      </p:cBhvr>
+                                      <p:to>
+                                        <p:strVal val="visible"/>
+                                      </p:to>
+                                    </p:set>
+                                    <p:animEffect transition="in" filter="fade">
+                                      <p:cBhvr>
+                                        <p:cTn id="40" dur="450"/>
+                                        <p:tgtEl>
+                                          <p:spTgt spid="17"/>
+                                        </p:tgtEl>
+                                      </p:cBhvr>
+                                    </p:animEffect>
+                                  </p:childTnLst>
+                                </p:cTn>
+                              </p:par>
+                              <p:par>
+                                <p:cTn id="41" presetID="10" presetClass="entr" presetSubtype="0" fill="hold" grpId="0" nodeType="withEffect">
+                                  <p:stCondLst>
+                                    <p:cond delay="550"/>
+                                  </p:stCondLst>
+                                  <p:childTnLst>
+                                    <p:set>
+                                      <p:cBhvr>
+                                        <p:cTn id="42" dur="1" fill="hold">
+                                          <p:stCondLst>
+                                            <p:cond delay="0"/>
+                                          </p:stCondLst>
+                                        </p:cTn>
+                                        <p:tgtEl>
+                                          <p:spTgt spid="18"/>
+                                        </p:tgtEl>
+                                        <p:attrNameLst>
+                                          <p:attrName>style.visibility</p:attrName>
+                                        </p:attrNameLst>
+                                      </p:cBhvr>
+                                      <p:to>
+                                        <p:strVal val="visible"/>
+                                      </p:to>
+                                    </p:set>
+                                    <p:animEffect transition="in" filter="fade">
+                                      <p:cBhvr>
+                                        <p:cTn id="43" dur="500"/>
+                                        <p:tgtEl>
+                                          <p:spTgt spid="18"/>
+                                        </p:tgtEl>
+                                      </p:cBhvr>
+                                    </p:animEffect>
+                                  </p:childTnLst>
+                                </p:cTn>
+                              </p:par>
+                              <p:par>
+                                <p:cTn id="44" presetID="10" presetClass="entr" presetSubtype="0" fill="hold" grpId="0" nodeType="withEffect">
+                                  <p:stCondLst>
+                                    <p:cond delay="550"/>
+                                  </p:stCondLst>
+                                  <p:childTnLst>
+                                    <p:set>
+                                      <p:cBhvr>
+                                        <p:cTn id="45" dur="1" fill="hold">
+                                          <p:stCondLst>
+                                            <p:cond delay="0"/>
+                                          </p:stCondLst>
+                                        </p:cTn>
+                                        <p:tgtEl>
+                                          <p:spTgt spid="19"/>
+                                        </p:tgtEl>
+                                        <p:attrNameLst>
+                                          <p:attrName>style.visibility</p:attrName>
+                                        </p:attrNameLst>
+                                      </p:cBhvr>
+                                      <p:to>
+                                        <p:strVal val="visible"/>
+                                      </p:to>
+                                    </p:set>
+                                    <p:animEffect transition="in" filter="fade">
+                                      <p:cBhvr>
+                                        <p:cTn id="46" dur="500"/>
+                                        <p:tgtEl>
+                                          <p:spTgt spid="19"/>
+                                        </p:tgtEl>
+                                      </p:cBhvr>
+                                    </p:animEffect>
+                                  </p:childTnLst>
+                                </p:cTn>
+                              </p:par>
+                              <p:par>
+                                <p:cTn id="47" presetID="10" presetClass="entr" presetSubtype="0" fill="hold" grpId="0" nodeType="withEffect">
+                                  <p:stCondLst>
+                                    <p:cond delay="550"/>
+                                  </p:stCondLst>
+                                  <p:childTnLst>
+                                    <p:set>
+                                      <p:cBhvr>
+                                        <p:cTn id="48" dur="1" fill="hold">
+                                          <p:stCondLst>
+                                            <p:cond delay="0"/>
+                                          </p:stCondLst>
+                                        </p:cTn>
+                                        <p:tgtEl>
+                                          <p:spTgt spid="20"/>
+                                        </p:tgtEl>
+                                        <p:attrNameLst>
+                                          <p:attrName>style.visibility</p:attrName>
+                                        </p:attrNameLst>
+                                      </p:cBhvr>
+                                      <p:to>
+                                        <p:strVal val="visible"/>
+                                      </p:to>
+                                    </p:set>
+                                    <p:animEffect transition="in" filter="fade">
+                                      <p:cBhvr>
+                                        <p:cTn id="49" dur="500"/>
+                                        <p:tgtEl>
+                                          <p:spTgt spid="20"/>
+                                        </p:tgtEl>
+                                      </p:cBhvr>
+                                    </p:animEffect>
+                                  </p:childTnLst>
+                                </p:cTn>
+                              </p:par>
+                              <p:par>
+                                <p:cTn id="50" presetID="10" presetClass="entr" presetSubtype="0" fill="hold" grpId="0" nodeType="withEffect">
+                                  <p:stCondLst>
+                                    <p:cond delay="550"/>
+                                  </p:stCondLst>
+                                  <p:childTnLst>
+                                    <p:set>
+                                      <p:cBhvr>
+                                        <p:cTn id="51" dur="1" fill="hold">
+                                          <p:stCondLst>
+                                            <p:cond delay="0"/>
+                                          </p:stCondLst>
+                                        </p:cTn>
+                                        <p:tgtEl>
+                                          <p:spTgt spid="21"/>
+                                        </p:tgtEl>
+                                        <p:attrNameLst>
+                                          <p:attrName>style.visibility</p:attrName>
+                                        </p:attrNameLst>
+                                      </p:cBhvr>
+                                      <p:to>
+                                        <p:strVal val="visible"/>
+                                      </p:to>
+                                    </p:set>
+                                    <p:animEffect transition="in" filter="fade">
+                                      <p:cBhvr>
+                                        <p:cTn id="52" dur="500"/>
+                                        <p:tgtEl>
+                                          <p:spTgt spid="21"/>
+                                        </p:tgtEl>
+                                      </p:cBhvr>
+                                    </p:animEffect>
+                                  </p:childTnLst>
+                                </p:cTn>
+                              </p:par>
+                              <p:par>
+                                <p:cTn id="53" presetID="10" presetClass="entr" presetSubtype="0" fill="hold" grpId="0" nodeType="withEffect">
+                                  <p:stCondLst>
+                                    <p:cond delay="550"/>
+                                  </p:stCondLst>
+                                  <p:childTnLst>
+                                    <p:set>
+                                      <p:cBhvr>
+                                        <p:cTn id="54" dur="1" fill="hold">
+                                          <p:stCondLst>
+                                            <p:cond delay="0"/>
+                                          </p:stCondLst>
+                                        </p:cTn>
+                                        <p:tgtEl>
+                                          <p:spTgt spid="22"/>
+                                        </p:tgtEl>
+                                        <p:attrNameLst>
+                                          <p:attrName>style.visibility</p:attrName>
+                                        </p:attrNameLst>
+                                      </p:cBhvr>
+                                      <p:to>
+                                        <p:strVal val="visible"/>
+                                      </p:to>
+                                    </p:set>
+                                    <p:animEffect transition="in" filter="fade">
+                                      <p:cBhvr>
+                                        <p:cTn id="55" dur="500"/>
+                                        <p:tgtEl>
+                                          <p:spTgt spid="22"/>
+                                        </p:tgtEl>
+                                      </p:cBhvr>
+                                    </p:animEffect>
+                                  </p:childTnLst>
+                                </p:cTn>
+                              </p:par>
+                              <p:par>
+                                <p:cTn id="56" presetID="10" presetClass="entr" presetSubtype="0" fill="hold" grpId="0" nodeType="withEffect">
+                                  <p:stCondLst>
+                                    <p:cond delay="550"/>
+                                  </p:stCondLst>
+                                  <p:childTnLst>
+                                    <p:set>
+                                      <p:cBhvr>
+                                        <p:cTn id="57" dur="1" fill="hold">
+                                          <p:stCondLst>
+                                            <p:cond delay="0"/>
+                                          </p:stCondLst>
+                                        </p:cTn>
+                                        <p:tgtEl>
+                                          <p:spTgt spid="23"/>
+                                        </p:tgtEl>
+                                        <p:attrNameLst>
+                                          <p:attrName>style.visibility</p:attrName>
+                                        </p:attrNameLst>
+                                      </p:cBhvr>
+                                      <p:to>
+                                        <p:strVal val="visible"/>
+                                      </p:to>
+                                    </p:set>
+                                    <p:animEffect transition="in" filter="fade">
+                                      <p:cBhvr>
+                                        <p:cTn id="58" dur="500"/>
+                                        <p:tgtEl>
+                                          <p:spTgt spid="23"/>
+                                        </p:tgtEl>
+                                      </p:cBhvr>
+                                    </p:animEffect>
+                                  </p:childTnLst>
+                                </p:cTn>
+                              </p:par>
+                              <p:par>
+                                <p:cTn id="59" presetID="10" presetClass="entr" presetSubtype="0" fill="hold" grpId="0" nodeType="withEffect">
+                                  <p:stCondLst>
+                                    <p:cond delay="800"/>
+                                  </p:stCondLst>
+                                  <p:childTnLst>
+                                    <p:set>
+                                      <p:cBhvr>
+                                        <p:cTn id="60" dur="1" fill="hold">
+                                          <p:stCondLst>
+                                            <p:cond delay="0"/>
+                                          </p:stCondLst>
+                                        </p:cTn>
+                                        <p:tgtEl>
+                                          <p:spTgt spid="4"/>
+                                        </p:tgtEl>
+                                        <p:attrNameLst>
+                                          <p:attrName>style.visibility</p:attrName>
+                                        </p:attrNameLst>
+                                      </p:cBhvr>
+                                      <p:to>
+                                        <p:strVal val="visible"/>
+                                      </p:to>
+                                    </p:set>
+                                    <p:animEffect transition="in" filter="fade">
+                                      <p:cBhvr>
+                                        <p:cTn id="61" dur="400"/>
+                                        <p:tgtEl>
+                                          <p:spTgt spid="4"/>
+                                        </p:tgtEl>
+                                      </p:cBhvr>
+                                    </p:animEffect>
+                                  </p:childTnLst>
+                                </p:cTn>
+                              </p:par>
+                              <p:par>
+                                <p:cTn id="62" presetID="10" presetClass="entr" presetSubtype="0" fill="hold" grpId="0" nodeType="withEffect">
+                                  <p:stCondLst>
+                                    <p:cond delay="800"/>
+                                  </p:stCondLst>
+                                  <p:childTnLst>
+                                    <p:set>
+                                      <p:cBhvr>
+                                        <p:cTn id="63" dur="1" fill="hold">
+                                          <p:stCondLst>
+                                            <p:cond delay="0"/>
+                                          </p:stCondLst>
+                                        </p:cTn>
+                                        <p:tgtEl>
+                                          <p:spTgt spid="5"/>
+                                        </p:tgtEl>
+                                        <p:attrNameLst>
+                                          <p:attrName>style.visibility</p:attrName>
+                                        </p:attrNameLst>
+                                      </p:cBhvr>
+                                      <p:to>
+                                        <p:strVal val="visible"/>
+                                      </p:to>
+                                    </p:set>
+                                    <p:animEffect transition="in" filter="fade">
+                                      <p:cBhvr>
+                                        <p:cTn id="64" dur="400"/>
+                                        <p:tgtEl>
+                                          <p:spTgt spid="5"/>
+                                        </p:tgtEl>
+                                      </p:cBhvr>
+                                    </p:animEffect>
+                                  </p:childTnLst>
+                                </p:cTn>
+                              </p:par>
+                            </p:childTnLst>
+                          </p:cTn>
+                        </p:par>
+                      </p:childTnLst>
+                    </p:cTn>
+                  </p:par>
+                </p:childTnLst>
+              </p:cTn>
+              <p:prevCondLst>
+                <p:cond evt="onPrev" delay="0">
+                  <p:tgtEl>
+                    <p:sldTgt/>
+                  </p:tgtEl>
+                </p:cond>
+              </p:prevCondLst>
+              <p:nextCondLst>
+                <p:cond evt="onNext" delay="0">
+                  <p:tgtEl>
+                    <p:sldTgt/>
+                  </p:tgtEl>
+                </p:cond>
+              </p:nextCondLst>
+            </p:seq>
+          </p:childTnLst>
+        </p:cTn>
+      </p:par>
+    </p:tnLst>
+  </p:timing>
 </p:sld>
 </file>
 
@@ -22884,6 +24100,1594 @@
       </p:transition>
     </mc:Fallback>
   </mc:AlternateContent>
+  <p:timing>
+    <p:tnLst>
+      <p:par>
+        <p:cTn id="1" dur="indefinite" restart="never" nodeType="tmRoot">
+          <p:childTnLst>
+            <p:seq concurrent="1" nextAc="seek">
+              <p:cTn id="2" dur="indefinite" nodeType="mainSeq">
+                <p:childTnLst>
+                  <p:par>
+                    <p:cTn id="3" fill="hold">
+                      <p:stCondLst>
+                        <p:cond delay="0"/>
+                      </p:stCondLst>
+                      <p:childTnLst>
+                        <p:par>
+                          <p:cTn id="4" fill="hold">
+                            <p:stCondLst>
+                              <p:cond delay="0"/>
+                            </p:stCondLst>
+                            <p:childTnLst>
+                              <p:par>
+                                <p:cTn id="5" presetID="10" presetClass="entr" presetSubtype="0" fill="hold" grpId="0" nodeType="withEffect">
+                                  <p:stCondLst>
+                                    <p:cond delay="150"/>
+                                  </p:stCondLst>
+                                  <p:childTnLst>
+                                    <p:set>
+                                      <p:cBhvr>
+                                        <p:cTn id="6" dur="1" fill="hold">
+                                          <p:stCondLst>
+                                            <p:cond delay="0"/>
+                                          </p:stCondLst>
+                                        </p:cTn>
+                                        <p:tgtEl>
+                                          <p:spTgt spid="6"/>
+                                        </p:tgtEl>
+                                        <p:attrNameLst>
+                                          <p:attrName>style.visibility</p:attrName>
+                                        </p:attrNameLst>
+                                      </p:cBhvr>
+                                      <p:to>
+                                        <p:strVal val="visible"/>
+                                      </p:to>
+                                    </p:set>
+                                    <p:animEffect transition="in" filter="fade">
+                                      <p:cBhvr>
+                                        <p:cTn id="7" dur="450"/>
+                                        <p:tgtEl>
+                                          <p:spTgt spid="6"/>
+                                        </p:tgtEl>
+                                      </p:cBhvr>
+                                    </p:animEffect>
+                                  </p:childTnLst>
+                                </p:cTn>
+                              </p:par>
+                              <p:par>
+                                <p:cTn id="8" presetID="10" presetClass="entr" presetSubtype="0" fill="hold" grpId="0" nodeType="withEffect">
+                                  <p:stCondLst>
+                                    <p:cond delay="185"/>
+                                  </p:stCondLst>
+                                  <p:childTnLst>
+                                    <p:set>
+                                      <p:cBhvr>
+                                        <p:cTn id="9" dur="1" fill="hold">
+                                          <p:stCondLst>
+                                            <p:cond delay="0"/>
+                                          </p:stCondLst>
+                                        </p:cTn>
+                                        <p:tgtEl>
+                                          <p:spTgt spid="7"/>
+                                        </p:tgtEl>
+                                        <p:attrNameLst>
+                                          <p:attrName>style.visibility</p:attrName>
+                                        </p:attrNameLst>
+                                      </p:cBhvr>
+                                      <p:to>
+                                        <p:strVal val="visible"/>
+                                      </p:to>
+                                    </p:set>
+                                    <p:animEffect transition="in" filter="fade">
+                                      <p:cBhvr>
+                                        <p:cTn id="10" dur="450"/>
+                                        <p:tgtEl>
+                                          <p:spTgt spid="7"/>
+                                        </p:tgtEl>
+                                      </p:cBhvr>
+                                    </p:animEffect>
+                                  </p:childTnLst>
+                                </p:cTn>
+                              </p:par>
+                              <p:par>
+                                <p:cTn id="11" presetID="10" presetClass="entr" presetSubtype="0" fill="hold" grpId="0" nodeType="withEffect">
+                                  <p:stCondLst>
+                                    <p:cond delay="220"/>
+                                  </p:stCondLst>
+                                  <p:childTnLst>
+                                    <p:set>
+                                      <p:cBhvr>
+                                        <p:cTn id="12" dur="1" fill="hold">
+                                          <p:stCondLst>
+                                            <p:cond delay="0"/>
+                                          </p:stCondLst>
+                                        </p:cTn>
+                                        <p:tgtEl>
+                                          <p:spTgt spid="8"/>
+                                        </p:tgtEl>
+                                        <p:attrNameLst>
+                                          <p:attrName>style.visibility</p:attrName>
+                                        </p:attrNameLst>
+                                      </p:cBhvr>
+                                      <p:to>
+                                        <p:strVal val="visible"/>
+                                      </p:to>
+                                    </p:set>
+                                    <p:animEffect transition="in" filter="fade">
+                                      <p:cBhvr>
+                                        <p:cTn id="13" dur="450"/>
+                                        <p:tgtEl>
+                                          <p:spTgt spid="8"/>
+                                        </p:tgtEl>
+                                      </p:cBhvr>
+                                    </p:animEffect>
+                                  </p:childTnLst>
+                                </p:cTn>
+                              </p:par>
+                              <p:par>
+                                <p:cTn id="14" presetID="10" presetClass="entr" presetSubtype="0" fill="hold" grpId="0" nodeType="withEffect">
+                                  <p:stCondLst>
+                                    <p:cond delay="255"/>
+                                  </p:stCondLst>
+                                  <p:childTnLst>
+                                    <p:set>
+                                      <p:cBhvr>
+                                        <p:cTn id="15" dur="1" fill="hold">
+                                          <p:stCondLst>
+                                            <p:cond delay="0"/>
+                                          </p:stCondLst>
+                                        </p:cTn>
+                                        <p:tgtEl>
+                                          <p:spTgt spid="9"/>
+                                        </p:tgtEl>
+                                        <p:attrNameLst>
+                                          <p:attrName>style.visibility</p:attrName>
+                                        </p:attrNameLst>
+                                      </p:cBhvr>
+                                      <p:to>
+                                        <p:strVal val="visible"/>
+                                      </p:to>
+                                    </p:set>
+                                    <p:animEffect transition="in" filter="fade">
+                                      <p:cBhvr>
+                                        <p:cTn id="16" dur="450"/>
+                                        <p:tgtEl>
+                                          <p:spTgt spid="9"/>
+                                        </p:tgtEl>
+                                      </p:cBhvr>
+                                    </p:animEffect>
+                                  </p:childTnLst>
+                                </p:cTn>
+                              </p:par>
+                              <p:par>
+                                <p:cTn id="17" presetID="10" presetClass="entr" presetSubtype="0" fill="hold" grpId="0" nodeType="withEffect">
+                                  <p:stCondLst>
+                                    <p:cond delay="290"/>
+                                  </p:stCondLst>
+                                  <p:childTnLst>
+                                    <p:set>
+                                      <p:cBhvr>
+                                        <p:cTn id="18" dur="1" fill="hold">
+                                          <p:stCondLst>
+                                            <p:cond delay="0"/>
+                                          </p:stCondLst>
+                                        </p:cTn>
+                                        <p:tgtEl>
+                                          <p:spTgt spid="10"/>
+                                        </p:tgtEl>
+                                        <p:attrNameLst>
+                                          <p:attrName>style.visibility</p:attrName>
+                                        </p:attrNameLst>
+                                      </p:cBhvr>
+                                      <p:to>
+                                        <p:strVal val="visible"/>
+                                      </p:to>
+                                    </p:set>
+                                    <p:animEffect transition="in" filter="fade">
+                                      <p:cBhvr>
+                                        <p:cTn id="19" dur="450"/>
+                                        <p:tgtEl>
+                                          <p:spTgt spid="10"/>
+                                        </p:tgtEl>
+                                      </p:cBhvr>
+                                    </p:animEffect>
+                                  </p:childTnLst>
+                                </p:cTn>
+                              </p:par>
+                              <p:par>
+                                <p:cTn id="20" presetID="10" presetClass="entr" presetSubtype="0" fill="hold" grpId="0" nodeType="withEffect">
+                                  <p:stCondLst>
+                                    <p:cond delay="325"/>
+                                  </p:stCondLst>
+                                  <p:childTnLst>
+                                    <p:set>
+                                      <p:cBhvr>
+                                        <p:cTn id="21" dur="1" fill="hold">
+                                          <p:stCondLst>
+                                            <p:cond delay="0"/>
+                                          </p:stCondLst>
+                                        </p:cTn>
+                                        <p:tgtEl>
+                                          <p:spTgt spid="11"/>
+                                        </p:tgtEl>
+                                        <p:attrNameLst>
+                                          <p:attrName>style.visibility</p:attrName>
+                                        </p:attrNameLst>
+                                      </p:cBhvr>
+                                      <p:to>
+                                        <p:strVal val="visible"/>
+                                      </p:to>
+                                    </p:set>
+                                    <p:animEffect transition="in" filter="fade">
+                                      <p:cBhvr>
+                                        <p:cTn id="22" dur="450"/>
+                                        <p:tgtEl>
+                                          <p:spTgt spid="11"/>
+                                        </p:tgtEl>
+                                      </p:cBhvr>
+                                    </p:animEffect>
+                                  </p:childTnLst>
+                                </p:cTn>
+                              </p:par>
+                              <p:par>
+                                <p:cTn id="23" presetID="10" presetClass="entr" presetSubtype="0" fill="hold" grpId="0" nodeType="withEffect">
+                                  <p:stCondLst>
+                                    <p:cond delay="360"/>
+                                  </p:stCondLst>
+                                  <p:childTnLst>
+                                    <p:set>
+                                      <p:cBhvr>
+                                        <p:cTn id="24" dur="1" fill="hold">
+                                          <p:stCondLst>
+                                            <p:cond delay="0"/>
+                                          </p:stCondLst>
+                                        </p:cTn>
+                                        <p:tgtEl>
+                                          <p:spTgt spid="12"/>
+                                        </p:tgtEl>
+                                        <p:attrNameLst>
+                                          <p:attrName>style.visibility</p:attrName>
+                                        </p:attrNameLst>
+                                      </p:cBhvr>
+                                      <p:to>
+                                        <p:strVal val="visible"/>
+                                      </p:to>
+                                    </p:set>
+                                    <p:animEffect transition="in" filter="fade">
+                                      <p:cBhvr>
+                                        <p:cTn id="25" dur="450"/>
+                                        <p:tgtEl>
+                                          <p:spTgt spid="12"/>
+                                        </p:tgtEl>
+                                      </p:cBhvr>
+                                    </p:animEffect>
+                                  </p:childTnLst>
+                                </p:cTn>
+                              </p:par>
+                              <p:par>
+                                <p:cTn id="26" presetID="10" presetClass="entr" presetSubtype="0" fill="hold" grpId="0" nodeType="withEffect">
+                                  <p:stCondLst>
+                                    <p:cond delay="395"/>
+                                  </p:stCondLst>
+                                  <p:childTnLst>
+                                    <p:set>
+                                      <p:cBhvr>
+                                        <p:cTn id="27" dur="1" fill="hold">
+                                          <p:stCondLst>
+                                            <p:cond delay="0"/>
+                                          </p:stCondLst>
+                                        </p:cTn>
+                                        <p:tgtEl>
+                                          <p:spTgt spid="13"/>
+                                        </p:tgtEl>
+                                        <p:attrNameLst>
+                                          <p:attrName>style.visibility</p:attrName>
+                                        </p:attrNameLst>
+                                      </p:cBhvr>
+                                      <p:to>
+                                        <p:strVal val="visible"/>
+                                      </p:to>
+                                    </p:set>
+                                    <p:animEffect transition="in" filter="fade">
+                                      <p:cBhvr>
+                                        <p:cTn id="28" dur="450"/>
+                                        <p:tgtEl>
+                                          <p:spTgt spid="13"/>
+                                        </p:tgtEl>
+                                      </p:cBhvr>
+                                    </p:animEffect>
+                                  </p:childTnLst>
+                                </p:cTn>
+                              </p:par>
+                              <p:par>
+                                <p:cTn id="29" presetID="10" presetClass="entr" presetSubtype="0" fill="hold" grpId="0" nodeType="withEffect">
+                                  <p:stCondLst>
+                                    <p:cond delay="430"/>
+                                  </p:stCondLst>
+                                  <p:childTnLst>
+                                    <p:set>
+                                      <p:cBhvr>
+                                        <p:cTn id="30" dur="1" fill="hold">
+                                          <p:stCondLst>
+                                            <p:cond delay="0"/>
+                                          </p:stCondLst>
+                                        </p:cTn>
+                                        <p:tgtEl>
+                                          <p:spTgt spid="14"/>
+                                        </p:tgtEl>
+                                        <p:attrNameLst>
+                                          <p:attrName>style.visibility</p:attrName>
+                                        </p:attrNameLst>
+                                      </p:cBhvr>
+                                      <p:to>
+                                        <p:strVal val="visible"/>
+                                      </p:to>
+                                    </p:set>
+                                    <p:animEffect transition="in" filter="fade">
+                                      <p:cBhvr>
+                                        <p:cTn id="31" dur="450"/>
+                                        <p:tgtEl>
+                                          <p:spTgt spid="14"/>
+                                        </p:tgtEl>
+                                      </p:cBhvr>
+                                    </p:animEffect>
+                                  </p:childTnLst>
+                                </p:cTn>
+                              </p:par>
+                              <p:par>
+                                <p:cTn id="32" presetID="10" presetClass="entr" presetSubtype="0" fill="hold" grpId="0" nodeType="withEffect">
+                                  <p:stCondLst>
+                                    <p:cond delay="465"/>
+                                  </p:stCondLst>
+                                  <p:childTnLst>
+                                    <p:set>
+                                      <p:cBhvr>
+                                        <p:cTn id="33" dur="1" fill="hold">
+                                          <p:stCondLst>
+                                            <p:cond delay="0"/>
+                                          </p:stCondLst>
+                                        </p:cTn>
+                                        <p:tgtEl>
+                                          <p:spTgt spid="15"/>
+                                        </p:tgtEl>
+                                        <p:attrNameLst>
+                                          <p:attrName>style.visibility</p:attrName>
+                                        </p:attrNameLst>
+                                      </p:cBhvr>
+                                      <p:to>
+                                        <p:strVal val="visible"/>
+                                      </p:to>
+                                    </p:set>
+                                    <p:animEffect transition="in" filter="fade">
+                                      <p:cBhvr>
+                                        <p:cTn id="34" dur="450"/>
+                                        <p:tgtEl>
+                                          <p:spTgt spid="15"/>
+                                        </p:tgtEl>
+                                      </p:cBhvr>
+                                    </p:animEffect>
+                                  </p:childTnLst>
+                                </p:cTn>
+                              </p:par>
+                              <p:par>
+                                <p:cTn id="35" presetID="10" presetClass="entr" presetSubtype="0" fill="hold" grpId="0" nodeType="withEffect">
+                                  <p:stCondLst>
+                                    <p:cond delay="500"/>
+                                  </p:stCondLst>
+                                  <p:childTnLst>
+                                    <p:set>
+                                      <p:cBhvr>
+                                        <p:cTn id="36" dur="1" fill="hold">
+                                          <p:stCondLst>
+                                            <p:cond delay="0"/>
+                                          </p:stCondLst>
+                                        </p:cTn>
+                                        <p:tgtEl>
+                                          <p:spTgt spid="16"/>
+                                        </p:tgtEl>
+                                        <p:attrNameLst>
+                                          <p:attrName>style.visibility</p:attrName>
+                                        </p:attrNameLst>
+                                      </p:cBhvr>
+                                      <p:to>
+                                        <p:strVal val="visible"/>
+                                      </p:to>
+                                    </p:set>
+                                    <p:animEffect transition="in" filter="fade">
+                                      <p:cBhvr>
+                                        <p:cTn id="37" dur="450"/>
+                                        <p:tgtEl>
+                                          <p:spTgt spid="16"/>
+                                        </p:tgtEl>
+                                      </p:cBhvr>
+                                    </p:animEffect>
+                                  </p:childTnLst>
+                                </p:cTn>
+                              </p:par>
+                              <p:par>
+                                <p:cTn id="38" presetID="10" presetClass="entr" presetSubtype="0" fill="hold" grpId="0" nodeType="withEffect">
+                                  <p:stCondLst>
+                                    <p:cond delay="535"/>
+                                  </p:stCondLst>
+                                  <p:childTnLst>
+                                    <p:set>
+                                      <p:cBhvr>
+                                        <p:cTn id="39" dur="1" fill="hold">
+                                          <p:stCondLst>
+                                            <p:cond delay="0"/>
+                                          </p:stCondLst>
+                                        </p:cTn>
+                                        <p:tgtEl>
+                                          <p:spTgt spid="17"/>
+                                        </p:tgtEl>
+                                        <p:attrNameLst>
+                                          <p:attrName>style.visibility</p:attrName>
+                                        </p:attrNameLst>
+                                      </p:cBhvr>
+                                      <p:to>
+                                        <p:strVal val="visible"/>
+                                      </p:to>
+                                    </p:set>
+                                    <p:animEffect transition="in" filter="fade">
+                                      <p:cBhvr>
+                                        <p:cTn id="40" dur="450"/>
+                                        <p:tgtEl>
+                                          <p:spTgt spid="17"/>
+                                        </p:tgtEl>
+                                      </p:cBhvr>
+                                    </p:animEffect>
+                                  </p:childTnLst>
+                                </p:cTn>
+                              </p:par>
+                              <p:par>
+                                <p:cTn id="41" presetID="10" presetClass="entr" presetSubtype="0" fill="hold" grpId="0" nodeType="withEffect">
+                                  <p:stCondLst>
+                                    <p:cond delay="570"/>
+                                  </p:stCondLst>
+                                  <p:childTnLst>
+                                    <p:set>
+                                      <p:cBhvr>
+                                        <p:cTn id="42" dur="1" fill="hold">
+                                          <p:stCondLst>
+                                            <p:cond delay="0"/>
+                                          </p:stCondLst>
+                                        </p:cTn>
+                                        <p:tgtEl>
+                                          <p:spTgt spid="18"/>
+                                        </p:tgtEl>
+                                        <p:attrNameLst>
+                                          <p:attrName>style.visibility</p:attrName>
+                                        </p:attrNameLst>
+                                      </p:cBhvr>
+                                      <p:to>
+                                        <p:strVal val="visible"/>
+                                      </p:to>
+                                    </p:set>
+                                    <p:animEffect transition="in" filter="fade">
+                                      <p:cBhvr>
+                                        <p:cTn id="43" dur="450"/>
+                                        <p:tgtEl>
+                                          <p:spTgt spid="18"/>
+                                        </p:tgtEl>
+                                      </p:cBhvr>
+                                    </p:animEffect>
+                                  </p:childTnLst>
+                                </p:cTn>
+                              </p:par>
+                              <p:par>
+                                <p:cTn id="44" presetID="10" presetClass="entr" presetSubtype="0" fill="hold" grpId="0" nodeType="withEffect">
+                                  <p:stCondLst>
+                                    <p:cond delay="605"/>
+                                  </p:stCondLst>
+                                  <p:childTnLst>
+                                    <p:set>
+                                      <p:cBhvr>
+                                        <p:cTn id="45" dur="1" fill="hold">
+                                          <p:stCondLst>
+                                            <p:cond delay="0"/>
+                                          </p:stCondLst>
+                                        </p:cTn>
+                                        <p:tgtEl>
+                                          <p:spTgt spid="19"/>
+                                        </p:tgtEl>
+                                        <p:attrNameLst>
+                                          <p:attrName>style.visibility</p:attrName>
+                                        </p:attrNameLst>
+                                      </p:cBhvr>
+                                      <p:to>
+                                        <p:strVal val="visible"/>
+                                      </p:to>
+                                    </p:set>
+                                    <p:animEffect transition="in" filter="fade">
+                                      <p:cBhvr>
+                                        <p:cTn id="46" dur="450"/>
+                                        <p:tgtEl>
+                                          <p:spTgt spid="19"/>
+                                        </p:tgtEl>
+                                      </p:cBhvr>
+                                    </p:animEffect>
+                                  </p:childTnLst>
+                                </p:cTn>
+                              </p:par>
+                              <p:par>
+                                <p:cTn id="47" presetID="10" presetClass="entr" presetSubtype="0" fill="hold" grpId="0" nodeType="withEffect">
+                                  <p:stCondLst>
+                                    <p:cond delay="640"/>
+                                  </p:stCondLst>
+                                  <p:childTnLst>
+                                    <p:set>
+                                      <p:cBhvr>
+                                        <p:cTn id="48" dur="1" fill="hold">
+                                          <p:stCondLst>
+                                            <p:cond delay="0"/>
+                                          </p:stCondLst>
+                                        </p:cTn>
+                                        <p:tgtEl>
+                                          <p:spTgt spid="20"/>
+                                        </p:tgtEl>
+                                        <p:attrNameLst>
+                                          <p:attrName>style.visibility</p:attrName>
+                                        </p:attrNameLst>
+                                      </p:cBhvr>
+                                      <p:to>
+                                        <p:strVal val="visible"/>
+                                      </p:to>
+                                    </p:set>
+                                    <p:animEffect transition="in" filter="fade">
+                                      <p:cBhvr>
+                                        <p:cTn id="49" dur="450"/>
+                                        <p:tgtEl>
+                                          <p:spTgt spid="20"/>
+                                        </p:tgtEl>
+                                      </p:cBhvr>
+                                    </p:animEffect>
+                                  </p:childTnLst>
+                                </p:cTn>
+                              </p:par>
+                              <p:par>
+                                <p:cTn id="50" presetID="10" presetClass="entr" presetSubtype="0" fill="hold" grpId="0" nodeType="withEffect">
+                                  <p:stCondLst>
+                                    <p:cond delay="675"/>
+                                  </p:stCondLst>
+                                  <p:childTnLst>
+                                    <p:set>
+                                      <p:cBhvr>
+                                        <p:cTn id="51" dur="1" fill="hold">
+                                          <p:stCondLst>
+                                            <p:cond delay="0"/>
+                                          </p:stCondLst>
+                                        </p:cTn>
+                                        <p:tgtEl>
+                                          <p:spTgt spid="21"/>
+                                        </p:tgtEl>
+                                        <p:attrNameLst>
+                                          <p:attrName>style.visibility</p:attrName>
+                                        </p:attrNameLst>
+                                      </p:cBhvr>
+                                      <p:to>
+                                        <p:strVal val="visible"/>
+                                      </p:to>
+                                    </p:set>
+                                    <p:animEffect transition="in" filter="fade">
+                                      <p:cBhvr>
+                                        <p:cTn id="52" dur="450"/>
+                                        <p:tgtEl>
+                                          <p:spTgt spid="21"/>
+                                        </p:tgtEl>
+                                      </p:cBhvr>
+                                    </p:animEffect>
+                                  </p:childTnLst>
+                                </p:cTn>
+                              </p:par>
+                              <p:par>
+                                <p:cTn id="53" presetID="10" presetClass="entr" presetSubtype="0" fill="hold" grpId="0" nodeType="withEffect">
+                                  <p:stCondLst>
+                                    <p:cond delay="710"/>
+                                  </p:stCondLst>
+                                  <p:childTnLst>
+                                    <p:set>
+                                      <p:cBhvr>
+                                        <p:cTn id="54" dur="1" fill="hold">
+                                          <p:stCondLst>
+                                            <p:cond delay="0"/>
+                                          </p:stCondLst>
+                                        </p:cTn>
+                                        <p:tgtEl>
+                                          <p:spTgt spid="22"/>
+                                        </p:tgtEl>
+                                        <p:attrNameLst>
+                                          <p:attrName>style.visibility</p:attrName>
+                                        </p:attrNameLst>
+                                      </p:cBhvr>
+                                      <p:to>
+                                        <p:strVal val="visible"/>
+                                      </p:to>
+                                    </p:set>
+                                    <p:animEffect transition="in" filter="fade">
+                                      <p:cBhvr>
+                                        <p:cTn id="55" dur="450"/>
+                                        <p:tgtEl>
+                                          <p:spTgt spid="22"/>
+                                        </p:tgtEl>
+                                      </p:cBhvr>
+                                    </p:animEffect>
+                                  </p:childTnLst>
+                                </p:cTn>
+                              </p:par>
+                              <p:par>
+                                <p:cTn id="56" presetID="10" presetClass="entr" presetSubtype="0" fill="hold" grpId="0" nodeType="withEffect">
+                                  <p:stCondLst>
+                                    <p:cond delay="745"/>
+                                  </p:stCondLst>
+                                  <p:childTnLst>
+                                    <p:set>
+                                      <p:cBhvr>
+                                        <p:cTn id="57" dur="1" fill="hold">
+                                          <p:stCondLst>
+                                            <p:cond delay="0"/>
+                                          </p:stCondLst>
+                                        </p:cTn>
+                                        <p:tgtEl>
+                                          <p:spTgt spid="23"/>
+                                        </p:tgtEl>
+                                        <p:attrNameLst>
+                                          <p:attrName>style.visibility</p:attrName>
+                                        </p:attrNameLst>
+                                      </p:cBhvr>
+                                      <p:to>
+                                        <p:strVal val="visible"/>
+                                      </p:to>
+                                    </p:set>
+                                    <p:animEffect transition="in" filter="fade">
+                                      <p:cBhvr>
+                                        <p:cTn id="58" dur="450"/>
+                                        <p:tgtEl>
+                                          <p:spTgt spid="23"/>
+                                        </p:tgtEl>
+                                      </p:cBhvr>
+                                    </p:animEffect>
+                                  </p:childTnLst>
+                                </p:cTn>
+                              </p:par>
+                              <p:par>
+                                <p:cTn id="59" presetID="10" presetClass="entr" presetSubtype="0" fill="hold" grpId="0" nodeType="withEffect">
+                                  <p:stCondLst>
+                                    <p:cond delay="780"/>
+                                  </p:stCondLst>
+                                  <p:childTnLst>
+                                    <p:set>
+                                      <p:cBhvr>
+                                        <p:cTn id="60" dur="1" fill="hold">
+                                          <p:stCondLst>
+                                            <p:cond delay="0"/>
+                                          </p:stCondLst>
+                                        </p:cTn>
+                                        <p:tgtEl>
+                                          <p:spTgt spid="24"/>
+                                        </p:tgtEl>
+                                        <p:attrNameLst>
+                                          <p:attrName>style.visibility</p:attrName>
+                                        </p:attrNameLst>
+                                      </p:cBhvr>
+                                      <p:to>
+                                        <p:strVal val="visible"/>
+                                      </p:to>
+                                    </p:set>
+                                    <p:animEffect transition="in" filter="fade">
+                                      <p:cBhvr>
+                                        <p:cTn id="61" dur="450"/>
+                                        <p:tgtEl>
+                                          <p:spTgt spid="24"/>
+                                        </p:tgtEl>
+                                      </p:cBhvr>
+                                    </p:animEffect>
+                                  </p:childTnLst>
+                                </p:cTn>
+                              </p:par>
+                              <p:par>
+                                <p:cTn id="62" presetID="10" presetClass="entr" presetSubtype="0" fill="hold" grpId="0" nodeType="withEffect">
+                                  <p:stCondLst>
+                                    <p:cond delay="815"/>
+                                  </p:stCondLst>
+                                  <p:childTnLst>
+                                    <p:set>
+                                      <p:cBhvr>
+                                        <p:cTn id="63" dur="1" fill="hold">
+                                          <p:stCondLst>
+                                            <p:cond delay="0"/>
+                                          </p:stCondLst>
+                                        </p:cTn>
+                                        <p:tgtEl>
+                                          <p:spTgt spid="25"/>
+                                        </p:tgtEl>
+                                        <p:attrNameLst>
+                                          <p:attrName>style.visibility</p:attrName>
+                                        </p:attrNameLst>
+                                      </p:cBhvr>
+                                      <p:to>
+                                        <p:strVal val="visible"/>
+                                      </p:to>
+                                    </p:set>
+                                    <p:animEffect transition="in" filter="fade">
+                                      <p:cBhvr>
+                                        <p:cTn id="64" dur="450"/>
+                                        <p:tgtEl>
+                                          <p:spTgt spid="25"/>
+                                        </p:tgtEl>
+                                      </p:cBhvr>
+                                    </p:animEffect>
+                                  </p:childTnLst>
+                                </p:cTn>
+                              </p:par>
+                              <p:par>
+                                <p:cTn id="65" presetID="10" presetClass="entr" presetSubtype="0" fill="hold" grpId="0" nodeType="withEffect">
+                                  <p:stCondLst>
+                                    <p:cond delay="850"/>
+                                  </p:stCondLst>
+                                  <p:childTnLst>
+                                    <p:set>
+                                      <p:cBhvr>
+                                        <p:cTn id="66" dur="1" fill="hold">
+                                          <p:stCondLst>
+                                            <p:cond delay="0"/>
+                                          </p:stCondLst>
+                                        </p:cTn>
+                                        <p:tgtEl>
+                                          <p:spTgt spid="26"/>
+                                        </p:tgtEl>
+                                        <p:attrNameLst>
+                                          <p:attrName>style.visibility</p:attrName>
+                                        </p:attrNameLst>
+                                      </p:cBhvr>
+                                      <p:to>
+                                        <p:strVal val="visible"/>
+                                      </p:to>
+                                    </p:set>
+                                    <p:animEffect transition="in" filter="fade">
+                                      <p:cBhvr>
+                                        <p:cTn id="67" dur="450"/>
+                                        <p:tgtEl>
+                                          <p:spTgt spid="26"/>
+                                        </p:tgtEl>
+                                      </p:cBhvr>
+                                    </p:animEffect>
+                                  </p:childTnLst>
+                                </p:cTn>
+                              </p:par>
+                              <p:par>
+                                <p:cTn id="68" presetID="10" presetClass="entr" presetSubtype="0" fill="hold" grpId="0" nodeType="withEffect">
+                                  <p:stCondLst>
+                                    <p:cond delay="885"/>
+                                  </p:stCondLst>
+                                  <p:childTnLst>
+                                    <p:set>
+                                      <p:cBhvr>
+                                        <p:cTn id="69" dur="1" fill="hold">
+                                          <p:stCondLst>
+                                            <p:cond delay="0"/>
+                                          </p:stCondLst>
+                                        </p:cTn>
+                                        <p:tgtEl>
+                                          <p:spTgt spid="27"/>
+                                        </p:tgtEl>
+                                        <p:attrNameLst>
+                                          <p:attrName>style.visibility</p:attrName>
+                                        </p:attrNameLst>
+                                      </p:cBhvr>
+                                      <p:to>
+                                        <p:strVal val="visible"/>
+                                      </p:to>
+                                    </p:set>
+                                    <p:animEffect transition="in" filter="fade">
+                                      <p:cBhvr>
+                                        <p:cTn id="70" dur="450"/>
+                                        <p:tgtEl>
+                                          <p:spTgt spid="27"/>
+                                        </p:tgtEl>
+                                      </p:cBhvr>
+                                    </p:animEffect>
+                                  </p:childTnLst>
+                                </p:cTn>
+                              </p:par>
+                              <p:par>
+                                <p:cTn id="71" presetID="10" presetClass="entr" presetSubtype="0" fill="hold" grpId="0" nodeType="withEffect">
+                                  <p:stCondLst>
+                                    <p:cond delay="920"/>
+                                  </p:stCondLst>
+                                  <p:childTnLst>
+                                    <p:set>
+                                      <p:cBhvr>
+                                        <p:cTn id="72" dur="1" fill="hold">
+                                          <p:stCondLst>
+                                            <p:cond delay="0"/>
+                                          </p:stCondLst>
+                                        </p:cTn>
+                                        <p:tgtEl>
+                                          <p:spTgt spid="28"/>
+                                        </p:tgtEl>
+                                        <p:attrNameLst>
+                                          <p:attrName>style.visibility</p:attrName>
+                                        </p:attrNameLst>
+                                      </p:cBhvr>
+                                      <p:to>
+                                        <p:strVal val="visible"/>
+                                      </p:to>
+                                    </p:set>
+                                    <p:animEffect transition="in" filter="fade">
+                                      <p:cBhvr>
+                                        <p:cTn id="73" dur="450"/>
+                                        <p:tgtEl>
+                                          <p:spTgt spid="28"/>
+                                        </p:tgtEl>
+                                      </p:cBhvr>
+                                    </p:animEffect>
+                                  </p:childTnLst>
+                                </p:cTn>
+                              </p:par>
+                              <p:par>
+                                <p:cTn id="74" presetID="10" presetClass="entr" presetSubtype="0" fill="hold" grpId="0" nodeType="withEffect">
+                                  <p:stCondLst>
+                                    <p:cond delay="955"/>
+                                  </p:stCondLst>
+                                  <p:childTnLst>
+                                    <p:set>
+                                      <p:cBhvr>
+                                        <p:cTn id="75" dur="1" fill="hold">
+                                          <p:stCondLst>
+                                            <p:cond delay="0"/>
+                                          </p:stCondLst>
+                                        </p:cTn>
+                                        <p:tgtEl>
+                                          <p:spTgt spid="29"/>
+                                        </p:tgtEl>
+                                        <p:attrNameLst>
+                                          <p:attrName>style.visibility</p:attrName>
+                                        </p:attrNameLst>
+                                      </p:cBhvr>
+                                      <p:to>
+                                        <p:strVal val="visible"/>
+                                      </p:to>
+                                    </p:set>
+                                    <p:animEffect transition="in" filter="fade">
+                                      <p:cBhvr>
+                                        <p:cTn id="76" dur="450"/>
+                                        <p:tgtEl>
+                                          <p:spTgt spid="29"/>
+                                        </p:tgtEl>
+                                      </p:cBhvr>
+                                    </p:animEffect>
+                                  </p:childTnLst>
+                                </p:cTn>
+                              </p:par>
+                              <p:par>
+                                <p:cTn id="77" presetID="10" presetClass="entr" presetSubtype="0" fill="hold" grpId="0" nodeType="withEffect">
+                                  <p:stCondLst>
+                                    <p:cond delay="990"/>
+                                  </p:stCondLst>
+                                  <p:childTnLst>
+                                    <p:set>
+                                      <p:cBhvr>
+                                        <p:cTn id="78" dur="1" fill="hold">
+                                          <p:stCondLst>
+                                            <p:cond delay="0"/>
+                                          </p:stCondLst>
+                                        </p:cTn>
+                                        <p:tgtEl>
+                                          <p:spTgt spid="30"/>
+                                        </p:tgtEl>
+                                        <p:attrNameLst>
+                                          <p:attrName>style.visibility</p:attrName>
+                                        </p:attrNameLst>
+                                      </p:cBhvr>
+                                      <p:to>
+                                        <p:strVal val="visible"/>
+                                      </p:to>
+                                    </p:set>
+                                    <p:animEffect transition="in" filter="fade">
+                                      <p:cBhvr>
+                                        <p:cTn id="79" dur="450"/>
+                                        <p:tgtEl>
+                                          <p:spTgt spid="30"/>
+                                        </p:tgtEl>
+                                      </p:cBhvr>
+                                    </p:animEffect>
+                                  </p:childTnLst>
+                                </p:cTn>
+                              </p:par>
+                              <p:par>
+                                <p:cTn id="80" presetID="10" presetClass="entr" presetSubtype="0" fill="hold" grpId="0" nodeType="withEffect">
+                                  <p:stCondLst>
+                                    <p:cond delay="1025"/>
+                                  </p:stCondLst>
+                                  <p:childTnLst>
+                                    <p:set>
+                                      <p:cBhvr>
+                                        <p:cTn id="81" dur="1" fill="hold">
+                                          <p:stCondLst>
+                                            <p:cond delay="0"/>
+                                          </p:stCondLst>
+                                        </p:cTn>
+                                        <p:tgtEl>
+                                          <p:spTgt spid="31"/>
+                                        </p:tgtEl>
+                                        <p:attrNameLst>
+                                          <p:attrName>style.visibility</p:attrName>
+                                        </p:attrNameLst>
+                                      </p:cBhvr>
+                                      <p:to>
+                                        <p:strVal val="visible"/>
+                                      </p:to>
+                                    </p:set>
+                                    <p:animEffect transition="in" filter="fade">
+                                      <p:cBhvr>
+                                        <p:cTn id="82" dur="450"/>
+                                        <p:tgtEl>
+                                          <p:spTgt spid="31"/>
+                                        </p:tgtEl>
+                                      </p:cBhvr>
+                                    </p:animEffect>
+                                  </p:childTnLst>
+                                </p:cTn>
+                              </p:par>
+                              <p:par>
+                                <p:cTn id="83" presetID="10" presetClass="entr" presetSubtype="0" fill="hold" grpId="0" nodeType="withEffect">
+                                  <p:stCondLst>
+                                    <p:cond delay="1060"/>
+                                  </p:stCondLst>
+                                  <p:childTnLst>
+                                    <p:set>
+                                      <p:cBhvr>
+                                        <p:cTn id="84" dur="1" fill="hold">
+                                          <p:stCondLst>
+                                            <p:cond delay="0"/>
+                                          </p:stCondLst>
+                                        </p:cTn>
+                                        <p:tgtEl>
+                                          <p:spTgt spid="32"/>
+                                        </p:tgtEl>
+                                        <p:attrNameLst>
+                                          <p:attrName>style.visibility</p:attrName>
+                                        </p:attrNameLst>
+                                      </p:cBhvr>
+                                      <p:to>
+                                        <p:strVal val="visible"/>
+                                      </p:to>
+                                    </p:set>
+                                    <p:animEffect transition="in" filter="fade">
+                                      <p:cBhvr>
+                                        <p:cTn id="85" dur="450"/>
+                                        <p:tgtEl>
+                                          <p:spTgt spid="32"/>
+                                        </p:tgtEl>
+                                      </p:cBhvr>
+                                    </p:animEffect>
+                                  </p:childTnLst>
+                                </p:cTn>
+                              </p:par>
+                              <p:par>
+                                <p:cTn id="86" presetID="10" presetClass="entr" presetSubtype="0" fill="hold" grpId="0" nodeType="withEffect">
+                                  <p:stCondLst>
+                                    <p:cond delay="1095"/>
+                                  </p:stCondLst>
+                                  <p:childTnLst>
+                                    <p:set>
+                                      <p:cBhvr>
+                                        <p:cTn id="87" dur="1" fill="hold">
+                                          <p:stCondLst>
+                                            <p:cond delay="0"/>
+                                          </p:stCondLst>
+                                        </p:cTn>
+                                        <p:tgtEl>
+                                          <p:spTgt spid="33"/>
+                                        </p:tgtEl>
+                                        <p:attrNameLst>
+                                          <p:attrName>style.visibility</p:attrName>
+                                        </p:attrNameLst>
+                                      </p:cBhvr>
+                                      <p:to>
+                                        <p:strVal val="visible"/>
+                                      </p:to>
+                                    </p:set>
+                                    <p:animEffect transition="in" filter="fade">
+                                      <p:cBhvr>
+                                        <p:cTn id="88" dur="450"/>
+                                        <p:tgtEl>
+                                          <p:spTgt spid="33"/>
+                                        </p:tgtEl>
+                                      </p:cBhvr>
+                                    </p:animEffect>
+                                  </p:childTnLst>
+                                </p:cTn>
+                              </p:par>
+                              <p:par>
+                                <p:cTn id="89" presetID="10" presetClass="entr" presetSubtype="0" fill="hold" grpId="0" nodeType="withEffect">
+                                  <p:stCondLst>
+                                    <p:cond delay="1130"/>
+                                  </p:stCondLst>
+                                  <p:childTnLst>
+                                    <p:set>
+                                      <p:cBhvr>
+                                        <p:cTn id="90" dur="1" fill="hold">
+                                          <p:stCondLst>
+                                            <p:cond delay="0"/>
+                                          </p:stCondLst>
+                                        </p:cTn>
+                                        <p:tgtEl>
+                                          <p:spTgt spid="34"/>
+                                        </p:tgtEl>
+                                        <p:attrNameLst>
+                                          <p:attrName>style.visibility</p:attrName>
+                                        </p:attrNameLst>
+                                      </p:cBhvr>
+                                      <p:to>
+                                        <p:strVal val="visible"/>
+                                      </p:to>
+                                    </p:set>
+                                    <p:animEffect transition="in" filter="fade">
+                                      <p:cBhvr>
+                                        <p:cTn id="91" dur="450"/>
+                                        <p:tgtEl>
+                                          <p:spTgt spid="34"/>
+                                        </p:tgtEl>
+                                      </p:cBhvr>
+                                    </p:animEffect>
+                                  </p:childTnLst>
+                                </p:cTn>
+                              </p:par>
+                              <p:par>
+                                <p:cTn id="92" presetID="10" presetClass="entr" presetSubtype="0" fill="hold" grpId="0" nodeType="withEffect">
+                                  <p:stCondLst>
+                                    <p:cond delay="1165"/>
+                                  </p:stCondLst>
+                                  <p:childTnLst>
+                                    <p:set>
+                                      <p:cBhvr>
+                                        <p:cTn id="93" dur="1" fill="hold">
+                                          <p:stCondLst>
+                                            <p:cond delay="0"/>
+                                          </p:stCondLst>
+                                        </p:cTn>
+                                        <p:tgtEl>
+                                          <p:spTgt spid="35"/>
+                                        </p:tgtEl>
+                                        <p:attrNameLst>
+                                          <p:attrName>style.visibility</p:attrName>
+                                        </p:attrNameLst>
+                                      </p:cBhvr>
+                                      <p:to>
+                                        <p:strVal val="visible"/>
+                                      </p:to>
+                                    </p:set>
+                                    <p:animEffect transition="in" filter="fade">
+                                      <p:cBhvr>
+                                        <p:cTn id="94" dur="450"/>
+                                        <p:tgtEl>
+                                          <p:spTgt spid="35"/>
+                                        </p:tgtEl>
+                                      </p:cBhvr>
+                                    </p:animEffect>
+                                  </p:childTnLst>
+                                </p:cTn>
+                              </p:par>
+                              <p:par>
+                                <p:cTn id="95" presetID="10" presetClass="entr" presetSubtype="0" fill="hold" grpId="0" nodeType="withEffect">
+                                  <p:stCondLst>
+                                    <p:cond delay="1200"/>
+                                  </p:stCondLst>
+                                  <p:childTnLst>
+                                    <p:set>
+                                      <p:cBhvr>
+                                        <p:cTn id="96" dur="1" fill="hold">
+                                          <p:stCondLst>
+                                            <p:cond delay="0"/>
+                                          </p:stCondLst>
+                                        </p:cTn>
+                                        <p:tgtEl>
+                                          <p:spTgt spid="36"/>
+                                        </p:tgtEl>
+                                        <p:attrNameLst>
+                                          <p:attrName>style.visibility</p:attrName>
+                                        </p:attrNameLst>
+                                      </p:cBhvr>
+                                      <p:to>
+                                        <p:strVal val="visible"/>
+                                      </p:to>
+                                    </p:set>
+                                    <p:animEffect transition="in" filter="fade">
+                                      <p:cBhvr>
+                                        <p:cTn id="97" dur="450"/>
+                                        <p:tgtEl>
+                                          <p:spTgt spid="36"/>
+                                        </p:tgtEl>
+                                      </p:cBhvr>
+                                    </p:animEffect>
+                                  </p:childTnLst>
+                                </p:cTn>
+                              </p:par>
+                              <p:par>
+                                <p:cTn id="98" presetID="10" presetClass="entr" presetSubtype="0" fill="hold" grpId="0" nodeType="withEffect">
+                                  <p:stCondLst>
+                                    <p:cond delay="1235"/>
+                                  </p:stCondLst>
+                                  <p:childTnLst>
+                                    <p:set>
+                                      <p:cBhvr>
+                                        <p:cTn id="99" dur="1" fill="hold">
+                                          <p:stCondLst>
+                                            <p:cond delay="0"/>
+                                          </p:stCondLst>
+                                        </p:cTn>
+                                        <p:tgtEl>
+                                          <p:spTgt spid="37"/>
+                                        </p:tgtEl>
+                                        <p:attrNameLst>
+                                          <p:attrName>style.visibility</p:attrName>
+                                        </p:attrNameLst>
+                                      </p:cBhvr>
+                                      <p:to>
+                                        <p:strVal val="visible"/>
+                                      </p:to>
+                                    </p:set>
+                                    <p:animEffect transition="in" filter="fade">
+                                      <p:cBhvr>
+                                        <p:cTn id="100" dur="450"/>
+                                        <p:tgtEl>
+                                          <p:spTgt spid="37"/>
+                                        </p:tgtEl>
+                                      </p:cBhvr>
+                                    </p:animEffect>
+                                  </p:childTnLst>
+                                </p:cTn>
+                              </p:par>
+                              <p:par>
+                                <p:cTn id="101" presetID="10" presetClass="entr" presetSubtype="0" fill="hold" grpId="0" nodeType="withEffect">
+                                  <p:stCondLst>
+                                    <p:cond delay="1270"/>
+                                  </p:stCondLst>
+                                  <p:childTnLst>
+                                    <p:set>
+                                      <p:cBhvr>
+                                        <p:cTn id="102" dur="1" fill="hold">
+                                          <p:stCondLst>
+                                            <p:cond delay="0"/>
+                                          </p:stCondLst>
+                                        </p:cTn>
+                                        <p:tgtEl>
+                                          <p:spTgt spid="38"/>
+                                        </p:tgtEl>
+                                        <p:attrNameLst>
+                                          <p:attrName>style.visibility</p:attrName>
+                                        </p:attrNameLst>
+                                      </p:cBhvr>
+                                      <p:to>
+                                        <p:strVal val="visible"/>
+                                      </p:to>
+                                    </p:set>
+                                    <p:animEffect transition="in" filter="fade">
+                                      <p:cBhvr>
+                                        <p:cTn id="103" dur="450"/>
+                                        <p:tgtEl>
+                                          <p:spTgt spid="38"/>
+                                        </p:tgtEl>
+                                      </p:cBhvr>
+                                    </p:animEffect>
+                                  </p:childTnLst>
+                                </p:cTn>
+                              </p:par>
+                              <p:par>
+                                <p:cTn id="104" presetID="10" presetClass="entr" presetSubtype="0" fill="hold" grpId="0" nodeType="withEffect">
+                                  <p:stCondLst>
+                                    <p:cond delay="1305"/>
+                                  </p:stCondLst>
+                                  <p:childTnLst>
+                                    <p:set>
+                                      <p:cBhvr>
+                                        <p:cTn id="105" dur="1" fill="hold">
+                                          <p:stCondLst>
+                                            <p:cond delay="0"/>
+                                          </p:stCondLst>
+                                        </p:cTn>
+                                        <p:tgtEl>
+                                          <p:spTgt spid="39"/>
+                                        </p:tgtEl>
+                                        <p:attrNameLst>
+                                          <p:attrName>style.visibility</p:attrName>
+                                        </p:attrNameLst>
+                                      </p:cBhvr>
+                                      <p:to>
+                                        <p:strVal val="visible"/>
+                                      </p:to>
+                                    </p:set>
+                                    <p:animEffect transition="in" filter="fade">
+                                      <p:cBhvr>
+                                        <p:cTn id="106" dur="450"/>
+                                        <p:tgtEl>
+                                          <p:spTgt spid="39"/>
+                                        </p:tgtEl>
+                                      </p:cBhvr>
+                                    </p:animEffect>
+                                  </p:childTnLst>
+                                </p:cTn>
+                              </p:par>
+                              <p:par>
+                                <p:cTn id="107" presetID="10" presetClass="entr" presetSubtype="0" fill="hold" grpId="0" nodeType="withEffect">
+                                  <p:stCondLst>
+                                    <p:cond delay="1340"/>
+                                  </p:stCondLst>
+                                  <p:childTnLst>
+                                    <p:set>
+                                      <p:cBhvr>
+                                        <p:cTn id="108" dur="1" fill="hold">
+                                          <p:stCondLst>
+                                            <p:cond delay="0"/>
+                                          </p:stCondLst>
+                                        </p:cTn>
+                                        <p:tgtEl>
+                                          <p:spTgt spid="40"/>
+                                        </p:tgtEl>
+                                        <p:attrNameLst>
+                                          <p:attrName>style.visibility</p:attrName>
+                                        </p:attrNameLst>
+                                      </p:cBhvr>
+                                      <p:to>
+                                        <p:strVal val="visible"/>
+                                      </p:to>
+                                    </p:set>
+                                    <p:animEffect transition="in" filter="fade">
+                                      <p:cBhvr>
+                                        <p:cTn id="109" dur="450"/>
+                                        <p:tgtEl>
+                                          <p:spTgt spid="40"/>
+                                        </p:tgtEl>
+                                      </p:cBhvr>
+                                    </p:animEffect>
+                                  </p:childTnLst>
+                                </p:cTn>
+                              </p:par>
+                              <p:par>
+                                <p:cTn id="110" presetID="10" presetClass="entr" presetSubtype="0" fill="hold" grpId="0" nodeType="withEffect">
+                                  <p:stCondLst>
+                                    <p:cond delay="1375"/>
+                                  </p:stCondLst>
+                                  <p:childTnLst>
+                                    <p:set>
+                                      <p:cBhvr>
+                                        <p:cTn id="111" dur="1" fill="hold">
+                                          <p:stCondLst>
+                                            <p:cond delay="0"/>
+                                          </p:stCondLst>
+                                        </p:cTn>
+                                        <p:tgtEl>
+                                          <p:spTgt spid="41"/>
+                                        </p:tgtEl>
+                                        <p:attrNameLst>
+                                          <p:attrName>style.visibility</p:attrName>
+                                        </p:attrNameLst>
+                                      </p:cBhvr>
+                                      <p:to>
+                                        <p:strVal val="visible"/>
+                                      </p:to>
+                                    </p:set>
+                                    <p:animEffect transition="in" filter="fade">
+                                      <p:cBhvr>
+                                        <p:cTn id="112" dur="450"/>
+                                        <p:tgtEl>
+                                          <p:spTgt spid="41"/>
+                                        </p:tgtEl>
+                                      </p:cBhvr>
+                                    </p:animEffect>
+                                  </p:childTnLst>
+                                </p:cTn>
+                              </p:par>
+                              <p:par>
+                                <p:cTn id="113" presetID="10" presetClass="entr" presetSubtype="0" fill="hold" grpId="0" nodeType="withEffect">
+                                  <p:stCondLst>
+                                    <p:cond delay="1410"/>
+                                  </p:stCondLst>
+                                  <p:childTnLst>
+                                    <p:set>
+                                      <p:cBhvr>
+                                        <p:cTn id="114" dur="1" fill="hold">
+                                          <p:stCondLst>
+                                            <p:cond delay="0"/>
+                                          </p:stCondLst>
+                                        </p:cTn>
+                                        <p:tgtEl>
+                                          <p:spTgt spid="42"/>
+                                        </p:tgtEl>
+                                        <p:attrNameLst>
+                                          <p:attrName>style.visibility</p:attrName>
+                                        </p:attrNameLst>
+                                      </p:cBhvr>
+                                      <p:to>
+                                        <p:strVal val="visible"/>
+                                      </p:to>
+                                    </p:set>
+                                    <p:animEffect transition="in" filter="fade">
+                                      <p:cBhvr>
+                                        <p:cTn id="115" dur="450"/>
+                                        <p:tgtEl>
+                                          <p:spTgt spid="42"/>
+                                        </p:tgtEl>
+                                      </p:cBhvr>
+                                    </p:animEffect>
+                                  </p:childTnLst>
+                                </p:cTn>
+                              </p:par>
+                              <p:par>
+                                <p:cTn id="116" presetID="10" presetClass="entr" presetSubtype="0" fill="hold" grpId="0" nodeType="withEffect">
+                                  <p:stCondLst>
+                                    <p:cond delay="1445"/>
+                                  </p:stCondLst>
+                                  <p:childTnLst>
+                                    <p:set>
+                                      <p:cBhvr>
+                                        <p:cTn id="117" dur="1" fill="hold">
+                                          <p:stCondLst>
+                                            <p:cond delay="0"/>
+                                          </p:stCondLst>
+                                        </p:cTn>
+                                        <p:tgtEl>
+                                          <p:spTgt spid="43"/>
+                                        </p:tgtEl>
+                                        <p:attrNameLst>
+                                          <p:attrName>style.visibility</p:attrName>
+                                        </p:attrNameLst>
+                                      </p:cBhvr>
+                                      <p:to>
+                                        <p:strVal val="visible"/>
+                                      </p:to>
+                                    </p:set>
+                                    <p:animEffect transition="in" filter="fade">
+                                      <p:cBhvr>
+                                        <p:cTn id="118" dur="450"/>
+                                        <p:tgtEl>
+                                          <p:spTgt spid="43"/>
+                                        </p:tgtEl>
+                                      </p:cBhvr>
+                                    </p:animEffect>
+                                  </p:childTnLst>
+                                </p:cTn>
+                              </p:par>
+                              <p:par>
+                                <p:cTn id="119" presetID="10" presetClass="entr" presetSubtype="0" fill="hold" grpId="0" nodeType="withEffect">
+                                  <p:stCondLst>
+                                    <p:cond delay="1480"/>
+                                  </p:stCondLst>
+                                  <p:childTnLst>
+                                    <p:set>
+                                      <p:cBhvr>
+                                        <p:cTn id="120" dur="1" fill="hold">
+                                          <p:stCondLst>
+                                            <p:cond delay="0"/>
+                                          </p:stCondLst>
+                                        </p:cTn>
+                                        <p:tgtEl>
+                                          <p:spTgt spid="44"/>
+                                        </p:tgtEl>
+                                        <p:attrNameLst>
+                                          <p:attrName>style.visibility</p:attrName>
+                                        </p:attrNameLst>
+                                      </p:cBhvr>
+                                      <p:to>
+                                        <p:strVal val="visible"/>
+                                      </p:to>
+                                    </p:set>
+                                    <p:animEffect transition="in" filter="fade">
+                                      <p:cBhvr>
+                                        <p:cTn id="121" dur="450"/>
+                                        <p:tgtEl>
+                                          <p:spTgt spid="44"/>
+                                        </p:tgtEl>
+                                      </p:cBhvr>
+                                    </p:animEffect>
+                                  </p:childTnLst>
+                                </p:cTn>
+                              </p:par>
+                              <p:par>
+                                <p:cTn id="122" presetID="10" presetClass="entr" presetSubtype="0" fill="hold" grpId="0" nodeType="withEffect">
+                                  <p:stCondLst>
+                                    <p:cond delay="1515"/>
+                                  </p:stCondLst>
+                                  <p:childTnLst>
+                                    <p:set>
+                                      <p:cBhvr>
+                                        <p:cTn id="123" dur="1" fill="hold">
+                                          <p:stCondLst>
+                                            <p:cond delay="0"/>
+                                          </p:stCondLst>
+                                        </p:cTn>
+                                        <p:tgtEl>
+                                          <p:spTgt spid="45"/>
+                                        </p:tgtEl>
+                                        <p:attrNameLst>
+                                          <p:attrName>style.visibility</p:attrName>
+                                        </p:attrNameLst>
+                                      </p:cBhvr>
+                                      <p:to>
+                                        <p:strVal val="visible"/>
+                                      </p:to>
+                                    </p:set>
+                                    <p:animEffect transition="in" filter="fade">
+                                      <p:cBhvr>
+                                        <p:cTn id="124" dur="450"/>
+                                        <p:tgtEl>
+                                          <p:spTgt spid="45"/>
+                                        </p:tgtEl>
+                                      </p:cBhvr>
+                                    </p:animEffect>
+                                  </p:childTnLst>
+                                </p:cTn>
+                              </p:par>
+                              <p:par>
+                                <p:cTn id="125" presetID="10" presetClass="entr" presetSubtype="0" fill="hold" grpId="0" nodeType="withEffect">
+                                  <p:stCondLst>
+                                    <p:cond delay="1550"/>
+                                  </p:stCondLst>
+                                  <p:childTnLst>
+                                    <p:set>
+                                      <p:cBhvr>
+                                        <p:cTn id="126" dur="1" fill="hold">
+                                          <p:stCondLst>
+                                            <p:cond delay="0"/>
+                                          </p:stCondLst>
+                                        </p:cTn>
+                                        <p:tgtEl>
+                                          <p:spTgt spid="46"/>
+                                        </p:tgtEl>
+                                        <p:attrNameLst>
+                                          <p:attrName>style.visibility</p:attrName>
+                                        </p:attrNameLst>
+                                      </p:cBhvr>
+                                      <p:to>
+                                        <p:strVal val="visible"/>
+                                      </p:to>
+                                    </p:set>
+                                    <p:animEffect transition="in" filter="fade">
+                                      <p:cBhvr>
+                                        <p:cTn id="127" dur="450"/>
+                                        <p:tgtEl>
+                                          <p:spTgt spid="46"/>
+                                        </p:tgtEl>
+                                      </p:cBhvr>
+                                    </p:animEffect>
+                                  </p:childTnLst>
+                                </p:cTn>
+                              </p:par>
+                              <p:par>
+                                <p:cTn id="128" presetID="10" presetClass="entr" presetSubtype="0" fill="hold" grpId="0" nodeType="withEffect">
+                                  <p:stCondLst>
+                                    <p:cond delay="1585"/>
+                                  </p:stCondLst>
+                                  <p:childTnLst>
+                                    <p:set>
+                                      <p:cBhvr>
+                                        <p:cTn id="129" dur="1" fill="hold">
+                                          <p:stCondLst>
+                                            <p:cond delay="0"/>
+                                          </p:stCondLst>
+                                        </p:cTn>
+                                        <p:tgtEl>
+                                          <p:spTgt spid="47"/>
+                                        </p:tgtEl>
+                                        <p:attrNameLst>
+                                          <p:attrName>style.visibility</p:attrName>
+                                        </p:attrNameLst>
+                                      </p:cBhvr>
+                                      <p:to>
+                                        <p:strVal val="visible"/>
+                                      </p:to>
+                                    </p:set>
+                                    <p:animEffect transition="in" filter="fade">
+                                      <p:cBhvr>
+                                        <p:cTn id="130" dur="450"/>
+                                        <p:tgtEl>
+                                          <p:spTgt spid="47"/>
+                                        </p:tgtEl>
+                                      </p:cBhvr>
+                                    </p:animEffect>
+                                  </p:childTnLst>
+                                </p:cTn>
+                              </p:par>
+                              <p:par>
+                                <p:cTn id="131" presetID="10" presetClass="entr" presetSubtype="0" fill="hold" grpId="0" nodeType="withEffect">
+                                  <p:stCondLst>
+                                    <p:cond delay="1620"/>
+                                  </p:stCondLst>
+                                  <p:childTnLst>
+                                    <p:set>
+                                      <p:cBhvr>
+                                        <p:cTn id="132" dur="1" fill="hold">
+                                          <p:stCondLst>
+                                            <p:cond delay="0"/>
+                                          </p:stCondLst>
+                                        </p:cTn>
+                                        <p:tgtEl>
+                                          <p:spTgt spid="48"/>
+                                        </p:tgtEl>
+                                        <p:attrNameLst>
+                                          <p:attrName>style.visibility</p:attrName>
+                                        </p:attrNameLst>
+                                      </p:cBhvr>
+                                      <p:to>
+                                        <p:strVal val="visible"/>
+                                      </p:to>
+                                    </p:set>
+                                    <p:animEffect transition="in" filter="fade">
+                                      <p:cBhvr>
+                                        <p:cTn id="133" dur="450"/>
+                                        <p:tgtEl>
+                                          <p:spTgt spid="48"/>
+                                        </p:tgtEl>
+                                      </p:cBhvr>
+                                    </p:animEffect>
+                                  </p:childTnLst>
+                                </p:cTn>
+                              </p:par>
+                              <p:par>
+                                <p:cTn id="134" presetID="10" presetClass="entr" presetSubtype="0" fill="hold" grpId="0" nodeType="withEffect">
+                                  <p:stCondLst>
+                                    <p:cond delay="1655"/>
+                                  </p:stCondLst>
+                                  <p:childTnLst>
+                                    <p:set>
+                                      <p:cBhvr>
+                                        <p:cTn id="135" dur="1" fill="hold">
+                                          <p:stCondLst>
+                                            <p:cond delay="0"/>
+                                          </p:stCondLst>
+                                        </p:cTn>
+                                        <p:tgtEl>
+                                          <p:spTgt spid="49"/>
+                                        </p:tgtEl>
+                                        <p:attrNameLst>
+                                          <p:attrName>style.visibility</p:attrName>
+                                        </p:attrNameLst>
+                                      </p:cBhvr>
+                                      <p:to>
+                                        <p:strVal val="visible"/>
+                                      </p:to>
+                                    </p:set>
+                                    <p:animEffect transition="in" filter="fade">
+                                      <p:cBhvr>
+                                        <p:cTn id="136" dur="450"/>
+                                        <p:tgtEl>
+                                          <p:spTgt spid="49"/>
+                                        </p:tgtEl>
+                                      </p:cBhvr>
+                                    </p:animEffect>
+                                  </p:childTnLst>
+                                </p:cTn>
+                              </p:par>
+                            </p:childTnLst>
+                          </p:cTn>
+                        </p:par>
+                      </p:childTnLst>
+                    </p:cTn>
+                  </p:par>
+                </p:childTnLst>
+              </p:cTn>
+              <p:prevCondLst>
+                <p:cond evt="onPrev" delay="0">
+                  <p:tgtEl>
+                    <p:sldTgt/>
+                  </p:tgtEl>
+                </p:cond>
+              </p:prevCondLst>
+              <p:nextCondLst>
+                <p:cond evt="onNext" delay="0">
+                  <p:tgtEl>
+                    <p:sldTgt/>
+                  </p:tgtEl>
+                </p:cond>
+              </p:nextCondLst>
+            </p:seq>
+          </p:childTnLst>
+        </p:cTn>
+      </p:par>
+    </p:tnLst>
+  </p:timing>
 </p:sld>
 </file>
 
@@ -26168,16 +28972,1044 @@
   </p:clrMapOvr>
   <mc:AlternateContent xmlns:mc="http://schemas.openxmlformats.org/markup-compatibility/2006">
     <mc:Choice xmlns:p159="http://schemas.microsoft.com/office/powerpoint/2015/09/main" Requires="p159">
-      <p:transition xmlns:p14="http://schemas.microsoft.com/office/powerpoint/2010/main" spd="slow" p14:dur="800" advTm="400">
+      <p:transition xmlns:p14="http://schemas.microsoft.com/office/powerpoint/2010/main" spd="slow" p14:dur="800" advTm="1000">
         <p159:morph option="byObject"/>
       </p:transition>
     </mc:Choice>
     <mc:Fallback>
-      <p:transition spd="fast" advTm="400">
+      <p:transition spd="fast" advTm="1000">
         <p:fade/>
       </p:transition>
     </mc:Fallback>
   </mc:AlternateContent>
+  <p:timing>
+    <p:tnLst>
+      <p:par>
+        <p:cTn id="1" dur="indefinite" restart="never" nodeType="tmRoot">
+          <p:childTnLst>
+            <p:seq concurrent="1" nextAc="seek">
+              <p:cTn id="2" dur="indefinite" nodeType="mainSeq">
+                <p:childTnLst>
+                  <p:par>
+                    <p:cTn id="3" fill="hold">
+                      <p:stCondLst>
+                        <p:cond delay="0"/>
+                      </p:stCondLst>
+                      <p:childTnLst>
+                        <p:par>
+                          <p:cTn id="4" fill="hold">
+                            <p:stCondLst>
+                              <p:cond delay="0"/>
+                            </p:stCondLst>
+                            <p:childTnLst>
+                              <p:par>
+                                <p:cTn id="5" presetID="10" presetClass="entr" presetSubtype="0" fill="hold" grpId="0" nodeType="withEffect">
+                                  <p:stCondLst>
+                                    <p:cond delay="100"/>
+                                  </p:stCondLst>
+                                  <p:childTnLst>
+                                    <p:set>
+                                      <p:cBhvr>
+                                        <p:cTn id="6" dur="1" fill="hold">
+                                          <p:stCondLst>
+                                            <p:cond delay="0"/>
+                                          </p:stCondLst>
+                                        </p:cTn>
+                                        <p:tgtEl>
+                                          <p:spTgt spid="29"/>
+                                        </p:tgtEl>
+                                        <p:attrNameLst>
+                                          <p:attrName>style.visibility</p:attrName>
+                                        </p:attrNameLst>
+                                      </p:cBhvr>
+                                      <p:to>
+                                        <p:strVal val="visible"/>
+                                      </p:to>
+                                    </p:set>
+                                    <p:animEffect transition="in" filter="fade">
+                                      <p:cBhvr>
+                                        <p:cTn id="7" dur="350"/>
+                                        <p:tgtEl>
+                                          <p:spTgt spid="29"/>
+                                        </p:tgtEl>
+                                      </p:cBhvr>
+                                    </p:animEffect>
+                                  </p:childTnLst>
+                                </p:cTn>
+                              </p:par>
+                              <p:par>
+                                <p:cTn id="8" presetID="10" presetClass="entr" presetSubtype="0" fill="hold" grpId="0" nodeType="withEffect">
+                                  <p:stCondLst>
+                                    <p:cond delay="100"/>
+                                  </p:stCondLst>
+                                  <p:childTnLst>
+                                    <p:set>
+                                      <p:cBhvr>
+                                        <p:cTn id="9" dur="1" fill="hold">
+                                          <p:stCondLst>
+                                            <p:cond delay="0"/>
+                                          </p:stCondLst>
+                                        </p:cTn>
+                                        <p:tgtEl>
+                                          <p:spTgt spid="30"/>
+                                        </p:tgtEl>
+                                        <p:attrNameLst>
+                                          <p:attrName>style.visibility</p:attrName>
+                                        </p:attrNameLst>
+                                      </p:cBhvr>
+                                      <p:to>
+                                        <p:strVal val="visible"/>
+                                      </p:to>
+                                    </p:set>
+                                    <p:animEffect transition="in" filter="fade">
+                                      <p:cBhvr>
+                                        <p:cTn id="10" dur="350"/>
+                                        <p:tgtEl>
+                                          <p:spTgt spid="30"/>
+                                        </p:tgtEl>
+                                      </p:cBhvr>
+                                    </p:animEffect>
+                                  </p:childTnLst>
+                                </p:cTn>
+                              </p:par>
+                              <p:par>
+                                <p:cTn id="11" presetID="10" presetClass="entr" presetSubtype="0" fill="hold" grpId="0" nodeType="withEffect">
+                                  <p:stCondLst>
+                                    <p:cond delay="100"/>
+                                  </p:stCondLst>
+                                  <p:childTnLst>
+                                    <p:set>
+                                      <p:cBhvr>
+                                        <p:cTn id="12" dur="1" fill="hold">
+                                          <p:stCondLst>
+                                            <p:cond delay="0"/>
+                                          </p:stCondLst>
+                                        </p:cTn>
+                                        <p:tgtEl>
+                                          <p:spTgt spid="31"/>
+                                        </p:tgtEl>
+                                        <p:attrNameLst>
+                                          <p:attrName>style.visibility</p:attrName>
+                                        </p:attrNameLst>
+                                      </p:cBhvr>
+                                      <p:to>
+                                        <p:strVal val="visible"/>
+                                      </p:to>
+                                    </p:set>
+                                    <p:animEffect transition="in" filter="fade">
+                                      <p:cBhvr>
+                                        <p:cTn id="13" dur="350"/>
+                                        <p:tgtEl>
+                                          <p:spTgt spid="31"/>
+                                        </p:tgtEl>
+                                      </p:cBhvr>
+                                    </p:animEffect>
+                                  </p:childTnLst>
+                                </p:cTn>
+                              </p:par>
+                              <p:par>
+                                <p:cTn id="14" presetID="10" presetClass="entr" presetSubtype="0" fill="hold" grpId="0" nodeType="withEffect">
+                                  <p:stCondLst>
+                                    <p:cond delay="100"/>
+                                  </p:stCondLst>
+                                  <p:childTnLst>
+                                    <p:set>
+                                      <p:cBhvr>
+                                        <p:cTn id="15" dur="1" fill="hold">
+                                          <p:stCondLst>
+                                            <p:cond delay="0"/>
+                                          </p:stCondLst>
+                                        </p:cTn>
+                                        <p:tgtEl>
+                                          <p:spTgt spid="32"/>
+                                        </p:tgtEl>
+                                        <p:attrNameLst>
+                                          <p:attrName>style.visibility</p:attrName>
+                                        </p:attrNameLst>
+                                      </p:cBhvr>
+                                      <p:to>
+                                        <p:strVal val="visible"/>
+                                      </p:to>
+                                    </p:set>
+                                    <p:animEffect transition="in" filter="fade">
+                                      <p:cBhvr>
+                                        <p:cTn id="16" dur="350"/>
+                                        <p:tgtEl>
+                                          <p:spTgt spid="32"/>
+                                        </p:tgtEl>
+                                      </p:cBhvr>
+                                    </p:animEffect>
+                                  </p:childTnLst>
+                                </p:cTn>
+                              </p:par>
+                              <p:par>
+                                <p:cTn id="17" presetID="10" presetClass="entr" presetSubtype="0" fill="hold" grpId="0" nodeType="withEffect">
+                                  <p:stCondLst>
+                                    <p:cond delay="100"/>
+                                  </p:stCondLst>
+                                  <p:childTnLst>
+                                    <p:set>
+                                      <p:cBhvr>
+                                        <p:cTn id="18" dur="1" fill="hold">
+                                          <p:stCondLst>
+                                            <p:cond delay="0"/>
+                                          </p:stCondLst>
+                                        </p:cTn>
+                                        <p:tgtEl>
+                                          <p:spTgt spid="33"/>
+                                        </p:tgtEl>
+                                        <p:attrNameLst>
+                                          <p:attrName>style.visibility</p:attrName>
+                                        </p:attrNameLst>
+                                      </p:cBhvr>
+                                      <p:to>
+                                        <p:strVal val="visible"/>
+                                      </p:to>
+                                    </p:set>
+                                    <p:animEffect transition="in" filter="fade">
+                                      <p:cBhvr>
+                                        <p:cTn id="19" dur="350"/>
+                                        <p:tgtEl>
+                                          <p:spTgt spid="33"/>
+                                        </p:tgtEl>
+                                      </p:cBhvr>
+                                    </p:animEffect>
+                                  </p:childTnLst>
+                                </p:cTn>
+                              </p:par>
+                              <p:par>
+                                <p:cTn id="20" presetID="10" presetClass="entr" presetSubtype="0" fill="hold" grpId="0" nodeType="withEffect">
+                                  <p:stCondLst>
+                                    <p:cond delay="100"/>
+                                  </p:stCondLst>
+                                  <p:childTnLst>
+                                    <p:set>
+                                      <p:cBhvr>
+                                        <p:cTn id="21" dur="1" fill="hold">
+                                          <p:stCondLst>
+                                            <p:cond delay="0"/>
+                                          </p:stCondLst>
+                                        </p:cTn>
+                                        <p:tgtEl>
+                                          <p:spTgt spid="34"/>
+                                        </p:tgtEl>
+                                        <p:attrNameLst>
+                                          <p:attrName>style.visibility</p:attrName>
+                                        </p:attrNameLst>
+                                      </p:cBhvr>
+                                      <p:to>
+                                        <p:strVal val="visible"/>
+                                      </p:to>
+                                    </p:set>
+                                    <p:animEffect transition="in" filter="fade">
+                                      <p:cBhvr>
+                                        <p:cTn id="22" dur="350"/>
+                                        <p:tgtEl>
+                                          <p:spTgt spid="34"/>
+                                        </p:tgtEl>
+                                      </p:cBhvr>
+                                    </p:animEffect>
+                                  </p:childTnLst>
+                                </p:cTn>
+                              </p:par>
+                              <p:par>
+                                <p:cTn id="23" presetID="10" presetClass="entr" presetSubtype="0" fill="hold" grpId="0" nodeType="withEffect">
+                                  <p:stCondLst>
+                                    <p:cond delay="100"/>
+                                  </p:stCondLst>
+                                  <p:childTnLst>
+                                    <p:set>
+                                      <p:cBhvr>
+                                        <p:cTn id="24" dur="1" fill="hold">
+                                          <p:stCondLst>
+                                            <p:cond delay="0"/>
+                                          </p:stCondLst>
+                                        </p:cTn>
+                                        <p:tgtEl>
+                                          <p:spTgt spid="35"/>
+                                        </p:tgtEl>
+                                        <p:attrNameLst>
+                                          <p:attrName>style.visibility</p:attrName>
+                                        </p:attrNameLst>
+                                      </p:cBhvr>
+                                      <p:to>
+                                        <p:strVal val="visible"/>
+                                      </p:to>
+                                    </p:set>
+                                    <p:animEffect transition="in" filter="fade">
+                                      <p:cBhvr>
+                                        <p:cTn id="25" dur="350"/>
+                                        <p:tgtEl>
+                                          <p:spTgt spid="35"/>
+                                        </p:tgtEl>
+                                      </p:cBhvr>
+                                    </p:animEffect>
+                                  </p:childTnLst>
+                                </p:cTn>
+                              </p:par>
+                              <p:par>
+                                <p:cTn id="26" presetID="10" presetClass="entr" presetSubtype="0" fill="hold" grpId="0" nodeType="withEffect">
+                                  <p:stCondLst>
+                                    <p:cond delay="100"/>
+                                  </p:stCondLst>
+                                  <p:childTnLst>
+                                    <p:set>
+                                      <p:cBhvr>
+                                        <p:cTn id="27" dur="1" fill="hold">
+                                          <p:stCondLst>
+                                            <p:cond delay="0"/>
+                                          </p:stCondLst>
+                                        </p:cTn>
+                                        <p:tgtEl>
+                                          <p:spTgt spid="36"/>
+                                        </p:tgtEl>
+                                        <p:attrNameLst>
+                                          <p:attrName>style.visibility</p:attrName>
+                                        </p:attrNameLst>
+                                      </p:cBhvr>
+                                      <p:to>
+                                        <p:strVal val="visible"/>
+                                      </p:to>
+                                    </p:set>
+                                    <p:animEffect transition="in" filter="fade">
+                                      <p:cBhvr>
+                                        <p:cTn id="28" dur="350"/>
+                                        <p:tgtEl>
+                                          <p:spTgt spid="36"/>
+                                        </p:tgtEl>
+                                      </p:cBhvr>
+                                    </p:animEffect>
+                                  </p:childTnLst>
+                                </p:cTn>
+                              </p:par>
+                              <p:par>
+                                <p:cTn id="29" presetID="10" presetClass="entr" presetSubtype="0" fill="hold" grpId="0" nodeType="withEffect">
+                                  <p:stCondLst>
+                                    <p:cond delay="100"/>
+                                  </p:stCondLst>
+                                  <p:childTnLst>
+                                    <p:set>
+                                      <p:cBhvr>
+                                        <p:cTn id="30" dur="1" fill="hold">
+                                          <p:stCondLst>
+                                            <p:cond delay="0"/>
+                                          </p:stCondLst>
+                                        </p:cTn>
+                                        <p:tgtEl>
+                                          <p:spTgt spid="37"/>
+                                        </p:tgtEl>
+                                        <p:attrNameLst>
+                                          <p:attrName>style.visibility</p:attrName>
+                                        </p:attrNameLst>
+                                      </p:cBhvr>
+                                      <p:to>
+                                        <p:strVal val="visible"/>
+                                      </p:to>
+                                    </p:set>
+                                    <p:animEffect transition="in" filter="fade">
+                                      <p:cBhvr>
+                                        <p:cTn id="31" dur="350"/>
+                                        <p:tgtEl>
+                                          <p:spTgt spid="37"/>
+                                        </p:tgtEl>
+                                      </p:cBhvr>
+                                    </p:animEffect>
+                                  </p:childTnLst>
+                                </p:cTn>
+                              </p:par>
+                              <p:par>
+                                <p:cTn id="32" presetID="10" presetClass="entr" presetSubtype="0" fill="hold" grpId="0" nodeType="withEffect">
+                                  <p:stCondLst>
+                                    <p:cond delay="100"/>
+                                  </p:stCondLst>
+                                  <p:childTnLst>
+                                    <p:set>
+                                      <p:cBhvr>
+                                        <p:cTn id="33" dur="1" fill="hold">
+                                          <p:stCondLst>
+                                            <p:cond delay="0"/>
+                                          </p:stCondLst>
+                                        </p:cTn>
+                                        <p:tgtEl>
+                                          <p:spTgt spid="38"/>
+                                        </p:tgtEl>
+                                        <p:attrNameLst>
+                                          <p:attrName>style.visibility</p:attrName>
+                                        </p:attrNameLst>
+                                      </p:cBhvr>
+                                      <p:to>
+                                        <p:strVal val="visible"/>
+                                      </p:to>
+                                    </p:set>
+                                    <p:animEffect transition="in" filter="fade">
+                                      <p:cBhvr>
+                                        <p:cTn id="34" dur="350"/>
+                                        <p:tgtEl>
+                                          <p:spTgt spid="38"/>
+                                        </p:tgtEl>
+                                      </p:cBhvr>
+                                    </p:animEffect>
+                                  </p:childTnLst>
+                                </p:cTn>
+                              </p:par>
+                              <p:par>
+                                <p:cTn id="35" presetID="10" presetClass="entr" presetSubtype="0" fill="hold" grpId="0" nodeType="withEffect">
+                                  <p:stCondLst>
+                                    <p:cond delay="100"/>
+                                  </p:stCondLst>
+                                  <p:childTnLst>
+                                    <p:set>
+                                      <p:cBhvr>
+                                        <p:cTn id="36" dur="1" fill="hold">
+                                          <p:stCondLst>
+                                            <p:cond delay="0"/>
+                                          </p:stCondLst>
+                                        </p:cTn>
+                                        <p:tgtEl>
+                                          <p:spTgt spid="39"/>
+                                        </p:tgtEl>
+                                        <p:attrNameLst>
+                                          <p:attrName>style.visibility</p:attrName>
+                                        </p:attrNameLst>
+                                      </p:cBhvr>
+                                      <p:to>
+                                        <p:strVal val="visible"/>
+                                      </p:to>
+                                    </p:set>
+                                    <p:animEffect transition="in" filter="fade">
+                                      <p:cBhvr>
+                                        <p:cTn id="37" dur="350"/>
+                                        <p:tgtEl>
+                                          <p:spTgt spid="39"/>
+                                        </p:tgtEl>
+                                      </p:cBhvr>
+                                    </p:animEffect>
+                                  </p:childTnLst>
+                                </p:cTn>
+                              </p:par>
+                              <p:par>
+                                <p:cTn id="38" presetID="10" presetClass="entr" presetSubtype="0" fill="hold" grpId="0" nodeType="withEffect">
+                                  <p:stCondLst>
+                                    <p:cond delay="100"/>
+                                  </p:stCondLst>
+                                  <p:childTnLst>
+                                    <p:set>
+                                      <p:cBhvr>
+                                        <p:cTn id="39" dur="1" fill="hold">
+                                          <p:stCondLst>
+                                            <p:cond delay="0"/>
+                                          </p:stCondLst>
+                                        </p:cTn>
+                                        <p:tgtEl>
+                                          <p:spTgt spid="40"/>
+                                        </p:tgtEl>
+                                        <p:attrNameLst>
+                                          <p:attrName>style.visibility</p:attrName>
+                                        </p:attrNameLst>
+                                      </p:cBhvr>
+                                      <p:to>
+                                        <p:strVal val="visible"/>
+                                      </p:to>
+                                    </p:set>
+                                    <p:animEffect transition="in" filter="fade">
+                                      <p:cBhvr>
+                                        <p:cTn id="40" dur="350"/>
+                                        <p:tgtEl>
+                                          <p:spTgt spid="40"/>
+                                        </p:tgtEl>
+                                      </p:cBhvr>
+                                    </p:animEffect>
+                                  </p:childTnLst>
+                                </p:cTn>
+                              </p:par>
+                              <p:par>
+                                <p:cTn id="41" presetID="10" presetClass="entr" presetSubtype="0" fill="hold" grpId="0" nodeType="withEffect">
+                                  <p:stCondLst>
+                                    <p:cond delay="100"/>
+                                  </p:stCondLst>
+                                  <p:childTnLst>
+                                    <p:set>
+                                      <p:cBhvr>
+                                        <p:cTn id="42" dur="1" fill="hold">
+                                          <p:stCondLst>
+                                            <p:cond delay="0"/>
+                                          </p:stCondLst>
+                                        </p:cTn>
+                                        <p:tgtEl>
+                                          <p:spTgt spid="41"/>
+                                        </p:tgtEl>
+                                        <p:attrNameLst>
+                                          <p:attrName>style.visibility</p:attrName>
+                                        </p:attrNameLst>
+                                      </p:cBhvr>
+                                      <p:to>
+                                        <p:strVal val="visible"/>
+                                      </p:to>
+                                    </p:set>
+                                    <p:animEffect transition="in" filter="fade">
+                                      <p:cBhvr>
+                                        <p:cTn id="43" dur="350"/>
+                                        <p:tgtEl>
+                                          <p:spTgt spid="41"/>
+                                        </p:tgtEl>
+                                      </p:cBhvr>
+                                    </p:animEffect>
+                                  </p:childTnLst>
+                                </p:cTn>
+                              </p:par>
+                              <p:par>
+                                <p:cTn id="44" presetID="10" presetClass="entr" presetSubtype="0" fill="hold" grpId="0" nodeType="withEffect">
+                                  <p:stCondLst>
+                                    <p:cond delay="100"/>
+                                  </p:stCondLst>
+                                  <p:childTnLst>
+                                    <p:set>
+                                      <p:cBhvr>
+                                        <p:cTn id="45" dur="1" fill="hold">
+                                          <p:stCondLst>
+                                            <p:cond delay="0"/>
+                                          </p:stCondLst>
+                                        </p:cTn>
+                                        <p:tgtEl>
+                                          <p:spTgt spid="42"/>
+                                        </p:tgtEl>
+                                        <p:attrNameLst>
+                                          <p:attrName>style.visibility</p:attrName>
+                                        </p:attrNameLst>
+                                      </p:cBhvr>
+                                      <p:to>
+                                        <p:strVal val="visible"/>
+                                      </p:to>
+                                    </p:set>
+                                    <p:animEffect transition="in" filter="fade">
+                                      <p:cBhvr>
+                                        <p:cTn id="46" dur="350"/>
+                                        <p:tgtEl>
+                                          <p:spTgt spid="42"/>
+                                        </p:tgtEl>
+                                      </p:cBhvr>
+                                    </p:animEffect>
+                                  </p:childTnLst>
+                                </p:cTn>
+                              </p:par>
+                              <p:par>
+                                <p:cTn id="47" presetID="10" presetClass="entr" presetSubtype="0" fill="hold" grpId="0" nodeType="withEffect">
+                                  <p:stCondLst>
+                                    <p:cond delay="100"/>
+                                  </p:stCondLst>
+                                  <p:childTnLst>
+                                    <p:set>
+                                      <p:cBhvr>
+                                        <p:cTn id="48" dur="1" fill="hold">
+                                          <p:stCondLst>
+                                            <p:cond delay="0"/>
+                                          </p:stCondLst>
+                                        </p:cTn>
+                                        <p:tgtEl>
+                                          <p:spTgt spid="43"/>
+                                        </p:tgtEl>
+                                        <p:attrNameLst>
+                                          <p:attrName>style.visibility</p:attrName>
+                                        </p:attrNameLst>
+                                      </p:cBhvr>
+                                      <p:to>
+                                        <p:strVal val="visible"/>
+                                      </p:to>
+                                    </p:set>
+                                    <p:animEffect transition="in" filter="fade">
+                                      <p:cBhvr>
+                                        <p:cTn id="49" dur="350"/>
+                                        <p:tgtEl>
+                                          <p:spTgt spid="43"/>
+                                        </p:tgtEl>
+                                      </p:cBhvr>
+                                    </p:animEffect>
+                                  </p:childTnLst>
+                                </p:cTn>
+                              </p:par>
+                              <p:par>
+                                <p:cTn id="50" presetID="10" presetClass="entr" presetSubtype="0" fill="hold" grpId="0" nodeType="withEffect">
+                                  <p:stCondLst>
+                                    <p:cond delay="100"/>
+                                  </p:stCondLst>
+                                  <p:childTnLst>
+                                    <p:set>
+                                      <p:cBhvr>
+                                        <p:cTn id="51" dur="1" fill="hold">
+                                          <p:stCondLst>
+                                            <p:cond delay="0"/>
+                                          </p:stCondLst>
+                                        </p:cTn>
+                                        <p:tgtEl>
+                                          <p:spTgt spid="44"/>
+                                        </p:tgtEl>
+                                        <p:attrNameLst>
+                                          <p:attrName>style.visibility</p:attrName>
+                                        </p:attrNameLst>
+                                      </p:cBhvr>
+                                      <p:to>
+                                        <p:strVal val="visible"/>
+                                      </p:to>
+                                    </p:set>
+                                    <p:animEffect transition="in" filter="fade">
+                                      <p:cBhvr>
+                                        <p:cTn id="52" dur="350"/>
+                                        <p:tgtEl>
+                                          <p:spTgt spid="44"/>
+                                        </p:tgtEl>
+                                      </p:cBhvr>
+                                    </p:animEffect>
+                                  </p:childTnLst>
+                                </p:cTn>
+                              </p:par>
+                              <p:par>
+                                <p:cTn id="53" presetID="10" presetClass="entr" presetSubtype="0" fill="hold" grpId="0" nodeType="withEffect">
+                                  <p:stCondLst>
+                                    <p:cond delay="100"/>
+                                  </p:stCondLst>
+                                  <p:childTnLst>
+                                    <p:set>
+                                      <p:cBhvr>
+                                        <p:cTn id="54" dur="1" fill="hold">
+                                          <p:stCondLst>
+                                            <p:cond delay="0"/>
+                                          </p:stCondLst>
+                                        </p:cTn>
+                                        <p:tgtEl>
+                                          <p:spTgt spid="45"/>
+                                        </p:tgtEl>
+                                        <p:attrNameLst>
+                                          <p:attrName>style.visibility</p:attrName>
+                                        </p:attrNameLst>
+                                      </p:cBhvr>
+                                      <p:to>
+                                        <p:strVal val="visible"/>
+                                      </p:to>
+                                    </p:set>
+                                    <p:animEffect transition="in" filter="fade">
+                                      <p:cBhvr>
+                                        <p:cTn id="55" dur="350"/>
+                                        <p:tgtEl>
+                                          <p:spTgt spid="45"/>
+                                        </p:tgtEl>
+                                      </p:cBhvr>
+                                    </p:animEffect>
+                                  </p:childTnLst>
+                                </p:cTn>
+                              </p:par>
+                              <p:par>
+                                <p:cTn id="56" presetID="10" presetClass="entr" presetSubtype="0" fill="hold" grpId="0" nodeType="withEffect">
+                                  <p:stCondLst>
+                                    <p:cond delay="100"/>
+                                  </p:stCondLst>
+                                  <p:childTnLst>
+                                    <p:set>
+                                      <p:cBhvr>
+                                        <p:cTn id="57" dur="1" fill="hold">
+                                          <p:stCondLst>
+                                            <p:cond delay="0"/>
+                                          </p:stCondLst>
+                                        </p:cTn>
+                                        <p:tgtEl>
+                                          <p:spTgt spid="46"/>
+                                        </p:tgtEl>
+                                        <p:attrNameLst>
+                                          <p:attrName>style.visibility</p:attrName>
+                                        </p:attrNameLst>
+                                      </p:cBhvr>
+                                      <p:to>
+                                        <p:strVal val="visible"/>
+                                      </p:to>
+                                    </p:set>
+                                    <p:animEffect transition="in" filter="fade">
+                                      <p:cBhvr>
+                                        <p:cTn id="58" dur="350"/>
+                                        <p:tgtEl>
+                                          <p:spTgt spid="46"/>
+                                        </p:tgtEl>
+                                      </p:cBhvr>
+                                    </p:animEffect>
+                                  </p:childTnLst>
+                                </p:cTn>
+                              </p:par>
+                              <p:par>
+                                <p:cTn id="59" presetID="10" presetClass="entr" presetSubtype="0" fill="hold" grpId="0" nodeType="withEffect">
+                                  <p:stCondLst>
+                                    <p:cond delay="100"/>
+                                  </p:stCondLst>
+                                  <p:childTnLst>
+                                    <p:set>
+                                      <p:cBhvr>
+                                        <p:cTn id="60" dur="1" fill="hold">
+                                          <p:stCondLst>
+                                            <p:cond delay="0"/>
+                                          </p:stCondLst>
+                                        </p:cTn>
+                                        <p:tgtEl>
+                                          <p:spTgt spid="47"/>
+                                        </p:tgtEl>
+                                        <p:attrNameLst>
+                                          <p:attrName>style.visibility</p:attrName>
+                                        </p:attrNameLst>
+                                      </p:cBhvr>
+                                      <p:to>
+                                        <p:strVal val="visible"/>
+                                      </p:to>
+                                    </p:set>
+                                    <p:animEffect transition="in" filter="fade">
+                                      <p:cBhvr>
+                                        <p:cTn id="61" dur="350"/>
+                                        <p:tgtEl>
+                                          <p:spTgt spid="47"/>
+                                        </p:tgtEl>
+                                      </p:cBhvr>
+                                    </p:animEffect>
+                                  </p:childTnLst>
+                                </p:cTn>
+                              </p:par>
+                              <p:par>
+                                <p:cTn id="62" presetID="10" presetClass="entr" presetSubtype="0" fill="hold" grpId="0" nodeType="withEffect">
+                                  <p:stCondLst>
+                                    <p:cond delay="250"/>
+                                  </p:stCondLst>
+                                  <p:childTnLst>
+                                    <p:set>
+                                      <p:cBhvr>
+                                        <p:cTn id="63" dur="1" fill="hold">
+                                          <p:stCondLst>
+                                            <p:cond delay="0"/>
+                                          </p:stCondLst>
+                                        </p:cTn>
+                                        <p:tgtEl>
+                                          <p:spTgt spid="20"/>
+                                        </p:tgtEl>
+                                        <p:attrNameLst>
+                                          <p:attrName>style.visibility</p:attrName>
+                                        </p:attrNameLst>
+                                      </p:cBhvr>
+                                      <p:to>
+                                        <p:strVal val="visible"/>
+                                      </p:to>
+                                    </p:set>
+                                    <p:animEffect transition="in" filter="fade">
+                                      <p:cBhvr>
+                                        <p:cTn id="64" dur="350"/>
+                                        <p:tgtEl>
+                                          <p:spTgt spid="20"/>
+                                        </p:tgtEl>
+                                      </p:cBhvr>
+                                    </p:animEffect>
+                                  </p:childTnLst>
+                                </p:cTn>
+                              </p:par>
+                              <p:par>
+                                <p:cTn id="65" presetID="10" presetClass="entr" presetSubtype="0" fill="hold" grpId="0" nodeType="withEffect">
+                                  <p:stCondLst>
+                                    <p:cond delay="250"/>
+                                  </p:stCondLst>
+                                  <p:childTnLst>
+                                    <p:set>
+                                      <p:cBhvr>
+                                        <p:cTn id="66" dur="1" fill="hold">
+                                          <p:stCondLst>
+                                            <p:cond delay="0"/>
+                                          </p:stCondLst>
+                                        </p:cTn>
+                                        <p:tgtEl>
+                                          <p:spTgt spid="21"/>
+                                        </p:tgtEl>
+                                        <p:attrNameLst>
+                                          <p:attrName>style.visibility</p:attrName>
+                                        </p:attrNameLst>
+                                      </p:cBhvr>
+                                      <p:to>
+                                        <p:strVal val="visible"/>
+                                      </p:to>
+                                    </p:set>
+                                    <p:animEffect transition="in" filter="fade">
+                                      <p:cBhvr>
+                                        <p:cTn id="67" dur="350"/>
+                                        <p:tgtEl>
+                                          <p:spTgt spid="21"/>
+                                        </p:tgtEl>
+                                      </p:cBhvr>
+                                    </p:animEffect>
+                                  </p:childTnLst>
+                                </p:cTn>
+                              </p:par>
+                              <p:par>
+                                <p:cTn id="68" presetID="10" presetClass="entr" presetSubtype="0" fill="hold" grpId="0" nodeType="withEffect">
+                                  <p:stCondLst>
+                                    <p:cond delay="250"/>
+                                  </p:stCondLst>
+                                  <p:childTnLst>
+                                    <p:set>
+                                      <p:cBhvr>
+                                        <p:cTn id="69" dur="1" fill="hold">
+                                          <p:stCondLst>
+                                            <p:cond delay="0"/>
+                                          </p:stCondLst>
+                                        </p:cTn>
+                                        <p:tgtEl>
+                                          <p:spTgt spid="22"/>
+                                        </p:tgtEl>
+                                        <p:attrNameLst>
+                                          <p:attrName>style.visibility</p:attrName>
+                                        </p:attrNameLst>
+                                      </p:cBhvr>
+                                      <p:to>
+                                        <p:strVal val="visible"/>
+                                      </p:to>
+                                    </p:set>
+                                    <p:animEffect transition="in" filter="fade">
+                                      <p:cBhvr>
+                                        <p:cTn id="70" dur="350"/>
+                                        <p:tgtEl>
+                                          <p:spTgt spid="22"/>
+                                        </p:tgtEl>
+                                      </p:cBhvr>
+                                    </p:animEffect>
+                                  </p:childTnLst>
+                                </p:cTn>
+                              </p:par>
+                              <p:par>
+                                <p:cTn id="71" presetID="10" presetClass="entr" presetSubtype="0" fill="hold" grpId="0" nodeType="withEffect">
+                                  <p:stCondLst>
+                                    <p:cond delay="450"/>
+                                  </p:stCondLst>
+                                  <p:childTnLst>
+                                    <p:set>
+                                      <p:cBhvr>
+                                        <p:cTn id="72" dur="1" fill="hold">
+                                          <p:stCondLst>
+                                            <p:cond delay="0"/>
+                                          </p:stCondLst>
+                                        </p:cTn>
+                                        <p:tgtEl>
+                                          <p:spTgt spid="23"/>
+                                        </p:tgtEl>
+                                        <p:attrNameLst>
+                                          <p:attrName>style.visibility</p:attrName>
+                                        </p:attrNameLst>
+                                      </p:cBhvr>
+                                      <p:to>
+                                        <p:strVal val="visible"/>
+                                      </p:to>
+                                    </p:set>
+                                    <p:animEffect transition="in" filter="fade">
+                                      <p:cBhvr>
+                                        <p:cTn id="73" dur="350"/>
+                                        <p:tgtEl>
+                                          <p:spTgt spid="23"/>
+                                        </p:tgtEl>
+                                      </p:cBhvr>
+                                    </p:animEffect>
+                                  </p:childTnLst>
+                                </p:cTn>
+                              </p:par>
+                              <p:par>
+                                <p:cTn id="74" presetID="10" presetClass="entr" presetSubtype="0" fill="hold" grpId="0" nodeType="withEffect">
+                                  <p:stCondLst>
+                                    <p:cond delay="450"/>
+                                  </p:stCondLst>
+                                  <p:childTnLst>
+                                    <p:set>
+                                      <p:cBhvr>
+                                        <p:cTn id="75" dur="1" fill="hold">
+                                          <p:stCondLst>
+                                            <p:cond delay="0"/>
+                                          </p:stCondLst>
+                                        </p:cTn>
+                                        <p:tgtEl>
+                                          <p:spTgt spid="24"/>
+                                        </p:tgtEl>
+                                        <p:attrNameLst>
+                                          <p:attrName>style.visibility</p:attrName>
+                                        </p:attrNameLst>
+                                      </p:cBhvr>
+                                      <p:to>
+                                        <p:strVal val="visible"/>
+                                      </p:to>
+                                    </p:set>
+                                    <p:animEffect transition="in" filter="fade">
+                                      <p:cBhvr>
+                                        <p:cTn id="76" dur="350"/>
+                                        <p:tgtEl>
+                                          <p:spTgt spid="24"/>
+                                        </p:tgtEl>
+                                      </p:cBhvr>
+                                    </p:animEffect>
+                                  </p:childTnLst>
+                                </p:cTn>
+                              </p:par>
+                              <p:par>
+                                <p:cTn id="77" presetID="10" presetClass="entr" presetSubtype="0" fill="hold" grpId="0" nodeType="withEffect">
+                                  <p:stCondLst>
+                                    <p:cond delay="450"/>
+                                  </p:stCondLst>
+                                  <p:childTnLst>
+                                    <p:set>
+                                      <p:cBhvr>
+                                        <p:cTn id="78" dur="1" fill="hold">
+                                          <p:stCondLst>
+                                            <p:cond delay="0"/>
+                                          </p:stCondLst>
+                                        </p:cTn>
+                                        <p:tgtEl>
+                                          <p:spTgt spid="25"/>
+                                        </p:tgtEl>
+                                        <p:attrNameLst>
+                                          <p:attrName>style.visibility</p:attrName>
+                                        </p:attrNameLst>
+                                      </p:cBhvr>
+                                      <p:to>
+                                        <p:strVal val="visible"/>
+                                      </p:to>
+                                    </p:set>
+                                    <p:animEffect transition="in" filter="fade">
+                                      <p:cBhvr>
+                                        <p:cTn id="79" dur="350"/>
+                                        <p:tgtEl>
+                                          <p:spTgt spid="25"/>
+                                        </p:tgtEl>
+                                      </p:cBhvr>
+                                    </p:animEffect>
+                                  </p:childTnLst>
+                                </p:cTn>
+                              </p:par>
+                              <p:par>
+                                <p:cTn id="80" presetID="10" presetClass="entr" presetSubtype="0" fill="hold" grpId="0" nodeType="withEffect">
+                                  <p:stCondLst>
+                                    <p:cond delay="650"/>
+                                  </p:stCondLst>
+                                  <p:childTnLst>
+                                    <p:set>
+                                      <p:cBhvr>
+                                        <p:cTn id="81" dur="1" fill="hold">
+                                          <p:stCondLst>
+                                            <p:cond delay="0"/>
+                                          </p:stCondLst>
+                                        </p:cTn>
+                                        <p:tgtEl>
+                                          <p:spTgt spid="26"/>
+                                        </p:tgtEl>
+                                        <p:attrNameLst>
+                                          <p:attrName>style.visibility</p:attrName>
+                                        </p:attrNameLst>
+                                      </p:cBhvr>
+                                      <p:to>
+                                        <p:strVal val="visible"/>
+                                      </p:to>
+                                    </p:set>
+                                    <p:animEffect transition="in" filter="fade">
+                                      <p:cBhvr>
+                                        <p:cTn id="82" dur="350"/>
+                                        <p:tgtEl>
+                                          <p:spTgt spid="26"/>
+                                        </p:tgtEl>
+                                      </p:cBhvr>
+                                    </p:animEffect>
+                                  </p:childTnLst>
+                                </p:cTn>
+                              </p:par>
+                              <p:par>
+                                <p:cTn id="83" presetID="10" presetClass="entr" presetSubtype="0" fill="hold" grpId="0" nodeType="withEffect">
+                                  <p:stCondLst>
+                                    <p:cond delay="650"/>
+                                  </p:stCondLst>
+                                  <p:childTnLst>
+                                    <p:set>
+                                      <p:cBhvr>
+                                        <p:cTn id="84" dur="1" fill="hold">
+                                          <p:stCondLst>
+                                            <p:cond delay="0"/>
+                                          </p:stCondLst>
+                                        </p:cTn>
+                                        <p:tgtEl>
+                                          <p:spTgt spid="27"/>
+                                        </p:tgtEl>
+                                        <p:attrNameLst>
+                                          <p:attrName>style.visibility</p:attrName>
+                                        </p:attrNameLst>
+                                      </p:cBhvr>
+                                      <p:to>
+                                        <p:strVal val="visible"/>
+                                      </p:to>
+                                    </p:set>
+                                    <p:animEffect transition="in" filter="fade">
+                                      <p:cBhvr>
+                                        <p:cTn id="85" dur="350"/>
+                                        <p:tgtEl>
+                                          <p:spTgt spid="27"/>
+                                        </p:tgtEl>
+                                      </p:cBhvr>
+                                    </p:animEffect>
+                                  </p:childTnLst>
+                                </p:cTn>
+                              </p:par>
+                              <p:par>
+                                <p:cTn id="86" presetID="10" presetClass="entr" presetSubtype="0" fill="hold" grpId="0" nodeType="withEffect">
+                                  <p:stCondLst>
+                                    <p:cond delay="650"/>
+                                  </p:stCondLst>
+                                  <p:childTnLst>
+                                    <p:set>
+                                      <p:cBhvr>
+                                        <p:cTn id="87" dur="1" fill="hold">
+                                          <p:stCondLst>
+                                            <p:cond delay="0"/>
+                                          </p:stCondLst>
+                                        </p:cTn>
+                                        <p:tgtEl>
+                                          <p:spTgt spid="28"/>
+                                        </p:tgtEl>
+                                        <p:attrNameLst>
+                                          <p:attrName>style.visibility</p:attrName>
+                                        </p:attrNameLst>
+                                      </p:cBhvr>
+                                      <p:to>
+                                        <p:strVal val="visible"/>
+                                      </p:to>
+                                    </p:set>
+                                    <p:animEffect transition="in" filter="fade">
+                                      <p:cBhvr>
+                                        <p:cTn id="88" dur="350"/>
+                                        <p:tgtEl>
+                                          <p:spTgt spid="28"/>
+                                        </p:tgtEl>
+                                      </p:cBhvr>
+                                    </p:animEffect>
+                                  </p:childTnLst>
+                                </p:cTn>
+                              </p:par>
+                            </p:childTnLst>
+                          </p:cTn>
+                        </p:par>
+                      </p:childTnLst>
+                    </p:cTn>
+                  </p:par>
+                </p:childTnLst>
+              </p:cTn>
+              <p:prevCondLst>
+                <p:cond evt="onPrev" delay="0">
+                  <p:tgtEl>
+                    <p:sldTgt/>
+                  </p:tgtEl>
+                </p:cond>
+              </p:prevCondLst>
+              <p:nextCondLst>
+                <p:cond evt="onNext" delay="0">
+                  <p:tgtEl>
+                    <p:sldTgt/>
+                  </p:tgtEl>
+                </p:cond>
+              </p:nextCondLst>
+            </p:seq>
+          </p:childTnLst>
+        </p:cTn>
+      </p:par>
+    </p:tnLst>
+  </p:timing>
 </p:sld>
 </file>
 
@@ -28438,6 +32270,404 @@
       </p:transition>
     </mc:Fallback>
   </mc:AlternateContent>
+  <p:timing>
+    <p:tnLst>
+      <p:par>
+        <p:cTn id="1" dur="indefinite" restart="never" nodeType="tmRoot">
+          <p:childTnLst>
+            <p:seq concurrent="1" nextAc="seek">
+              <p:cTn id="2" dur="indefinite" nodeType="mainSeq">
+                <p:childTnLst>
+                  <p:par>
+                    <p:cTn id="3" fill="hold">
+                      <p:stCondLst>
+                        <p:cond delay="0"/>
+                      </p:stCondLst>
+                      <p:childTnLst>
+                        <p:par>
+                          <p:cTn id="4" fill="hold">
+                            <p:stCondLst>
+                              <p:cond delay="0"/>
+                            </p:stCondLst>
+                            <p:childTnLst>
+                              <p:par>
+                                <p:cTn id="5" presetID="10" presetClass="entr" presetSubtype="0" fill="hold" grpId="0" nodeType="withEffect">
+                                  <p:stCondLst>
+                                    <p:cond delay="0"/>
+                                  </p:stCondLst>
+                                  <p:childTnLst>
+                                    <p:set>
+                                      <p:cBhvr>
+                                        <p:cTn id="6" dur="1" fill="hold">
+                                          <p:stCondLst>
+                                            <p:cond delay="0"/>
+                                          </p:stCondLst>
+                                        </p:cTn>
+                                        <p:tgtEl>
+                                          <p:spTgt spid="4"/>
+                                        </p:tgtEl>
+                                        <p:attrNameLst>
+                                          <p:attrName>style.visibility</p:attrName>
+                                        </p:attrNameLst>
+                                      </p:cBhvr>
+                                      <p:to>
+                                        <p:strVal val="visible"/>
+                                      </p:to>
+                                    </p:set>
+                                    <p:animEffect transition="in" filter="fade">
+                                      <p:cBhvr>
+                                        <p:cTn id="7" dur="450"/>
+                                        <p:tgtEl>
+                                          <p:spTgt spid="4"/>
+                                        </p:tgtEl>
+                                      </p:cBhvr>
+                                    </p:animEffect>
+                                  </p:childTnLst>
+                                </p:cTn>
+                              </p:par>
+                              <p:par>
+                                <p:cTn id="8" presetID="10" presetClass="entr" presetSubtype="0" fill="hold" grpId="0" nodeType="withEffect">
+                                  <p:stCondLst>
+                                    <p:cond delay="0"/>
+                                  </p:stCondLst>
+                                  <p:childTnLst>
+                                    <p:set>
+                                      <p:cBhvr>
+                                        <p:cTn id="9" dur="1" fill="hold">
+                                          <p:stCondLst>
+                                            <p:cond delay="0"/>
+                                          </p:stCondLst>
+                                        </p:cTn>
+                                        <p:tgtEl>
+                                          <p:spTgt spid="5"/>
+                                        </p:tgtEl>
+                                        <p:attrNameLst>
+                                          <p:attrName>style.visibility</p:attrName>
+                                        </p:attrNameLst>
+                                      </p:cBhvr>
+                                      <p:to>
+                                        <p:strVal val="visible"/>
+                                      </p:to>
+                                    </p:set>
+                                    <p:animEffect transition="in" filter="fade">
+                                      <p:cBhvr>
+                                        <p:cTn id="10" dur="450"/>
+                                        <p:tgtEl>
+                                          <p:spTgt spid="5"/>
+                                        </p:tgtEl>
+                                      </p:cBhvr>
+                                    </p:animEffect>
+                                  </p:childTnLst>
+                                </p:cTn>
+                              </p:par>
+                              <p:par>
+                                <p:cTn id="11" presetID="10" presetClass="entr" presetSubtype="0" fill="hold" grpId="0" nodeType="withEffect">
+                                  <p:stCondLst>
+                                    <p:cond delay="0"/>
+                                  </p:stCondLst>
+                                  <p:childTnLst>
+                                    <p:set>
+                                      <p:cBhvr>
+                                        <p:cTn id="12" dur="1" fill="hold">
+                                          <p:stCondLst>
+                                            <p:cond delay="0"/>
+                                          </p:stCondLst>
+                                        </p:cTn>
+                                        <p:tgtEl>
+                                          <p:spTgt spid="6"/>
+                                        </p:tgtEl>
+                                        <p:attrNameLst>
+                                          <p:attrName>style.visibility</p:attrName>
+                                        </p:attrNameLst>
+                                      </p:cBhvr>
+                                      <p:to>
+                                        <p:strVal val="visible"/>
+                                      </p:to>
+                                    </p:set>
+                                    <p:animEffect transition="in" filter="fade">
+                                      <p:cBhvr>
+                                        <p:cTn id="13" dur="450"/>
+                                        <p:tgtEl>
+                                          <p:spTgt spid="6"/>
+                                        </p:tgtEl>
+                                      </p:cBhvr>
+                                    </p:animEffect>
+                                  </p:childTnLst>
+                                </p:cTn>
+                              </p:par>
+                              <p:par>
+                                <p:cTn id="14" presetID="10" presetClass="entr" presetSubtype="0" fill="hold" grpId="0" nodeType="withEffect">
+                                  <p:stCondLst>
+                                    <p:cond delay="180"/>
+                                  </p:stCondLst>
+                                  <p:childTnLst>
+                                    <p:set>
+                                      <p:cBhvr>
+                                        <p:cTn id="15" dur="1" fill="hold">
+                                          <p:stCondLst>
+                                            <p:cond delay="0"/>
+                                          </p:stCondLst>
+                                        </p:cTn>
+                                        <p:tgtEl>
+                                          <p:spTgt spid="7"/>
+                                        </p:tgtEl>
+                                        <p:attrNameLst>
+                                          <p:attrName>style.visibility</p:attrName>
+                                        </p:attrNameLst>
+                                      </p:cBhvr>
+                                      <p:to>
+                                        <p:strVal val="visible"/>
+                                      </p:to>
+                                    </p:set>
+                                    <p:animEffect transition="in" filter="fade">
+                                      <p:cBhvr>
+                                        <p:cTn id="16" dur="450"/>
+                                        <p:tgtEl>
+                                          <p:spTgt spid="7"/>
+                                        </p:tgtEl>
+                                      </p:cBhvr>
+                                    </p:animEffect>
+                                  </p:childTnLst>
+                                </p:cTn>
+                              </p:par>
+                              <p:par>
+                                <p:cTn id="17" presetID="10" presetClass="entr" presetSubtype="0" fill="hold" grpId="0" nodeType="withEffect">
+                                  <p:stCondLst>
+                                    <p:cond delay="180"/>
+                                  </p:stCondLst>
+                                  <p:childTnLst>
+                                    <p:set>
+                                      <p:cBhvr>
+                                        <p:cTn id="18" dur="1" fill="hold">
+                                          <p:stCondLst>
+                                            <p:cond delay="0"/>
+                                          </p:stCondLst>
+                                        </p:cTn>
+                                        <p:tgtEl>
+                                          <p:spTgt spid="8"/>
+                                        </p:tgtEl>
+                                        <p:attrNameLst>
+                                          <p:attrName>style.visibility</p:attrName>
+                                        </p:attrNameLst>
+                                      </p:cBhvr>
+                                      <p:to>
+                                        <p:strVal val="visible"/>
+                                      </p:to>
+                                    </p:set>
+                                    <p:animEffect transition="in" filter="fade">
+                                      <p:cBhvr>
+                                        <p:cTn id="19" dur="450"/>
+                                        <p:tgtEl>
+                                          <p:spTgt spid="8"/>
+                                        </p:tgtEl>
+                                      </p:cBhvr>
+                                    </p:animEffect>
+                                  </p:childTnLst>
+                                </p:cTn>
+                              </p:par>
+                              <p:par>
+                                <p:cTn id="20" presetID="10" presetClass="entr" presetSubtype="0" fill="hold" grpId="0" nodeType="withEffect">
+                                  <p:stCondLst>
+                                    <p:cond delay="180"/>
+                                  </p:stCondLst>
+                                  <p:childTnLst>
+                                    <p:set>
+                                      <p:cBhvr>
+                                        <p:cTn id="21" dur="1" fill="hold">
+                                          <p:stCondLst>
+                                            <p:cond delay="0"/>
+                                          </p:stCondLst>
+                                        </p:cTn>
+                                        <p:tgtEl>
+                                          <p:spTgt spid="9"/>
+                                        </p:tgtEl>
+                                        <p:attrNameLst>
+                                          <p:attrName>style.visibility</p:attrName>
+                                        </p:attrNameLst>
+                                      </p:cBhvr>
+                                      <p:to>
+                                        <p:strVal val="visible"/>
+                                      </p:to>
+                                    </p:set>
+                                    <p:animEffect transition="in" filter="fade">
+                                      <p:cBhvr>
+                                        <p:cTn id="22" dur="450"/>
+                                        <p:tgtEl>
+                                          <p:spTgt spid="9"/>
+                                        </p:tgtEl>
+                                      </p:cBhvr>
+                                    </p:animEffect>
+                                  </p:childTnLst>
+                                </p:cTn>
+                              </p:par>
+                              <p:par>
+                                <p:cTn id="23" presetID="10" presetClass="entr" presetSubtype="0" fill="hold" grpId="0" nodeType="withEffect">
+                                  <p:stCondLst>
+                                    <p:cond delay="360"/>
+                                  </p:stCondLst>
+                                  <p:childTnLst>
+                                    <p:set>
+                                      <p:cBhvr>
+                                        <p:cTn id="24" dur="1" fill="hold">
+                                          <p:stCondLst>
+                                            <p:cond delay="0"/>
+                                          </p:stCondLst>
+                                        </p:cTn>
+                                        <p:tgtEl>
+                                          <p:spTgt spid="10"/>
+                                        </p:tgtEl>
+                                        <p:attrNameLst>
+                                          <p:attrName>style.visibility</p:attrName>
+                                        </p:attrNameLst>
+                                      </p:cBhvr>
+                                      <p:to>
+                                        <p:strVal val="visible"/>
+                                      </p:to>
+                                    </p:set>
+                                    <p:animEffect transition="in" filter="fade">
+                                      <p:cBhvr>
+                                        <p:cTn id="25" dur="450"/>
+                                        <p:tgtEl>
+                                          <p:spTgt spid="10"/>
+                                        </p:tgtEl>
+                                      </p:cBhvr>
+                                    </p:animEffect>
+                                  </p:childTnLst>
+                                </p:cTn>
+                              </p:par>
+                              <p:par>
+                                <p:cTn id="26" presetID="10" presetClass="entr" presetSubtype="0" fill="hold" grpId="0" nodeType="withEffect">
+                                  <p:stCondLst>
+                                    <p:cond delay="360"/>
+                                  </p:stCondLst>
+                                  <p:childTnLst>
+                                    <p:set>
+                                      <p:cBhvr>
+                                        <p:cTn id="27" dur="1" fill="hold">
+                                          <p:stCondLst>
+                                            <p:cond delay="0"/>
+                                          </p:stCondLst>
+                                        </p:cTn>
+                                        <p:tgtEl>
+                                          <p:spTgt spid="11"/>
+                                        </p:tgtEl>
+                                        <p:attrNameLst>
+                                          <p:attrName>style.visibility</p:attrName>
+                                        </p:attrNameLst>
+                                      </p:cBhvr>
+                                      <p:to>
+                                        <p:strVal val="visible"/>
+                                      </p:to>
+                                    </p:set>
+                                    <p:animEffect transition="in" filter="fade">
+                                      <p:cBhvr>
+                                        <p:cTn id="28" dur="450"/>
+                                        <p:tgtEl>
+                                          <p:spTgt spid="11"/>
+                                        </p:tgtEl>
+                                      </p:cBhvr>
+                                    </p:animEffect>
+                                  </p:childTnLst>
+                                </p:cTn>
+                              </p:par>
+                              <p:par>
+                                <p:cTn id="29" presetID="10" presetClass="entr" presetSubtype="0" fill="hold" grpId="0" nodeType="withEffect">
+                                  <p:stCondLst>
+                                    <p:cond delay="360"/>
+                                  </p:stCondLst>
+                                  <p:childTnLst>
+                                    <p:set>
+                                      <p:cBhvr>
+                                        <p:cTn id="30" dur="1" fill="hold">
+                                          <p:stCondLst>
+                                            <p:cond delay="0"/>
+                                          </p:stCondLst>
+                                        </p:cTn>
+                                        <p:tgtEl>
+                                          <p:spTgt spid="12"/>
+                                        </p:tgtEl>
+                                        <p:attrNameLst>
+                                          <p:attrName>style.visibility</p:attrName>
+                                        </p:attrNameLst>
+                                      </p:cBhvr>
+                                      <p:to>
+                                        <p:strVal val="visible"/>
+                                      </p:to>
+                                    </p:set>
+                                    <p:animEffect transition="in" filter="fade">
+                                      <p:cBhvr>
+                                        <p:cTn id="31" dur="450"/>
+                                        <p:tgtEl>
+                                          <p:spTgt spid="12"/>
+                                        </p:tgtEl>
+                                      </p:cBhvr>
+                                    </p:animEffect>
+                                  </p:childTnLst>
+                                </p:cTn>
+                              </p:par>
+                              <p:par>
+                                <p:cTn id="32" presetID="10" presetClass="entr" presetSubtype="0" fill="hold" grpId="0" nodeType="withEffect">
+                                  <p:stCondLst>
+                                    <p:cond delay="750"/>
+                                  </p:stCondLst>
+                                  <p:childTnLst>
+                                    <p:set>
+                                      <p:cBhvr>
+                                        <p:cTn id="33" dur="1" fill="hold">
+                                          <p:stCondLst>
+                                            <p:cond delay="0"/>
+                                          </p:stCondLst>
+                                        </p:cTn>
+                                        <p:tgtEl>
+                                          <p:spTgt spid="13"/>
+                                        </p:tgtEl>
+                                        <p:attrNameLst>
+                                          <p:attrName>style.visibility</p:attrName>
+                                        </p:attrNameLst>
+                                      </p:cBhvr>
+                                      <p:to>
+                                        <p:strVal val="visible"/>
+                                      </p:to>
+                                    </p:set>
+                                    <p:animEffect transition="in" filter="fade">
+                                      <p:cBhvr>
+                                        <p:cTn id="34" dur="500"/>
+                                        <p:tgtEl>
+                                          <p:spTgt spid="13"/>
+                                        </p:tgtEl>
+                                      </p:cBhvr>
+                                    </p:animEffect>
+                                  </p:childTnLst>
+                                </p:cTn>
+                              </p:par>
+                            </p:childTnLst>
+                          </p:cTn>
+                        </p:par>
+                      </p:childTnLst>
+                    </p:cTn>
+                  </p:par>
+                </p:childTnLst>
+              </p:cTn>
+              <p:prevCondLst>
+                <p:cond evt="onPrev" delay="0">
+                  <p:tgtEl>
+                    <p:sldTgt/>
+                  </p:tgtEl>
+                </p:cond>
+              </p:prevCondLst>
+              <p:nextCondLst>
+                <p:cond evt="onNext" delay="0">
+                  <p:tgtEl>
+                    <p:sldTgt/>
+                  </p:tgtEl>
+                </p:cond>
+              </p:nextCondLst>
+            </p:seq>
+          </p:childTnLst>
+        </p:cTn>
+      </p:par>
+    </p:tnLst>
+  </p:timing>
 </p:sld>
 </file>
 
